--- a/docs/figures/new diagrams 3.pptx
+++ b/docs/figures/new diagrams 3.pptx
@@ -7,18 +7,18 @@
   <p:sldIdLst>
     <p:sldId id="256" r:id="rId2"/>
     <p:sldId id="270" r:id="rId3"/>
-    <p:sldId id="275" r:id="rId4"/>
-    <p:sldId id="271" r:id="rId5"/>
-    <p:sldId id="274" r:id="rId6"/>
-    <p:sldId id="276" r:id="rId7"/>
-    <p:sldId id="277" r:id="rId8"/>
-    <p:sldId id="278" r:id="rId9"/>
-    <p:sldId id="279" r:id="rId10"/>
-    <p:sldId id="281" r:id="rId11"/>
-    <p:sldId id="283" r:id="rId12"/>
-    <p:sldId id="284" r:id="rId13"/>
-    <p:sldId id="280" r:id="rId14"/>
-    <p:sldId id="282" r:id="rId15"/>
+    <p:sldId id="271" r:id="rId4"/>
+    <p:sldId id="274" r:id="rId5"/>
+    <p:sldId id="276" r:id="rId6"/>
+    <p:sldId id="277" r:id="rId7"/>
+    <p:sldId id="278" r:id="rId8"/>
+    <p:sldId id="279" r:id="rId9"/>
+    <p:sldId id="281" r:id="rId10"/>
+    <p:sldId id="283" r:id="rId11"/>
+    <p:sldId id="284" r:id="rId12"/>
+    <p:sldId id="285" r:id="rId13"/>
+    <p:sldId id="286" r:id="rId14"/>
+    <p:sldId id="280" r:id="rId15"/>
     <p:sldId id="272" r:id="rId16"/>
     <p:sldId id="273" r:id="rId17"/>
     <p:sldId id="268" r:id="rId18"/>
@@ -139,7 +139,6 @@
           <p14:sldIdLst>
             <p14:sldId id="256"/>
             <p14:sldId id="270"/>
-            <p14:sldId id="275"/>
             <p14:sldId id="271"/>
             <p14:sldId id="274"/>
             <p14:sldId id="276"/>
@@ -149,8 +148,9 @@
             <p14:sldId id="281"/>
             <p14:sldId id="283"/>
             <p14:sldId id="284"/>
+            <p14:sldId id="285"/>
+            <p14:sldId id="286"/>
             <p14:sldId id="280"/>
-            <p14:sldId id="282"/>
             <p14:sldId id="272"/>
             <p14:sldId id="273"/>
             <p14:sldId id="268"/>
@@ -341,7 +341,7 @@
           <a:p>
             <a:fld id="{783195BA-A24A-42A8-94D4-15E9273B559F}" type="datetimeFigureOut">
               <a:rPr lang="en-AU" smtClean="0"/>
-              <a:t>24/05/2026</a:t>
+              <a:t>26/05/2026</a:t>
             </a:fld>
             <a:endParaRPr lang="en-AU"/>
           </a:p>
@@ -541,7 +541,7 @@
           <a:p>
             <a:fld id="{783195BA-A24A-42A8-94D4-15E9273B559F}" type="datetimeFigureOut">
               <a:rPr lang="en-AU" smtClean="0"/>
-              <a:t>24/05/2026</a:t>
+              <a:t>26/05/2026</a:t>
             </a:fld>
             <a:endParaRPr lang="en-AU"/>
           </a:p>
@@ -751,7 +751,7 @@
           <a:p>
             <a:fld id="{783195BA-A24A-42A8-94D4-15E9273B559F}" type="datetimeFigureOut">
               <a:rPr lang="en-AU" smtClean="0"/>
-              <a:t>24/05/2026</a:t>
+              <a:t>26/05/2026</a:t>
             </a:fld>
             <a:endParaRPr lang="en-AU"/>
           </a:p>
@@ -951,7 +951,7 @@
           <a:p>
             <a:fld id="{783195BA-A24A-42A8-94D4-15E9273B559F}" type="datetimeFigureOut">
               <a:rPr lang="en-AU" smtClean="0"/>
-              <a:t>24/05/2026</a:t>
+              <a:t>26/05/2026</a:t>
             </a:fld>
             <a:endParaRPr lang="en-AU"/>
           </a:p>
@@ -1227,7 +1227,7 @@
           <a:p>
             <a:fld id="{783195BA-A24A-42A8-94D4-15E9273B559F}" type="datetimeFigureOut">
               <a:rPr lang="en-AU" smtClean="0"/>
-              <a:t>24/05/2026</a:t>
+              <a:t>26/05/2026</a:t>
             </a:fld>
             <a:endParaRPr lang="en-AU"/>
           </a:p>
@@ -1495,7 +1495,7 @@
           <a:p>
             <a:fld id="{783195BA-A24A-42A8-94D4-15E9273B559F}" type="datetimeFigureOut">
               <a:rPr lang="en-AU" smtClean="0"/>
-              <a:t>24/05/2026</a:t>
+              <a:t>26/05/2026</a:t>
             </a:fld>
             <a:endParaRPr lang="en-AU"/>
           </a:p>
@@ -1910,7 +1910,7 @@
           <a:p>
             <a:fld id="{783195BA-A24A-42A8-94D4-15E9273B559F}" type="datetimeFigureOut">
               <a:rPr lang="en-AU" smtClean="0"/>
-              <a:t>24/05/2026</a:t>
+              <a:t>26/05/2026</a:t>
             </a:fld>
             <a:endParaRPr lang="en-AU"/>
           </a:p>
@@ -2052,7 +2052,7 @@
           <a:p>
             <a:fld id="{783195BA-A24A-42A8-94D4-15E9273B559F}" type="datetimeFigureOut">
               <a:rPr lang="en-AU" smtClean="0"/>
-              <a:t>24/05/2026</a:t>
+              <a:t>26/05/2026</a:t>
             </a:fld>
             <a:endParaRPr lang="en-AU"/>
           </a:p>
@@ -2165,7 +2165,7 @@
           <a:p>
             <a:fld id="{783195BA-A24A-42A8-94D4-15E9273B559F}" type="datetimeFigureOut">
               <a:rPr lang="en-AU" smtClean="0"/>
-              <a:t>24/05/2026</a:t>
+              <a:t>26/05/2026</a:t>
             </a:fld>
             <a:endParaRPr lang="en-AU"/>
           </a:p>
@@ -2478,7 +2478,7 @@
           <a:p>
             <a:fld id="{783195BA-A24A-42A8-94D4-15E9273B559F}" type="datetimeFigureOut">
               <a:rPr lang="en-AU" smtClean="0"/>
-              <a:t>24/05/2026</a:t>
+              <a:t>26/05/2026</a:t>
             </a:fld>
             <a:endParaRPr lang="en-AU"/>
           </a:p>
@@ -2767,7 +2767,7 @@
           <a:p>
             <a:fld id="{783195BA-A24A-42A8-94D4-15E9273B559F}" type="datetimeFigureOut">
               <a:rPr lang="en-AU" smtClean="0"/>
-              <a:t>24/05/2026</a:t>
+              <a:t>26/05/2026</a:t>
             </a:fld>
             <a:endParaRPr lang="en-AU"/>
           </a:p>
@@ -3010,7 +3010,7 @@
           <a:p>
             <a:fld id="{783195BA-A24A-42A8-94D4-15E9273B559F}" type="datetimeFigureOut">
               <a:rPr lang="en-AU" smtClean="0"/>
-              <a:t>24/05/2026</a:t>
+              <a:t>26/05/2026</a:t>
             </a:fld>
             <a:endParaRPr lang="en-AU"/>
           </a:p>
@@ -4614,7 +4614,7 @@
         </p:grpSpPr>
         <p:cxnSp>
           <p:nvCxnSpPr>
-            <p:cNvPr id="39" name="Straight Connector 38">
+            <p:cNvPr id="39" name="Straight Connector 38" hidden="1">
               <a:extLst>
                 <a:ext uri="{FF2B5EF4-FFF2-40B4-BE49-F238E27FC236}">
                   <a16:creationId xmlns:a16="http://schemas.microsoft.com/office/drawing/2014/main" id="{CBFFF161-DEA8-4365-AEDE-D0ED12796E72}"/>
@@ -4650,7 +4650,7 @@
         </p:cxnSp>
         <p:cxnSp>
           <p:nvCxnSpPr>
-            <p:cNvPr id="41" name="Straight Connector 40">
+            <p:cNvPr id="41" name="Straight Connector 40" hidden="1">
               <a:extLst>
                 <a:ext uri="{FF2B5EF4-FFF2-40B4-BE49-F238E27FC236}">
                   <a16:creationId xmlns:a16="http://schemas.microsoft.com/office/drawing/2014/main" id="{286BE9B1-7CF6-43DC-ABCC-EB09CC6288B2}"/>
@@ -5071,7 +5071,7 @@
       </p:cxnSp>
       <p:cxnSp>
         <p:nvCxnSpPr>
-          <p:cNvPr id="80" name="Straight Connector 79">
+          <p:cNvPr id="80" name="Straight Connector 79" hidden="1">
             <a:extLst>
               <a:ext uri="{FF2B5EF4-FFF2-40B4-BE49-F238E27FC236}">
                 <a16:creationId xmlns:a16="http://schemas.microsoft.com/office/drawing/2014/main" id="{D5662873-2B05-4D06-9BD3-CE81EDA93B6E}"/>
@@ -5848,1547 +5848,6 @@
           </a:fontRef>
         </p:style>
       </p:cxnSp>
-    </p:spTree>
-    <p:extLst>
-      <p:ext uri="{BB962C8B-B14F-4D97-AF65-F5344CB8AC3E}">
-        <p14:creationId xmlns:p14="http://schemas.microsoft.com/office/powerpoint/2010/main" val="3133723904"/>
-      </p:ext>
-    </p:extLst>
-  </p:cSld>
-  <p:clrMapOvr>
-    <a:masterClrMapping/>
-  </p:clrMapOvr>
-</p:sld>
-</file>
-
-<file path=ppt/slides/slide11.xml><?xml version="1.0" encoding="utf-8"?>
-<p:sld xmlns:a="http://schemas.openxmlformats.org/drawingml/2006/main" xmlns:r="http://schemas.openxmlformats.org/officeDocument/2006/relationships" xmlns:p="http://schemas.openxmlformats.org/presentationml/2006/main">
-  <p:cSld>
-    <p:bg>
-      <p:bgPr>
-        <a:solidFill>
-          <a:schemeClr val="bg1">
-            <a:alpha val="99000"/>
-          </a:schemeClr>
-        </a:solidFill>
-        <a:effectLst/>
-      </p:bgPr>
-    </p:bg>
-    <p:spTree>
-      <p:nvGrpSpPr>
-        <p:cNvPr id="1" name=""/>
-        <p:cNvGrpSpPr/>
-        <p:nvPr/>
-      </p:nvGrpSpPr>
-      <p:grpSpPr>
-        <a:xfrm>
-          <a:off x="0" y="0"/>
-          <a:ext cx="0" cy="0"/>
-          <a:chOff x="0" y="0"/>
-          <a:chExt cx="0" cy="0"/>
-        </a:xfrm>
-      </p:grpSpPr>
-      <p:sp>
-        <p:nvSpPr>
-          <p:cNvPr id="46" name="Arc 45">
-            <a:extLst>
-              <a:ext uri="{FF2B5EF4-FFF2-40B4-BE49-F238E27FC236}">
-                <a16:creationId xmlns:a16="http://schemas.microsoft.com/office/drawing/2014/main" id="{A4C5642D-AC1A-4512-A5A4-63C66C071622}"/>
-              </a:ext>
-            </a:extLst>
-          </p:cNvPr>
-          <p:cNvSpPr/>
-          <p:nvPr/>
-        </p:nvSpPr>
-        <p:spPr>
-          <a:xfrm>
-            <a:off x="405417" y="-209059"/>
-            <a:ext cx="7750362" cy="7750362"/>
-          </a:xfrm>
-          <a:prstGeom prst="arc">
-            <a:avLst>
-              <a:gd name="adj1" fmla="val 2123"/>
-              <a:gd name="adj2" fmla="val 1633386"/>
-            </a:avLst>
-          </a:prstGeom>
-          <a:ln w="19050"/>
-        </p:spPr>
-        <p:style>
-          <a:lnRef idx="1">
-            <a:schemeClr val="accent1"/>
-          </a:lnRef>
-          <a:fillRef idx="0">
-            <a:schemeClr val="accent1"/>
-          </a:fillRef>
-          <a:effectRef idx="0">
-            <a:schemeClr val="accent1"/>
-          </a:effectRef>
-          <a:fontRef idx="minor">
-            <a:schemeClr val="tx1"/>
-          </a:fontRef>
-        </p:style>
-        <p:txBody>
-          <a:bodyPr rtlCol="0" anchor="ctr"/>
-          <a:lstStyle/>
-          <a:p>
-            <a:pPr algn="ctr"/>
-            <a:endParaRPr lang="en-AU"/>
-          </a:p>
-        </p:txBody>
-      </p:sp>
-      <p:sp>
-        <p:nvSpPr>
-          <p:cNvPr id="48" name="Arc 47">
-            <a:extLst>
-              <a:ext uri="{FF2B5EF4-FFF2-40B4-BE49-F238E27FC236}">
-                <a16:creationId xmlns:a16="http://schemas.microsoft.com/office/drawing/2014/main" id="{F770F6E8-960F-4901-AA43-46D2B03322D4}"/>
-              </a:ext>
-            </a:extLst>
-          </p:cNvPr>
-          <p:cNvSpPr/>
-          <p:nvPr/>
-        </p:nvSpPr>
-        <p:spPr>
-          <a:xfrm>
-            <a:off x="2372087" y="1663846"/>
-            <a:ext cx="3656857" cy="4004550"/>
-          </a:xfrm>
-          <a:prstGeom prst="arc">
-            <a:avLst>
-              <a:gd name="adj1" fmla="val 21587170"/>
-              <a:gd name="adj2" fmla="val 1834383"/>
-            </a:avLst>
-          </a:prstGeom>
-          <a:ln w="19050"/>
-        </p:spPr>
-        <p:style>
-          <a:lnRef idx="1">
-            <a:schemeClr val="accent1"/>
-          </a:lnRef>
-          <a:fillRef idx="0">
-            <a:schemeClr val="accent1"/>
-          </a:fillRef>
-          <a:effectRef idx="0">
-            <a:schemeClr val="accent1"/>
-          </a:effectRef>
-          <a:fontRef idx="minor">
-            <a:schemeClr val="tx1"/>
-          </a:fontRef>
-        </p:style>
-        <p:txBody>
-          <a:bodyPr rtlCol="0" anchor="ctr"/>
-          <a:lstStyle/>
-          <a:p>
-            <a:pPr algn="ctr"/>
-            <a:endParaRPr lang="en-AU"/>
-          </a:p>
-        </p:txBody>
-      </p:sp>
-      <p:sp>
-        <p:nvSpPr>
-          <p:cNvPr id="101" name="Arc 100">
-            <a:extLst>
-              <a:ext uri="{FF2B5EF4-FFF2-40B4-BE49-F238E27FC236}">
-                <a16:creationId xmlns:a16="http://schemas.microsoft.com/office/drawing/2014/main" id="{917D25E1-0130-4345-9B11-12530BB5DC0D}"/>
-              </a:ext>
-            </a:extLst>
-          </p:cNvPr>
-          <p:cNvSpPr/>
-          <p:nvPr/>
-        </p:nvSpPr>
-        <p:spPr>
-          <a:xfrm>
-            <a:off x="1395091" y="-683303"/>
-            <a:ext cx="7768495" cy="7750362"/>
-          </a:xfrm>
-          <a:prstGeom prst="arc">
-            <a:avLst>
-              <a:gd name="adj1" fmla="val 2094"/>
-              <a:gd name="adj2" fmla="val 1631430"/>
-            </a:avLst>
-          </a:prstGeom>
-          <a:ln w="19050"/>
-        </p:spPr>
-        <p:style>
-          <a:lnRef idx="1">
-            <a:schemeClr val="accent1"/>
-          </a:lnRef>
-          <a:fillRef idx="0">
-            <a:schemeClr val="accent1"/>
-          </a:fillRef>
-          <a:effectRef idx="0">
-            <a:schemeClr val="accent1"/>
-          </a:effectRef>
-          <a:fontRef idx="minor">
-            <a:schemeClr val="tx1"/>
-          </a:fontRef>
-        </p:style>
-        <p:txBody>
-          <a:bodyPr rtlCol="0" anchor="ctr"/>
-          <a:lstStyle/>
-          <a:p>
-            <a:pPr algn="ctr"/>
-            <a:endParaRPr lang="en-AU"/>
-          </a:p>
-        </p:txBody>
-      </p:sp>
-      <p:sp>
-        <p:nvSpPr>
-          <p:cNvPr id="107" name="Arc 106">
-            <a:extLst>
-              <a:ext uri="{FF2B5EF4-FFF2-40B4-BE49-F238E27FC236}">
-                <a16:creationId xmlns:a16="http://schemas.microsoft.com/office/drawing/2014/main" id="{C3AA2F2E-BB27-425C-B585-7C578D78A777}"/>
-              </a:ext>
-            </a:extLst>
-          </p:cNvPr>
-          <p:cNvSpPr/>
-          <p:nvPr/>
-        </p:nvSpPr>
-        <p:spPr>
-          <a:xfrm>
-            <a:off x="2715793" y="1205000"/>
-            <a:ext cx="4337251" cy="4004552"/>
-          </a:xfrm>
-          <a:prstGeom prst="arc">
-            <a:avLst>
-              <a:gd name="adj1" fmla="val 21556473"/>
-              <a:gd name="adj2" fmla="val 1294205"/>
-            </a:avLst>
-          </a:prstGeom>
-          <a:ln w="19050"/>
-        </p:spPr>
-        <p:style>
-          <a:lnRef idx="1">
-            <a:schemeClr val="accent1"/>
-          </a:lnRef>
-          <a:fillRef idx="0">
-            <a:schemeClr val="accent1"/>
-          </a:fillRef>
-          <a:effectRef idx="0">
-            <a:schemeClr val="accent1"/>
-          </a:effectRef>
-          <a:fontRef idx="minor">
-            <a:schemeClr val="tx1"/>
-          </a:fontRef>
-        </p:style>
-        <p:txBody>
-          <a:bodyPr rtlCol="0" anchor="ctr"/>
-          <a:lstStyle/>
-          <a:p>
-            <a:pPr algn="ctr"/>
-            <a:endParaRPr lang="en-AU"/>
-          </a:p>
-        </p:txBody>
-      </p:sp>
-      <p:sp>
-        <p:nvSpPr>
-          <p:cNvPr id="88" name="Parallelogram 87">
-            <a:extLst>
-              <a:ext uri="{FF2B5EF4-FFF2-40B4-BE49-F238E27FC236}">
-                <a16:creationId xmlns:a16="http://schemas.microsoft.com/office/drawing/2014/main" id="{5F26B470-4070-4A4D-9591-E20F17BCDADB}"/>
-              </a:ext>
-            </a:extLst>
-          </p:cNvPr>
-          <p:cNvSpPr/>
-          <p:nvPr/>
-        </p:nvSpPr>
-        <p:spPr>
-          <a:xfrm rot="1671234">
-            <a:off x="4305812" y="3985548"/>
-            <a:ext cx="4908333" cy="889129"/>
-          </a:xfrm>
-          <a:prstGeom prst="parallelogram">
-            <a:avLst>
-              <a:gd name="adj" fmla="val 75267"/>
-            </a:avLst>
-          </a:prstGeom>
-          <a:solidFill>
-            <a:schemeClr val="accent1">
-              <a:alpha val="18000"/>
-            </a:schemeClr>
-          </a:solidFill>
-        </p:spPr>
-        <p:style>
-          <a:lnRef idx="2">
-            <a:schemeClr val="accent1">
-              <a:shade val="50000"/>
-            </a:schemeClr>
-          </a:lnRef>
-          <a:fillRef idx="1">
-            <a:schemeClr val="accent1"/>
-          </a:fillRef>
-          <a:effectRef idx="0">
-            <a:schemeClr val="accent1"/>
-          </a:effectRef>
-          <a:fontRef idx="minor">
-            <a:schemeClr val="lt1"/>
-          </a:fontRef>
-        </p:style>
-        <p:txBody>
-          <a:bodyPr rtlCol="0" anchor="ctr"/>
-          <a:lstStyle/>
-          <a:p>
-            <a:pPr algn="ctr"/>
-            <a:endParaRPr lang="en-AU" dirty="0"/>
-          </a:p>
-        </p:txBody>
-      </p:sp>
-      <p:grpSp>
-        <p:nvGrpSpPr>
-          <p:cNvPr id="45" name="Group 44">
-            <a:extLst>
-              <a:ext uri="{FF2B5EF4-FFF2-40B4-BE49-F238E27FC236}">
-                <a16:creationId xmlns:a16="http://schemas.microsoft.com/office/drawing/2014/main" id="{AC310F68-C2B6-4792-8BD7-53933B512123}"/>
-              </a:ext>
-            </a:extLst>
-          </p:cNvPr>
-          <p:cNvGrpSpPr/>
-          <p:nvPr/>
-        </p:nvGrpSpPr>
-        <p:grpSpPr>
-          <a:xfrm>
-            <a:off x="4380079" y="3666124"/>
-            <a:ext cx="3897179" cy="2002272"/>
-            <a:chOff x="2302516" y="3428996"/>
-            <a:chExt cx="6984703" cy="2064513"/>
-          </a:xfrm>
-        </p:grpSpPr>
-        <p:cxnSp>
-          <p:nvCxnSpPr>
-            <p:cNvPr id="39" name="Straight Connector 38" hidden="1">
-              <a:extLst>
-                <a:ext uri="{FF2B5EF4-FFF2-40B4-BE49-F238E27FC236}">
-                  <a16:creationId xmlns:a16="http://schemas.microsoft.com/office/drawing/2014/main" id="{CBFFF161-DEA8-4365-AEDE-D0ED12796E72}"/>
-                </a:ext>
-              </a:extLst>
-            </p:cNvPr>
-            <p:cNvCxnSpPr/>
-            <p:nvPr/>
-          </p:nvCxnSpPr>
-          <p:spPr>
-            <a:xfrm>
-              <a:off x="2302525" y="3429000"/>
-              <a:ext cx="6984694" cy="0"/>
-            </a:xfrm>
-            <a:prstGeom prst="line">
-              <a:avLst/>
-            </a:prstGeom>
-          </p:spPr>
-          <p:style>
-            <a:lnRef idx="1">
-              <a:schemeClr val="accent1"/>
-            </a:lnRef>
-            <a:fillRef idx="0">
-              <a:schemeClr val="accent1"/>
-            </a:fillRef>
-            <a:effectRef idx="0">
-              <a:schemeClr val="accent1"/>
-            </a:effectRef>
-            <a:fontRef idx="minor">
-              <a:schemeClr val="tx1"/>
-            </a:fontRef>
-          </p:style>
-        </p:cxnSp>
-        <p:cxnSp>
-          <p:nvCxnSpPr>
-            <p:cNvPr id="41" name="Straight Connector 40" hidden="1">
-              <a:extLst>
-                <a:ext uri="{FF2B5EF4-FFF2-40B4-BE49-F238E27FC236}">
-                  <a16:creationId xmlns:a16="http://schemas.microsoft.com/office/drawing/2014/main" id="{286BE9B1-7CF6-43DC-ABCC-EB09CC6288B2}"/>
-                </a:ext>
-              </a:extLst>
-            </p:cNvPr>
-            <p:cNvCxnSpPr>
-              <a:cxnSpLocks/>
-              <a:stCxn id="47" idx="4"/>
-            </p:cNvCxnSpPr>
-            <p:nvPr/>
-          </p:nvCxnSpPr>
-          <p:spPr>
-            <a:xfrm>
-              <a:off x="2302516" y="3428996"/>
-              <a:ext cx="6777218" cy="2064513"/>
-            </a:xfrm>
-            <a:prstGeom prst="line">
-              <a:avLst/>
-            </a:prstGeom>
-          </p:spPr>
-          <p:style>
-            <a:lnRef idx="1">
-              <a:schemeClr val="accent1"/>
-            </a:lnRef>
-            <a:fillRef idx="0">
-              <a:schemeClr val="accent1"/>
-            </a:fillRef>
-            <a:effectRef idx="0">
-              <a:schemeClr val="accent1"/>
-            </a:effectRef>
-            <a:fontRef idx="minor">
-              <a:schemeClr val="tx1"/>
-            </a:fontRef>
-          </p:style>
-        </p:cxnSp>
-      </p:grpSp>
-      <p:sp>
-        <p:nvSpPr>
-          <p:cNvPr id="47" name="Isosceles Triangle 46">
-            <a:extLst>
-              <a:ext uri="{FF2B5EF4-FFF2-40B4-BE49-F238E27FC236}">
-                <a16:creationId xmlns:a16="http://schemas.microsoft.com/office/drawing/2014/main" id="{12693047-67EB-495A-9F22-0DACDB085A63}"/>
-              </a:ext>
-            </a:extLst>
-          </p:cNvPr>
-          <p:cNvSpPr/>
-          <p:nvPr/>
-        </p:nvSpPr>
-        <p:spPr>
-          <a:xfrm rot="16200000" flipV="1">
-            <a:off x="5269647" y="2776555"/>
-            <a:ext cx="2002275" cy="3781411"/>
-          </a:xfrm>
-          <a:prstGeom prst="triangle">
-            <a:avLst>
-              <a:gd name="adj" fmla="val 0"/>
-            </a:avLst>
-          </a:prstGeom>
-        </p:spPr>
-        <p:style>
-          <a:lnRef idx="2">
-            <a:schemeClr val="accent1">
-              <a:shade val="50000"/>
-            </a:schemeClr>
-          </a:lnRef>
-          <a:fillRef idx="1">
-            <a:schemeClr val="accent1"/>
-          </a:fillRef>
-          <a:effectRef idx="0">
-            <a:schemeClr val="accent1"/>
-          </a:effectRef>
-          <a:fontRef idx="minor">
-            <a:schemeClr val="lt1"/>
-          </a:fontRef>
-        </p:style>
-        <p:txBody>
-          <a:bodyPr rtlCol="0" anchor="ctr"/>
-          <a:lstStyle/>
-          <a:p>
-            <a:pPr algn="ctr"/>
-            <a:endParaRPr lang="en-AU"/>
-          </a:p>
-        </p:txBody>
-      </p:sp>
-      <p:sp>
-        <p:nvSpPr>
-          <p:cNvPr id="49" name="Arc 48">
-            <a:extLst>
-              <a:ext uri="{FF2B5EF4-FFF2-40B4-BE49-F238E27FC236}">
-                <a16:creationId xmlns:a16="http://schemas.microsoft.com/office/drawing/2014/main" id="{C7878056-A928-4322-A60A-9D23EFC37BB4}"/>
-              </a:ext>
-            </a:extLst>
-          </p:cNvPr>
-          <p:cNvSpPr/>
-          <p:nvPr/>
-        </p:nvSpPr>
-        <p:spPr>
-          <a:xfrm>
-            <a:off x="3922879" y="3208921"/>
-            <a:ext cx="914400" cy="914400"/>
-          </a:xfrm>
-          <a:prstGeom prst="arc">
-            <a:avLst>
-              <a:gd name="adj1" fmla="val 21557601"/>
-              <a:gd name="adj2" fmla="val 2161639"/>
-            </a:avLst>
-          </a:prstGeom>
-          <a:ln w="19050"/>
-        </p:spPr>
-        <p:style>
-          <a:lnRef idx="1">
-            <a:schemeClr val="accent1"/>
-          </a:lnRef>
-          <a:fillRef idx="0">
-            <a:schemeClr val="accent1"/>
-          </a:fillRef>
-          <a:effectRef idx="0">
-            <a:schemeClr val="accent1"/>
-          </a:effectRef>
-          <a:fontRef idx="minor">
-            <a:schemeClr val="tx1"/>
-          </a:fontRef>
-        </p:style>
-        <p:txBody>
-          <a:bodyPr rtlCol="0" anchor="ctr"/>
-          <a:lstStyle/>
-          <a:p>
-            <a:pPr algn="ctr"/>
-            <a:endParaRPr lang="en-AU"/>
-          </a:p>
-        </p:txBody>
-      </p:sp>
-      <p:sp>
-        <p:nvSpPr>
-          <p:cNvPr id="54" name="Rectangle 53">
-            <a:extLst>
-              <a:ext uri="{FF2B5EF4-FFF2-40B4-BE49-F238E27FC236}">
-                <a16:creationId xmlns:a16="http://schemas.microsoft.com/office/drawing/2014/main" id="{9BF4EC97-D220-4DE1-B57D-E8C122283779}"/>
-              </a:ext>
-            </a:extLst>
-          </p:cNvPr>
-          <p:cNvSpPr/>
-          <p:nvPr/>
-        </p:nvSpPr>
-        <p:spPr>
-          <a:xfrm rot="1773429">
-            <a:off x="5761719" y="4270012"/>
-            <a:ext cx="154236" cy="154236"/>
-          </a:xfrm>
-          <a:prstGeom prst="rect">
-            <a:avLst/>
-          </a:prstGeom>
-          <a:noFill/>
-        </p:spPr>
-        <p:style>
-          <a:lnRef idx="2">
-            <a:schemeClr val="accent1">
-              <a:shade val="50000"/>
-            </a:schemeClr>
-          </a:lnRef>
-          <a:fillRef idx="1">
-            <a:schemeClr val="accent1"/>
-          </a:fillRef>
-          <a:effectRef idx="0">
-            <a:schemeClr val="accent1"/>
-          </a:effectRef>
-          <a:fontRef idx="minor">
-            <a:schemeClr val="lt1"/>
-          </a:fontRef>
-        </p:style>
-        <p:txBody>
-          <a:bodyPr rtlCol="0" anchor="ctr"/>
-          <a:lstStyle/>
-          <a:p>
-            <a:pPr algn="ctr"/>
-            <a:endParaRPr lang="en-AU"/>
-          </a:p>
-        </p:txBody>
-      </p:sp>
-      <p:sp>
-        <p:nvSpPr>
-          <p:cNvPr id="55" name="Rectangle 54">
-            <a:extLst>
-              <a:ext uri="{FF2B5EF4-FFF2-40B4-BE49-F238E27FC236}">
-                <a16:creationId xmlns:a16="http://schemas.microsoft.com/office/drawing/2014/main" id="{15460610-DCE4-429F-B01D-5A37DF1FC802}"/>
-              </a:ext>
-            </a:extLst>
-          </p:cNvPr>
-          <p:cNvSpPr/>
-          <p:nvPr/>
-        </p:nvSpPr>
-        <p:spPr>
-          <a:xfrm rot="1669691">
-            <a:off x="7610275" y="5257677"/>
-            <a:ext cx="154236" cy="154236"/>
-          </a:xfrm>
-          <a:prstGeom prst="rect">
-            <a:avLst/>
-          </a:prstGeom>
-          <a:noFill/>
-        </p:spPr>
-        <p:style>
-          <a:lnRef idx="2">
-            <a:schemeClr val="accent1">
-              <a:shade val="50000"/>
-            </a:schemeClr>
-          </a:lnRef>
-          <a:fillRef idx="1">
-            <a:schemeClr val="accent1"/>
-          </a:fillRef>
-          <a:effectRef idx="0">
-            <a:schemeClr val="accent1"/>
-          </a:effectRef>
-          <a:fontRef idx="minor">
-            <a:schemeClr val="lt1"/>
-          </a:fontRef>
-        </p:style>
-        <p:txBody>
-          <a:bodyPr rtlCol="0" anchor="ctr"/>
-          <a:lstStyle/>
-          <a:p>
-            <a:pPr algn="ctr"/>
-            <a:endParaRPr lang="en-AU"/>
-          </a:p>
-        </p:txBody>
-      </p:sp>
-      <p:sp>
-        <p:nvSpPr>
-          <p:cNvPr id="56" name="Rectangle 55">
-            <a:extLst>
-              <a:ext uri="{FF2B5EF4-FFF2-40B4-BE49-F238E27FC236}">
-                <a16:creationId xmlns:a16="http://schemas.microsoft.com/office/drawing/2014/main" id="{F3F4CFFC-6873-403E-9E58-FCE837BC94A1}"/>
-              </a:ext>
-            </a:extLst>
-          </p:cNvPr>
-          <p:cNvSpPr/>
-          <p:nvPr/>
-        </p:nvSpPr>
-        <p:spPr>
-          <a:xfrm>
-            <a:off x="8000427" y="3669048"/>
-            <a:ext cx="154236" cy="154236"/>
-          </a:xfrm>
-          <a:prstGeom prst="rect">
-            <a:avLst/>
-          </a:prstGeom>
-          <a:noFill/>
-        </p:spPr>
-        <p:style>
-          <a:lnRef idx="2">
-            <a:schemeClr val="accent1">
-              <a:shade val="50000"/>
-            </a:schemeClr>
-          </a:lnRef>
-          <a:fillRef idx="1">
-            <a:schemeClr val="accent1"/>
-          </a:fillRef>
-          <a:effectRef idx="0">
-            <a:schemeClr val="accent1"/>
-          </a:effectRef>
-          <a:fontRef idx="minor">
-            <a:schemeClr val="lt1"/>
-          </a:fontRef>
-        </p:style>
-        <p:txBody>
-          <a:bodyPr rtlCol="0" anchor="ctr"/>
-          <a:lstStyle/>
-          <a:p>
-            <a:pPr algn="ctr"/>
-            <a:endParaRPr lang="en-AU"/>
-          </a:p>
-        </p:txBody>
-      </p:sp>
-      <p:sp>
-        <p:nvSpPr>
-          <p:cNvPr id="57" name="Rectangle 56">
-            <a:extLst>
-              <a:ext uri="{FF2B5EF4-FFF2-40B4-BE49-F238E27FC236}">
-                <a16:creationId xmlns:a16="http://schemas.microsoft.com/office/drawing/2014/main" id="{B4147C33-960E-4E4F-B3D7-097082A79023}"/>
-              </a:ext>
-            </a:extLst>
-          </p:cNvPr>
-          <p:cNvSpPr/>
-          <p:nvPr/>
-        </p:nvSpPr>
-        <p:spPr>
-          <a:xfrm>
-            <a:off x="5881478" y="3681775"/>
-            <a:ext cx="154236" cy="154236"/>
-          </a:xfrm>
-          <a:prstGeom prst="rect">
-            <a:avLst/>
-          </a:prstGeom>
-          <a:noFill/>
-        </p:spPr>
-        <p:style>
-          <a:lnRef idx="2">
-            <a:schemeClr val="accent1">
-              <a:shade val="50000"/>
-            </a:schemeClr>
-          </a:lnRef>
-          <a:fillRef idx="1">
-            <a:schemeClr val="accent1"/>
-          </a:fillRef>
-          <a:effectRef idx="0">
-            <a:schemeClr val="accent1"/>
-          </a:effectRef>
-          <a:fontRef idx="minor">
-            <a:schemeClr val="lt1"/>
-          </a:fontRef>
-        </p:style>
-        <p:txBody>
-          <a:bodyPr rtlCol="0" anchor="ctr"/>
-          <a:lstStyle/>
-          <a:p>
-            <a:pPr algn="ctr"/>
-            <a:endParaRPr lang="en-AU"/>
-          </a:p>
-        </p:txBody>
-      </p:sp>
-      <p:sp>
-        <p:nvSpPr>
-          <p:cNvPr id="58" name="Parallelogram 57">
-            <a:extLst>
-              <a:ext uri="{FF2B5EF4-FFF2-40B4-BE49-F238E27FC236}">
-                <a16:creationId xmlns:a16="http://schemas.microsoft.com/office/drawing/2014/main" id="{288DC3CF-0821-46C8-B0A6-ED5A28EC5D16}"/>
-              </a:ext>
-            </a:extLst>
-          </p:cNvPr>
-          <p:cNvSpPr/>
-          <p:nvPr/>
-        </p:nvSpPr>
-        <p:spPr>
-          <a:xfrm>
-            <a:off x="4400572" y="3195537"/>
-            <a:ext cx="5326493" cy="468041"/>
-          </a:xfrm>
-          <a:prstGeom prst="parallelogram">
-            <a:avLst>
-              <a:gd name="adj" fmla="val 217135"/>
-            </a:avLst>
-          </a:prstGeom>
-          <a:solidFill>
-            <a:schemeClr val="accent1">
-              <a:alpha val="18000"/>
-            </a:schemeClr>
-          </a:solidFill>
-        </p:spPr>
-        <p:style>
-          <a:lnRef idx="2">
-            <a:schemeClr val="accent1">
-              <a:shade val="50000"/>
-            </a:schemeClr>
-          </a:lnRef>
-          <a:fillRef idx="1">
-            <a:schemeClr val="accent1"/>
-          </a:fillRef>
-          <a:effectRef idx="0">
-            <a:schemeClr val="accent1"/>
-          </a:effectRef>
-          <a:fontRef idx="minor">
-            <a:schemeClr val="lt1"/>
-          </a:fontRef>
-        </p:style>
-        <p:txBody>
-          <a:bodyPr rtlCol="0" anchor="ctr"/>
-          <a:lstStyle/>
-          <a:p>
-            <a:pPr algn="ctr"/>
-            <a:endParaRPr lang="en-AU"/>
-          </a:p>
-        </p:txBody>
-      </p:sp>
-      <p:cxnSp>
-        <p:nvCxnSpPr>
-          <p:cNvPr id="59" name="Straight Arrow Connector 58">
-            <a:extLst>
-              <a:ext uri="{FF2B5EF4-FFF2-40B4-BE49-F238E27FC236}">
-                <a16:creationId xmlns:a16="http://schemas.microsoft.com/office/drawing/2014/main" id="{99534178-3884-4ADF-AB41-DCB44AA716E5}"/>
-              </a:ext>
-            </a:extLst>
-          </p:cNvPr>
-          <p:cNvCxnSpPr>
-            <a:cxnSpLocks/>
-          </p:cNvCxnSpPr>
-          <p:nvPr/>
-        </p:nvCxnSpPr>
-        <p:spPr>
-          <a:xfrm flipV="1">
-            <a:off x="5443752" y="3203835"/>
-            <a:ext cx="767959" cy="362280"/>
-          </a:xfrm>
-          <a:prstGeom prst="straightConnector1">
-            <a:avLst/>
-          </a:prstGeom>
-          <a:ln w="57150">
-            <a:solidFill>
-              <a:srgbClr val="00B050"/>
-            </a:solidFill>
-            <a:tailEnd type="stealth" w="lg" len="lg"/>
-          </a:ln>
-        </p:spPr>
-        <p:style>
-          <a:lnRef idx="1">
-            <a:schemeClr val="accent1"/>
-          </a:lnRef>
-          <a:fillRef idx="0">
-            <a:schemeClr val="accent1"/>
-          </a:fillRef>
-          <a:effectRef idx="0">
-            <a:schemeClr val="accent1"/>
-          </a:effectRef>
-          <a:fontRef idx="minor">
-            <a:schemeClr val="tx1"/>
-          </a:fontRef>
-        </p:style>
-      </p:cxnSp>
-      <p:cxnSp>
-        <p:nvCxnSpPr>
-          <p:cNvPr id="80" name="Straight Connector 79" hidden="1">
-            <a:extLst>
-              <a:ext uri="{FF2B5EF4-FFF2-40B4-BE49-F238E27FC236}">
-                <a16:creationId xmlns:a16="http://schemas.microsoft.com/office/drawing/2014/main" id="{D5662873-2B05-4D06-9BD3-CE81EDA93B6E}"/>
-              </a:ext>
-            </a:extLst>
-          </p:cNvPr>
-          <p:cNvCxnSpPr/>
-          <p:nvPr/>
-        </p:nvCxnSpPr>
-        <p:spPr>
-          <a:xfrm flipH="1">
-            <a:off x="7472077" y="4018962"/>
-            <a:ext cx="51708" cy="0"/>
-          </a:xfrm>
-          <a:prstGeom prst="line">
-            <a:avLst/>
-          </a:prstGeom>
-        </p:spPr>
-        <p:style>
-          <a:lnRef idx="1">
-            <a:schemeClr val="accent1"/>
-          </a:lnRef>
-          <a:fillRef idx="0">
-            <a:schemeClr val="accent1"/>
-          </a:fillRef>
-          <a:effectRef idx="0">
-            <a:schemeClr val="accent1"/>
-          </a:effectRef>
-          <a:fontRef idx="minor">
-            <a:schemeClr val="tx1"/>
-          </a:fontRef>
-        </p:style>
-      </p:cxnSp>
-      <p:cxnSp>
-        <p:nvCxnSpPr>
-          <p:cNvPr id="93" name="Straight Connector 92">
-            <a:extLst>
-              <a:ext uri="{FF2B5EF4-FFF2-40B4-BE49-F238E27FC236}">
-                <a16:creationId xmlns:a16="http://schemas.microsoft.com/office/drawing/2014/main" id="{229D5ACC-E1D9-48EF-A995-071B6FEC7083}"/>
-              </a:ext>
-            </a:extLst>
-          </p:cNvPr>
-          <p:cNvCxnSpPr>
-            <a:cxnSpLocks/>
-          </p:cNvCxnSpPr>
-          <p:nvPr/>
-        </p:nvCxnSpPr>
-        <p:spPr>
-          <a:xfrm flipV="1">
-            <a:off x="7720333" y="4971542"/>
-            <a:ext cx="1015498" cy="465074"/>
-          </a:xfrm>
-          <a:prstGeom prst="line">
-            <a:avLst/>
-          </a:prstGeom>
-        </p:spPr>
-        <p:style>
-          <a:lnRef idx="1">
-            <a:schemeClr val="accent1"/>
-          </a:lnRef>
-          <a:fillRef idx="0">
-            <a:schemeClr val="accent1"/>
-          </a:fillRef>
-          <a:effectRef idx="0">
-            <a:schemeClr val="accent1"/>
-          </a:effectRef>
-          <a:fontRef idx="minor">
-            <a:schemeClr val="tx1"/>
-          </a:fontRef>
-        </p:style>
-      </p:cxnSp>
-      <p:sp>
-        <p:nvSpPr>
-          <p:cNvPr id="89" name="Parallelogram 88">
-            <a:extLst>
-              <a:ext uri="{FF2B5EF4-FFF2-40B4-BE49-F238E27FC236}">
-                <a16:creationId xmlns:a16="http://schemas.microsoft.com/office/drawing/2014/main" id="{955251FA-5555-43CA-A0C7-807F4A2198BF}"/>
-              </a:ext>
-            </a:extLst>
-          </p:cNvPr>
-          <p:cNvSpPr/>
-          <p:nvPr/>
-        </p:nvSpPr>
-        <p:spPr>
-          <a:xfrm rot="780000">
-            <a:off x="4393951" y="3584950"/>
-            <a:ext cx="5104419" cy="672420"/>
-          </a:xfrm>
-          <a:prstGeom prst="parallelogram">
-            <a:avLst>
-              <a:gd name="adj" fmla="val 128731"/>
-            </a:avLst>
-          </a:prstGeom>
-          <a:solidFill>
-            <a:schemeClr val="accent1">
-              <a:alpha val="18000"/>
-            </a:schemeClr>
-          </a:solidFill>
-        </p:spPr>
-        <p:style>
-          <a:lnRef idx="2">
-            <a:schemeClr val="accent1">
-              <a:shade val="50000"/>
-            </a:schemeClr>
-          </a:lnRef>
-          <a:fillRef idx="1">
-            <a:schemeClr val="accent1"/>
-          </a:fillRef>
-          <a:effectRef idx="0">
-            <a:schemeClr val="accent1"/>
-          </a:effectRef>
-          <a:fontRef idx="minor">
-            <a:schemeClr val="lt1"/>
-          </a:fontRef>
-        </p:style>
-        <p:txBody>
-          <a:bodyPr rtlCol="0" anchor="ctr"/>
-          <a:lstStyle/>
-          <a:p>
-            <a:pPr algn="ctr"/>
-            <a:endParaRPr lang="en-AU" dirty="0"/>
-          </a:p>
-        </p:txBody>
-      </p:sp>
-      <p:cxnSp>
-        <p:nvCxnSpPr>
-          <p:cNvPr id="97" name="Straight Connector 96">
-            <a:extLst>
-              <a:ext uri="{FF2B5EF4-FFF2-40B4-BE49-F238E27FC236}">
-                <a16:creationId xmlns:a16="http://schemas.microsoft.com/office/drawing/2014/main" id="{35C7ED1E-B9D1-4E7F-9C6B-7ADD328B1CC0}"/>
-              </a:ext>
-            </a:extLst>
-          </p:cNvPr>
-          <p:cNvCxnSpPr>
-            <a:cxnSpLocks/>
-          </p:cNvCxnSpPr>
-          <p:nvPr/>
-        </p:nvCxnSpPr>
-        <p:spPr>
-          <a:xfrm flipV="1">
-            <a:off x="8060851" y="4065947"/>
-            <a:ext cx="994191" cy="460299"/>
-          </a:xfrm>
-          <a:prstGeom prst="line">
-            <a:avLst/>
-          </a:prstGeom>
-        </p:spPr>
-        <p:style>
-          <a:lnRef idx="1">
-            <a:schemeClr val="accent1"/>
-          </a:lnRef>
-          <a:fillRef idx="0">
-            <a:schemeClr val="accent1"/>
-          </a:fillRef>
-          <a:effectRef idx="0">
-            <a:schemeClr val="accent1"/>
-          </a:effectRef>
-          <a:fontRef idx="minor">
-            <a:schemeClr val="tx1"/>
-          </a:fontRef>
-        </p:style>
-      </p:cxnSp>
-      <p:cxnSp>
-        <p:nvCxnSpPr>
-          <p:cNvPr id="100" name="Straight Connector 99">
-            <a:extLst>
-              <a:ext uri="{FF2B5EF4-FFF2-40B4-BE49-F238E27FC236}">
-                <a16:creationId xmlns:a16="http://schemas.microsoft.com/office/drawing/2014/main" id="{28544516-F908-496F-A11C-71ABAC2C89EF}"/>
-              </a:ext>
-            </a:extLst>
-          </p:cNvPr>
-          <p:cNvCxnSpPr>
-            <a:cxnSpLocks/>
-          </p:cNvCxnSpPr>
-          <p:nvPr/>
-        </p:nvCxnSpPr>
-        <p:spPr>
-          <a:xfrm flipV="1">
-            <a:off x="8147982" y="3196642"/>
-            <a:ext cx="1017985" cy="464889"/>
-          </a:xfrm>
-          <a:prstGeom prst="line">
-            <a:avLst/>
-          </a:prstGeom>
-        </p:spPr>
-        <p:style>
-          <a:lnRef idx="1">
-            <a:schemeClr val="accent1"/>
-          </a:lnRef>
-          <a:fillRef idx="0">
-            <a:schemeClr val="accent1"/>
-          </a:fillRef>
-          <a:effectRef idx="0">
-            <a:schemeClr val="accent1"/>
-          </a:effectRef>
-          <a:fontRef idx="minor">
-            <a:schemeClr val="tx1"/>
-          </a:fontRef>
-        </p:style>
-      </p:cxnSp>
-      <p:cxnSp>
-        <p:nvCxnSpPr>
-          <p:cNvPr id="108" name="Straight Connector 107">
-            <a:extLst>
-              <a:ext uri="{FF2B5EF4-FFF2-40B4-BE49-F238E27FC236}">
-                <a16:creationId xmlns:a16="http://schemas.microsoft.com/office/drawing/2014/main" id="{4E73F104-EDE5-407E-B915-2D33904BE063}"/>
-              </a:ext>
-            </a:extLst>
-          </p:cNvPr>
-          <p:cNvCxnSpPr>
-            <a:cxnSpLocks/>
-          </p:cNvCxnSpPr>
-          <p:nvPr/>
-        </p:nvCxnSpPr>
-        <p:spPr>
-          <a:xfrm flipV="1">
-            <a:off x="5849310" y="3986665"/>
-            <a:ext cx="1015498" cy="475419"/>
-          </a:xfrm>
-          <a:prstGeom prst="line">
-            <a:avLst/>
-          </a:prstGeom>
-        </p:spPr>
-        <p:style>
-          <a:lnRef idx="1">
-            <a:schemeClr val="accent1"/>
-          </a:lnRef>
-          <a:fillRef idx="0">
-            <a:schemeClr val="accent1"/>
-          </a:fillRef>
-          <a:effectRef idx="0">
-            <a:schemeClr val="accent1"/>
-          </a:effectRef>
-          <a:fontRef idx="minor">
-            <a:schemeClr val="tx1"/>
-          </a:fontRef>
-        </p:style>
-      </p:cxnSp>
-      <p:cxnSp>
-        <p:nvCxnSpPr>
-          <p:cNvPr id="109" name="Straight Connector 108">
-            <a:extLst>
-              <a:ext uri="{FF2B5EF4-FFF2-40B4-BE49-F238E27FC236}">
-                <a16:creationId xmlns:a16="http://schemas.microsoft.com/office/drawing/2014/main" id="{6191B49E-EFF5-4738-AB6E-33E1AE470FE5}"/>
-              </a:ext>
-            </a:extLst>
-          </p:cNvPr>
-          <p:cNvCxnSpPr>
-            <a:cxnSpLocks/>
-            <a:endCxn id="58" idx="0"/>
-          </p:cNvCxnSpPr>
-          <p:nvPr/>
-        </p:nvCxnSpPr>
-        <p:spPr>
-          <a:xfrm flipV="1">
-            <a:off x="6056494" y="3195537"/>
-            <a:ext cx="1007325" cy="456434"/>
-          </a:xfrm>
-          <a:prstGeom prst="line">
-            <a:avLst/>
-          </a:prstGeom>
-        </p:spPr>
-        <p:style>
-          <a:lnRef idx="1">
-            <a:schemeClr val="accent1"/>
-          </a:lnRef>
-          <a:fillRef idx="0">
-            <a:schemeClr val="accent1"/>
-          </a:fillRef>
-          <a:effectRef idx="0">
-            <a:schemeClr val="accent1"/>
-          </a:effectRef>
-          <a:fontRef idx="minor">
-            <a:schemeClr val="tx1"/>
-          </a:fontRef>
-        </p:style>
-      </p:cxnSp>
-      <p:sp>
-        <p:nvSpPr>
-          <p:cNvPr id="110" name="Arc 109">
-            <a:extLst>
-              <a:ext uri="{FF2B5EF4-FFF2-40B4-BE49-F238E27FC236}">
-                <a16:creationId xmlns:a16="http://schemas.microsoft.com/office/drawing/2014/main" id="{77D6F64C-5260-4D10-BFE1-80F678C6533B}"/>
-              </a:ext>
-            </a:extLst>
-          </p:cNvPr>
-          <p:cNvSpPr/>
-          <p:nvPr/>
-        </p:nvSpPr>
-        <p:spPr>
-          <a:xfrm>
-            <a:off x="4958226" y="2714223"/>
-            <a:ext cx="914400" cy="914400"/>
-          </a:xfrm>
-          <a:prstGeom prst="arc">
-            <a:avLst>
-              <a:gd name="adj1" fmla="val 288290"/>
-              <a:gd name="adj2" fmla="val 1974097"/>
-            </a:avLst>
-          </a:prstGeom>
-          <a:ln w="19050"/>
-        </p:spPr>
-        <p:style>
-          <a:lnRef idx="1">
-            <a:schemeClr val="accent1"/>
-          </a:lnRef>
-          <a:fillRef idx="0">
-            <a:schemeClr val="accent1"/>
-          </a:fillRef>
-          <a:effectRef idx="0">
-            <a:schemeClr val="accent1"/>
-          </a:effectRef>
-          <a:fontRef idx="minor">
-            <a:schemeClr val="tx1"/>
-          </a:fontRef>
-        </p:style>
-        <p:txBody>
-          <a:bodyPr rtlCol="0" anchor="ctr"/>
-          <a:lstStyle/>
-          <a:p>
-            <a:pPr algn="ctr"/>
-            <a:endParaRPr lang="en-AU"/>
-          </a:p>
-        </p:txBody>
-      </p:sp>
-      <p:cxnSp>
-        <p:nvCxnSpPr>
-          <p:cNvPr id="111" name="Straight Connector 110">
-            <a:extLst>
-              <a:ext uri="{FF2B5EF4-FFF2-40B4-BE49-F238E27FC236}">
-                <a16:creationId xmlns:a16="http://schemas.microsoft.com/office/drawing/2014/main" id="{1CE0ECAA-0B91-4CAD-90A0-2AFD9DC97BA0}"/>
-              </a:ext>
-            </a:extLst>
-          </p:cNvPr>
-          <p:cNvCxnSpPr>
-            <a:cxnSpLocks/>
-          </p:cNvCxnSpPr>
-          <p:nvPr/>
-        </p:nvCxnSpPr>
-        <p:spPr>
-          <a:xfrm flipV="1">
-            <a:off x="4836969" y="3192815"/>
-            <a:ext cx="1028723" cy="470255"/>
-          </a:xfrm>
-          <a:prstGeom prst="line">
-            <a:avLst/>
-          </a:prstGeom>
-        </p:spPr>
-        <p:style>
-          <a:lnRef idx="1">
-            <a:schemeClr val="accent1"/>
-          </a:lnRef>
-          <a:fillRef idx="0">
-            <a:schemeClr val="accent1"/>
-          </a:fillRef>
-          <a:effectRef idx="0">
-            <a:schemeClr val="accent1"/>
-          </a:effectRef>
-          <a:fontRef idx="minor">
-            <a:schemeClr val="tx1"/>
-          </a:fontRef>
-        </p:style>
-      </p:cxnSp>
-      <p:cxnSp>
-        <p:nvCxnSpPr>
-          <p:cNvPr id="112" name="Straight Connector 111">
-            <a:extLst>
-              <a:ext uri="{FF2B5EF4-FFF2-40B4-BE49-F238E27FC236}">
-                <a16:creationId xmlns:a16="http://schemas.microsoft.com/office/drawing/2014/main" id="{43F841B7-AEC5-4C32-A89E-E56EC752442A}"/>
-              </a:ext>
-            </a:extLst>
-          </p:cNvPr>
-          <p:cNvCxnSpPr>
-            <a:cxnSpLocks/>
-          </p:cNvCxnSpPr>
-          <p:nvPr/>
-        </p:nvCxnSpPr>
-        <p:spPr>
-          <a:xfrm flipV="1">
-            <a:off x="4748864" y="3417150"/>
-            <a:ext cx="1058113" cy="479239"/>
-          </a:xfrm>
-          <a:prstGeom prst="line">
-            <a:avLst/>
-          </a:prstGeom>
-        </p:spPr>
-        <p:style>
-          <a:lnRef idx="1">
-            <a:schemeClr val="accent1"/>
-          </a:lnRef>
-          <a:fillRef idx="0">
-            <a:schemeClr val="accent1"/>
-          </a:fillRef>
-          <a:effectRef idx="0">
-            <a:schemeClr val="accent1"/>
-          </a:effectRef>
-          <a:fontRef idx="minor">
-            <a:schemeClr val="tx1"/>
-          </a:fontRef>
-        </p:style>
-      </p:cxnSp>
-      <p:cxnSp>
-        <p:nvCxnSpPr>
-          <p:cNvPr id="121" name="Straight Connector 120">
-            <a:extLst>
-              <a:ext uri="{FF2B5EF4-FFF2-40B4-BE49-F238E27FC236}">
-                <a16:creationId xmlns:a16="http://schemas.microsoft.com/office/drawing/2014/main" id="{81997C64-4C34-411B-8E0B-5BF6813B1C86}"/>
-              </a:ext>
-            </a:extLst>
-          </p:cNvPr>
-          <p:cNvCxnSpPr>
-            <a:cxnSpLocks/>
-            <a:endCxn id="89" idx="0"/>
-          </p:cNvCxnSpPr>
-          <p:nvPr/>
-        </p:nvCxnSpPr>
-        <p:spPr>
-          <a:xfrm flipV="1">
-            <a:off x="6007723" y="3593567"/>
-            <a:ext cx="1014069" cy="448218"/>
-          </a:xfrm>
-          <a:prstGeom prst="line">
-            <a:avLst/>
-          </a:prstGeom>
-        </p:spPr>
-        <p:style>
-          <a:lnRef idx="1">
-            <a:schemeClr val="accent1"/>
-          </a:lnRef>
-          <a:fillRef idx="0">
-            <a:schemeClr val="accent1"/>
-          </a:fillRef>
-          <a:effectRef idx="0">
-            <a:schemeClr val="accent1"/>
-          </a:effectRef>
-          <a:fontRef idx="minor">
-            <a:schemeClr val="tx1"/>
-          </a:fontRef>
-        </p:style>
-      </p:cxnSp>
-      <p:cxnSp>
-        <p:nvCxnSpPr>
-          <p:cNvPr id="131" name="Straight Connector 130">
-            <a:extLst>
-              <a:ext uri="{FF2B5EF4-FFF2-40B4-BE49-F238E27FC236}">
-                <a16:creationId xmlns:a16="http://schemas.microsoft.com/office/drawing/2014/main" id="{C7C11E92-151B-4668-9032-3F28B5E31805}"/>
-              </a:ext>
-            </a:extLst>
-          </p:cNvPr>
-          <p:cNvCxnSpPr>
-            <a:stCxn id="89" idx="5"/>
-            <a:endCxn id="89" idx="2"/>
-          </p:cNvCxnSpPr>
-          <p:nvPr/>
-        </p:nvCxnSpPr>
-        <p:spPr>
-          <a:xfrm>
-            <a:off x="4881077" y="3444398"/>
-            <a:ext cx="4130167" cy="953524"/>
-          </a:xfrm>
-          <a:prstGeom prst="line">
-            <a:avLst/>
-          </a:prstGeom>
-        </p:spPr>
-        <p:style>
-          <a:lnRef idx="1">
-            <a:schemeClr val="accent1"/>
-          </a:lnRef>
-          <a:fillRef idx="0">
-            <a:schemeClr val="accent1"/>
-          </a:fillRef>
-          <a:effectRef idx="0">
-            <a:schemeClr val="accent1"/>
-          </a:effectRef>
-          <a:fontRef idx="minor">
-            <a:schemeClr val="tx1"/>
-          </a:fontRef>
-        </p:style>
-      </p:cxnSp>
-      <p:cxnSp>
-        <p:nvCxnSpPr>
-          <p:cNvPr id="202" name="Straight Connector 201">
-            <a:extLst>
-              <a:ext uri="{FF2B5EF4-FFF2-40B4-BE49-F238E27FC236}">
-                <a16:creationId xmlns:a16="http://schemas.microsoft.com/office/drawing/2014/main" id="{8EB34537-B236-4FA0-9FD6-DFE5D5ED4E75}"/>
-              </a:ext>
-            </a:extLst>
-          </p:cNvPr>
-          <p:cNvCxnSpPr>
-            <a:cxnSpLocks/>
-          </p:cNvCxnSpPr>
-          <p:nvPr/>
-        </p:nvCxnSpPr>
-        <p:spPr>
-          <a:xfrm flipH="1">
-            <a:off x="8228082" y="3429000"/>
-            <a:ext cx="455102" cy="1765154"/>
-          </a:xfrm>
-          <a:prstGeom prst="line">
-            <a:avLst/>
-          </a:prstGeom>
-        </p:spPr>
-        <p:style>
-          <a:lnRef idx="1">
-            <a:schemeClr val="accent1"/>
-          </a:lnRef>
-          <a:fillRef idx="0">
-            <a:schemeClr val="accent1"/>
-          </a:fillRef>
-          <a:effectRef idx="0">
-            <a:schemeClr val="accent1"/>
-          </a:effectRef>
-          <a:fontRef idx="minor">
-            <a:schemeClr val="tx1"/>
-          </a:fontRef>
-        </p:style>
-      </p:cxnSp>
-      <p:cxnSp>
-        <p:nvCxnSpPr>
-          <p:cNvPr id="208" name="Straight Connector 207">
-            <a:extLst>
-              <a:ext uri="{FF2B5EF4-FFF2-40B4-BE49-F238E27FC236}">
-                <a16:creationId xmlns:a16="http://schemas.microsoft.com/office/drawing/2014/main" id="{B927ADA8-D634-4D5B-9587-89440C8616A5}"/>
-              </a:ext>
-            </a:extLst>
-          </p:cNvPr>
-          <p:cNvCxnSpPr>
-            <a:stCxn id="89" idx="5"/>
-            <a:endCxn id="88" idx="2"/>
-          </p:cNvCxnSpPr>
-          <p:nvPr/>
-        </p:nvCxnSpPr>
-        <p:spPr>
-          <a:xfrm>
-            <a:off x="4881077" y="3444398"/>
-            <a:ext cx="3752890" cy="1976011"/>
-          </a:xfrm>
-          <a:prstGeom prst="line">
-            <a:avLst/>
-          </a:prstGeom>
-        </p:spPr>
-        <p:style>
-          <a:lnRef idx="1">
-            <a:schemeClr val="accent1"/>
-          </a:lnRef>
-          <a:fillRef idx="0">
-            <a:schemeClr val="accent1"/>
-          </a:fillRef>
-          <a:effectRef idx="0">
-            <a:schemeClr val="accent1"/>
-          </a:effectRef>
-          <a:fontRef idx="minor">
-            <a:schemeClr val="tx1"/>
-          </a:fontRef>
-        </p:style>
-      </p:cxnSp>
-      <p:cxnSp>
-        <p:nvCxnSpPr>
-          <p:cNvPr id="212" name="Straight Connector 211">
-            <a:extLst>
-              <a:ext uri="{FF2B5EF4-FFF2-40B4-BE49-F238E27FC236}">
-                <a16:creationId xmlns:a16="http://schemas.microsoft.com/office/drawing/2014/main" id="{E23D0723-3463-4790-B9AF-E578E7077039}"/>
-              </a:ext>
-            </a:extLst>
-          </p:cNvPr>
-          <p:cNvCxnSpPr>
-            <a:stCxn id="89" idx="5"/>
-            <a:endCxn id="58" idx="2"/>
-          </p:cNvCxnSpPr>
-          <p:nvPr/>
-        </p:nvCxnSpPr>
-        <p:spPr>
-          <a:xfrm flipV="1">
-            <a:off x="4881077" y="3429558"/>
-            <a:ext cx="4337848" cy="14840"/>
-          </a:xfrm>
-          <a:prstGeom prst="line">
-            <a:avLst/>
-          </a:prstGeom>
-        </p:spPr>
-        <p:style>
-          <a:lnRef idx="1">
-            <a:schemeClr val="accent1"/>
-          </a:lnRef>
-          <a:fillRef idx="0">
-            <a:schemeClr val="accent1"/>
-          </a:fillRef>
-          <a:effectRef idx="0">
-            <a:schemeClr val="accent1"/>
-          </a:effectRef>
-          <a:fontRef idx="minor">
-            <a:schemeClr val="tx1"/>
-          </a:fontRef>
-        </p:style>
-      </p:cxnSp>
-      <p:pic>
-        <p:nvPicPr>
-          <p:cNvPr id="215" name="Picture 214">
-            <a:extLst>
-              <a:ext uri="{FF2B5EF4-FFF2-40B4-BE49-F238E27FC236}">
-                <a16:creationId xmlns:a16="http://schemas.microsoft.com/office/drawing/2014/main" id="{AC623809-65F1-4136-ADC5-93BC5B529110}"/>
-              </a:ext>
-            </a:extLst>
-          </p:cNvPr>
-          <p:cNvPicPr>
-            <a:picLocks noChangeAspect="1"/>
-          </p:cNvPicPr>
-          <p:nvPr/>
-        </p:nvPicPr>
-        <p:blipFill>
-          <a:blip r:embed="rId2"/>
-          <a:stretch>
-            <a:fillRect/>
-          </a:stretch>
-        </p:blipFill>
-        <p:spPr>
-          <a:xfrm>
-            <a:off x="6908391" y="3327832"/>
-            <a:ext cx="3530956" cy="2617136"/>
-          </a:xfrm>
-          <a:prstGeom prst="rect">
-            <a:avLst/>
-          </a:prstGeom>
-        </p:spPr>
-      </p:pic>
-      <p:pic>
-        <p:nvPicPr>
-          <p:cNvPr id="230" name="Picture 229">
-            <a:extLst>
-              <a:ext uri="{FF2B5EF4-FFF2-40B4-BE49-F238E27FC236}">
-                <a16:creationId xmlns:a16="http://schemas.microsoft.com/office/drawing/2014/main" id="{BFC4E085-83C5-4E95-A56F-686755AC988F}"/>
-              </a:ext>
-            </a:extLst>
-          </p:cNvPr>
-          <p:cNvPicPr>
-            <a:picLocks noChangeAspect="1"/>
-          </p:cNvPicPr>
-          <p:nvPr/>
-        </p:nvPicPr>
-        <p:blipFill>
-          <a:blip r:embed="rId3"/>
-          <a:stretch>
-            <a:fillRect/>
-          </a:stretch>
-        </p:blipFill>
-        <p:spPr>
-          <a:xfrm>
-            <a:off x="6090855" y="3407196"/>
-            <a:ext cx="1332000" cy="1358761"/>
-          </a:xfrm>
-          <a:prstGeom prst="rect">
-            <a:avLst/>
-          </a:prstGeom>
-          <a:ln>
-            <a:noFill/>
-          </a:ln>
-        </p:spPr>
-      </p:pic>
-      <p:pic>
-        <p:nvPicPr>
-          <p:cNvPr id="231" name="Picture 230">
-            <a:extLst>
-              <a:ext uri="{FF2B5EF4-FFF2-40B4-BE49-F238E27FC236}">
-                <a16:creationId xmlns:a16="http://schemas.microsoft.com/office/drawing/2014/main" id="{BDB62D6F-28DA-40D4-9604-EAD5CFB4DE8D}"/>
-              </a:ext>
-            </a:extLst>
-          </p:cNvPr>
-          <p:cNvPicPr>
-            <a:picLocks noChangeAspect="1"/>
-          </p:cNvPicPr>
-          <p:nvPr/>
-        </p:nvPicPr>
-        <p:blipFill>
-          <a:blip r:embed="rId4"/>
-          <a:stretch>
-            <a:fillRect/>
-          </a:stretch>
-        </p:blipFill>
-        <p:spPr>
-          <a:xfrm>
-            <a:off x="5220162" y="3459238"/>
-            <a:ext cx="657225" cy="412061"/>
-          </a:xfrm>
-          <a:prstGeom prst="rect">
-            <a:avLst/>
-          </a:prstGeom>
-        </p:spPr>
-      </p:pic>
-      <p:cxnSp>
-        <p:nvCxnSpPr>
-          <p:cNvPr id="234" name="Straight Arrow Connector 233">
-            <a:extLst>
-              <a:ext uri="{FF2B5EF4-FFF2-40B4-BE49-F238E27FC236}">
-                <a16:creationId xmlns:a16="http://schemas.microsoft.com/office/drawing/2014/main" id="{5DF379B6-6D79-4B37-B229-2559B07C8A67}"/>
-              </a:ext>
-            </a:extLst>
-          </p:cNvPr>
-          <p:cNvCxnSpPr>
-            <a:cxnSpLocks/>
-          </p:cNvCxnSpPr>
-          <p:nvPr/>
-        </p:nvCxnSpPr>
-        <p:spPr>
-          <a:xfrm flipV="1">
-            <a:off x="6556320" y="3192815"/>
-            <a:ext cx="1324979" cy="625052"/>
-          </a:xfrm>
-          <a:prstGeom prst="straightConnector1">
-            <a:avLst/>
-          </a:prstGeom>
-          <a:ln w="57150">
-            <a:solidFill>
-              <a:srgbClr val="00B050"/>
-            </a:solidFill>
-            <a:tailEnd type="stealth" w="lg" len="lg"/>
-          </a:ln>
-        </p:spPr>
-        <p:style>
-          <a:lnRef idx="1">
-            <a:schemeClr val="accent1"/>
-          </a:lnRef>
-          <a:fillRef idx="0">
-            <a:schemeClr val="accent1"/>
-          </a:fillRef>
-          <a:effectRef idx="0">
-            <a:schemeClr val="accent1"/>
-          </a:effectRef>
-          <a:fontRef idx="minor">
-            <a:schemeClr val="tx1"/>
-          </a:fontRef>
-        </p:style>
-      </p:cxnSp>
-      <p:cxnSp>
-        <p:nvCxnSpPr>
-          <p:cNvPr id="236" name="Straight Arrow Connector 235">
-            <a:extLst>
-              <a:ext uri="{FF2B5EF4-FFF2-40B4-BE49-F238E27FC236}">
-                <a16:creationId xmlns:a16="http://schemas.microsoft.com/office/drawing/2014/main" id="{72720128-EA7F-4EDA-8002-52CAD3E765DA}"/>
-              </a:ext>
-            </a:extLst>
-          </p:cNvPr>
-          <p:cNvCxnSpPr>
-            <a:cxnSpLocks/>
-          </p:cNvCxnSpPr>
-          <p:nvPr/>
-        </p:nvCxnSpPr>
-        <p:spPr>
-          <a:xfrm flipV="1">
-            <a:off x="8484429" y="3226942"/>
-            <a:ext cx="2210869" cy="1042967"/>
-          </a:xfrm>
-          <a:prstGeom prst="straightConnector1">
-            <a:avLst/>
-          </a:prstGeom>
-          <a:ln w="57150">
-            <a:solidFill>
-              <a:srgbClr val="00B050"/>
-            </a:solidFill>
-            <a:tailEnd type="stealth" w="lg" len="lg"/>
-          </a:ln>
-        </p:spPr>
-        <p:style>
-          <a:lnRef idx="1">
-            <a:schemeClr val="accent1"/>
-          </a:lnRef>
-          <a:fillRef idx="0">
-            <a:schemeClr val="accent1"/>
-          </a:fillRef>
-          <a:effectRef idx="0">
-            <a:schemeClr val="accent1"/>
-          </a:effectRef>
-          <a:fontRef idx="minor">
-            <a:schemeClr val="tx1"/>
-          </a:fontRef>
-        </p:style>
-      </p:cxnSp>
       <p:pic>
         <p:nvPicPr>
           <p:cNvPr id="2" name="Picture 1">
@@ -7432,7 +5891,7 @@
 </p:sld>
 </file>
 
-<file path=ppt/slides/slide12.xml><?xml version="1.0" encoding="utf-8"?>
+<file path=ppt/slides/slide11.xml><?xml version="1.0" encoding="utf-8"?>
 <p:sld xmlns:a="http://schemas.openxmlformats.org/drawingml/2006/main" xmlns:r="http://schemas.openxmlformats.org/officeDocument/2006/relationships" xmlns:p="http://schemas.openxmlformats.org/presentationml/2006/main">
   <p:cSld>
     <p:bg>
@@ -7509,10 +5968,10 @@
         </p:nvGrpSpPr>
         <p:grpSpPr>
           <a:xfrm>
-            <a:off x="4305812" y="3192815"/>
-            <a:ext cx="6389486" cy="2736320"/>
-            <a:chOff x="4305812" y="3192815"/>
-            <a:chExt cx="6389486" cy="2736320"/>
+            <a:off x="1139702" y="1762559"/>
+            <a:ext cx="9299828" cy="4075136"/>
+            <a:chOff x="4305812" y="1853999"/>
+            <a:chExt cx="9299828" cy="4075136"/>
           </a:xfrm>
         </p:grpSpPr>
         <p:sp>
@@ -7729,8 +6188,8 @@
           </p:nvCxnSpPr>
           <p:spPr>
             <a:xfrm flipV="1">
-              <a:off x="6556320" y="3192815"/>
-              <a:ext cx="1324979" cy="625052"/>
+              <a:off x="6556320" y="2684346"/>
+              <a:ext cx="2402826" cy="1133521"/>
             </a:xfrm>
             <a:prstGeom prst="straightConnector1">
               <a:avLst/>
@@ -7773,8 +6232,8 @@
           </p:nvCxnSpPr>
           <p:spPr>
             <a:xfrm flipV="1">
-              <a:off x="8484429" y="3226942"/>
-              <a:ext cx="2210869" cy="1042967"/>
+              <a:off x="8484429" y="1853999"/>
+              <a:ext cx="5121211" cy="2415912"/>
             </a:xfrm>
             <a:prstGeom prst="straightConnector1">
               <a:avLst/>
@@ -7892,6 +6351,143 @@
           </p:spPr>
         </p:pic>
       </p:grpSp>
+      <p:sp>
+        <p:nvSpPr>
+          <p:cNvPr id="2" name="TextBox 1">
+            <a:extLst>
+              <a:ext uri="{FF2B5EF4-FFF2-40B4-BE49-F238E27FC236}">
+                <a16:creationId xmlns:a16="http://schemas.microsoft.com/office/drawing/2014/main" id="{152D039D-8A94-4801-9E5D-5D34E2C0AD83}"/>
+              </a:ext>
+            </a:extLst>
+          </p:cNvPr>
+          <p:cNvSpPr txBox="1"/>
+          <p:nvPr/>
+        </p:nvSpPr>
+        <p:spPr>
+          <a:xfrm>
+            <a:off x="1550670" y="1642469"/>
+            <a:ext cx="3565849" cy="646331"/>
+          </a:xfrm>
+          <a:prstGeom prst="rect">
+            <a:avLst/>
+          </a:prstGeom>
+          <a:noFill/>
+        </p:spPr>
+        <p:txBody>
+          <a:bodyPr wrap="square" rtlCol="0">
+            <a:spAutoFit/>
+          </a:bodyPr>
+          <a:lstStyle/>
+          <a:p>
+            <a:pPr algn="ctr"/>
+            <a:r>
+              <a:rPr lang="en-GB" dirty="0"/>
+              <a:t>Effect of Q-Slack on </a:t>
+            </a:r>
+          </a:p>
+          <a:p>
+            <a:pPr algn="ctr"/>
+            <a:r>
+              <a:rPr lang="en-GB" dirty="0"/>
+              <a:t>Transverse Wave</a:t>
+            </a:r>
+            <a:endParaRPr lang="en-AU" dirty="0"/>
+          </a:p>
+        </p:txBody>
+      </p:sp>
+      <p:cxnSp>
+        <p:nvCxnSpPr>
+          <p:cNvPr id="8" name="Straight Connector 7">
+            <a:extLst>
+              <a:ext uri="{FF2B5EF4-FFF2-40B4-BE49-F238E27FC236}">
+                <a16:creationId xmlns:a16="http://schemas.microsoft.com/office/drawing/2014/main" id="{0B945EF2-1527-46CB-B58E-6861B0B4C95E}"/>
+              </a:ext>
+            </a:extLst>
+          </p:cNvPr>
+          <p:cNvCxnSpPr>
+            <a:cxnSpLocks/>
+            <a:stCxn id="58" idx="5"/>
+          </p:cNvCxnSpPr>
+          <p:nvPr/>
+        </p:nvCxnSpPr>
+        <p:spPr>
+          <a:xfrm flipV="1">
+            <a:off x="1742602" y="1714500"/>
+            <a:ext cx="8898728" cy="1623618"/>
+          </a:xfrm>
+          <a:prstGeom prst="line">
+            <a:avLst/>
+          </a:prstGeom>
+        </p:spPr>
+        <p:style>
+          <a:lnRef idx="1">
+            <a:schemeClr val="accent1"/>
+          </a:lnRef>
+          <a:fillRef idx="0">
+            <a:schemeClr val="accent1"/>
+          </a:fillRef>
+          <a:effectRef idx="0">
+            <a:schemeClr val="accent1"/>
+          </a:effectRef>
+          <a:fontRef idx="minor">
+            <a:schemeClr val="tx1"/>
+          </a:fontRef>
+        </p:style>
+      </p:cxnSp>
+      <p:sp>
+        <p:nvSpPr>
+          <p:cNvPr id="11" name="Oval 10">
+            <a:extLst>
+              <a:ext uri="{FF2B5EF4-FFF2-40B4-BE49-F238E27FC236}">
+                <a16:creationId xmlns:a16="http://schemas.microsoft.com/office/drawing/2014/main" id="{13F14503-4BDD-4912-A80A-4C547D78C4EF}"/>
+              </a:ext>
+            </a:extLst>
+          </p:cNvPr>
+          <p:cNvSpPr/>
+          <p:nvPr/>
+        </p:nvSpPr>
+        <p:spPr>
+          <a:xfrm>
+            <a:off x="1752470" y="3277209"/>
+            <a:ext cx="95402" cy="95402"/>
+          </a:xfrm>
+          <a:prstGeom prst="ellipse">
+            <a:avLst/>
+          </a:prstGeom>
+          <a:solidFill>
+            <a:srgbClr val="00B050"/>
+          </a:solidFill>
+          <a:ln>
+            <a:solidFill>
+              <a:srgbClr val="00B050"/>
+            </a:solidFill>
+          </a:ln>
+        </p:spPr>
+        <p:style>
+          <a:lnRef idx="2">
+            <a:schemeClr val="accent1">
+              <a:shade val="50000"/>
+            </a:schemeClr>
+          </a:lnRef>
+          <a:fillRef idx="1">
+            <a:schemeClr val="accent1"/>
+          </a:fillRef>
+          <a:effectRef idx="0">
+            <a:schemeClr val="accent1"/>
+          </a:effectRef>
+          <a:fontRef idx="minor">
+            <a:schemeClr val="lt1"/>
+          </a:fontRef>
+        </p:style>
+        <p:txBody>
+          <a:bodyPr rtlCol="0" anchor="ctr"/>
+          <a:lstStyle/>
+          <a:p>
+            <a:pPr algn="ctr"/>
+            <a:endParaRPr lang="en-AU"/>
+          </a:p>
+        </p:txBody>
+      </p:sp>
     </p:spTree>
     <p:extLst>
       <p:ext uri="{BB962C8B-B14F-4D97-AF65-F5344CB8AC3E}">
@@ -7905,7 +6501,2475 @@
 </p:sld>
 </file>
 
+<file path=ppt/slides/slide12.xml><?xml version="1.0" encoding="utf-8"?>
+<p:sld xmlns:a="http://schemas.openxmlformats.org/drawingml/2006/main" xmlns:r="http://schemas.openxmlformats.org/officeDocument/2006/relationships" xmlns:p="http://schemas.openxmlformats.org/presentationml/2006/main">
+  <p:cSld>
+    <p:spTree>
+      <p:nvGrpSpPr>
+        <p:cNvPr id="1" name=""/>
+        <p:cNvGrpSpPr/>
+        <p:nvPr/>
+      </p:nvGrpSpPr>
+      <p:grpSpPr>
+        <a:xfrm>
+          <a:off x="0" y="0"/>
+          <a:ext cx="0" cy="0"/>
+          <a:chOff x="0" y="0"/>
+          <a:chExt cx="0" cy="0"/>
+        </a:xfrm>
+      </p:grpSpPr>
+      <p:grpSp>
+        <p:nvGrpSpPr>
+          <p:cNvPr id="43" name="Group 42">
+            <a:extLst>
+              <a:ext uri="{FF2B5EF4-FFF2-40B4-BE49-F238E27FC236}">
+                <a16:creationId xmlns:a16="http://schemas.microsoft.com/office/drawing/2014/main" id="{08F3941E-F64D-4A53-B9D4-96EE59B43A19}"/>
+              </a:ext>
+            </a:extLst>
+          </p:cNvPr>
+          <p:cNvGrpSpPr/>
+          <p:nvPr/>
+        </p:nvGrpSpPr>
+        <p:grpSpPr>
+          <a:xfrm>
+            <a:off x="2496330" y="97250"/>
+            <a:ext cx="5718456" cy="5937757"/>
+            <a:chOff x="2496330" y="97250"/>
+            <a:chExt cx="5718456" cy="5937757"/>
+          </a:xfrm>
+        </p:grpSpPr>
+        <p:sp>
+          <p:nvSpPr>
+            <p:cNvPr id="52" name="TextBox 51">
+              <a:extLst>
+                <a:ext uri="{FF2B5EF4-FFF2-40B4-BE49-F238E27FC236}">
+                  <a16:creationId xmlns:a16="http://schemas.microsoft.com/office/drawing/2014/main" id="{5B101584-4CE9-48FD-B99D-DD356D9DABEE}"/>
+                </a:ext>
+              </a:extLst>
+            </p:cNvPr>
+            <p:cNvSpPr txBox="1"/>
+            <p:nvPr/>
+          </p:nvSpPr>
+          <p:spPr>
+            <a:xfrm>
+              <a:off x="3001834" y="4709585"/>
+              <a:ext cx="184731" cy="369332"/>
+            </a:xfrm>
+            <a:prstGeom prst="rect">
+              <a:avLst/>
+            </a:prstGeom>
+            <a:noFill/>
+          </p:spPr>
+          <p:txBody>
+            <a:bodyPr wrap="none" rtlCol="0">
+              <a:spAutoFit/>
+            </a:bodyPr>
+            <a:lstStyle/>
+            <a:p>
+              <a:endParaRPr lang="en-AU" dirty="0"/>
+            </a:p>
+          </p:txBody>
+        </p:sp>
+        <p:sp>
+          <p:nvSpPr>
+            <p:cNvPr id="72" name="TextBox 71">
+              <a:extLst>
+                <a:ext uri="{FF2B5EF4-FFF2-40B4-BE49-F238E27FC236}">
+                  <a16:creationId xmlns:a16="http://schemas.microsoft.com/office/drawing/2014/main" id="{7FCDE1BC-889A-4B8E-92C3-873EFE59CB62}"/>
+                </a:ext>
+              </a:extLst>
+            </p:cNvPr>
+            <p:cNvSpPr txBox="1"/>
+            <p:nvPr/>
+          </p:nvSpPr>
+          <p:spPr>
+            <a:xfrm>
+              <a:off x="3111975" y="97250"/>
+              <a:ext cx="4134641" cy="923330"/>
+            </a:xfrm>
+            <a:prstGeom prst="rect">
+              <a:avLst/>
+            </a:prstGeom>
+            <a:noFill/>
+          </p:spPr>
+          <p:txBody>
+            <a:bodyPr wrap="square" rtlCol="0">
+              <a:spAutoFit/>
+            </a:bodyPr>
+            <a:lstStyle/>
+            <a:p>
+              <a:pPr algn="ctr"/>
+              <a:r>
+                <a:rPr lang="en-GB" dirty="0"/>
+                <a:t>Time-and-Phase Lock at Boundary</a:t>
+              </a:r>
+              <a:br>
+                <a:rPr lang="en-GB" dirty="0"/>
+              </a:br>
+              <a:r>
+                <a:rPr lang="en-GB" dirty="0"/>
+                <a:t>Due to loss of Q-slack</a:t>
+              </a:r>
+              <a:br>
+                <a:rPr lang="en-GB" dirty="0"/>
+              </a:br>
+              <a:r>
+                <a:rPr lang="en-GB" dirty="0"/>
+                <a:t>in k-Domain</a:t>
+              </a:r>
+              <a:endParaRPr lang="en-AU" dirty="0"/>
+            </a:p>
+          </p:txBody>
+        </p:sp>
+        <p:sp>
+          <p:nvSpPr>
+            <p:cNvPr id="73" name="TextBox 72">
+              <a:extLst>
+                <a:ext uri="{FF2B5EF4-FFF2-40B4-BE49-F238E27FC236}">
+                  <a16:creationId xmlns:a16="http://schemas.microsoft.com/office/drawing/2014/main" id="{D155DFBC-FB08-4996-8A7E-F3178A5AA448}"/>
+                </a:ext>
+              </a:extLst>
+            </p:cNvPr>
+            <p:cNvSpPr txBox="1"/>
+            <p:nvPr/>
+          </p:nvSpPr>
+          <p:spPr>
+            <a:xfrm>
+              <a:off x="2924843" y="5436840"/>
+              <a:ext cx="3548528" cy="369332"/>
+            </a:xfrm>
+            <a:prstGeom prst="rect">
+              <a:avLst/>
+            </a:prstGeom>
+            <a:noFill/>
+          </p:spPr>
+          <p:txBody>
+            <a:bodyPr wrap="square" rtlCol="0">
+              <a:spAutoFit/>
+            </a:bodyPr>
+            <a:lstStyle/>
+            <a:p>
+              <a:r>
+                <a:rPr lang="en-GB" dirty="0"/>
+                <a:t>Horizontal axis is in units or w=1/r</a:t>
+              </a:r>
+              <a:endParaRPr lang="en-AU" dirty="0"/>
+            </a:p>
+          </p:txBody>
+        </p:sp>
+        <p:grpSp>
+          <p:nvGrpSpPr>
+            <p:cNvPr id="20" name="Group 19">
+              <a:extLst>
+                <a:ext uri="{FF2B5EF4-FFF2-40B4-BE49-F238E27FC236}">
+                  <a16:creationId xmlns:a16="http://schemas.microsoft.com/office/drawing/2014/main" id="{E4DCDD66-92B6-4CB9-BEA3-3ED197D6D0F5}"/>
+                </a:ext>
+              </a:extLst>
+            </p:cNvPr>
+            <p:cNvGrpSpPr/>
+            <p:nvPr/>
+          </p:nvGrpSpPr>
+          <p:grpSpPr>
+            <a:xfrm>
+              <a:off x="2496330" y="1908809"/>
+              <a:ext cx="3950471" cy="4126198"/>
+              <a:chOff x="4001489" y="2129914"/>
+              <a:chExt cx="2176227" cy="2273030"/>
+            </a:xfrm>
+          </p:grpSpPr>
+          <p:cxnSp>
+            <p:nvCxnSpPr>
+              <p:cNvPr id="12" name="Straight Connector 11">
+                <a:extLst>
+                  <a:ext uri="{FF2B5EF4-FFF2-40B4-BE49-F238E27FC236}">
+                    <a16:creationId xmlns:a16="http://schemas.microsoft.com/office/drawing/2014/main" id="{5909335B-7D3B-4EF4-83F9-BC3DB5A82124}"/>
+                  </a:ext>
+                </a:extLst>
+              </p:cNvPr>
+              <p:cNvCxnSpPr>
+                <a:cxnSpLocks/>
+                <a:endCxn id="8" idx="1"/>
+              </p:cNvCxnSpPr>
+              <p:nvPr/>
+            </p:nvCxnSpPr>
+            <p:spPr>
+              <a:xfrm>
+                <a:off x="4975433" y="2450772"/>
+                <a:ext cx="0" cy="978228"/>
+              </a:xfrm>
+              <a:prstGeom prst="line">
+                <a:avLst/>
+              </a:prstGeom>
+              <a:ln w="38100">
+                <a:solidFill>
+                  <a:schemeClr val="bg1">
+                    <a:lumMod val="50000"/>
+                    <a:alpha val="70000"/>
+                  </a:schemeClr>
+                </a:solidFill>
+              </a:ln>
+            </p:spPr>
+            <p:style>
+              <a:lnRef idx="1">
+                <a:schemeClr val="accent1"/>
+              </a:lnRef>
+              <a:fillRef idx="0">
+                <a:schemeClr val="accent1"/>
+              </a:fillRef>
+              <a:effectRef idx="0">
+                <a:schemeClr val="accent1"/>
+              </a:effectRef>
+              <a:fontRef idx="minor">
+                <a:schemeClr val="tx1"/>
+              </a:fontRef>
+            </p:style>
+          </p:cxnSp>
+          <p:sp>
+            <p:nvSpPr>
+              <p:cNvPr id="8" name="Arc 7">
+                <a:extLst>
+                  <a:ext uri="{FF2B5EF4-FFF2-40B4-BE49-F238E27FC236}">
+                    <a16:creationId xmlns:a16="http://schemas.microsoft.com/office/drawing/2014/main" id="{A21F2297-5085-4D93-A4FD-193CB36AB508}"/>
+                  </a:ext>
+                </a:extLst>
+              </p:cNvPr>
+              <p:cNvSpPr/>
+              <p:nvPr/>
+            </p:nvSpPr>
+            <p:spPr>
+              <a:xfrm>
+                <a:off x="4001489" y="2455056"/>
+                <a:ext cx="1947888" cy="1947888"/>
+              </a:xfrm>
+              <a:prstGeom prst="arc">
+                <a:avLst>
+                  <a:gd name="adj1" fmla="val 16427315"/>
+                  <a:gd name="adj2" fmla="val 15554"/>
+                </a:avLst>
+              </a:prstGeom>
+              <a:noFill/>
+              <a:ln w="38100">
+                <a:solidFill>
+                  <a:schemeClr val="accent1"/>
+                </a:solidFill>
+                <a:headEnd type="stealth" w="lg" len="lg"/>
+                <a:tailEnd type="none" w="lg" len="lg"/>
+              </a:ln>
+            </p:spPr>
+            <p:style>
+              <a:lnRef idx="1">
+                <a:schemeClr val="accent1"/>
+              </a:lnRef>
+              <a:fillRef idx="0">
+                <a:schemeClr val="accent1"/>
+              </a:fillRef>
+              <a:effectRef idx="0">
+                <a:schemeClr val="accent1"/>
+              </a:effectRef>
+              <a:fontRef idx="minor">
+                <a:schemeClr val="tx1"/>
+              </a:fontRef>
+            </p:style>
+            <p:txBody>
+              <a:bodyPr rtlCol="0" anchor="ctr"/>
+              <a:lstStyle/>
+              <a:p>
+                <a:pPr algn="ctr"/>
+                <a:endParaRPr lang="en-AU" dirty="0"/>
+              </a:p>
+            </p:txBody>
+          </p:sp>
+          <p:sp>
+            <p:nvSpPr>
+              <p:cNvPr id="40" name="TextBox 39">
+                <a:extLst>
+                  <a:ext uri="{FF2B5EF4-FFF2-40B4-BE49-F238E27FC236}">
+                    <a16:creationId xmlns:a16="http://schemas.microsoft.com/office/drawing/2014/main" id="{0D7EAAFD-07E2-41EA-8E9C-B57F6E855569}"/>
+                  </a:ext>
+                </a:extLst>
+              </p:cNvPr>
+              <p:cNvSpPr txBox="1"/>
+              <p:nvPr/>
+            </p:nvSpPr>
+            <p:spPr>
+              <a:xfrm>
+                <a:off x="5285289" y="2602798"/>
+                <a:ext cx="184731" cy="369332"/>
+              </a:xfrm>
+              <a:prstGeom prst="rect">
+                <a:avLst/>
+              </a:prstGeom>
+              <a:noFill/>
+            </p:spPr>
+            <p:txBody>
+              <a:bodyPr wrap="none" rtlCol="0">
+                <a:spAutoFit/>
+              </a:bodyPr>
+              <a:lstStyle/>
+              <a:p>
+                <a:endParaRPr lang="en-AU" dirty="0"/>
+              </a:p>
+            </p:txBody>
+          </p:sp>
+          <p:cxnSp>
+            <p:nvCxnSpPr>
+              <p:cNvPr id="3" name="Straight Connector 2">
+                <a:extLst>
+                  <a:ext uri="{FF2B5EF4-FFF2-40B4-BE49-F238E27FC236}">
+                    <a16:creationId xmlns:a16="http://schemas.microsoft.com/office/drawing/2014/main" id="{651A3F2B-D95A-48FC-95A2-F09E220FA8A0}"/>
+                  </a:ext>
+                </a:extLst>
+              </p:cNvPr>
+              <p:cNvCxnSpPr>
+                <a:cxnSpLocks/>
+              </p:cNvCxnSpPr>
+              <p:nvPr/>
+            </p:nvCxnSpPr>
+            <p:spPr>
+              <a:xfrm>
+                <a:off x="4979988" y="2129914"/>
+                <a:ext cx="0" cy="1774429"/>
+              </a:xfrm>
+              <a:prstGeom prst="line">
+                <a:avLst/>
+              </a:prstGeom>
+            </p:spPr>
+            <p:style>
+              <a:lnRef idx="1">
+                <a:schemeClr val="accent1"/>
+              </a:lnRef>
+              <a:fillRef idx="0">
+                <a:schemeClr val="accent1"/>
+              </a:fillRef>
+              <a:effectRef idx="0">
+                <a:schemeClr val="accent1"/>
+              </a:effectRef>
+              <a:fontRef idx="minor">
+                <a:schemeClr val="tx1"/>
+              </a:fontRef>
+            </p:style>
+          </p:cxnSp>
+          <p:cxnSp>
+            <p:nvCxnSpPr>
+              <p:cNvPr id="26" name="Straight Connector 25">
+                <a:extLst>
+                  <a:ext uri="{FF2B5EF4-FFF2-40B4-BE49-F238E27FC236}">
+                    <a16:creationId xmlns:a16="http://schemas.microsoft.com/office/drawing/2014/main" id="{57B086ED-C58B-477E-8336-B86A12FFECE6}"/>
+                  </a:ext>
+                </a:extLst>
+              </p:cNvPr>
+              <p:cNvCxnSpPr>
+                <a:cxnSpLocks/>
+              </p:cNvCxnSpPr>
+              <p:nvPr/>
+            </p:nvCxnSpPr>
+            <p:spPr>
+              <a:xfrm>
+                <a:off x="4574135" y="3429000"/>
+                <a:ext cx="1603581" cy="0"/>
+              </a:xfrm>
+              <a:prstGeom prst="line">
+                <a:avLst/>
+              </a:prstGeom>
+            </p:spPr>
+            <p:style>
+              <a:lnRef idx="1">
+                <a:schemeClr val="accent1"/>
+              </a:lnRef>
+              <a:fillRef idx="0">
+                <a:schemeClr val="accent1"/>
+              </a:fillRef>
+              <a:effectRef idx="0">
+                <a:schemeClr val="accent1"/>
+              </a:effectRef>
+              <a:fontRef idx="minor">
+                <a:schemeClr val="tx1"/>
+              </a:fontRef>
+            </p:style>
+          </p:cxnSp>
+          <p:sp>
+            <p:nvSpPr>
+              <p:cNvPr id="6" name="Oval 5">
+                <a:extLst>
+                  <a:ext uri="{FF2B5EF4-FFF2-40B4-BE49-F238E27FC236}">
+                    <a16:creationId xmlns:a16="http://schemas.microsoft.com/office/drawing/2014/main" id="{83E18047-9BF8-42E6-A1E3-A054AE000AC8}"/>
+                  </a:ext>
+                </a:extLst>
+              </p:cNvPr>
+              <p:cNvSpPr/>
+              <p:nvPr/>
+            </p:nvSpPr>
+            <p:spPr>
+              <a:xfrm>
+                <a:off x="4901562" y="2376901"/>
+                <a:ext cx="147742" cy="147742"/>
+              </a:xfrm>
+              <a:prstGeom prst="ellipse">
+                <a:avLst/>
+              </a:prstGeom>
+              <a:solidFill>
+                <a:schemeClr val="bg1"/>
+              </a:solidFill>
+            </p:spPr>
+            <p:style>
+              <a:lnRef idx="2">
+                <a:schemeClr val="accent1">
+                  <a:shade val="50000"/>
+                </a:schemeClr>
+              </a:lnRef>
+              <a:fillRef idx="1">
+                <a:schemeClr val="accent1"/>
+              </a:fillRef>
+              <a:effectRef idx="0">
+                <a:schemeClr val="accent1"/>
+              </a:effectRef>
+              <a:fontRef idx="minor">
+                <a:schemeClr val="lt1"/>
+              </a:fontRef>
+            </p:style>
+            <p:txBody>
+              <a:bodyPr rtlCol="0" anchor="ctr"/>
+              <a:lstStyle/>
+              <a:p>
+                <a:pPr algn="ctr"/>
+                <a:endParaRPr lang="en-AU"/>
+              </a:p>
+            </p:txBody>
+          </p:sp>
+          <p:cxnSp>
+            <p:nvCxnSpPr>
+              <p:cNvPr id="15" name="Straight Arrow Connector 14">
+                <a:extLst>
+                  <a:ext uri="{FF2B5EF4-FFF2-40B4-BE49-F238E27FC236}">
+                    <a16:creationId xmlns:a16="http://schemas.microsoft.com/office/drawing/2014/main" id="{0400D6CF-5486-4334-842D-EFA04D033DC4}"/>
+                  </a:ext>
+                </a:extLst>
+              </p:cNvPr>
+              <p:cNvCxnSpPr>
+                <a:cxnSpLocks/>
+                <a:stCxn id="8" idx="1"/>
+                <a:endCxn id="8" idx="2"/>
+              </p:cNvCxnSpPr>
+              <p:nvPr/>
+            </p:nvCxnSpPr>
+            <p:spPr>
+              <a:xfrm>
+                <a:off x="4975433" y="3429000"/>
+                <a:ext cx="973934" cy="4406"/>
+              </a:xfrm>
+              <a:prstGeom prst="straightConnector1">
+                <a:avLst/>
+              </a:prstGeom>
+              <a:ln w="38100">
+                <a:solidFill>
+                  <a:schemeClr val="bg1">
+                    <a:lumMod val="50000"/>
+                    <a:alpha val="70000"/>
+                  </a:schemeClr>
+                </a:solidFill>
+                <a:tailEnd type="none"/>
+              </a:ln>
+            </p:spPr>
+            <p:style>
+              <a:lnRef idx="1">
+                <a:schemeClr val="accent1"/>
+              </a:lnRef>
+              <a:fillRef idx="0">
+                <a:schemeClr val="accent1"/>
+              </a:fillRef>
+              <a:effectRef idx="0">
+                <a:schemeClr val="accent1"/>
+              </a:effectRef>
+              <a:fontRef idx="minor">
+                <a:schemeClr val="tx1"/>
+              </a:fontRef>
+            </p:style>
+          </p:cxnSp>
+        </p:grpSp>
+        <p:sp>
+          <p:nvSpPr>
+            <p:cNvPr id="28" name="TextBox 27">
+              <a:extLst>
+                <a:ext uri="{FF2B5EF4-FFF2-40B4-BE49-F238E27FC236}">
+                  <a16:creationId xmlns:a16="http://schemas.microsoft.com/office/drawing/2014/main" id="{E04F5E7B-1A0E-485D-A5ED-6C642BC63413}"/>
+                </a:ext>
+              </a:extLst>
+            </p:cNvPr>
+            <p:cNvSpPr txBox="1"/>
+            <p:nvPr/>
+          </p:nvSpPr>
+          <p:spPr>
+            <a:xfrm>
+              <a:off x="6410801" y="3958455"/>
+              <a:ext cx="1803985" cy="369332"/>
+            </a:xfrm>
+            <a:prstGeom prst="rect">
+              <a:avLst/>
+            </a:prstGeom>
+            <a:noFill/>
+          </p:spPr>
+          <p:txBody>
+            <a:bodyPr wrap="square" rtlCol="0">
+              <a:spAutoFit/>
+            </a:bodyPr>
+            <a:lstStyle/>
+            <a:p>
+              <a:r>
+                <a:rPr lang="en-GB" dirty="0"/>
+                <a:t>Tempo =  Q-slack</a:t>
+              </a:r>
+              <a:endParaRPr lang="en-AU" dirty="0"/>
+            </a:p>
+          </p:txBody>
+        </p:sp>
+        <p:sp>
+          <p:nvSpPr>
+            <p:cNvPr id="29" name="TextBox 28">
+              <a:extLst>
+                <a:ext uri="{FF2B5EF4-FFF2-40B4-BE49-F238E27FC236}">
+                  <a16:creationId xmlns:a16="http://schemas.microsoft.com/office/drawing/2014/main" id="{4122883E-B4E8-4136-9636-993979FEFDED}"/>
+                </a:ext>
+              </a:extLst>
+            </p:cNvPr>
+            <p:cNvSpPr txBox="1"/>
+            <p:nvPr/>
+          </p:nvSpPr>
+          <p:spPr>
+            <a:xfrm>
+              <a:off x="3584896" y="1528993"/>
+              <a:ext cx="1378849" cy="369332"/>
+            </a:xfrm>
+            <a:prstGeom prst="rect">
+              <a:avLst/>
+            </a:prstGeom>
+            <a:noFill/>
+          </p:spPr>
+          <p:txBody>
+            <a:bodyPr wrap="square" rtlCol="0">
+              <a:spAutoFit/>
+            </a:bodyPr>
+            <a:lstStyle/>
+            <a:p>
+              <a:pPr algn="ctr"/>
+              <a:r>
+                <a:rPr lang="en-GB" dirty="0"/>
+                <a:t>Q-depth</a:t>
+              </a:r>
+              <a:endParaRPr lang="en-AU" dirty="0"/>
+            </a:p>
+          </p:txBody>
+        </p:sp>
+        <p:sp>
+          <p:nvSpPr>
+            <p:cNvPr id="32" name="TextBox 31">
+              <a:extLst>
+                <a:ext uri="{FF2B5EF4-FFF2-40B4-BE49-F238E27FC236}">
+                  <a16:creationId xmlns:a16="http://schemas.microsoft.com/office/drawing/2014/main" id="{14E68E5E-1BE8-4DFF-A8FE-DDE3DCFB1E57}"/>
+                </a:ext>
+              </a:extLst>
+            </p:cNvPr>
+            <p:cNvSpPr txBox="1"/>
+            <p:nvPr/>
+          </p:nvSpPr>
+          <p:spPr>
+            <a:xfrm>
+              <a:off x="3756728" y="4267021"/>
+              <a:ext cx="617477" cy="369332"/>
+            </a:xfrm>
+            <a:prstGeom prst="rect">
+              <a:avLst/>
+            </a:prstGeom>
+            <a:noFill/>
+          </p:spPr>
+          <p:txBody>
+            <a:bodyPr wrap="none" rtlCol="0">
+              <a:spAutoFit/>
+            </a:bodyPr>
+            <a:lstStyle/>
+            <a:p>
+              <a:r>
+                <a:rPr lang="en-GB" dirty="0"/>
+                <a:t>(0,0)</a:t>
+              </a:r>
+              <a:endParaRPr lang="en-AU" dirty="0"/>
+            </a:p>
+          </p:txBody>
+        </p:sp>
+        <p:sp>
+          <p:nvSpPr>
+            <p:cNvPr id="34" name="TextBox 33">
+              <a:extLst>
+                <a:ext uri="{FF2B5EF4-FFF2-40B4-BE49-F238E27FC236}">
+                  <a16:creationId xmlns:a16="http://schemas.microsoft.com/office/drawing/2014/main" id="{5942C619-5548-4BAC-9084-635CE5BBD471}"/>
+                </a:ext>
+              </a:extLst>
+            </p:cNvPr>
+            <p:cNvSpPr txBox="1"/>
+            <p:nvPr/>
+          </p:nvSpPr>
+          <p:spPr>
+            <a:xfrm>
+              <a:off x="5691803" y="4245991"/>
+              <a:ext cx="617477" cy="369332"/>
+            </a:xfrm>
+            <a:prstGeom prst="rect">
+              <a:avLst/>
+            </a:prstGeom>
+            <a:noFill/>
+          </p:spPr>
+          <p:txBody>
+            <a:bodyPr wrap="none" rtlCol="0">
+              <a:spAutoFit/>
+            </a:bodyPr>
+            <a:lstStyle/>
+            <a:p>
+              <a:r>
+                <a:rPr lang="en-GB" dirty="0"/>
+                <a:t>(1,0)</a:t>
+              </a:r>
+              <a:endParaRPr lang="en-AU" dirty="0"/>
+            </a:p>
+          </p:txBody>
+        </p:sp>
+        <p:sp>
+          <p:nvSpPr>
+            <p:cNvPr id="36" name="TextBox 35">
+              <a:extLst>
+                <a:ext uri="{FF2B5EF4-FFF2-40B4-BE49-F238E27FC236}">
+                  <a16:creationId xmlns:a16="http://schemas.microsoft.com/office/drawing/2014/main" id="{438CF033-D0F5-4F9A-82F4-FC9F5C01D0A0}"/>
+                </a:ext>
+              </a:extLst>
+            </p:cNvPr>
+            <p:cNvSpPr txBox="1"/>
+            <p:nvPr/>
+          </p:nvSpPr>
+          <p:spPr>
+            <a:xfrm>
+              <a:off x="3570134" y="2306592"/>
+              <a:ext cx="653037" cy="369332"/>
+            </a:xfrm>
+            <a:prstGeom prst="rect">
+              <a:avLst/>
+            </a:prstGeom>
+            <a:noFill/>
+          </p:spPr>
+          <p:txBody>
+            <a:bodyPr wrap="square" rtlCol="0">
+              <a:spAutoFit/>
+            </a:bodyPr>
+            <a:lstStyle/>
+            <a:p>
+              <a:r>
+                <a:rPr lang="en-GB" dirty="0"/>
+                <a:t>(0,1)</a:t>
+              </a:r>
+              <a:endParaRPr lang="en-AU" dirty="0"/>
+            </a:p>
+          </p:txBody>
+        </p:sp>
+      </p:grpSp>
+    </p:spTree>
+    <p:extLst>
+      <p:ext uri="{BB962C8B-B14F-4D97-AF65-F5344CB8AC3E}">
+        <p14:creationId xmlns:p14="http://schemas.microsoft.com/office/powerpoint/2010/main" val="1612985972"/>
+      </p:ext>
+    </p:extLst>
+  </p:cSld>
+  <p:clrMapOvr>
+    <a:masterClrMapping/>
+  </p:clrMapOvr>
+</p:sld>
+</file>
+
 <file path=ppt/slides/slide13.xml><?xml version="1.0" encoding="utf-8"?>
+<p:sld xmlns:a="http://schemas.openxmlformats.org/drawingml/2006/main" xmlns:r="http://schemas.openxmlformats.org/officeDocument/2006/relationships" xmlns:p="http://schemas.openxmlformats.org/presentationml/2006/main">
+  <p:cSld>
+    <p:spTree>
+      <p:nvGrpSpPr>
+        <p:cNvPr id="1" name=""/>
+        <p:cNvGrpSpPr/>
+        <p:nvPr/>
+      </p:nvGrpSpPr>
+      <p:grpSpPr>
+        <a:xfrm>
+          <a:off x="0" y="0"/>
+          <a:ext cx="0" cy="0"/>
+          <a:chOff x="0" y="0"/>
+          <a:chExt cx="0" cy="0"/>
+        </a:xfrm>
+      </p:grpSpPr>
+      <p:grpSp>
+        <p:nvGrpSpPr>
+          <p:cNvPr id="19" name="Group 18">
+            <a:extLst>
+              <a:ext uri="{FF2B5EF4-FFF2-40B4-BE49-F238E27FC236}">
+                <a16:creationId xmlns:a16="http://schemas.microsoft.com/office/drawing/2014/main" id="{5384DBCA-1C57-4A4C-BAD5-B4FF19CE6EF0}"/>
+              </a:ext>
+            </a:extLst>
+          </p:cNvPr>
+          <p:cNvGrpSpPr/>
+          <p:nvPr/>
+        </p:nvGrpSpPr>
+        <p:grpSpPr>
+          <a:xfrm>
+            <a:off x="514738" y="41178"/>
+            <a:ext cx="12561892" cy="6386401"/>
+            <a:chOff x="514738" y="41178"/>
+            <a:chExt cx="12561892" cy="6386401"/>
+          </a:xfrm>
+        </p:grpSpPr>
+        <p:cxnSp>
+          <p:nvCxnSpPr>
+            <p:cNvPr id="3" name="Straight Connector 2">
+              <a:extLst>
+                <a:ext uri="{FF2B5EF4-FFF2-40B4-BE49-F238E27FC236}">
+                  <a16:creationId xmlns:a16="http://schemas.microsoft.com/office/drawing/2014/main" id="{8A8E0841-A325-4868-A273-6CA4C62FC0F8}"/>
+                </a:ext>
+              </a:extLst>
+            </p:cNvPr>
+            <p:cNvCxnSpPr>
+              <a:stCxn id="46" idx="0"/>
+            </p:cNvCxnSpPr>
+            <p:nvPr/>
+          </p:nvCxnSpPr>
+          <p:spPr>
+            <a:xfrm flipH="1">
+              <a:off x="2011559" y="2485171"/>
+              <a:ext cx="200" cy="3166743"/>
+            </a:xfrm>
+            <a:prstGeom prst="line">
+              <a:avLst/>
+            </a:prstGeom>
+            <a:ln w="19050">
+              <a:solidFill>
+                <a:srgbClr val="7030A0"/>
+              </a:solidFill>
+            </a:ln>
+          </p:spPr>
+          <p:style>
+            <a:lnRef idx="1">
+              <a:schemeClr val="accent1"/>
+            </a:lnRef>
+            <a:fillRef idx="0">
+              <a:schemeClr val="accent1"/>
+            </a:fillRef>
+            <a:effectRef idx="0">
+              <a:schemeClr val="accent1"/>
+            </a:effectRef>
+            <a:fontRef idx="minor">
+              <a:schemeClr val="tx1"/>
+            </a:fontRef>
+          </p:style>
+        </p:cxnSp>
+        <p:sp>
+          <p:nvSpPr>
+            <p:cNvPr id="9" name="Rectangle 8">
+              <a:extLst>
+                <a:ext uri="{FF2B5EF4-FFF2-40B4-BE49-F238E27FC236}">
+                  <a16:creationId xmlns:a16="http://schemas.microsoft.com/office/drawing/2014/main" id="{C23879D7-2087-4D50-A33A-4EC195852315}"/>
+                </a:ext>
+              </a:extLst>
+            </p:cNvPr>
+            <p:cNvSpPr/>
+            <p:nvPr/>
+          </p:nvSpPr>
+          <p:spPr>
+            <a:xfrm>
+              <a:off x="1291589" y="945859"/>
+              <a:ext cx="6892289" cy="4723002"/>
+            </a:xfrm>
+            <a:prstGeom prst="rect">
+              <a:avLst/>
+            </a:prstGeom>
+            <a:noFill/>
+            <a:ln>
+              <a:solidFill>
+                <a:srgbClr val="00B0F0"/>
+              </a:solidFill>
+            </a:ln>
+          </p:spPr>
+          <p:style>
+            <a:lnRef idx="2">
+              <a:schemeClr val="accent1">
+                <a:shade val="50000"/>
+              </a:schemeClr>
+            </a:lnRef>
+            <a:fillRef idx="1">
+              <a:schemeClr val="accent1"/>
+            </a:fillRef>
+            <a:effectRef idx="0">
+              <a:schemeClr val="accent1"/>
+            </a:effectRef>
+            <a:fontRef idx="minor">
+              <a:schemeClr val="lt1"/>
+            </a:fontRef>
+          </p:style>
+          <p:txBody>
+            <a:bodyPr rtlCol="0" anchor="ctr"/>
+            <a:lstStyle/>
+            <a:p>
+              <a:pPr algn="ctr"/>
+              <a:endParaRPr lang="en-AU"/>
+            </a:p>
+          </p:txBody>
+        </p:sp>
+        <p:grpSp>
+          <p:nvGrpSpPr>
+            <p:cNvPr id="8" name="Group 7">
+              <a:extLst>
+                <a:ext uri="{FF2B5EF4-FFF2-40B4-BE49-F238E27FC236}">
+                  <a16:creationId xmlns:a16="http://schemas.microsoft.com/office/drawing/2014/main" id="{B4064B70-011D-49B0-B936-85BBB5801E14}"/>
+                </a:ext>
+              </a:extLst>
+            </p:cNvPr>
+            <p:cNvGrpSpPr/>
+            <p:nvPr/>
+          </p:nvGrpSpPr>
+          <p:grpSpPr>
+            <a:xfrm>
+              <a:off x="514738" y="41178"/>
+              <a:ext cx="12561892" cy="6052842"/>
+              <a:chOff x="1954918" y="269778"/>
+              <a:chExt cx="12561892" cy="6052842"/>
+            </a:xfrm>
+          </p:grpSpPr>
+          <p:grpSp>
+            <p:nvGrpSpPr>
+              <p:cNvPr id="74" name="Group 73">
+                <a:extLst>
+                  <a:ext uri="{FF2B5EF4-FFF2-40B4-BE49-F238E27FC236}">
+                    <a16:creationId xmlns:a16="http://schemas.microsoft.com/office/drawing/2014/main" id="{F9EAF757-FD7D-4309-9B3D-D7E711FFEA27}"/>
+                  </a:ext>
+                </a:extLst>
+              </p:cNvPr>
+              <p:cNvGrpSpPr/>
+              <p:nvPr/>
+            </p:nvGrpSpPr>
+            <p:grpSpPr>
+              <a:xfrm>
+                <a:off x="1954918" y="269778"/>
+                <a:ext cx="12561892" cy="6052842"/>
+                <a:chOff x="1954918" y="269778"/>
+                <a:chExt cx="12561892" cy="6052842"/>
+              </a:xfrm>
+            </p:grpSpPr>
+            <p:sp>
+              <p:nvSpPr>
+                <p:cNvPr id="4" name="Rectangle 3">
+                  <a:extLst>
+                    <a:ext uri="{FF2B5EF4-FFF2-40B4-BE49-F238E27FC236}">
+                      <a16:creationId xmlns:a16="http://schemas.microsoft.com/office/drawing/2014/main" id="{C81DC566-657F-4037-BACC-82C09CAEAE9A}"/>
+                    </a:ext>
+                  </a:extLst>
+                </p:cNvPr>
+                <p:cNvSpPr/>
+                <p:nvPr/>
+              </p:nvSpPr>
+              <p:spPr>
+                <a:xfrm>
+                  <a:off x="2136152" y="1174459"/>
+                  <a:ext cx="1291904" cy="4723002"/>
+                </a:xfrm>
+                <a:prstGeom prst="rect">
+                  <a:avLst/>
+                </a:prstGeom>
+              </p:spPr>
+              <p:style>
+                <a:lnRef idx="2">
+                  <a:schemeClr val="accent1">
+                    <a:shade val="50000"/>
+                  </a:schemeClr>
+                </a:lnRef>
+                <a:fillRef idx="1">
+                  <a:schemeClr val="accent1"/>
+                </a:fillRef>
+                <a:effectRef idx="0">
+                  <a:schemeClr val="accent1"/>
+                </a:effectRef>
+                <a:fontRef idx="minor">
+                  <a:schemeClr val="lt1"/>
+                </a:fontRef>
+              </p:style>
+              <p:txBody>
+                <a:bodyPr rtlCol="0" anchor="ctr"/>
+                <a:lstStyle/>
+                <a:p>
+                  <a:pPr algn="ctr"/>
+                  <a:r>
+                    <a:rPr lang="en-GB" dirty="0"/>
+                    <a:t>Boundary</a:t>
+                  </a:r>
+                  <a:endParaRPr lang="en-AU" dirty="0"/>
+                </a:p>
+              </p:txBody>
+            </p:sp>
+            <p:sp>
+              <p:nvSpPr>
+                <p:cNvPr id="14" name="Arc 13">
+                  <a:extLst>
+                    <a:ext uri="{FF2B5EF4-FFF2-40B4-BE49-F238E27FC236}">
+                      <a16:creationId xmlns:a16="http://schemas.microsoft.com/office/drawing/2014/main" id="{F24A5022-5689-4574-9CE1-CC0723D1BD32}"/>
+                    </a:ext>
+                  </a:extLst>
+                </p:cNvPr>
+                <p:cNvSpPr/>
+                <p:nvPr/>
+              </p:nvSpPr>
+              <p:spPr>
+                <a:xfrm>
+                  <a:off x="3451739" y="4903365"/>
+                  <a:ext cx="11052818" cy="1419255"/>
+                </a:xfrm>
+                <a:prstGeom prst="arc">
+                  <a:avLst>
+                    <a:gd name="adj1" fmla="val 10786942"/>
+                    <a:gd name="adj2" fmla="val 16086711"/>
+                  </a:avLst>
+                </a:prstGeom>
+                <a:ln w="19050">
+                  <a:solidFill>
+                    <a:srgbClr val="7030A0"/>
+                  </a:solidFill>
+                </a:ln>
+              </p:spPr>
+              <p:style>
+                <a:lnRef idx="1">
+                  <a:schemeClr val="accent1"/>
+                </a:lnRef>
+                <a:fillRef idx="0">
+                  <a:schemeClr val="accent1"/>
+                </a:fillRef>
+                <a:effectRef idx="0">
+                  <a:schemeClr val="accent1"/>
+                </a:effectRef>
+                <a:fontRef idx="minor">
+                  <a:schemeClr val="tx1"/>
+                </a:fontRef>
+              </p:style>
+              <p:txBody>
+                <a:bodyPr rtlCol="0" anchor="ctr"/>
+                <a:lstStyle/>
+                <a:p>
+                  <a:pPr algn="ctr"/>
+                  <a:endParaRPr lang="en-AU"/>
+                </a:p>
+              </p:txBody>
+            </p:sp>
+            <p:cxnSp>
+              <p:nvCxnSpPr>
+                <p:cNvPr id="18" name="Straight Arrow Connector 17">
+                  <a:extLst>
+                    <a:ext uri="{FF2B5EF4-FFF2-40B4-BE49-F238E27FC236}">
+                      <a16:creationId xmlns:a16="http://schemas.microsoft.com/office/drawing/2014/main" id="{96F4B3BC-5B30-45C3-8A76-56E7717C188A}"/>
+                    </a:ext>
+                  </a:extLst>
+                </p:cNvPr>
+                <p:cNvCxnSpPr>
+                  <a:cxnSpLocks/>
+                </p:cNvCxnSpPr>
+                <p:nvPr/>
+              </p:nvCxnSpPr>
+              <p:spPr>
+                <a:xfrm flipV="1">
+                  <a:off x="8564880" y="1250169"/>
+                  <a:ext cx="0" cy="4571581"/>
+                </a:xfrm>
+                <a:prstGeom prst="straightConnector1">
+                  <a:avLst/>
+                </a:prstGeom>
+                <a:ln w="38100">
+                  <a:solidFill>
+                    <a:srgbClr val="92D050"/>
+                  </a:solidFill>
+                  <a:tailEnd type="triangle"/>
+                </a:ln>
+              </p:spPr>
+              <p:style>
+                <a:lnRef idx="1">
+                  <a:schemeClr val="accent1"/>
+                </a:lnRef>
+                <a:fillRef idx="0">
+                  <a:schemeClr val="accent1"/>
+                </a:fillRef>
+                <a:effectRef idx="0">
+                  <a:schemeClr val="accent1"/>
+                </a:effectRef>
+                <a:fontRef idx="minor">
+                  <a:schemeClr val="tx1"/>
+                </a:fontRef>
+              </p:style>
+            </p:cxnSp>
+            <mc:AlternateContent xmlns:mc="http://schemas.openxmlformats.org/markup-compatibility/2006" xmlns:a14="http://schemas.microsoft.com/office/drawing/2010/main">
+              <mc:Choice Requires="a14">
+                <p:sp>
+                  <p:nvSpPr>
+                    <p:cNvPr id="40" name="TextBox 39">
+                      <a:extLst>
+                        <a:ext uri="{FF2B5EF4-FFF2-40B4-BE49-F238E27FC236}">
+                          <a16:creationId xmlns:a16="http://schemas.microsoft.com/office/drawing/2014/main" id="{0D7EAAFD-07E2-41EA-8E9C-B57F6E855569}"/>
+                        </a:ext>
+                      </a:extLst>
+                    </p:cNvPr>
+                    <p:cNvSpPr txBox="1"/>
+                    <p:nvPr/>
+                  </p:nvSpPr>
+                  <p:spPr>
+                    <a:xfrm>
+                      <a:off x="7007084" y="2541514"/>
+                      <a:ext cx="361766" cy="369332"/>
+                    </a:xfrm>
+                    <a:prstGeom prst="rect">
+                      <a:avLst/>
+                    </a:prstGeom>
+                    <a:noFill/>
+                  </p:spPr>
+                  <p:txBody>
+                    <a:bodyPr wrap="none" rtlCol="0">
+                      <a:spAutoFit/>
+                    </a:bodyPr>
+                    <a:lstStyle/>
+                    <a:p>
+                      <a:pPr/>
+                      <a14:m>
+                        <m:oMathPara xmlns:m="http://schemas.openxmlformats.org/officeDocument/2006/math">
+                          <m:oMathParaPr>
+                            <m:jc m:val="centerGroup"/>
+                          </m:oMathParaPr>
+                          <m:oMath xmlns:m="http://schemas.openxmlformats.org/officeDocument/2006/math">
+                            <m:r>
+                              <a:rPr lang="en-GB" i="1" dirty="0">
+                                <a:latin typeface="Cambria Math" panose="02040503050406030204" pitchFamily="18" charset="0"/>
+                                <a:ea typeface="Cambria Math" panose="02040503050406030204" pitchFamily="18" charset="0"/>
+                              </a:rPr>
+                              <m:t>𝜆</m:t>
+                            </m:r>
+                          </m:oMath>
+                        </m:oMathPara>
+                      </a14:m>
+                      <a:endParaRPr lang="en-AU" dirty="0"/>
+                    </a:p>
+                  </p:txBody>
+                </p:sp>
+              </mc:Choice>
+              <mc:Fallback xmlns="">
+                <p:sp>
+                  <p:nvSpPr>
+                    <p:cNvPr id="40" name="TextBox 39">
+                      <a:extLst>
+                        <a:ext uri="{FF2B5EF4-FFF2-40B4-BE49-F238E27FC236}">
+                          <a16:creationId xmlns:a16="http://schemas.microsoft.com/office/drawing/2014/main" id="{0D7EAAFD-07E2-41EA-8E9C-B57F6E855569}"/>
+                        </a:ext>
+                      </a:extLst>
+                    </p:cNvPr>
+                    <p:cNvSpPr txBox="1">
+                      <a:spLocks noRot="1" noChangeAspect="1" noMove="1" noResize="1" noEditPoints="1" noAdjustHandles="1" noChangeArrowheads="1" noChangeShapeType="1" noTextEdit="1"/>
+                    </p:cNvSpPr>
+                    <p:nvPr/>
+                  </p:nvSpPr>
+                  <p:spPr>
+                    <a:xfrm>
+                      <a:off x="7007084" y="2541514"/>
+                      <a:ext cx="361766" cy="369332"/>
+                    </a:xfrm>
+                    <a:prstGeom prst="rect">
+                      <a:avLst/>
+                    </a:prstGeom>
+                    <a:blipFill>
+                      <a:blip r:embed="rId2"/>
+                      <a:stretch>
+                        <a:fillRect/>
+                      </a:stretch>
+                    </a:blipFill>
+                  </p:spPr>
+                  <p:txBody>
+                    <a:bodyPr/>
+                    <a:lstStyle/>
+                    <a:p>
+                      <a:r>
+                        <a:rPr lang="en-AU">
+                          <a:noFill/>
+                        </a:rPr>
+                        <a:t> </a:t>
+                      </a:r>
+                    </a:p>
+                  </p:txBody>
+                </p:sp>
+              </mc:Fallback>
+            </mc:AlternateContent>
+            <mc:AlternateContent xmlns:mc="http://schemas.openxmlformats.org/markup-compatibility/2006" xmlns:a14="http://schemas.microsoft.com/office/drawing/2010/main">
+              <mc:Choice Requires="a14">
+                <p:sp>
+                  <p:nvSpPr>
+                    <p:cNvPr id="41" name="Rectangle 40">
+                      <a:extLst>
+                        <a:ext uri="{FF2B5EF4-FFF2-40B4-BE49-F238E27FC236}">
+                          <a16:creationId xmlns:a16="http://schemas.microsoft.com/office/drawing/2014/main" id="{2C359E4E-59FD-4967-B461-3351E8DF7CEE}"/>
+                        </a:ext>
+                      </a:extLst>
+                    </p:cNvPr>
+                    <p:cNvSpPr/>
+                    <p:nvPr/>
+                  </p:nvSpPr>
+                  <p:spPr>
+                    <a:xfrm>
+                      <a:off x="7007084" y="4027379"/>
+                      <a:ext cx="361766" cy="369332"/>
+                    </a:xfrm>
+                    <a:prstGeom prst="rect">
+                      <a:avLst/>
+                    </a:prstGeom>
+                  </p:spPr>
+                  <p:txBody>
+                    <a:bodyPr wrap="none">
+                      <a:spAutoFit/>
+                    </a:bodyPr>
+                    <a:lstStyle/>
+                    <a:p>
+                      <a:pPr/>
+                      <a14:m>
+                        <m:oMathPara xmlns:m="http://schemas.openxmlformats.org/officeDocument/2006/math">
+                          <m:oMathParaPr>
+                            <m:jc m:val="centerGroup"/>
+                          </m:oMathParaPr>
+                          <m:oMath xmlns:m="http://schemas.openxmlformats.org/officeDocument/2006/math">
+                            <m:r>
+                              <a:rPr lang="en-GB" i="1" dirty="0">
+                                <a:latin typeface="Cambria Math" panose="02040503050406030204" pitchFamily="18" charset="0"/>
+                                <a:ea typeface="Cambria Math" panose="02040503050406030204" pitchFamily="18" charset="0"/>
+                              </a:rPr>
+                              <m:t>𝜆</m:t>
+                            </m:r>
+                          </m:oMath>
+                        </m:oMathPara>
+                      </a14:m>
+                      <a:endParaRPr lang="en-AU" dirty="0"/>
+                    </a:p>
+                  </p:txBody>
+                </p:sp>
+              </mc:Choice>
+              <mc:Fallback xmlns="">
+                <p:sp>
+                  <p:nvSpPr>
+                    <p:cNvPr id="41" name="Rectangle 40">
+                      <a:extLst>
+                        <a:ext uri="{FF2B5EF4-FFF2-40B4-BE49-F238E27FC236}">
+                          <a16:creationId xmlns:a16="http://schemas.microsoft.com/office/drawing/2014/main" id="{2C359E4E-59FD-4967-B461-3351E8DF7CEE}"/>
+                        </a:ext>
+                      </a:extLst>
+                    </p:cNvPr>
+                    <p:cNvSpPr>
+                      <a:spLocks noRot="1" noChangeAspect="1" noMove="1" noResize="1" noEditPoints="1" noAdjustHandles="1" noChangeArrowheads="1" noChangeShapeType="1" noTextEdit="1"/>
+                    </p:cNvSpPr>
+                    <p:nvPr/>
+                  </p:nvSpPr>
+                  <p:spPr>
+                    <a:xfrm>
+                      <a:off x="7007084" y="4027379"/>
+                      <a:ext cx="361766" cy="369332"/>
+                    </a:xfrm>
+                    <a:prstGeom prst="rect">
+                      <a:avLst/>
+                    </a:prstGeom>
+                    <a:blipFill>
+                      <a:blip r:embed="rId3"/>
+                      <a:stretch>
+                        <a:fillRect/>
+                      </a:stretch>
+                    </a:blipFill>
+                  </p:spPr>
+                  <p:txBody>
+                    <a:bodyPr/>
+                    <a:lstStyle/>
+                    <a:p>
+                      <a:r>
+                        <a:rPr lang="en-AU">
+                          <a:noFill/>
+                        </a:rPr>
+                        <a:t> </a:t>
+                      </a:r>
+                    </a:p>
+                  </p:txBody>
+                </p:sp>
+              </mc:Fallback>
+            </mc:AlternateContent>
+            <p:cxnSp>
+              <p:nvCxnSpPr>
+                <p:cNvPr id="43" name="Straight Arrow Connector 42">
+                  <a:extLst>
+                    <a:ext uri="{FF2B5EF4-FFF2-40B4-BE49-F238E27FC236}">
+                      <a16:creationId xmlns:a16="http://schemas.microsoft.com/office/drawing/2014/main" id="{99FF513F-88B7-4403-B6E3-793C3AB02688}"/>
+                    </a:ext>
+                  </a:extLst>
+                </p:cNvPr>
+                <p:cNvCxnSpPr>
+                  <a:stCxn id="40" idx="0"/>
+                </p:cNvCxnSpPr>
+                <p:nvPr/>
+              </p:nvCxnSpPr>
+              <p:spPr>
+                <a:xfrm flipV="1">
+                  <a:off x="7187967" y="2008744"/>
+                  <a:ext cx="0" cy="532770"/>
+                </a:xfrm>
+                <a:prstGeom prst="straightConnector1">
+                  <a:avLst/>
+                </a:prstGeom>
+                <a:ln>
+                  <a:tailEnd type="stealth"/>
+                </a:ln>
+              </p:spPr>
+              <p:style>
+                <a:lnRef idx="1">
+                  <a:schemeClr val="accent1"/>
+                </a:lnRef>
+                <a:fillRef idx="0">
+                  <a:schemeClr val="accent1"/>
+                </a:fillRef>
+                <a:effectRef idx="0">
+                  <a:schemeClr val="accent1"/>
+                </a:effectRef>
+                <a:fontRef idx="minor">
+                  <a:schemeClr val="tx1"/>
+                </a:fontRef>
+              </p:style>
+            </p:cxnSp>
+            <p:cxnSp>
+              <p:nvCxnSpPr>
+                <p:cNvPr id="45" name="Straight Arrow Connector 44">
+                  <a:extLst>
+                    <a:ext uri="{FF2B5EF4-FFF2-40B4-BE49-F238E27FC236}">
+                      <a16:creationId xmlns:a16="http://schemas.microsoft.com/office/drawing/2014/main" id="{C1B1E8A1-2EC3-43AF-9AE5-33B43143534B}"/>
+                    </a:ext>
+                  </a:extLst>
+                </p:cNvPr>
+                <p:cNvCxnSpPr>
+                  <a:stCxn id="40" idx="2"/>
+                </p:cNvCxnSpPr>
+                <p:nvPr/>
+              </p:nvCxnSpPr>
+              <p:spPr>
+                <a:xfrm>
+                  <a:off x="7187967" y="2910846"/>
+                  <a:ext cx="0" cy="563874"/>
+                </a:xfrm>
+                <a:prstGeom prst="straightConnector1">
+                  <a:avLst/>
+                </a:prstGeom>
+                <a:ln>
+                  <a:tailEnd type="stealth"/>
+                </a:ln>
+              </p:spPr>
+              <p:style>
+                <a:lnRef idx="1">
+                  <a:schemeClr val="accent1"/>
+                </a:lnRef>
+                <a:fillRef idx="0">
+                  <a:schemeClr val="accent1"/>
+                </a:fillRef>
+                <a:effectRef idx="0">
+                  <a:schemeClr val="accent1"/>
+                </a:effectRef>
+                <a:fontRef idx="minor">
+                  <a:schemeClr val="tx1"/>
+                </a:fontRef>
+              </p:style>
+            </p:cxnSp>
+            <p:cxnSp>
+              <p:nvCxnSpPr>
+                <p:cNvPr id="47" name="Straight Arrow Connector 46">
+                  <a:extLst>
+                    <a:ext uri="{FF2B5EF4-FFF2-40B4-BE49-F238E27FC236}">
+                      <a16:creationId xmlns:a16="http://schemas.microsoft.com/office/drawing/2014/main" id="{95C9091A-5F25-4FB2-B146-F65C337EC15D}"/>
+                    </a:ext>
+                  </a:extLst>
+                </p:cNvPr>
+                <p:cNvCxnSpPr>
+                  <a:stCxn id="41" idx="0"/>
+                </p:cNvCxnSpPr>
+                <p:nvPr/>
+              </p:nvCxnSpPr>
+              <p:spPr>
+                <a:xfrm flipV="1">
+                  <a:off x="7187967" y="3474720"/>
+                  <a:ext cx="0" cy="552659"/>
+                </a:xfrm>
+                <a:prstGeom prst="straightConnector1">
+                  <a:avLst/>
+                </a:prstGeom>
+                <a:ln>
+                  <a:tailEnd type="stealth"/>
+                </a:ln>
+              </p:spPr>
+              <p:style>
+                <a:lnRef idx="1">
+                  <a:schemeClr val="accent1"/>
+                </a:lnRef>
+                <a:fillRef idx="0">
+                  <a:schemeClr val="accent1"/>
+                </a:fillRef>
+                <a:effectRef idx="0">
+                  <a:schemeClr val="accent1"/>
+                </a:effectRef>
+                <a:fontRef idx="minor">
+                  <a:schemeClr val="tx1"/>
+                </a:fontRef>
+              </p:style>
+            </p:cxnSp>
+            <p:cxnSp>
+              <p:nvCxnSpPr>
+                <p:cNvPr id="49" name="Straight Arrow Connector 48">
+                  <a:extLst>
+                    <a:ext uri="{FF2B5EF4-FFF2-40B4-BE49-F238E27FC236}">
+                      <a16:creationId xmlns:a16="http://schemas.microsoft.com/office/drawing/2014/main" id="{3E55B91B-DECB-4CD2-9A06-5C0F2C54200C}"/>
+                    </a:ext>
+                  </a:extLst>
+                </p:cNvPr>
+                <p:cNvCxnSpPr>
+                  <a:stCxn id="41" idx="2"/>
+                </p:cNvCxnSpPr>
+                <p:nvPr/>
+              </p:nvCxnSpPr>
+              <p:spPr>
+                <a:xfrm>
+                  <a:off x="7187967" y="4396711"/>
+                  <a:ext cx="0" cy="552374"/>
+                </a:xfrm>
+                <a:prstGeom prst="straightConnector1">
+                  <a:avLst/>
+                </a:prstGeom>
+                <a:ln>
+                  <a:tailEnd type="stealth"/>
+                </a:ln>
+              </p:spPr>
+              <p:style>
+                <a:lnRef idx="1">
+                  <a:schemeClr val="accent1"/>
+                </a:lnRef>
+                <a:fillRef idx="0">
+                  <a:schemeClr val="accent1"/>
+                </a:fillRef>
+                <a:effectRef idx="0">
+                  <a:schemeClr val="accent1"/>
+                </a:effectRef>
+                <a:fontRef idx="minor">
+                  <a:schemeClr val="tx1"/>
+                </a:fontRef>
+              </p:style>
+            </p:cxnSp>
+            <p:sp>
+              <p:nvSpPr>
+                <p:cNvPr id="72" name="TextBox 71">
+                  <a:extLst>
+                    <a:ext uri="{FF2B5EF4-FFF2-40B4-BE49-F238E27FC236}">
+                      <a16:creationId xmlns:a16="http://schemas.microsoft.com/office/drawing/2014/main" id="{7FCDE1BC-889A-4B8E-92C3-873EFE59CB62}"/>
+                    </a:ext>
+                  </a:extLst>
+                </p:cNvPr>
+                <p:cNvSpPr txBox="1"/>
+                <p:nvPr/>
+              </p:nvSpPr>
+              <p:spPr>
+                <a:xfrm>
+                  <a:off x="1954918" y="269778"/>
+                  <a:ext cx="3704919" cy="923330"/>
+                </a:xfrm>
+                <a:prstGeom prst="rect">
+                  <a:avLst/>
+                </a:prstGeom>
+                <a:noFill/>
+              </p:spPr>
+              <p:txBody>
+                <a:bodyPr wrap="square" rtlCol="0">
+                  <a:spAutoFit/>
+                </a:bodyPr>
+                <a:lstStyle/>
+                <a:p>
+                  <a:pPr algn="ctr"/>
+                  <a:r>
+                    <a:rPr lang="en-GB" dirty="0"/>
+                    <a:t>Time-and-Phase Lock at Boundary</a:t>
+                  </a:r>
+                  <a:br>
+                    <a:rPr lang="en-GB" dirty="0"/>
+                  </a:br>
+                  <a:r>
+                    <a:rPr lang="en-GB" dirty="0"/>
+                    <a:t>Due to loss of Q-slack </a:t>
+                  </a:r>
+                  <a:br>
+                    <a:rPr lang="en-GB" dirty="0"/>
+                  </a:br>
+                  <a:r>
+                    <a:rPr lang="en-GB" dirty="0"/>
+                    <a:t>in x-Domain</a:t>
+                  </a:r>
+                  <a:endParaRPr lang="en-AU" dirty="0"/>
+                </a:p>
+              </p:txBody>
+            </p:sp>
+            <p:sp>
+              <p:nvSpPr>
+                <p:cNvPr id="44" name="Arc 43">
+                  <a:extLst>
+                    <a:ext uri="{FF2B5EF4-FFF2-40B4-BE49-F238E27FC236}">
+                      <a16:creationId xmlns:a16="http://schemas.microsoft.com/office/drawing/2014/main" id="{AE16264C-8B61-4C05-8B01-A984C45463BF}"/>
+                    </a:ext>
+                  </a:extLst>
+                </p:cNvPr>
+                <p:cNvSpPr/>
+                <p:nvPr/>
+              </p:nvSpPr>
+              <p:spPr>
+                <a:xfrm>
+                  <a:off x="3451739" y="3435629"/>
+                  <a:ext cx="11065071" cy="1501630"/>
+                </a:xfrm>
+                <a:prstGeom prst="arc">
+                  <a:avLst>
+                    <a:gd name="adj1" fmla="val 10803968"/>
+                    <a:gd name="adj2" fmla="val 16086711"/>
+                  </a:avLst>
+                </a:prstGeom>
+                <a:ln w="19050">
+                  <a:solidFill>
+                    <a:srgbClr val="7030A0"/>
+                  </a:solidFill>
+                </a:ln>
+              </p:spPr>
+              <p:style>
+                <a:lnRef idx="1">
+                  <a:schemeClr val="accent1"/>
+                </a:lnRef>
+                <a:fillRef idx="0">
+                  <a:schemeClr val="accent1"/>
+                </a:fillRef>
+                <a:effectRef idx="0">
+                  <a:schemeClr val="accent1"/>
+                </a:effectRef>
+                <a:fontRef idx="minor">
+                  <a:schemeClr val="tx1"/>
+                </a:fontRef>
+              </p:style>
+              <p:txBody>
+                <a:bodyPr rtlCol="0" anchor="ctr"/>
+                <a:lstStyle/>
+                <a:p>
+                  <a:pPr algn="ctr"/>
+                  <a:endParaRPr lang="en-AU"/>
+                </a:p>
+              </p:txBody>
+            </p:sp>
+            <p:sp>
+              <p:nvSpPr>
+                <p:cNvPr id="46" name="Arc 45">
+                  <a:extLst>
+                    <a:ext uri="{FF2B5EF4-FFF2-40B4-BE49-F238E27FC236}">
+                      <a16:creationId xmlns:a16="http://schemas.microsoft.com/office/drawing/2014/main" id="{213F1E32-72A2-4C1A-9D94-BE3C05DE1346}"/>
+                    </a:ext>
+                  </a:extLst>
+                </p:cNvPr>
+                <p:cNvSpPr/>
+                <p:nvPr/>
+              </p:nvSpPr>
+              <p:spPr>
+                <a:xfrm>
+                  <a:off x="3451739" y="1969342"/>
+                  <a:ext cx="11065071" cy="1501630"/>
+                </a:xfrm>
+                <a:prstGeom prst="arc">
+                  <a:avLst>
+                    <a:gd name="adj1" fmla="val 10803968"/>
+                    <a:gd name="adj2" fmla="val 16086711"/>
+                  </a:avLst>
+                </a:prstGeom>
+                <a:ln w="19050">
+                  <a:solidFill>
+                    <a:srgbClr val="7030A0"/>
+                  </a:solidFill>
+                </a:ln>
+              </p:spPr>
+              <p:style>
+                <a:lnRef idx="1">
+                  <a:schemeClr val="accent1"/>
+                </a:lnRef>
+                <a:fillRef idx="0">
+                  <a:schemeClr val="accent1"/>
+                </a:fillRef>
+                <a:effectRef idx="0">
+                  <a:schemeClr val="accent1"/>
+                </a:effectRef>
+                <a:fontRef idx="minor">
+                  <a:schemeClr val="tx1"/>
+                </a:fontRef>
+              </p:style>
+              <p:txBody>
+                <a:bodyPr rtlCol="0" anchor="ctr"/>
+                <a:lstStyle/>
+                <a:p>
+                  <a:pPr algn="ctr"/>
+                  <a:endParaRPr lang="en-AU"/>
+                </a:p>
+              </p:txBody>
+            </p:sp>
+          </p:grpSp>
+          <p:sp>
+            <p:nvSpPr>
+              <p:cNvPr id="7" name="Freeform: Shape 6">
+                <a:extLst>
+                  <a:ext uri="{FF2B5EF4-FFF2-40B4-BE49-F238E27FC236}">
+                    <a16:creationId xmlns:a16="http://schemas.microsoft.com/office/drawing/2014/main" id="{BCEEF394-CFD5-4CE5-812C-0C51276D85B1}"/>
+                  </a:ext>
+                </a:extLst>
+              </p:cNvPr>
+              <p:cNvSpPr/>
+              <p:nvPr/>
+            </p:nvSpPr>
+            <p:spPr>
+              <a:xfrm>
+                <a:off x="8924891" y="1840900"/>
+                <a:ext cx="70458" cy="324672"/>
+              </a:xfrm>
+              <a:custGeom>
+                <a:avLst/>
+                <a:gdLst>
+                  <a:gd name="connsiteX0" fmla="*/ 0 w 12879"/>
+                  <a:gd name="connsiteY0" fmla="*/ 0 h 2305318"/>
+                  <a:gd name="connsiteX1" fmla="*/ 12879 w 12879"/>
+                  <a:gd name="connsiteY1" fmla="*/ 1017431 h 2305318"/>
+                  <a:gd name="connsiteX2" fmla="*/ 12879 w 12879"/>
+                  <a:gd name="connsiteY2" fmla="*/ 2305318 h 2305318"/>
+                  <a:gd name="connsiteX3" fmla="*/ 12879 w 12879"/>
+                  <a:gd name="connsiteY3" fmla="*/ 2305318 h 2305318"/>
+                  <a:gd name="connsiteX0" fmla="*/ 0 w 25757"/>
+                  <a:gd name="connsiteY0" fmla="*/ 0 h 2305318"/>
+                  <a:gd name="connsiteX1" fmla="*/ 25757 w 25757"/>
+                  <a:gd name="connsiteY1" fmla="*/ 463639 h 2305318"/>
+                  <a:gd name="connsiteX2" fmla="*/ 12879 w 25757"/>
+                  <a:gd name="connsiteY2" fmla="*/ 1017431 h 2305318"/>
+                  <a:gd name="connsiteX3" fmla="*/ 12879 w 25757"/>
+                  <a:gd name="connsiteY3" fmla="*/ 2305318 h 2305318"/>
+                  <a:gd name="connsiteX4" fmla="*/ 12879 w 25757"/>
+                  <a:gd name="connsiteY4" fmla="*/ 2305318 h 2305318"/>
+                  <a:gd name="connsiteX0" fmla="*/ 0 w 38636"/>
+                  <a:gd name="connsiteY0" fmla="*/ 0 h 2305318"/>
+                  <a:gd name="connsiteX1" fmla="*/ 25757 w 38636"/>
+                  <a:gd name="connsiteY1" fmla="*/ 463639 h 2305318"/>
+                  <a:gd name="connsiteX2" fmla="*/ 12879 w 38636"/>
+                  <a:gd name="connsiteY2" fmla="*/ 1017431 h 2305318"/>
+                  <a:gd name="connsiteX3" fmla="*/ 38636 w 38636"/>
+                  <a:gd name="connsiteY3" fmla="*/ 1661375 h 2305318"/>
+                  <a:gd name="connsiteX4" fmla="*/ 12879 w 38636"/>
+                  <a:gd name="connsiteY4" fmla="*/ 2305318 h 2305318"/>
+                  <a:gd name="connsiteX5" fmla="*/ 12879 w 38636"/>
+                  <a:gd name="connsiteY5" fmla="*/ 2305318 h 2305318"/>
+                  <a:gd name="connsiteX0" fmla="*/ 0 w 38636"/>
+                  <a:gd name="connsiteY0" fmla="*/ 0 h 2305318"/>
+                  <a:gd name="connsiteX1" fmla="*/ 25757 w 38636"/>
+                  <a:gd name="connsiteY1" fmla="*/ 463639 h 2305318"/>
+                  <a:gd name="connsiteX2" fmla="*/ 12879 w 38636"/>
+                  <a:gd name="connsiteY2" fmla="*/ 1017431 h 2305318"/>
+                  <a:gd name="connsiteX3" fmla="*/ 38636 w 38636"/>
+                  <a:gd name="connsiteY3" fmla="*/ 1661375 h 2305318"/>
+                  <a:gd name="connsiteX4" fmla="*/ 12879 w 38636"/>
+                  <a:gd name="connsiteY4" fmla="*/ 2305318 h 2305318"/>
+                  <a:gd name="connsiteX5" fmla="*/ 12879 w 38636"/>
+                  <a:gd name="connsiteY5" fmla="*/ 2305318 h 2305318"/>
+                  <a:gd name="connsiteX0" fmla="*/ 0 w 38636"/>
+                  <a:gd name="connsiteY0" fmla="*/ 0 h 2305318"/>
+                  <a:gd name="connsiteX1" fmla="*/ 12879 w 38636"/>
+                  <a:gd name="connsiteY1" fmla="*/ 1017431 h 2305318"/>
+                  <a:gd name="connsiteX2" fmla="*/ 38636 w 38636"/>
+                  <a:gd name="connsiteY2" fmla="*/ 1661375 h 2305318"/>
+                  <a:gd name="connsiteX3" fmla="*/ 12879 w 38636"/>
+                  <a:gd name="connsiteY3" fmla="*/ 2305318 h 2305318"/>
+                  <a:gd name="connsiteX4" fmla="*/ 12879 w 38636"/>
+                  <a:gd name="connsiteY4" fmla="*/ 2305318 h 2305318"/>
+                  <a:gd name="connsiteX0" fmla="*/ 0 w 13833"/>
+                  <a:gd name="connsiteY0" fmla="*/ 0 h 2305318"/>
+                  <a:gd name="connsiteX1" fmla="*/ 12879 w 13833"/>
+                  <a:gd name="connsiteY1" fmla="*/ 1017431 h 2305318"/>
+                  <a:gd name="connsiteX2" fmla="*/ 12879 w 13833"/>
+                  <a:gd name="connsiteY2" fmla="*/ 2305318 h 2305318"/>
+                  <a:gd name="connsiteX3" fmla="*/ 12879 w 13833"/>
+                  <a:gd name="connsiteY3" fmla="*/ 2305318 h 2305318"/>
+                  <a:gd name="connsiteX0" fmla="*/ 253308 w 267141"/>
+                  <a:gd name="connsiteY0" fmla="*/ 0 h 2305318"/>
+                  <a:gd name="connsiteX1" fmla="*/ 266187 w 267141"/>
+                  <a:gd name="connsiteY1" fmla="*/ 1017431 h 2305318"/>
+                  <a:gd name="connsiteX2" fmla="*/ 266187 w 267141"/>
+                  <a:gd name="connsiteY2" fmla="*/ 2305318 h 2305318"/>
+                  <a:gd name="connsiteX3" fmla="*/ 266187 w 267141"/>
+                  <a:gd name="connsiteY3" fmla="*/ 2305318 h 2305318"/>
+                  <a:gd name="connsiteX0" fmla="*/ 297527 w 311360"/>
+                  <a:gd name="connsiteY0" fmla="*/ 0 h 2305318"/>
+                  <a:gd name="connsiteX1" fmla="*/ 310406 w 311360"/>
+                  <a:gd name="connsiteY1" fmla="*/ 1017431 h 2305318"/>
+                  <a:gd name="connsiteX2" fmla="*/ 310406 w 311360"/>
+                  <a:gd name="connsiteY2" fmla="*/ 2305318 h 2305318"/>
+                  <a:gd name="connsiteX3" fmla="*/ 310406 w 311360"/>
+                  <a:gd name="connsiteY3" fmla="*/ 2305318 h 2305318"/>
+                  <a:gd name="connsiteX0" fmla="*/ 297527 w 408667"/>
+                  <a:gd name="connsiteY0" fmla="*/ 0 h 2305318"/>
+                  <a:gd name="connsiteX1" fmla="*/ 310406 w 408667"/>
+                  <a:gd name="connsiteY1" fmla="*/ 1017431 h 2305318"/>
+                  <a:gd name="connsiteX2" fmla="*/ 310406 w 408667"/>
+                  <a:gd name="connsiteY2" fmla="*/ 2305318 h 2305318"/>
+                  <a:gd name="connsiteX3" fmla="*/ 310406 w 408667"/>
+                  <a:gd name="connsiteY3" fmla="*/ 2305318 h 2305318"/>
+                  <a:gd name="connsiteX0" fmla="*/ 297527 w 500279"/>
+                  <a:gd name="connsiteY0" fmla="*/ 0 h 2305318"/>
+                  <a:gd name="connsiteX1" fmla="*/ 310406 w 500279"/>
+                  <a:gd name="connsiteY1" fmla="*/ 1017431 h 2305318"/>
+                  <a:gd name="connsiteX2" fmla="*/ 310406 w 500279"/>
+                  <a:gd name="connsiteY2" fmla="*/ 2305318 h 2305318"/>
+                  <a:gd name="connsiteX3" fmla="*/ 310406 w 500279"/>
+                  <a:gd name="connsiteY3" fmla="*/ 2305318 h 2305318"/>
+                </a:gdLst>
+                <a:ahLst/>
+                <a:cxnLst>
+                  <a:cxn ang="0">
+                    <a:pos x="connsiteX0" y="connsiteY0"/>
+                  </a:cxn>
+                  <a:cxn ang="0">
+                    <a:pos x="connsiteX1" y="connsiteY1"/>
+                  </a:cxn>
+                  <a:cxn ang="0">
+                    <a:pos x="connsiteX2" y="connsiteY2"/>
+                  </a:cxn>
+                  <a:cxn ang="0">
+                    <a:pos x="connsiteX3" y="connsiteY3"/>
+                  </a:cxn>
+                </a:cxnLst>
+                <a:rect l="l" t="t" r="r" b="b"/>
+                <a:pathLst>
+                  <a:path w="500279" h="2305318">
+                    <a:moveTo>
+                      <a:pt x="297527" y="0"/>
+                    </a:moveTo>
+                    <a:cubicBezTo>
+                      <a:pt x="-277730" y="609600"/>
+                      <a:pt x="125808" y="704045"/>
+                      <a:pt x="310406" y="1017431"/>
+                    </a:cubicBezTo>
+                    <a:cubicBezTo>
+                      <a:pt x="531494" y="1363015"/>
+                      <a:pt x="593741" y="1678546"/>
+                      <a:pt x="310406" y="2305318"/>
+                    </a:cubicBezTo>
+                    <a:lnTo>
+                      <a:pt x="310406" y="2305318"/>
+                    </a:lnTo>
+                  </a:path>
+                </a:pathLst>
+              </a:custGeom>
+              <a:noFill/>
+            </p:spPr>
+            <p:style>
+              <a:lnRef idx="2">
+                <a:schemeClr val="accent1">
+                  <a:shade val="50000"/>
+                </a:schemeClr>
+              </a:lnRef>
+              <a:fillRef idx="1">
+                <a:schemeClr val="accent1"/>
+              </a:fillRef>
+              <a:effectRef idx="0">
+                <a:schemeClr val="accent1"/>
+              </a:effectRef>
+              <a:fontRef idx="minor">
+                <a:schemeClr val="lt1"/>
+              </a:fontRef>
+            </p:style>
+            <p:txBody>
+              <a:bodyPr rtlCol="0" anchor="ctr"/>
+              <a:lstStyle/>
+              <a:p>
+                <a:pPr algn="ctr"/>
+                <a:endParaRPr lang="en-AU"/>
+              </a:p>
+            </p:txBody>
+          </p:sp>
+          <p:sp>
+            <p:nvSpPr>
+              <p:cNvPr id="48" name="Freeform: Shape 47">
+                <a:extLst>
+                  <a:ext uri="{FF2B5EF4-FFF2-40B4-BE49-F238E27FC236}">
+                    <a16:creationId xmlns:a16="http://schemas.microsoft.com/office/drawing/2014/main" id="{15485314-DEF5-4C98-AFAB-320BC1C17EA0}"/>
+                  </a:ext>
+                </a:extLst>
+              </p:cNvPr>
+              <p:cNvSpPr/>
+              <p:nvPr/>
+            </p:nvSpPr>
+            <p:spPr>
+              <a:xfrm>
+                <a:off x="8917392" y="3260035"/>
+                <a:ext cx="70458" cy="324672"/>
+              </a:xfrm>
+              <a:custGeom>
+                <a:avLst/>
+                <a:gdLst>
+                  <a:gd name="connsiteX0" fmla="*/ 0 w 12879"/>
+                  <a:gd name="connsiteY0" fmla="*/ 0 h 2305318"/>
+                  <a:gd name="connsiteX1" fmla="*/ 12879 w 12879"/>
+                  <a:gd name="connsiteY1" fmla="*/ 1017431 h 2305318"/>
+                  <a:gd name="connsiteX2" fmla="*/ 12879 w 12879"/>
+                  <a:gd name="connsiteY2" fmla="*/ 2305318 h 2305318"/>
+                  <a:gd name="connsiteX3" fmla="*/ 12879 w 12879"/>
+                  <a:gd name="connsiteY3" fmla="*/ 2305318 h 2305318"/>
+                  <a:gd name="connsiteX0" fmla="*/ 0 w 25757"/>
+                  <a:gd name="connsiteY0" fmla="*/ 0 h 2305318"/>
+                  <a:gd name="connsiteX1" fmla="*/ 25757 w 25757"/>
+                  <a:gd name="connsiteY1" fmla="*/ 463639 h 2305318"/>
+                  <a:gd name="connsiteX2" fmla="*/ 12879 w 25757"/>
+                  <a:gd name="connsiteY2" fmla="*/ 1017431 h 2305318"/>
+                  <a:gd name="connsiteX3" fmla="*/ 12879 w 25757"/>
+                  <a:gd name="connsiteY3" fmla="*/ 2305318 h 2305318"/>
+                  <a:gd name="connsiteX4" fmla="*/ 12879 w 25757"/>
+                  <a:gd name="connsiteY4" fmla="*/ 2305318 h 2305318"/>
+                  <a:gd name="connsiteX0" fmla="*/ 0 w 38636"/>
+                  <a:gd name="connsiteY0" fmla="*/ 0 h 2305318"/>
+                  <a:gd name="connsiteX1" fmla="*/ 25757 w 38636"/>
+                  <a:gd name="connsiteY1" fmla="*/ 463639 h 2305318"/>
+                  <a:gd name="connsiteX2" fmla="*/ 12879 w 38636"/>
+                  <a:gd name="connsiteY2" fmla="*/ 1017431 h 2305318"/>
+                  <a:gd name="connsiteX3" fmla="*/ 38636 w 38636"/>
+                  <a:gd name="connsiteY3" fmla="*/ 1661375 h 2305318"/>
+                  <a:gd name="connsiteX4" fmla="*/ 12879 w 38636"/>
+                  <a:gd name="connsiteY4" fmla="*/ 2305318 h 2305318"/>
+                  <a:gd name="connsiteX5" fmla="*/ 12879 w 38636"/>
+                  <a:gd name="connsiteY5" fmla="*/ 2305318 h 2305318"/>
+                  <a:gd name="connsiteX0" fmla="*/ 0 w 38636"/>
+                  <a:gd name="connsiteY0" fmla="*/ 0 h 2305318"/>
+                  <a:gd name="connsiteX1" fmla="*/ 25757 w 38636"/>
+                  <a:gd name="connsiteY1" fmla="*/ 463639 h 2305318"/>
+                  <a:gd name="connsiteX2" fmla="*/ 12879 w 38636"/>
+                  <a:gd name="connsiteY2" fmla="*/ 1017431 h 2305318"/>
+                  <a:gd name="connsiteX3" fmla="*/ 38636 w 38636"/>
+                  <a:gd name="connsiteY3" fmla="*/ 1661375 h 2305318"/>
+                  <a:gd name="connsiteX4" fmla="*/ 12879 w 38636"/>
+                  <a:gd name="connsiteY4" fmla="*/ 2305318 h 2305318"/>
+                  <a:gd name="connsiteX5" fmla="*/ 12879 w 38636"/>
+                  <a:gd name="connsiteY5" fmla="*/ 2305318 h 2305318"/>
+                  <a:gd name="connsiteX0" fmla="*/ 0 w 38636"/>
+                  <a:gd name="connsiteY0" fmla="*/ 0 h 2305318"/>
+                  <a:gd name="connsiteX1" fmla="*/ 12879 w 38636"/>
+                  <a:gd name="connsiteY1" fmla="*/ 1017431 h 2305318"/>
+                  <a:gd name="connsiteX2" fmla="*/ 38636 w 38636"/>
+                  <a:gd name="connsiteY2" fmla="*/ 1661375 h 2305318"/>
+                  <a:gd name="connsiteX3" fmla="*/ 12879 w 38636"/>
+                  <a:gd name="connsiteY3" fmla="*/ 2305318 h 2305318"/>
+                  <a:gd name="connsiteX4" fmla="*/ 12879 w 38636"/>
+                  <a:gd name="connsiteY4" fmla="*/ 2305318 h 2305318"/>
+                  <a:gd name="connsiteX0" fmla="*/ 0 w 13833"/>
+                  <a:gd name="connsiteY0" fmla="*/ 0 h 2305318"/>
+                  <a:gd name="connsiteX1" fmla="*/ 12879 w 13833"/>
+                  <a:gd name="connsiteY1" fmla="*/ 1017431 h 2305318"/>
+                  <a:gd name="connsiteX2" fmla="*/ 12879 w 13833"/>
+                  <a:gd name="connsiteY2" fmla="*/ 2305318 h 2305318"/>
+                  <a:gd name="connsiteX3" fmla="*/ 12879 w 13833"/>
+                  <a:gd name="connsiteY3" fmla="*/ 2305318 h 2305318"/>
+                  <a:gd name="connsiteX0" fmla="*/ 253308 w 267141"/>
+                  <a:gd name="connsiteY0" fmla="*/ 0 h 2305318"/>
+                  <a:gd name="connsiteX1" fmla="*/ 266187 w 267141"/>
+                  <a:gd name="connsiteY1" fmla="*/ 1017431 h 2305318"/>
+                  <a:gd name="connsiteX2" fmla="*/ 266187 w 267141"/>
+                  <a:gd name="connsiteY2" fmla="*/ 2305318 h 2305318"/>
+                  <a:gd name="connsiteX3" fmla="*/ 266187 w 267141"/>
+                  <a:gd name="connsiteY3" fmla="*/ 2305318 h 2305318"/>
+                  <a:gd name="connsiteX0" fmla="*/ 297527 w 311360"/>
+                  <a:gd name="connsiteY0" fmla="*/ 0 h 2305318"/>
+                  <a:gd name="connsiteX1" fmla="*/ 310406 w 311360"/>
+                  <a:gd name="connsiteY1" fmla="*/ 1017431 h 2305318"/>
+                  <a:gd name="connsiteX2" fmla="*/ 310406 w 311360"/>
+                  <a:gd name="connsiteY2" fmla="*/ 2305318 h 2305318"/>
+                  <a:gd name="connsiteX3" fmla="*/ 310406 w 311360"/>
+                  <a:gd name="connsiteY3" fmla="*/ 2305318 h 2305318"/>
+                  <a:gd name="connsiteX0" fmla="*/ 297527 w 408667"/>
+                  <a:gd name="connsiteY0" fmla="*/ 0 h 2305318"/>
+                  <a:gd name="connsiteX1" fmla="*/ 310406 w 408667"/>
+                  <a:gd name="connsiteY1" fmla="*/ 1017431 h 2305318"/>
+                  <a:gd name="connsiteX2" fmla="*/ 310406 w 408667"/>
+                  <a:gd name="connsiteY2" fmla="*/ 2305318 h 2305318"/>
+                  <a:gd name="connsiteX3" fmla="*/ 310406 w 408667"/>
+                  <a:gd name="connsiteY3" fmla="*/ 2305318 h 2305318"/>
+                  <a:gd name="connsiteX0" fmla="*/ 297527 w 500279"/>
+                  <a:gd name="connsiteY0" fmla="*/ 0 h 2305318"/>
+                  <a:gd name="connsiteX1" fmla="*/ 310406 w 500279"/>
+                  <a:gd name="connsiteY1" fmla="*/ 1017431 h 2305318"/>
+                  <a:gd name="connsiteX2" fmla="*/ 310406 w 500279"/>
+                  <a:gd name="connsiteY2" fmla="*/ 2305318 h 2305318"/>
+                  <a:gd name="connsiteX3" fmla="*/ 310406 w 500279"/>
+                  <a:gd name="connsiteY3" fmla="*/ 2305318 h 2305318"/>
+                </a:gdLst>
+                <a:ahLst/>
+                <a:cxnLst>
+                  <a:cxn ang="0">
+                    <a:pos x="connsiteX0" y="connsiteY0"/>
+                  </a:cxn>
+                  <a:cxn ang="0">
+                    <a:pos x="connsiteX1" y="connsiteY1"/>
+                  </a:cxn>
+                  <a:cxn ang="0">
+                    <a:pos x="connsiteX2" y="connsiteY2"/>
+                  </a:cxn>
+                  <a:cxn ang="0">
+                    <a:pos x="connsiteX3" y="connsiteY3"/>
+                  </a:cxn>
+                </a:cxnLst>
+                <a:rect l="l" t="t" r="r" b="b"/>
+                <a:pathLst>
+                  <a:path w="500279" h="2305318">
+                    <a:moveTo>
+                      <a:pt x="297527" y="0"/>
+                    </a:moveTo>
+                    <a:cubicBezTo>
+                      <a:pt x="-277730" y="609600"/>
+                      <a:pt x="125808" y="704045"/>
+                      <a:pt x="310406" y="1017431"/>
+                    </a:cubicBezTo>
+                    <a:cubicBezTo>
+                      <a:pt x="531494" y="1363015"/>
+                      <a:pt x="593741" y="1678546"/>
+                      <a:pt x="310406" y="2305318"/>
+                    </a:cubicBezTo>
+                    <a:lnTo>
+                      <a:pt x="310406" y="2305318"/>
+                    </a:lnTo>
+                  </a:path>
+                </a:pathLst>
+              </a:custGeom>
+              <a:noFill/>
+            </p:spPr>
+            <p:style>
+              <a:lnRef idx="2">
+                <a:schemeClr val="accent1">
+                  <a:shade val="50000"/>
+                </a:schemeClr>
+              </a:lnRef>
+              <a:fillRef idx="1">
+                <a:schemeClr val="accent1"/>
+              </a:fillRef>
+              <a:effectRef idx="0">
+                <a:schemeClr val="accent1"/>
+              </a:effectRef>
+              <a:fontRef idx="minor">
+                <a:schemeClr val="lt1"/>
+              </a:fontRef>
+            </p:style>
+            <p:txBody>
+              <a:bodyPr rtlCol="0" anchor="ctr"/>
+              <a:lstStyle/>
+              <a:p>
+                <a:pPr algn="ctr"/>
+                <a:endParaRPr lang="en-AU"/>
+              </a:p>
+            </p:txBody>
+          </p:sp>
+          <p:sp>
+            <p:nvSpPr>
+              <p:cNvPr id="54" name="Freeform: Shape 53">
+                <a:extLst>
+                  <a:ext uri="{FF2B5EF4-FFF2-40B4-BE49-F238E27FC236}">
+                    <a16:creationId xmlns:a16="http://schemas.microsoft.com/office/drawing/2014/main" id="{425658AC-144C-407E-8C6F-9EA5FB6C2485}"/>
+                  </a:ext>
+                </a:extLst>
+              </p:cNvPr>
+              <p:cNvSpPr/>
+              <p:nvPr/>
+            </p:nvSpPr>
+            <p:spPr>
+              <a:xfrm>
+                <a:off x="8910445" y="4734460"/>
+                <a:ext cx="70458" cy="324672"/>
+              </a:xfrm>
+              <a:custGeom>
+                <a:avLst/>
+                <a:gdLst>
+                  <a:gd name="connsiteX0" fmla="*/ 0 w 12879"/>
+                  <a:gd name="connsiteY0" fmla="*/ 0 h 2305318"/>
+                  <a:gd name="connsiteX1" fmla="*/ 12879 w 12879"/>
+                  <a:gd name="connsiteY1" fmla="*/ 1017431 h 2305318"/>
+                  <a:gd name="connsiteX2" fmla="*/ 12879 w 12879"/>
+                  <a:gd name="connsiteY2" fmla="*/ 2305318 h 2305318"/>
+                  <a:gd name="connsiteX3" fmla="*/ 12879 w 12879"/>
+                  <a:gd name="connsiteY3" fmla="*/ 2305318 h 2305318"/>
+                  <a:gd name="connsiteX0" fmla="*/ 0 w 25757"/>
+                  <a:gd name="connsiteY0" fmla="*/ 0 h 2305318"/>
+                  <a:gd name="connsiteX1" fmla="*/ 25757 w 25757"/>
+                  <a:gd name="connsiteY1" fmla="*/ 463639 h 2305318"/>
+                  <a:gd name="connsiteX2" fmla="*/ 12879 w 25757"/>
+                  <a:gd name="connsiteY2" fmla="*/ 1017431 h 2305318"/>
+                  <a:gd name="connsiteX3" fmla="*/ 12879 w 25757"/>
+                  <a:gd name="connsiteY3" fmla="*/ 2305318 h 2305318"/>
+                  <a:gd name="connsiteX4" fmla="*/ 12879 w 25757"/>
+                  <a:gd name="connsiteY4" fmla="*/ 2305318 h 2305318"/>
+                  <a:gd name="connsiteX0" fmla="*/ 0 w 38636"/>
+                  <a:gd name="connsiteY0" fmla="*/ 0 h 2305318"/>
+                  <a:gd name="connsiteX1" fmla="*/ 25757 w 38636"/>
+                  <a:gd name="connsiteY1" fmla="*/ 463639 h 2305318"/>
+                  <a:gd name="connsiteX2" fmla="*/ 12879 w 38636"/>
+                  <a:gd name="connsiteY2" fmla="*/ 1017431 h 2305318"/>
+                  <a:gd name="connsiteX3" fmla="*/ 38636 w 38636"/>
+                  <a:gd name="connsiteY3" fmla="*/ 1661375 h 2305318"/>
+                  <a:gd name="connsiteX4" fmla="*/ 12879 w 38636"/>
+                  <a:gd name="connsiteY4" fmla="*/ 2305318 h 2305318"/>
+                  <a:gd name="connsiteX5" fmla="*/ 12879 w 38636"/>
+                  <a:gd name="connsiteY5" fmla="*/ 2305318 h 2305318"/>
+                  <a:gd name="connsiteX0" fmla="*/ 0 w 38636"/>
+                  <a:gd name="connsiteY0" fmla="*/ 0 h 2305318"/>
+                  <a:gd name="connsiteX1" fmla="*/ 25757 w 38636"/>
+                  <a:gd name="connsiteY1" fmla="*/ 463639 h 2305318"/>
+                  <a:gd name="connsiteX2" fmla="*/ 12879 w 38636"/>
+                  <a:gd name="connsiteY2" fmla="*/ 1017431 h 2305318"/>
+                  <a:gd name="connsiteX3" fmla="*/ 38636 w 38636"/>
+                  <a:gd name="connsiteY3" fmla="*/ 1661375 h 2305318"/>
+                  <a:gd name="connsiteX4" fmla="*/ 12879 w 38636"/>
+                  <a:gd name="connsiteY4" fmla="*/ 2305318 h 2305318"/>
+                  <a:gd name="connsiteX5" fmla="*/ 12879 w 38636"/>
+                  <a:gd name="connsiteY5" fmla="*/ 2305318 h 2305318"/>
+                  <a:gd name="connsiteX0" fmla="*/ 0 w 38636"/>
+                  <a:gd name="connsiteY0" fmla="*/ 0 h 2305318"/>
+                  <a:gd name="connsiteX1" fmla="*/ 12879 w 38636"/>
+                  <a:gd name="connsiteY1" fmla="*/ 1017431 h 2305318"/>
+                  <a:gd name="connsiteX2" fmla="*/ 38636 w 38636"/>
+                  <a:gd name="connsiteY2" fmla="*/ 1661375 h 2305318"/>
+                  <a:gd name="connsiteX3" fmla="*/ 12879 w 38636"/>
+                  <a:gd name="connsiteY3" fmla="*/ 2305318 h 2305318"/>
+                  <a:gd name="connsiteX4" fmla="*/ 12879 w 38636"/>
+                  <a:gd name="connsiteY4" fmla="*/ 2305318 h 2305318"/>
+                  <a:gd name="connsiteX0" fmla="*/ 0 w 13833"/>
+                  <a:gd name="connsiteY0" fmla="*/ 0 h 2305318"/>
+                  <a:gd name="connsiteX1" fmla="*/ 12879 w 13833"/>
+                  <a:gd name="connsiteY1" fmla="*/ 1017431 h 2305318"/>
+                  <a:gd name="connsiteX2" fmla="*/ 12879 w 13833"/>
+                  <a:gd name="connsiteY2" fmla="*/ 2305318 h 2305318"/>
+                  <a:gd name="connsiteX3" fmla="*/ 12879 w 13833"/>
+                  <a:gd name="connsiteY3" fmla="*/ 2305318 h 2305318"/>
+                  <a:gd name="connsiteX0" fmla="*/ 253308 w 267141"/>
+                  <a:gd name="connsiteY0" fmla="*/ 0 h 2305318"/>
+                  <a:gd name="connsiteX1" fmla="*/ 266187 w 267141"/>
+                  <a:gd name="connsiteY1" fmla="*/ 1017431 h 2305318"/>
+                  <a:gd name="connsiteX2" fmla="*/ 266187 w 267141"/>
+                  <a:gd name="connsiteY2" fmla="*/ 2305318 h 2305318"/>
+                  <a:gd name="connsiteX3" fmla="*/ 266187 w 267141"/>
+                  <a:gd name="connsiteY3" fmla="*/ 2305318 h 2305318"/>
+                  <a:gd name="connsiteX0" fmla="*/ 297527 w 311360"/>
+                  <a:gd name="connsiteY0" fmla="*/ 0 h 2305318"/>
+                  <a:gd name="connsiteX1" fmla="*/ 310406 w 311360"/>
+                  <a:gd name="connsiteY1" fmla="*/ 1017431 h 2305318"/>
+                  <a:gd name="connsiteX2" fmla="*/ 310406 w 311360"/>
+                  <a:gd name="connsiteY2" fmla="*/ 2305318 h 2305318"/>
+                  <a:gd name="connsiteX3" fmla="*/ 310406 w 311360"/>
+                  <a:gd name="connsiteY3" fmla="*/ 2305318 h 2305318"/>
+                  <a:gd name="connsiteX0" fmla="*/ 297527 w 408667"/>
+                  <a:gd name="connsiteY0" fmla="*/ 0 h 2305318"/>
+                  <a:gd name="connsiteX1" fmla="*/ 310406 w 408667"/>
+                  <a:gd name="connsiteY1" fmla="*/ 1017431 h 2305318"/>
+                  <a:gd name="connsiteX2" fmla="*/ 310406 w 408667"/>
+                  <a:gd name="connsiteY2" fmla="*/ 2305318 h 2305318"/>
+                  <a:gd name="connsiteX3" fmla="*/ 310406 w 408667"/>
+                  <a:gd name="connsiteY3" fmla="*/ 2305318 h 2305318"/>
+                  <a:gd name="connsiteX0" fmla="*/ 297527 w 500279"/>
+                  <a:gd name="connsiteY0" fmla="*/ 0 h 2305318"/>
+                  <a:gd name="connsiteX1" fmla="*/ 310406 w 500279"/>
+                  <a:gd name="connsiteY1" fmla="*/ 1017431 h 2305318"/>
+                  <a:gd name="connsiteX2" fmla="*/ 310406 w 500279"/>
+                  <a:gd name="connsiteY2" fmla="*/ 2305318 h 2305318"/>
+                  <a:gd name="connsiteX3" fmla="*/ 310406 w 500279"/>
+                  <a:gd name="connsiteY3" fmla="*/ 2305318 h 2305318"/>
+                </a:gdLst>
+                <a:ahLst/>
+                <a:cxnLst>
+                  <a:cxn ang="0">
+                    <a:pos x="connsiteX0" y="connsiteY0"/>
+                  </a:cxn>
+                  <a:cxn ang="0">
+                    <a:pos x="connsiteX1" y="connsiteY1"/>
+                  </a:cxn>
+                  <a:cxn ang="0">
+                    <a:pos x="connsiteX2" y="connsiteY2"/>
+                  </a:cxn>
+                  <a:cxn ang="0">
+                    <a:pos x="connsiteX3" y="connsiteY3"/>
+                  </a:cxn>
+                </a:cxnLst>
+                <a:rect l="l" t="t" r="r" b="b"/>
+                <a:pathLst>
+                  <a:path w="500279" h="2305318">
+                    <a:moveTo>
+                      <a:pt x="297527" y="0"/>
+                    </a:moveTo>
+                    <a:cubicBezTo>
+                      <a:pt x="-277730" y="609600"/>
+                      <a:pt x="125808" y="704045"/>
+                      <a:pt x="310406" y="1017431"/>
+                    </a:cubicBezTo>
+                    <a:cubicBezTo>
+                      <a:pt x="531494" y="1363015"/>
+                      <a:pt x="593741" y="1678546"/>
+                      <a:pt x="310406" y="2305318"/>
+                    </a:cubicBezTo>
+                    <a:lnTo>
+                      <a:pt x="310406" y="2305318"/>
+                    </a:lnTo>
+                  </a:path>
+                </a:pathLst>
+              </a:custGeom>
+              <a:noFill/>
+            </p:spPr>
+            <p:style>
+              <a:lnRef idx="2">
+                <a:schemeClr val="accent1">
+                  <a:shade val="50000"/>
+                </a:schemeClr>
+              </a:lnRef>
+              <a:fillRef idx="1">
+                <a:schemeClr val="accent1"/>
+              </a:fillRef>
+              <a:effectRef idx="0">
+                <a:schemeClr val="accent1"/>
+              </a:effectRef>
+              <a:fontRef idx="minor">
+                <a:schemeClr val="lt1"/>
+              </a:fontRef>
+            </p:style>
+            <p:txBody>
+              <a:bodyPr rtlCol="0" anchor="ctr"/>
+              <a:lstStyle/>
+              <a:p>
+                <a:pPr algn="ctr"/>
+                <a:endParaRPr lang="en-AU"/>
+              </a:p>
+            </p:txBody>
+          </p:sp>
+        </p:grpSp>
+        <p:sp>
+          <p:nvSpPr>
+            <p:cNvPr id="13" name="Callout: Double Bent Line with Accent Bar 12">
+              <a:extLst>
+                <a:ext uri="{FF2B5EF4-FFF2-40B4-BE49-F238E27FC236}">
+                  <a16:creationId xmlns:a16="http://schemas.microsoft.com/office/drawing/2014/main" id="{873C3053-E80E-494A-A5E2-4C4B092F8EEF}"/>
+                </a:ext>
+              </a:extLst>
+            </p:cNvPr>
+            <p:cNvSpPr/>
+            <p:nvPr/>
+          </p:nvSpPr>
+          <p:spPr>
+            <a:xfrm>
+              <a:off x="5148300" y="228735"/>
+              <a:ext cx="3035578" cy="671177"/>
+            </a:xfrm>
+            <a:prstGeom prst="accentCallout3">
+              <a:avLst>
+                <a:gd name="adj1" fmla="val 85598"/>
+                <a:gd name="adj2" fmla="val 100417"/>
+                <a:gd name="adj3" fmla="val 85871"/>
+                <a:gd name="adj4" fmla="val 105706"/>
+                <a:gd name="adj5" fmla="val 153599"/>
+                <a:gd name="adj6" fmla="val 105705"/>
+                <a:gd name="adj7" fmla="val 154340"/>
+                <a:gd name="adj8" fmla="val 64518"/>
+              </a:avLst>
+            </a:prstGeom>
+            <a:solidFill>
+              <a:schemeClr val="bg2"/>
+            </a:solidFill>
+            <a:ln>
+              <a:tailEnd type="stealth" w="med" len="med"/>
+            </a:ln>
+          </p:spPr>
+          <p:style>
+            <a:lnRef idx="2">
+              <a:schemeClr val="accent1">
+                <a:shade val="50000"/>
+              </a:schemeClr>
+            </a:lnRef>
+            <a:fillRef idx="1">
+              <a:schemeClr val="accent1"/>
+            </a:fillRef>
+            <a:effectRef idx="0">
+              <a:schemeClr val="accent1"/>
+            </a:effectRef>
+            <a:fontRef idx="minor">
+              <a:schemeClr val="lt1"/>
+            </a:fontRef>
+          </p:style>
+          <p:txBody>
+            <a:bodyPr rtlCol="0" anchor="ctr"/>
+            <a:lstStyle/>
+            <a:p>
+              <a:pPr algn="r"/>
+              <a:r>
+                <a:rPr lang="en-GB" dirty="0">
+                  <a:solidFill>
+                    <a:schemeClr val="tx1"/>
+                  </a:solidFill>
+                </a:rPr>
+                <a:t>Wave motion </a:t>
+              </a:r>
+              <a:br>
+                <a:rPr lang="en-GB" dirty="0">
+                  <a:solidFill>
+                    <a:schemeClr val="tx1"/>
+                  </a:solidFill>
+                </a:rPr>
+              </a:br>
+              <a:r>
+                <a:rPr lang="en-GB" dirty="0">
+                  <a:solidFill>
+                    <a:schemeClr val="tx1"/>
+                  </a:solidFill>
+                </a:rPr>
+                <a:t>(Z axis – physical in X-domain)</a:t>
+              </a:r>
+              <a:endParaRPr lang="en-AU" dirty="0">
+                <a:solidFill>
+                  <a:schemeClr val="tx1"/>
+                </a:solidFill>
+              </a:endParaRPr>
+            </a:p>
+          </p:txBody>
+        </p:sp>
+        <p:sp>
+          <p:nvSpPr>
+            <p:cNvPr id="16" name="Callout: Bent Line with Accent Bar 15">
+              <a:extLst>
+                <a:ext uri="{FF2B5EF4-FFF2-40B4-BE49-F238E27FC236}">
+                  <a16:creationId xmlns:a16="http://schemas.microsoft.com/office/drawing/2014/main" id="{2DC6C3B8-C9BA-40C4-A3A4-6F1F0B00372E}"/>
+                </a:ext>
+              </a:extLst>
+            </p:cNvPr>
+            <p:cNvSpPr/>
+            <p:nvPr/>
+          </p:nvSpPr>
+          <p:spPr>
+            <a:xfrm>
+              <a:off x="3647910" y="5733459"/>
+              <a:ext cx="2388870" cy="694120"/>
+            </a:xfrm>
+            <a:prstGeom prst="accentCallout2">
+              <a:avLst>
+                <a:gd name="adj1" fmla="val 24473"/>
+                <a:gd name="adj2" fmla="val 100350"/>
+                <a:gd name="adj3" fmla="val 24750"/>
+                <a:gd name="adj4" fmla="val 115253"/>
+                <a:gd name="adj5" fmla="val -10488"/>
+                <a:gd name="adj6" fmla="val 115260"/>
+              </a:avLst>
+            </a:prstGeom>
+            <a:solidFill>
+              <a:schemeClr val="bg2"/>
+            </a:solidFill>
+            <a:ln>
+              <a:tailEnd type="stealth"/>
+            </a:ln>
+          </p:spPr>
+          <p:style>
+            <a:lnRef idx="2">
+              <a:schemeClr val="accent1">
+                <a:shade val="50000"/>
+              </a:schemeClr>
+            </a:lnRef>
+            <a:fillRef idx="1">
+              <a:schemeClr val="accent1"/>
+            </a:fillRef>
+            <a:effectRef idx="0">
+              <a:schemeClr val="accent1"/>
+            </a:effectRef>
+            <a:fontRef idx="minor">
+              <a:schemeClr val="lt1"/>
+            </a:fontRef>
+          </p:style>
+          <p:txBody>
+            <a:bodyPr rtlCol="0" anchor="ctr"/>
+            <a:lstStyle/>
+            <a:p>
+              <a:pPr algn="r"/>
+              <a:r>
+                <a:rPr lang="en-GB" dirty="0">
+                  <a:solidFill>
+                    <a:schemeClr val="tx1"/>
+                  </a:solidFill>
+                </a:rPr>
+                <a:t>X axis</a:t>
+              </a:r>
+              <a:br>
+                <a:rPr lang="en-GB" dirty="0">
+                  <a:solidFill>
+                    <a:schemeClr val="tx1"/>
+                  </a:solidFill>
+                </a:rPr>
+              </a:br>
+              <a:r>
+                <a:rPr lang="en-GB" dirty="0">
+                  <a:solidFill>
+                    <a:schemeClr val="tx1"/>
+                  </a:solidFill>
+                </a:rPr>
+                <a:t> (physical in X-domain)</a:t>
+              </a:r>
+              <a:endParaRPr lang="en-AU" dirty="0">
+                <a:solidFill>
+                  <a:schemeClr val="tx1"/>
+                </a:solidFill>
+              </a:endParaRPr>
+            </a:p>
+          </p:txBody>
+        </p:sp>
+        <p:sp>
+          <p:nvSpPr>
+            <p:cNvPr id="17" name="Callout: Bent Line with Accent Bar 16">
+              <a:extLst>
+                <a:ext uri="{FF2B5EF4-FFF2-40B4-BE49-F238E27FC236}">
+                  <a16:creationId xmlns:a16="http://schemas.microsoft.com/office/drawing/2014/main" id="{8D1B9F73-3FF8-4D32-A372-4B6B3D8B8D4B}"/>
+                </a:ext>
+              </a:extLst>
+            </p:cNvPr>
+            <p:cNvSpPr/>
+            <p:nvPr/>
+          </p:nvSpPr>
+          <p:spPr>
+            <a:xfrm>
+              <a:off x="3574109" y="2096753"/>
+              <a:ext cx="1268236" cy="334042"/>
+            </a:xfrm>
+            <a:prstGeom prst="accentCallout2">
+              <a:avLst>
+                <a:gd name="adj1" fmla="val 20616"/>
+                <a:gd name="adj2" fmla="val 680"/>
+                <a:gd name="adj3" fmla="val 18750"/>
+                <a:gd name="adj4" fmla="val -16667"/>
+                <a:gd name="adj5" fmla="val -20947"/>
+                <a:gd name="adj6" fmla="val -33148"/>
+              </a:avLst>
+            </a:prstGeom>
+            <a:solidFill>
+              <a:schemeClr val="accent3">
+                <a:lumMod val="20000"/>
+                <a:lumOff val="80000"/>
+                <a:alpha val="86000"/>
+              </a:schemeClr>
+            </a:solidFill>
+            <a:ln>
+              <a:solidFill>
+                <a:schemeClr val="accent1">
+                  <a:shade val="50000"/>
+                </a:schemeClr>
+              </a:solidFill>
+              <a:tailEnd type="stealth"/>
+            </a:ln>
+          </p:spPr>
+          <p:style>
+            <a:lnRef idx="2">
+              <a:schemeClr val="accent1">
+                <a:shade val="50000"/>
+              </a:schemeClr>
+            </a:lnRef>
+            <a:fillRef idx="1">
+              <a:schemeClr val="accent1"/>
+            </a:fillRef>
+            <a:effectRef idx="0">
+              <a:schemeClr val="accent1"/>
+            </a:effectRef>
+            <a:fontRef idx="minor">
+              <a:schemeClr val="lt1"/>
+            </a:fontRef>
+          </p:style>
+          <p:txBody>
+            <a:bodyPr rtlCol="0" anchor="ctr"/>
+            <a:lstStyle/>
+            <a:p>
+              <a:r>
+                <a:rPr lang="en-GB" dirty="0">
+                  <a:solidFill>
+                    <a:schemeClr val="tx1"/>
+                  </a:solidFill>
+                </a:rPr>
+                <a:t>Wave Crest</a:t>
+              </a:r>
+              <a:endParaRPr lang="en-AU" dirty="0">
+                <a:solidFill>
+                  <a:schemeClr val="tx1"/>
+                </a:solidFill>
+              </a:endParaRPr>
+            </a:p>
+          </p:txBody>
+        </p:sp>
+        <p:sp>
+          <p:nvSpPr>
+            <p:cNvPr id="39" name="Callout: Bent Line with Accent Bar 38">
+              <a:extLst>
+                <a:ext uri="{FF2B5EF4-FFF2-40B4-BE49-F238E27FC236}">
+                  <a16:creationId xmlns:a16="http://schemas.microsoft.com/office/drawing/2014/main" id="{E001408F-7589-4FF8-9445-0CD63934049D}"/>
+                </a:ext>
+              </a:extLst>
+            </p:cNvPr>
+            <p:cNvSpPr/>
+            <p:nvPr/>
+          </p:nvSpPr>
+          <p:spPr>
+            <a:xfrm>
+              <a:off x="3565494" y="3582005"/>
+              <a:ext cx="1268236" cy="334042"/>
+            </a:xfrm>
+            <a:prstGeom prst="accentCallout2">
+              <a:avLst>
+                <a:gd name="adj1" fmla="val 20616"/>
+                <a:gd name="adj2" fmla="val 680"/>
+                <a:gd name="adj3" fmla="val 18750"/>
+                <a:gd name="adj4" fmla="val -16667"/>
+                <a:gd name="adj5" fmla="val -20947"/>
+                <a:gd name="adj6" fmla="val -33148"/>
+              </a:avLst>
+            </a:prstGeom>
+            <a:solidFill>
+              <a:schemeClr val="accent3">
+                <a:lumMod val="20000"/>
+                <a:lumOff val="80000"/>
+                <a:alpha val="86000"/>
+              </a:schemeClr>
+            </a:solidFill>
+            <a:ln>
+              <a:solidFill>
+                <a:schemeClr val="accent1">
+                  <a:shade val="50000"/>
+                </a:schemeClr>
+              </a:solidFill>
+              <a:tailEnd type="stealth"/>
+            </a:ln>
+          </p:spPr>
+          <p:style>
+            <a:lnRef idx="2">
+              <a:schemeClr val="accent1">
+                <a:shade val="50000"/>
+              </a:schemeClr>
+            </a:lnRef>
+            <a:fillRef idx="1">
+              <a:schemeClr val="accent1"/>
+            </a:fillRef>
+            <a:effectRef idx="0">
+              <a:schemeClr val="accent1"/>
+            </a:effectRef>
+            <a:fontRef idx="minor">
+              <a:schemeClr val="lt1"/>
+            </a:fontRef>
+          </p:style>
+          <p:txBody>
+            <a:bodyPr rtlCol="0" anchor="ctr"/>
+            <a:lstStyle/>
+            <a:p>
+              <a:r>
+                <a:rPr lang="en-GB" dirty="0">
+                  <a:solidFill>
+                    <a:schemeClr val="tx1"/>
+                  </a:solidFill>
+                </a:rPr>
+                <a:t>Wave Crest</a:t>
+              </a:r>
+              <a:endParaRPr lang="en-AU" dirty="0">
+                <a:solidFill>
+                  <a:schemeClr val="tx1"/>
+                </a:solidFill>
+              </a:endParaRPr>
+            </a:p>
+          </p:txBody>
+        </p:sp>
+        <p:sp>
+          <p:nvSpPr>
+            <p:cNvPr id="42" name="Callout: Bent Line with Accent Bar 41">
+              <a:extLst>
+                <a:ext uri="{FF2B5EF4-FFF2-40B4-BE49-F238E27FC236}">
+                  <a16:creationId xmlns:a16="http://schemas.microsoft.com/office/drawing/2014/main" id="{717B9642-7DD3-42E0-A384-5732D8577EED}"/>
+                </a:ext>
+              </a:extLst>
+            </p:cNvPr>
+            <p:cNvSpPr/>
+            <p:nvPr/>
+          </p:nvSpPr>
+          <p:spPr>
+            <a:xfrm>
+              <a:off x="3565494" y="5013265"/>
+              <a:ext cx="1268236" cy="334042"/>
+            </a:xfrm>
+            <a:prstGeom prst="accentCallout2">
+              <a:avLst>
+                <a:gd name="adj1" fmla="val 20616"/>
+                <a:gd name="adj2" fmla="val 680"/>
+                <a:gd name="adj3" fmla="val 18750"/>
+                <a:gd name="adj4" fmla="val -16667"/>
+                <a:gd name="adj5" fmla="val -20947"/>
+                <a:gd name="adj6" fmla="val -33148"/>
+              </a:avLst>
+            </a:prstGeom>
+            <a:solidFill>
+              <a:schemeClr val="accent3">
+                <a:lumMod val="20000"/>
+                <a:lumOff val="80000"/>
+                <a:alpha val="86000"/>
+              </a:schemeClr>
+            </a:solidFill>
+            <a:ln>
+              <a:solidFill>
+                <a:schemeClr val="accent1">
+                  <a:shade val="50000"/>
+                </a:schemeClr>
+              </a:solidFill>
+              <a:tailEnd type="stealth"/>
+            </a:ln>
+          </p:spPr>
+          <p:style>
+            <a:lnRef idx="2">
+              <a:schemeClr val="accent1">
+                <a:shade val="50000"/>
+              </a:schemeClr>
+            </a:lnRef>
+            <a:fillRef idx="1">
+              <a:schemeClr val="accent1"/>
+            </a:fillRef>
+            <a:effectRef idx="0">
+              <a:schemeClr val="accent1"/>
+            </a:effectRef>
+            <a:fontRef idx="minor">
+              <a:schemeClr val="lt1"/>
+            </a:fontRef>
+          </p:style>
+          <p:txBody>
+            <a:bodyPr rtlCol="0" anchor="ctr"/>
+            <a:lstStyle/>
+            <a:p>
+              <a:r>
+                <a:rPr lang="en-GB" dirty="0">
+                  <a:solidFill>
+                    <a:schemeClr val="tx1"/>
+                  </a:solidFill>
+                </a:rPr>
+                <a:t>Wave Crest</a:t>
+              </a:r>
+              <a:endParaRPr lang="en-AU" dirty="0">
+                <a:solidFill>
+                  <a:schemeClr val="tx1"/>
+                </a:solidFill>
+              </a:endParaRPr>
+            </a:p>
+          </p:txBody>
+        </p:sp>
+      </p:grpSp>
+    </p:spTree>
+    <p:extLst>
+      <p:ext uri="{BB962C8B-B14F-4D97-AF65-F5344CB8AC3E}">
+        <p14:creationId xmlns:p14="http://schemas.microsoft.com/office/powerpoint/2010/main" val="2982400030"/>
+      </p:ext>
+    </p:extLst>
+  </p:cSld>
+  <p:clrMapOvr>
+    <a:masterClrMapping/>
+  </p:clrMapOvr>
+</p:sld>
+</file>
+
+<file path=ppt/slides/slide14.xml><?xml version="1.0" encoding="utf-8"?>
 <p:sld xmlns:a="http://schemas.openxmlformats.org/drawingml/2006/main" xmlns:r="http://schemas.openxmlformats.org/officeDocument/2006/relationships" xmlns:p="http://schemas.openxmlformats.org/presentationml/2006/main">
   <p:cSld>
     <p:bg>
@@ -9633,523 +10697,12 @@
           </p:txBody>
         </p:sp>
       </p:grpSp>
-    </p:spTree>
-    <p:extLst>
-      <p:ext uri="{BB962C8B-B14F-4D97-AF65-F5344CB8AC3E}">
-        <p14:creationId xmlns:p14="http://schemas.microsoft.com/office/powerpoint/2010/main" val="1650695578"/>
-      </p:ext>
-    </p:extLst>
-  </p:cSld>
-  <p:clrMapOvr>
-    <a:masterClrMapping/>
-  </p:clrMapOvr>
-</p:sld>
-</file>
-
-<file path=ppt/slides/slide14.xml><?xml version="1.0" encoding="utf-8"?>
-<p:sld xmlns:a="http://schemas.openxmlformats.org/drawingml/2006/main" xmlns:r="http://schemas.openxmlformats.org/officeDocument/2006/relationships" xmlns:p="http://schemas.openxmlformats.org/presentationml/2006/main">
-  <p:cSld>
-    <p:bg>
-      <p:bgPr>
-        <a:solidFill>
-          <a:schemeClr val="bg1">
-            <a:alpha val="32000"/>
-          </a:schemeClr>
-        </a:solidFill>
-        <a:effectLst/>
-      </p:bgPr>
-    </p:bg>
-    <p:spTree>
-      <p:nvGrpSpPr>
-        <p:cNvPr id="1" name=""/>
-        <p:cNvGrpSpPr/>
-        <p:nvPr/>
-      </p:nvGrpSpPr>
-      <p:grpSpPr>
-        <a:xfrm>
-          <a:off x="0" y="0"/>
-          <a:ext cx="0" cy="0"/>
-          <a:chOff x="0" y="0"/>
-          <a:chExt cx="0" cy="0"/>
-        </a:xfrm>
-      </p:grpSpPr>
-      <p:grpSp>
-        <p:nvGrpSpPr>
-          <p:cNvPr id="4" name="Group 3">
+      <p:sp>
+        <p:nvSpPr>
+          <p:cNvPr id="6" name="TextBox 5">
             <a:extLst>
               <a:ext uri="{FF2B5EF4-FFF2-40B4-BE49-F238E27FC236}">
-                <a16:creationId xmlns:a16="http://schemas.microsoft.com/office/drawing/2014/main" id="{C7FA3C29-615A-43E7-9194-B0D6727D3772}"/>
-              </a:ext>
-            </a:extLst>
-          </p:cNvPr>
-          <p:cNvGrpSpPr/>
-          <p:nvPr/>
-        </p:nvGrpSpPr>
-        <p:grpSpPr>
-          <a:xfrm>
-            <a:off x="-150374" y="137579"/>
-            <a:ext cx="11900845" cy="6325518"/>
-            <a:chOff x="-664394" y="1700579"/>
-            <a:chExt cx="11900845" cy="6325518"/>
-          </a:xfrm>
-        </p:grpSpPr>
-        <p:sp>
-          <p:nvSpPr>
-            <p:cNvPr id="18" name="Rectangle 17">
-              <a:extLst>
-                <a:ext uri="{FF2B5EF4-FFF2-40B4-BE49-F238E27FC236}">
-                  <a16:creationId xmlns:a16="http://schemas.microsoft.com/office/drawing/2014/main" id="{B6A0FC2C-3E78-4DEA-9362-B790C376DA3D}"/>
-                </a:ext>
-              </a:extLst>
-            </p:cNvPr>
-            <p:cNvSpPr/>
-            <p:nvPr/>
-          </p:nvSpPr>
-          <p:spPr>
-            <a:xfrm>
-              <a:off x="1110867" y="1700580"/>
-              <a:ext cx="2390660" cy="2434728"/>
-            </a:xfrm>
-            <a:prstGeom prst="rect">
-              <a:avLst/>
-            </a:prstGeom>
-            <a:solidFill>
-              <a:schemeClr val="accent1">
-                <a:lumMod val="40000"/>
-                <a:lumOff val="60000"/>
-                <a:alpha val="48000"/>
-              </a:schemeClr>
-            </a:solidFill>
-          </p:spPr>
-          <p:style>
-            <a:lnRef idx="2">
-              <a:schemeClr val="accent1">
-                <a:shade val="50000"/>
-              </a:schemeClr>
-            </a:lnRef>
-            <a:fillRef idx="1">
-              <a:schemeClr val="accent1"/>
-            </a:fillRef>
-            <a:effectRef idx="0">
-              <a:schemeClr val="accent1"/>
-            </a:effectRef>
-            <a:fontRef idx="minor">
-              <a:schemeClr val="lt1"/>
-            </a:fontRef>
-          </p:style>
-          <p:txBody>
-            <a:bodyPr rtlCol="0" anchor="ctr"/>
-            <a:lstStyle/>
-            <a:p>
-              <a:pPr algn="ctr"/>
-              <a:endParaRPr lang="en-AU"/>
-            </a:p>
-          </p:txBody>
-        </p:sp>
-        <p:sp>
-          <p:nvSpPr>
-            <p:cNvPr id="29" name="Parallelogram 28">
-              <a:extLst>
-                <a:ext uri="{FF2B5EF4-FFF2-40B4-BE49-F238E27FC236}">
-                  <a16:creationId xmlns:a16="http://schemas.microsoft.com/office/drawing/2014/main" id="{018A6C9A-369D-422C-944F-FA25CA48B296}"/>
-                </a:ext>
-              </a:extLst>
-            </p:cNvPr>
-            <p:cNvSpPr/>
-            <p:nvPr/>
-          </p:nvSpPr>
-          <p:spPr>
-            <a:xfrm rot="5400000">
-              <a:off x="4211130" y="990975"/>
-              <a:ext cx="6315718" cy="7734925"/>
-            </a:xfrm>
-            <a:prstGeom prst="parallelogram">
-              <a:avLst>
-                <a:gd name="adj" fmla="val 61081"/>
-              </a:avLst>
-            </a:prstGeom>
-            <a:solidFill>
-              <a:srgbClr val="7030A0">
-                <a:alpha val="22000"/>
-              </a:srgbClr>
-            </a:solidFill>
-          </p:spPr>
-          <p:style>
-            <a:lnRef idx="2">
-              <a:schemeClr val="accent1">
-                <a:shade val="50000"/>
-              </a:schemeClr>
-            </a:lnRef>
-            <a:fillRef idx="1">
-              <a:schemeClr val="accent1"/>
-            </a:fillRef>
-            <a:effectRef idx="0">
-              <a:schemeClr val="accent1"/>
-            </a:effectRef>
-            <a:fontRef idx="minor">
-              <a:schemeClr val="lt1"/>
-            </a:fontRef>
-          </p:style>
-          <p:txBody>
-            <a:bodyPr rtlCol="0" anchor="ctr"/>
-            <a:lstStyle/>
-            <a:p>
-              <a:pPr algn="ctr"/>
-              <a:endParaRPr lang="en-AU" dirty="0"/>
-            </a:p>
-          </p:txBody>
-        </p:sp>
-        <p:sp>
-          <p:nvSpPr>
-            <p:cNvPr id="15" name="Slope">
-              <a:extLst>
-                <a:ext uri="{FF2B5EF4-FFF2-40B4-BE49-F238E27FC236}">
-                  <a16:creationId xmlns:a16="http://schemas.microsoft.com/office/drawing/2014/main" id="{CCA16FE5-52A8-40E8-A5D3-D3EEE233E685}"/>
-                </a:ext>
-              </a:extLst>
-            </p:cNvPr>
-            <p:cNvSpPr/>
-            <p:nvPr/>
-          </p:nvSpPr>
-          <p:spPr>
-            <a:xfrm flipH="1">
-              <a:off x="1055278" y="1700579"/>
-              <a:ext cx="10181169" cy="6315718"/>
-            </a:xfrm>
-            <a:prstGeom prst="parallelogram">
-              <a:avLst>
-                <a:gd name="adj" fmla="val 122697"/>
-              </a:avLst>
-            </a:prstGeom>
-            <a:pattFill prst="pct70">
-              <a:fgClr>
-                <a:schemeClr val="tx1"/>
-              </a:fgClr>
-              <a:bgClr>
-                <a:schemeClr val="bg1"/>
-              </a:bgClr>
-            </a:pattFill>
-          </p:spPr>
-          <p:style>
-            <a:lnRef idx="2">
-              <a:schemeClr val="accent1">
-                <a:shade val="50000"/>
-              </a:schemeClr>
-            </a:lnRef>
-            <a:fillRef idx="1">
-              <a:schemeClr val="accent1"/>
-            </a:fillRef>
-            <a:effectRef idx="0">
-              <a:schemeClr val="accent1"/>
-            </a:effectRef>
-            <a:fontRef idx="minor">
-              <a:schemeClr val="lt1"/>
-            </a:fontRef>
-          </p:style>
-          <p:txBody>
-            <a:bodyPr rtlCol="0" anchor="ctr"/>
-            <a:lstStyle/>
-            <a:p>
-              <a:pPr algn="ctr"/>
-              <a:endParaRPr lang="en-AU" dirty="0"/>
-            </a:p>
-          </p:txBody>
-        </p:sp>
-        <p:sp>
-          <p:nvSpPr>
-            <p:cNvPr id="13" name="Parallelogram 12">
-              <a:extLst>
-                <a:ext uri="{FF2B5EF4-FFF2-40B4-BE49-F238E27FC236}">
-                  <a16:creationId xmlns:a16="http://schemas.microsoft.com/office/drawing/2014/main" id="{5B71B0CF-80B7-4FBB-86D8-BB902DB977BB}"/>
-                </a:ext>
-              </a:extLst>
-            </p:cNvPr>
-            <p:cNvSpPr/>
-            <p:nvPr/>
-          </p:nvSpPr>
-          <p:spPr>
-            <a:xfrm rot="5400000">
-              <a:off x="1798307" y="967348"/>
-              <a:ext cx="6315719" cy="7801780"/>
-            </a:xfrm>
-            <a:prstGeom prst="parallelogram">
-              <a:avLst>
-                <a:gd name="adj" fmla="val 61263"/>
-              </a:avLst>
-            </a:prstGeom>
-            <a:solidFill>
-              <a:srgbClr val="7030A0">
-                <a:alpha val="0"/>
-              </a:srgbClr>
-            </a:solidFill>
-          </p:spPr>
-          <p:style>
-            <a:lnRef idx="2">
-              <a:schemeClr val="accent1">
-                <a:shade val="50000"/>
-              </a:schemeClr>
-            </a:lnRef>
-            <a:fillRef idx="1">
-              <a:schemeClr val="accent1"/>
-            </a:fillRef>
-            <a:effectRef idx="0">
-              <a:schemeClr val="accent1"/>
-            </a:effectRef>
-            <a:fontRef idx="minor">
-              <a:schemeClr val="lt1"/>
-            </a:fontRef>
-          </p:style>
-          <p:txBody>
-            <a:bodyPr rtlCol="0" anchor="ctr"/>
-            <a:lstStyle/>
-            <a:p>
-              <a:pPr algn="ctr"/>
-              <a:endParaRPr lang="en-AU" dirty="0"/>
-            </a:p>
-          </p:txBody>
-        </p:sp>
-        <p:pic>
-          <p:nvPicPr>
-            <p:cNvPr id="31" name="Picture 30">
-              <a:extLst>
-                <a:ext uri="{FF2B5EF4-FFF2-40B4-BE49-F238E27FC236}">
-                  <a16:creationId xmlns:a16="http://schemas.microsoft.com/office/drawing/2014/main" id="{1339A7D4-CCDF-4DC8-AE83-A7BAF52CD0C7}"/>
-                </a:ext>
-              </a:extLst>
-            </p:cNvPr>
-            <p:cNvPicPr>
-              <a:picLocks noChangeAspect="1"/>
-            </p:cNvPicPr>
-            <p:nvPr/>
-          </p:nvPicPr>
-          <p:blipFill>
-            <a:blip r:embed="rId2"/>
-            <a:stretch>
-              <a:fillRect/>
-            </a:stretch>
-          </p:blipFill>
-          <p:spPr>
-            <a:xfrm rot="1039211">
-              <a:off x="8996777" y="5692826"/>
-              <a:ext cx="2200275" cy="2195651"/>
-            </a:xfrm>
-            <a:prstGeom prst="rect">
-              <a:avLst/>
-            </a:prstGeom>
-            <a:scene3d>
-              <a:camera prst="orthographicFront">
-                <a:rot lat="0" lon="3000000" rev="0"/>
-              </a:camera>
-              <a:lightRig rig="threePt" dir="t"/>
-            </a:scene3d>
-          </p:spPr>
-        </p:pic>
-        <p:sp>
-          <p:nvSpPr>
-            <p:cNvPr id="16" name="Isosceles Triangle 15">
-              <a:extLst>
-                <a:ext uri="{FF2B5EF4-FFF2-40B4-BE49-F238E27FC236}">
-                  <a16:creationId xmlns:a16="http://schemas.microsoft.com/office/drawing/2014/main" id="{7F7EA422-D12A-41D8-A091-DB35068EE3A1}"/>
-                </a:ext>
-              </a:extLst>
-            </p:cNvPr>
-            <p:cNvSpPr/>
-            <p:nvPr/>
-          </p:nvSpPr>
-          <p:spPr>
-            <a:xfrm rot="2340000" flipH="1" flipV="1">
-              <a:off x="-664394" y="4641419"/>
-              <a:ext cx="10020045" cy="1903203"/>
-            </a:xfrm>
-            <a:prstGeom prst="triangle">
-              <a:avLst>
-                <a:gd name="adj" fmla="val 84615"/>
-              </a:avLst>
-            </a:prstGeom>
-            <a:pattFill prst="pct40">
-              <a:fgClr>
-                <a:schemeClr val="tx1">
-                  <a:lumMod val="65000"/>
-                  <a:lumOff val="35000"/>
-                </a:schemeClr>
-              </a:fgClr>
-              <a:bgClr>
-                <a:schemeClr val="bg1"/>
-              </a:bgClr>
-            </a:pattFill>
-          </p:spPr>
-          <p:style>
-            <a:lnRef idx="2">
-              <a:schemeClr val="accent1">
-                <a:shade val="50000"/>
-              </a:schemeClr>
-            </a:lnRef>
-            <a:fillRef idx="1">
-              <a:schemeClr val="accent1"/>
-            </a:fillRef>
-            <a:effectRef idx="0">
-              <a:schemeClr val="accent1"/>
-            </a:effectRef>
-            <a:fontRef idx="minor">
-              <a:schemeClr val="lt1"/>
-            </a:fontRef>
-          </p:style>
-          <p:txBody>
-            <a:bodyPr rtlCol="0" anchor="ctr"/>
-            <a:lstStyle/>
-            <a:p>
-              <a:pPr algn="ctr"/>
-              <a:endParaRPr lang="en-AU"/>
-            </a:p>
-          </p:txBody>
-        </p:sp>
-        <p:pic>
-          <p:nvPicPr>
-            <p:cNvPr id="14" name="Picture 13">
-              <a:extLst>
-                <a:ext uri="{FF2B5EF4-FFF2-40B4-BE49-F238E27FC236}">
-                  <a16:creationId xmlns:a16="http://schemas.microsoft.com/office/drawing/2014/main" id="{AB2188E7-61D5-47EC-B5D4-6CD58B96B0B7}"/>
-                </a:ext>
-              </a:extLst>
-            </p:cNvPr>
-            <p:cNvPicPr>
-              <a:picLocks noChangeAspect="1"/>
-            </p:cNvPicPr>
-            <p:nvPr/>
-          </p:nvPicPr>
-          <p:blipFill>
-            <a:blip r:embed="rId2"/>
-            <a:stretch>
-              <a:fillRect/>
-            </a:stretch>
-          </p:blipFill>
-          <p:spPr>
-            <a:xfrm rot="1946617">
-              <a:off x="5042772" y="3775751"/>
-              <a:ext cx="2241134" cy="885528"/>
-            </a:xfrm>
-            <a:prstGeom prst="rect">
-              <a:avLst/>
-            </a:prstGeom>
-            <a:scene3d>
-              <a:camera prst="orthographicFront">
-                <a:rot lat="0" lon="2100000" rev="0"/>
-              </a:camera>
-              <a:lightRig rig="threePt" dir="t"/>
-            </a:scene3d>
-          </p:spPr>
-        </p:pic>
-        <p:grpSp>
-          <p:nvGrpSpPr>
-            <p:cNvPr id="5" name="Group 4">
-              <a:extLst>
-                <a:ext uri="{FF2B5EF4-FFF2-40B4-BE49-F238E27FC236}">
-                  <a16:creationId xmlns:a16="http://schemas.microsoft.com/office/drawing/2014/main" id="{3F0D1029-69F3-408E-9B64-60906E0F025A}"/>
-                </a:ext>
-              </a:extLst>
-            </p:cNvPr>
-            <p:cNvGrpSpPr/>
-            <p:nvPr/>
-          </p:nvGrpSpPr>
-          <p:grpSpPr>
-            <a:xfrm flipV="1">
-              <a:off x="1741812" y="2060154"/>
-              <a:ext cx="2390660" cy="212710"/>
-              <a:chOff x="1954968" y="0"/>
-              <a:chExt cx="2390660" cy="2434728"/>
-            </a:xfrm>
-          </p:grpSpPr>
-          <p:sp>
-            <p:nvSpPr>
-              <p:cNvPr id="19" name="Rectangle 18">
-                <a:extLst>
-                  <a:ext uri="{FF2B5EF4-FFF2-40B4-BE49-F238E27FC236}">
-                    <a16:creationId xmlns:a16="http://schemas.microsoft.com/office/drawing/2014/main" id="{242F7AF8-6442-4194-95D2-9019302E92F8}"/>
-                  </a:ext>
-                </a:extLst>
-              </p:cNvPr>
-              <p:cNvSpPr/>
-              <p:nvPr/>
-            </p:nvSpPr>
-            <p:spPr>
-              <a:xfrm>
-                <a:off x="1954968" y="0"/>
-                <a:ext cx="2390660" cy="2434728"/>
-              </a:xfrm>
-              <a:prstGeom prst="rect">
-                <a:avLst/>
-              </a:prstGeom>
-              <a:solidFill>
-                <a:schemeClr val="accent1">
-                  <a:lumMod val="40000"/>
-                  <a:lumOff val="60000"/>
-                  <a:alpha val="48000"/>
-                </a:schemeClr>
-              </a:solidFill>
-            </p:spPr>
-            <p:style>
-              <a:lnRef idx="2">
-                <a:schemeClr val="accent1">
-                  <a:shade val="50000"/>
-                </a:schemeClr>
-              </a:lnRef>
-              <a:fillRef idx="1">
-                <a:schemeClr val="accent1"/>
-              </a:fillRef>
-              <a:effectRef idx="0">
-                <a:schemeClr val="accent1"/>
-              </a:effectRef>
-              <a:fontRef idx="minor">
-                <a:schemeClr val="lt1"/>
-              </a:fontRef>
-            </p:style>
-            <p:txBody>
-              <a:bodyPr rtlCol="0" anchor="ctr"/>
-              <a:lstStyle/>
-              <a:p>
-                <a:pPr algn="ctr"/>
-                <a:endParaRPr lang="en-AU"/>
-              </a:p>
-            </p:txBody>
-          </p:sp>
-          <p:pic>
-            <p:nvPicPr>
-              <p:cNvPr id="20" name="Picture 19">
-                <a:extLst>
-                  <a:ext uri="{FF2B5EF4-FFF2-40B4-BE49-F238E27FC236}">
-                    <a16:creationId xmlns:a16="http://schemas.microsoft.com/office/drawing/2014/main" id="{456BE81B-90F1-478A-8080-130397093B35}"/>
-                  </a:ext>
-                </a:extLst>
-              </p:cNvPr>
-              <p:cNvPicPr>
-                <a:picLocks noChangeAspect="1"/>
-              </p:cNvPicPr>
-              <p:nvPr/>
-            </p:nvPicPr>
-            <p:blipFill>
-              <a:blip r:embed="rId2"/>
-              <a:stretch>
-                <a:fillRect/>
-              </a:stretch>
-            </p:blipFill>
-            <p:spPr>
-              <a:xfrm>
-                <a:off x="2029731" y="99152"/>
-                <a:ext cx="2241134" cy="2236424"/>
-              </a:xfrm>
-              <a:prstGeom prst="rect">
-                <a:avLst/>
-              </a:prstGeom>
-            </p:spPr>
-          </p:pic>
-        </p:grpSp>
-      </p:grpSp>
-      <p:sp>
-        <p:nvSpPr>
-          <p:cNvPr id="8" name="TextBox 7">
-            <a:extLst>
-              <a:ext uri="{FF2B5EF4-FFF2-40B4-BE49-F238E27FC236}">
-                <a16:creationId xmlns:a16="http://schemas.microsoft.com/office/drawing/2014/main" id="{8EEFF41A-8E87-4949-82EA-09196203D97A}"/>
+                <a16:creationId xmlns:a16="http://schemas.microsoft.com/office/drawing/2014/main" id="{BDC24B8B-341F-4135-BA0C-D2C4467A4B04}"/>
               </a:ext>
             </a:extLst>
           </p:cNvPr>
@@ -10158,8 +10711,8 @@
         </p:nvSpPr>
         <p:spPr>
           <a:xfrm>
-            <a:off x="9399982" y="6733116"/>
-            <a:ext cx="2267224" cy="369332"/>
+            <a:off x="720090" y="594360"/>
+            <a:ext cx="3255507" cy="646331"/>
           </a:xfrm>
           <a:prstGeom prst="rect">
             <a:avLst/>
@@ -10174,598 +10727,23 @@
           <a:p>
             <a:r>
               <a:rPr lang="en-GB" dirty="0"/>
-              <a:t>Energy - Compressible</a:t>
+              <a:t>Comparison of Q-slack effect for </a:t>
+            </a:r>
+          </a:p>
+          <a:p>
+            <a:pPr algn="ctr"/>
+            <a:r>
+              <a:rPr lang="en-GB" dirty="0"/>
+              <a:t>Water and Energy waves</a:t>
             </a:r>
             <a:endParaRPr lang="en-AU" dirty="0"/>
           </a:p>
         </p:txBody>
       </p:sp>
-      <p:sp>
-        <p:nvSpPr>
-          <p:cNvPr id="37" name="TextBox 36">
-            <a:extLst>
-              <a:ext uri="{FF2B5EF4-FFF2-40B4-BE49-F238E27FC236}">
-                <a16:creationId xmlns:a16="http://schemas.microsoft.com/office/drawing/2014/main" id="{CD60E422-5A2C-4431-8102-B325BBA99ADA}"/>
-              </a:ext>
-            </a:extLst>
-          </p:cNvPr>
-          <p:cNvSpPr txBox="1"/>
-          <p:nvPr/>
-        </p:nvSpPr>
-        <p:spPr>
-          <a:xfrm>
-            <a:off x="2863362" y="2484543"/>
-            <a:ext cx="1093120" cy="369332"/>
-          </a:xfrm>
-          <a:prstGeom prst="rect">
-            <a:avLst/>
-          </a:prstGeom>
-          <a:noFill/>
-        </p:spPr>
-        <p:txBody>
-          <a:bodyPr wrap="none" rtlCol="0">
-            <a:spAutoFit/>
-          </a:bodyPr>
-          <a:lstStyle/>
-          <a:p>
-            <a:r>
-              <a:rPr lang="en-GB" dirty="0"/>
-              <a:t>Boundary</a:t>
-            </a:r>
-            <a:endParaRPr lang="en-AU" dirty="0"/>
-          </a:p>
-        </p:txBody>
-      </p:sp>
-      <p:sp>
-        <p:nvSpPr>
-          <p:cNvPr id="39" name="Parallelogram 38">
-            <a:extLst>
-              <a:ext uri="{FF2B5EF4-FFF2-40B4-BE49-F238E27FC236}">
-                <a16:creationId xmlns:a16="http://schemas.microsoft.com/office/drawing/2014/main" id="{2BDD2C88-3FAC-4449-91BA-F85CDCC02C23}"/>
-              </a:ext>
-            </a:extLst>
-          </p:cNvPr>
-          <p:cNvSpPr/>
-          <p:nvPr/>
-        </p:nvSpPr>
-        <p:spPr>
-          <a:xfrm flipV="1">
-            <a:off x="1569293" y="116628"/>
-            <a:ext cx="10133366" cy="3871191"/>
-          </a:xfrm>
-          <a:prstGeom prst="parallelogram">
-            <a:avLst>
-              <a:gd name="adj" fmla="val 200464"/>
-            </a:avLst>
-          </a:prstGeom>
-          <a:solidFill>
-            <a:schemeClr val="bg1">
-              <a:lumMod val="50000"/>
-              <a:alpha val="41000"/>
-            </a:schemeClr>
-          </a:solidFill>
-        </p:spPr>
-        <p:style>
-          <a:lnRef idx="2">
-            <a:schemeClr val="accent1">
-              <a:shade val="50000"/>
-            </a:schemeClr>
-          </a:lnRef>
-          <a:fillRef idx="1">
-            <a:schemeClr val="accent1"/>
-          </a:fillRef>
-          <a:effectRef idx="0">
-            <a:schemeClr val="accent1"/>
-          </a:effectRef>
-          <a:fontRef idx="minor">
-            <a:schemeClr val="lt1"/>
-          </a:fontRef>
-        </p:style>
-        <p:txBody>
-          <a:bodyPr rtlCol="0" anchor="ctr"/>
-          <a:lstStyle/>
-          <a:p>
-            <a:pPr algn="ctr"/>
-            <a:endParaRPr lang="en-AU" dirty="0"/>
-          </a:p>
-        </p:txBody>
-      </p:sp>
-      <p:sp>
-        <p:nvSpPr>
-          <p:cNvPr id="38" name="TextBox 37">
-            <a:extLst>
-              <a:ext uri="{FF2B5EF4-FFF2-40B4-BE49-F238E27FC236}">
-                <a16:creationId xmlns:a16="http://schemas.microsoft.com/office/drawing/2014/main" id="{542ECBCB-E16D-4F81-A93E-2F2D1AAD79A3}"/>
-              </a:ext>
-            </a:extLst>
-          </p:cNvPr>
-          <p:cNvSpPr txBox="1"/>
-          <p:nvPr/>
-        </p:nvSpPr>
-        <p:spPr>
-          <a:xfrm>
-            <a:off x="9129165" y="3442959"/>
-            <a:ext cx="1093120" cy="369332"/>
-          </a:xfrm>
-          <a:prstGeom prst="rect">
-            <a:avLst/>
-          </a:prstGeom>
-          <a:noFill/>
-        </p:spPr>
-        <p:txBody>
-          <a:bodyPr wrap="none" rtlCol="0">
-            <a:spAutoFit/>
-          </a:bodyPr>
-          <a:lstStyle/>
-          <a:p>
-            <a:r>
-              <a:rPr lang="en-GB" dirty="0"/>
-              <a:t>Boundary</a:t>
-            </a:r>
-            <a:endParaRPr lang="en-AU" dirty="0"/>
-          </a:p>
-        </p:txBody>
-      </p:sp>
-      <p:sp>
-        <p:nvSpPr>
-          <p:cNvPr id="43" name="TextBox 42">
-            <a:extLst>
-              <a:ext uri="{FF2B5EF4-FFF2-40B4-BE49-F238E27FC236}">
-                <a16:creationId xmlns:a16="http://schemas.microsoft.com/office/drawing/2014/main" id="{E6A1757B-8391-4813-9422-BD17E57D1616}"/>
-              </a:ext>
-            </a:extLst>
-          </p:cNvPr>
-          <p:cNvSpPr txBox="1"/>
-          <p:nvPr/>
-        </p:nvSpPr>
-        <p:spPr>
-          <a:xfrm>
-            <a:off x="2061637" y="-262502"/>
-            <a:ext cx="1336456" cy="369332"/>
-          </a:xfrm>
-          <a:prstGeom prst="rect">
-            <a:avLst/>
-          </a:prstGeom>
-          <a:noFill/>
-        </p:spPr>
-        <p:txBody>
-          <a:bodyPr wrap="none" rtlCol="0">
-            <a:spAutoFit/>
-          </a:bodyPr>
-          <a:lstStyle/>
-          <a:p>
-            <a:r>
-              <a:rPr lang="en-GB" dirty="0"/>
-              <a:t>Zero Q-slack</a:t>
-            </a:r>
-            <a:endParaRPr lang="en-AU" dirty="0"/>
-          </a:p>
-        </p:txBody>
-      </p:sp>
-      <p:cxnSp>
-        <p:nvCxnSpPr>
-          <p:cNvPr id="54" name="Straight Arrow Connector 53">
-            <a:extLst>
-              <a:ext uri="{FF2B5EF4-FFF2-40B4-BE49-F238E27FC236}">
-                <a16:creationId xmlns:a16="http://schemas.microsoft.com/office/drawing/2014/main" id="{B365690E-A8AC-4567-A50D-A73ADD247E96}"/>
-              </a:ext>
-            </a:extLst>
-          </p:cNvPr>
-          <p:cNvCxnSpPr>
-            <a:cxnSpLocks/>
-          </p:cNvCxnSpPr>
-          <p:nvPr/>
-        </p:nvCxnSpPr>
-        <p:spPr>
-          <a:xfrm flipH="1" flipV="1">
-            <a:off x="354631" y="2936784"/>
-            <a:ext cx="7739126" cy="5147368"/>
-          </a:xfrm>
-          <a:prstGeom prst="straightConnector1">
-            <a:avLst/>
-          </a:prstGeom>
-          <a:ln w="57150">
-            <a:solidFill>
-              <a:srgbClr val="00B050"/>
-            </a:solidFill>
-            <a:tailEnd type="stealth" w="lg" len="lg"/>
-          </a:ln>
-        </p:spPr>
-        <p:style>
-          <a:lnRef idx="1">
-            <a:schemeClr val="accent1"/>
-          </a:lnRef>
-          <a:fillRef idx="0">
-            <a:schemeClr val="accent1"/>
-          </a:fillRef>
-          <a:effectRef idx="0">
-            <a:schemeClr val="accent1"/>
-          </a:effectRef>
-          <a:fontRef idx="minor">
-            <a:schemeClr val="tx1"/>
-          </a:fontRef>
-        </p:style>
-      </p:cxnSp>
-      <p:sp>
-        <p:nvSpPr>
-          <p:cNvPr id="58" name="TextBox 57">
-            <a:extLst>
-              <a:ext uri="{FF2B5EF4-FFF2-40B4-BE49-F238E27FC236}">
-                <a16:creationId xmlns:a16="http://schemas.microsoft.com/office/drawing/2014/main" id="{01BE667A-6A10-4818-BE66-51A82F95AE72}"/>
-              </a:ext>
-            </a:extLst>
-          </p:cNvPr>
-          <p:cNvSpPr txBox="1"/>
-          <p:nvPr/>
-        </p:nvSpPr>
-        <p:spPr>
-          <a:xfrm flipH="1">
-            <a:off x="10631022" y="5133038"/>
-            <a:ext cx="2241134" cy="369332"/>
-          </a:xfrm>
-          <a:prstGeom prst="rect">
-            <a:avLst/>
-          </a:prstGeom>
-          <a:noFill/>
-        </p:spPr>
-        <p:txBody>
-          <a:bodyPr wrap="square" rtlCol="0">
-            <a:spAutoFit/>
-          </a:bodyPr>
-          <a:lstStyle/>
-          <a:p>
-            <a:r>
-              <a:rPr lang="en-GB" dirty="0"/>
-              <a:t>Wave movement</a:t>
-            </a:r>
-            <a:endParaRPr lang="en-AU" dirty="0"/>
-          </a:p>
-        </p:txBody>
-      </p:sp>
-      <p:cxnSp>
-        <p:nvCxnSpPr>
-          <p:cNvPr id="40" name="Straight Connector 39">
-            <a:extLst>
-              <a:ext uri="{FF2B5EF4-FFF2-40B4-BE49-F238E27FC236}">
-                <a16:creationId xmlns:a16="http://schemas.microsoft.com/office/drawing/2014/main" id="{44A334B2-1A12-445B-95A7-2F47060BE9E0}"/>
-              </a:ext>
-            </a:extLst>
-          </p:cNvPr>
-          <p:cNvCxnSpPr>
-            <a:cxnSpLocks/>
-            <a:stCxn id="15" idx="1"/>
-          </p:cNvCxnSpPr>
-          <p:nvPr/>
-        </p:nvCxnSpPr>
-        <p:spPr>
-          <a:xfrm>
-            <a:off x="2785284" y="137579"/>
-            <a:ext cx="7769854" cy="6325518"/>
-          </a:xfrm>
-          <a:prstGeom prst="line">
-            <a:avLst/>
-          </a:prstGeom>
-          <a:ln>
-            <a:solidFill>
-              <a:schemeClr val="bg1"/>
-            </a:solidFill>
-          </a:ln>
-        </p:spPr>
-        <p:style>
-          <a:lnRef idx="1">
-            <a:schemeClr val="accent1"/>
-          </a:lnRef>
-          <a:fillRef idx="0">
-            <a:schemeClr val="accent1"/>
-          </a:fillRef>
-          <a:effectRef idx="0">
-            <a:schemeClr val="accent1"/>
-          </a:effectRef>
-          <a:fontRef idx="minor">
-            <a:schemeClr val="tx1"/>
-          </a:fontRef>
-        </p:style>
-      </p:cxnSp>
-      <p:cxnSp>
-        <p:nvCxnSpPr>
-          <p:cNvPr id="42" name="Straight Connector 41">
-            <a:extLst>
-              <a:ext uri="{FF2B5EF4-FFF2-40B4-BE49-F238E27FC236}">
-                <a16:creationId xmlns:a16="http://schemas.microsoft.com/office/drawing/2014/main" id="{B47DFCB8-E724-4752-B573-2E4DF3C34335}"/>
-              </a:ext>
-            </a:extLst>
-          </p:cNvPr>
-          <p:cNvCxnSpPr>
-            <a:stCxn id="39" idx="3"/>
-            <a:endCxn id="39" idx="1"/>
-          </p:cNvCxnSpPr>
-          <p:nvPr/>
-        </p:nvCxnSpPr>
-        <p:spPr>
-          <a:xfrm>
-            <a:off x="2755804" y="116628"/>
-            <a:ext cx="7760344" cy="3871191"/>
-          </a:xfrm>
-          <a:prstGeom prst="line">
-            <a:avLst/>
-          </a:prstGeom>
-          <a:ln>
-            <a:solidFill>
-              <a:schemeClr val="bg1"/>
-            </a:solidFill>
-          </a:ln>
-        </p:spPr>
-        <p:style>
-          <a:lnRef idx="1">
-            <a:schemeClr val="accent1"/>
-          </a:lnRef>
-          <a:fillRef idx="0">
-            <a:schemeClr val="accent1"/>
-          </a:fillRef>
-          <a:effectRef idx="0">
-            <a:schemeClr val="accent1"/>
-          </a:effectRef>
-          <a:fontRef idx="minor">
-            <a:schemeClr val="tx1"/>
-          </a:fontRef>
-        </p:style>
-      </p:cxnSp>
-      <p:cxnSp>
-        <p:nvCxnSpPr>
-          <p:cNvPr id="52" name="Straight Connector 51">
-            <a:extLst>
-              <a:ext uri="{FF2B5EF4-FFF2-40B4-BE49-F238E27FC236}">
-                <a16:creationId xmlns:a16="http://schemas.microsoft.com/office/drawing/2014/main" id="{BCF5A93B-74A1-4B59-809E-72308AFB248A}"/>
-              </a:ext>
-            </a:extLst>
-          </p:cNvPr>
-          <p:cNvCxnSpPr>
-            <a:cxnSpLocks/>
-            <a:stCxn id="39" idx="3"/>
-          </p:cNvCxnSpPr>
-          <p:nvPr/>
-        </p:nvCxnSpPr>
-        <p:spPr>
-          <a:xfrm>
-            <a:off x="2755804" y="116628"/>
-            <a:ext cx="7750446" cy="5147368"/>
-          </a:xfrm>
-          <a:prstGeom prst="line">
-            <a:avLst/>
-          </a:prstGeom>
-          <a:ln>
-            <a:solidFill>
-              <a:schemeClr val="bg1">
-                <a:lumMod val="95000"/>
-              </a:schemeClr>
-            </a:solidFill>
-          </a:ln>
-        </p:spPr>
-        <p:style>
-          <a:lnRef idx="1">
-            <a:schemeClr val="accent1"/>
-          </a:lnRef>
-          <a:fillRef idx="0">
-            <a:schemeClr val="accent1"/>
-          </a:fillRef>
-          <a:effectRef idx="0">
-            <a:schemeClr val="accent1"/>
-          </a:effectRef>
-          <a:fontRef idx="minor">
-            <a:schemeClr val="tx1"/>
-          </a:fontRef>
-        </p:style>
-      </p:cxnSp>
-      <p:cxnSp>
-        <p:nvCxnSpPr>
-          <p:cNvPr id="55" name="Straight Connector 54">
-            <a:extLst>
-              <a:ext uri="{FF2B5EF4-FFF2-40B4-BE49-F238E27FC236}">
-                <a16:creationId xmlns:a16="http://schemas.microsoft.com/office/drawing/2014/main" id="{3D1DCD3F-E6A7-4E6F-890B-D512F71D3110}"/>
-              </a:ext>
-            </a:extLst>
-          </p:cNvPr>
-          <p:cNvCxnSpPr>
-            <a:cxnSpLocks/>
-          </p:cNvCxnSpPr>
-          <p:nvPr/>
-        </p:nvCxnSpPr>
-        <p:spPr>
-          <a:xfrm>
-            <a:off x="10584043" y="4047198"/>
-            <a:ext cx="0" cy="2434728"/>
-          </a:xfrm>
-          <a:prstGeom prst="line">
-            <a:avLst/>
-          </a:prstGeom>
-          <a:ln>
-            <a:solidFill>
-              <a:schemeClr val="bg1"/>
-            </a:solidFill>
-          </a:ln>
-        </p:spPr>
-        <p:style>
-          <a:lnRef idx="1">
-            <a:schemeClr val="accent1"/>
-          </a:lnRef>
-          <a:fillRef idx="0">
-            <a:schemeClr val="accent1"/>
-          </a:fillRef>
-          <a:effectRef idx="0">
-            <a:schemeClr val="accent1"/>
-          </a:effectRef>
-          <a:fontRef idx="minor">
-            <a:schemeClr val="tx1"/>
-          </a:fontRef>
-        </p:style>
-      </p:cxnSp>
-      <p:cxnSp>
-        <p:nvCxnSpPr>
-          <p:cNvPr id="60" name="Straight Connector 59">
-            <a:extLst>
-              <a:ext uri="{FF2B5EF4-FFF2-40B4-BE49-F238E27FC236}">
-                <a16:creationId xmlns:a16="http://schemas.microsoft.com/office/drawing/2014/main" id="{3A114070-EF41-4DFB-9A5F-4908171B2760}"/>
-              </a:ext>
-            </a:extLst>
-          </p:cNvPr>
-          <p:cNvCxnSpPr>
-            <a:cxnSpLocks/>
-          </p:cNvCxnSpPr>
-          <p:nvPr/>
-        </p:nvCxnSpPr>
-        <p:spPr>
-          <a:xfrm>
-            <a:off x="6683784" y="2102412"/>
-            <a:ext cx="0" cy="1211854"/>
-          </a:xfrm>
-          <a:prstGeom prst="line">
-            <a:avLst/>
-          </a:prstGeom>
-          <a:ln>
-            <a:solidFill>
-              <a:schemeClr val="bg1"/>
-            </a:solidFill>
-          </a:ln>
-        </p:spPr>
-        <p:style>
-          <a:lnRef idx="1">
-            <a:schemeClr val="accent1"/>
-          </a:lnRef>
-          <a:fillRef idx="0">
-            <a:schemeClr val="accent1"/>
-          </a:fillRef>
-          <a:effectRef idx="0">
-            <a:schemeClr val="accent1"/>
-          </a:effectRef>
-          <a:fontRef idx="minor">
-            <a:schemeClr val="tx1"/>
-          </a:fontRef>
-        </p:style>
-      </p:cxnSp>
-      <p:cxnSp>
-        <p:nvCxnSpPr>
-          <p:cNvPr id="67" name="Straight Connector 66">
-            <a:extLst>
-              <a:ext uri="{FF2B5EF4-FFF2-40B4-BE49-F238E27FC236}">
-                <a16:creationId xmlns:a16="http://schemas.microsoft.com/office/drawing/2014/main" id="{1D3C4F05-85B9-4B1D-8BE4-373CCF29DC7E}"/>
-              </a:ext>
-            </a:extLst>
-          </p:cNvPr>
-          <p:cNvCxnSpPr/>
-          <p:nvPr/>
-        </p:nvCxnSpPr>
-        <p:spPr>
-          <a:xfrm flipH="1">
-            <a:off x="9981282" y="5133038"/>
-            <a:ext cx="4330" cy="11839"/>
-          </a:xfrm>
-          <a:prstGeom prst="line">
-            <a:avLst/>
-          </a:prstGeom>
-        </p:spPr>
-        <p:style>
-          <a:lnRef idx="1">
-            <a:schemeClr val="accent1"/>
-          </a:lnRef>
-          <a:fillRef idx="0">
-            <a:schemeClr val="accent1"/>
-          </a:fillRef>
-          <a:effectRef idx="0">
-            <a:schemeClr val="accent1"/>
-          </a:effectRef>
-          <a:fontRef idx="minor">
-            <a:schemeClr val="tx1"/>
-          </a:fontRef>
-        </p:style>
-      </p:cxnSp>
-      <p:cxnSp>
-        <p:nvCxnSpPr>
-          <p:cNvPr id="69" name="Straight Connector 68">
-            <a:extLst>
-              <a:ext uri="{FF2B5EF4-FFF2-40B4-BE49-F238E27FC236}">
-                <a16:creationId xmlns:a16="http://schemas.microsoft.com/office/drawing/2014/main" id="{56307509-4DD8-48F7-8D9F-0E237D75F0F1}"/>
-              </a:ext>
-            </a:extLst>
-          </p:cNvPr>
-          <p:cNvCxnSpPr/>
-          <p:nvPr/>
-        </p:nvCxnSpPr>
-        <p:spPr>
-          <a:xfrm flipH="1">
-            <a:off x="10222285" y="4259960"/>
-            <a:ext cx="711936" cy="1931520"/>
-          </a:xfrm>
-          <a:prstGeom prst="line">
-            <a:avLst/>
-          </a:prstGeom>
-          <a:ln>
-            <a:solidFill>
-              <a:schemeClr val="bg1"/>
-            </a:solidFill>
-          </a:ln>
-        </p:spPr>
-        <p:style>
-          <a:lnRef idx="1">
-            <a:schemeClr val="accent1"/>
-          </a:lnRef>
-          <a:fillRef idx="0">
-            <a:schemeClr val="accent1"/>
-          </a:fillRef>
-          <a:effectRef idx="0">
-            <a:schemeClr val="accent1"/>
-          </a:effectRef>
-          <a:fontRef idx="minor">
-            <a:schemeClr val="tx1"/>
-          </a:fontRef>
-        </p:style>
-      </p:cxnSp>
-      <p:cxnSp>
-        <p:nvCxnSpPr>
-          <p:cNvPr id="72" name="Straight Connector 71">
-            <a:extLst>
-              <a:ext uri="{FF2B5EF4-FFF2-40B4-BE49-F238E27FC236}">
-                <a16:creationId xmlns:a16="http://schemas.microsoft.com/office/drawing/2014/main" id="{938ACC3A-DAA9-4D8D-A16D-6743F0D8A300}"/>
-              </a:ext>
-            </a:extLst>
-          </p:cNvPr>
-          <p:cNvCxnSpPr>
-            <a:cxnSpLocks/>
-          </p:cNvCxnSpPr>
-          <p:nvPr/>
-        </p:nvCxnSpPr>
-        <p:spPr>
-          <a:xfrm>
-            <a:off x="6096000" y="2235223"/>
-            <a:ext cx="1508761" cy="1079043"/>
-          </a:xfrm>
-          <a:prstGeom prst="line">
-            <a:avLst/>
-          </a:prstGeom>
-          <a:ln>
-            <a:solidFill>
-              <a:schemeClr val="bg1"/>
-            </a:solidFill>
-          </a:ln>
-        </p:spPr>
-        <p:style>
-          <a:lnRef idx="1">
-            <a:schemeClr val="accent1"/>
-          </a:lnRef>
-          <a:fillRef idx="0">
-            <a:schemeClr val="accent1"/>
-          </a:fillRef>
-          <a:effectRef idx="0">
-            <a:schemeClr val="accent1"/>
-          </a:effectRef>
-          <a:fontRef idx="minor">
-            <a:schemeClr val="tx1"/>
-          </a:fontRef>
-        </p:style>
-      </p:cxnSp>
     </p:spTree>
     <p:extLst>
       <p:ext uri="{BB962C8B-B14F-4D97-AF65-F5344CB8AC3E}">
-        <p14:creationId xmlns:p14="http://schemas.microsoft.com/office/powerpoint/2010/main" val="2853666392"/>
+        <p14:creationId xmlns:p14="http://schemas.microsoft.com/office/powerpoint/2010/main" val="1650695578"/>
       </p:ext>
     </p:extLst>
   </p:cSld>
@@ -24711,897 +24689,6 @@
       </p:grpSpPr>
       <p:grpSp>
         <p:nvGrpSpPr>
-          <p:cNvPr id="8" name="Group 7">
-            <a:extLst>
-              <a:ext uri="{FF2B5EF4-FFF2-40B4-BE49-F238E27FC236}">
-                <a16:creationId xmlns:a16="http://schemas.microsoft.com/office/drawing/2014/main" id="{E7193782-8820-45BC-AEC1-718FA9027D46}"/>
-              </a:ext>
-            </a:extLst>
-          </p:cNvPr>
-          <p:cNvGrpSpPr/>
-          <p:nvPr/>
-        </p:nvGrpSpPr>
-        <p:grpSpPr>
-          <a:xfrm>
-            <a:off x="3573710" y="161908"/>
-            <a:ext cx="7077303" cy="5861382"/>
-            <a:chOff x="3573710" y="161908"/>
-            <a:chExt cx="7077303" cy="5861382"/>
-          </a:xfrm>
-        </p:grpSpPr>
-        <p:sp>
-          <p:nvSpPr>
-            <p:cNvPr id="4" name="Rectangle 3">
-              <a:extLst>
-                <a:ext uri="{FF2B5EF4-FFF2-40B4-BE49-F238E27FC236}">
-                  <a16:creationId xmlns:a16="http://schemas.microsoft.com/office/drawing/2014/main" id="{D0E77FF8-7701-472B-9EE9-42B35BDC868F}"/>
-                </a:ext>
-              </a:extLst>
-            </p:cNvPr>
-            <p:cNvSpPr/>
-            <p:nvPr/>
-          </p:nvSpPr>
-          <p:spPr>
-            <a:xfrm>
-              <a:off x="6094535" y="1753946"/>
-              <a:ext cx="4013257" cy="1675054"/>
-            </a:xfrm>
-            <a:prstGeom prst="rect">
-              <a:avLst/>
-            </a:prstGeom>
-            <a:solidFill>
-              <a:srgbClr val="FF0000">
-                <a:alpha val="16000"/>
-              </a:srgbClr>
-            </a:solidFill>
-          </p:spPr>
-          <p:style>
-            <a:lnRef idx="2">
-              <a:schemeClr val="accent1">
-                <a:shade val="50000"/>
-              </a:schemeClr>
-            </a:lnRef>
-            <a:fillRef idx="1">
-              <a:schemeClr val="accent1"/>
-            </a:fillRef>
-            <a:effectRef idx="0">
-              <a:schemeClr val="accent1"/>
-            </a:effectRef>
-            <a:fontRef idx="minor">
-              <a:schemeClr val="lt1"/>
-            </a:fontRef>
-          </p:style>
-          <p:txBody>
-            <a:bodyPr rtlCol="0" anchor="ctr"/>
-            <a:lstStyle/>
-            <a:p>
-              <a:pPr algn="ctr"/>
-              <a:endParaRPr lang="en-AU"/>
-            </a:p>
-          </p:txBody>
-        </p:sp>
-        <p:sp>
-          <p:nvSpPr>
-            <p:cNvPr id="28" name="Rectangle 27">
-              <a:extLst>
-                <a:ext uri="{FF2B5EF4-FFF2-40B4-BE49-F238E27FC236}">
-                  <a16:creationId xmlns:a16="http://schemas.microsoft.com/office/drawing/2014/main" id="{41C2B2A2-8A23-4E64-88FF-92C080B16F98}"/>
-                </a:ext>
-              </a:extLst>
-            </p:cNvPr>
-            <p:cNvSpPr/>
-            <p:nvPr/>
-          </p:nvSpPr>
-          <p:spPr>
-            <a:xfrm>
-              <a:off x="6096000" y="802872"/>
-              <a:ext cx="4013257" cy="939958"/>
-            </a:xfrm>
-            <a:prstGeom prst="rect">
-              <a:avLst/>
-            </a:prstGeom>
-            <a:solidFill>
-              <a:schemeClr val="accent6">
-                <a:alpha val="16000"/>
-              </a:schemeClr>
-            </a:solidFill>
-          </p:spPr>
-          <p:style>
-            <a:lnRef idx="2">
-              <a:schemeClr val="accent1">
-                <a:shade val="50000"/>
-              </a:schemeClr>
-            </a:lnRef>
-            <a:fillRef idx="1">
-              <a:schemeClr val="accent1"/>
-            </a:fillRef>
-            <a:effectRef idx="0">
-              <a:schemeClr val="accent1"/>
-            </a:effectRef>
-            <a:fontRef idx="minor">
-              <a:schemeClr val="lt1"/>
-            </a:fontRef>
-          </p:style>
-          <p:txBody>
-            <a:bodyPr rtlCol="0" anchor="ctr"/>
-            <a:lstStyle/>
-            <a:p>
-              <a:pPr algn="ctr"/>
-              <a:endParaRPr lang="en-AU" dirty="0"/>
-            </a:p>
-          </p:txBody>
-        </p:sp>
-        <p:grpSp>
-          <p:nvGrpSpPr>
-            <p:cNvPr id="3" name="Group 2">
-              <a:extLst>
-                <a:ext uri="{FF2B5EF4-FFF2-40B4-BE49-F238E27FC236}">
-                  <a16:creationId xmlns:a16="http://schemas.microsoft.com/office/drawing/2014/main" id="{F1A54309-7C19-42C3-ABA0-9D54F04AA2B4}"/>
-                </a:ext>
-              </a:extLst>
-            </p:cNvPr>
-            <p:cNvGrpSpPr/>
-            <p:nvPr/>
-          </p:nvGrpSpPr>
-          <p:grpSpPr>
-            <a:xfrm>
-              <a:off x="3573710" y="161908"/>
-              <a:ext cx="5817934" cy="5861382"/>
-              <a:chOff x="3573710" y="161908"/>
-              <a:chExt cx="5817934" cy="5861382"/>
-            </a:xfrm>
-          </p:grpSpPr>
-          <p:grpSp>
-            <p:nvGrpSpPr>
-              <p:cNvPr id="55" name="Group 54">
-                <a:extLst>
-                  <a:ext uri="{FF2B5EF4-FFF2-40B4-BE49-F238E27FC236}">
-                    <a16:creationId xmlns:a16="http://schemas.microsoft.com/office/drawing/2014/main" id="{62B5FDAF-ACD4-4439-A513-26409AFBC300}"/>
-                  </a:ext>
-                </a:extLst>
-              </p:cNvPr>
-              <p:cNvGrpSpPr/>
-              <p:nvPr/>
-            </p:nvGrpSpPr>
-            <p:grpSpPr>
-              <a:xfrm>
-                <a:off x="3573710" y="248748"/>
-                <a:ext cx="5716745" cy="5774542"/>
-                <a:chOff x="3573710" y="248748"/>
-                <a:chExt cx="5716745" cy="5774542"/>
-              </a:xfrm>
-            </p:grpSpPr>
-            <p:grpSp>
-              <p:nvGrpSpPr>
-                <p:cNvPr id="49" name="Group 48">
-                  <a:extLst>
-                    <a:ext uri="{FF2B5EF4-FFF2-40B4-BE49-F238E27FC236}">
-                      <a16:creationId xmlns:a16="http://schemas.microsoft.com/office/drawing/2014/main" id="{1955BAE0-D53F-4678-B924-2AA5035F0770}"/>
-                    </a:ext>
-                  </a:extLst>
-                </p:cNvPr>
-                <p:cNvGrpSpPr/>
-                <p:nvPr/>
-              </p:nvGrpSpPr>
-              <p:grpSpPr>
-                <a:xfrm>
-                  <a:off x="3573710" y="248748"/>
-                  <a:ext cx="5716745" cy="5774542"/>
-                  <a:chOff x="3573710" y="248748"/>
-                  <a:chExt cx="5716745" cy="5774542"/>
-                </a:xfrm>
-              </p:grpSpPr>
-              <p:grpSp>
-                <p:nvGrpSpPr>
-                  <p:cNvPr id="20" name="Group 19">
-                    <a:extLst>
-                      <a:ext uri="{FF2B5EF4-FFF2-40B4-BE49-F238E27FC236}">
-                        <a16:creationId xmlns:a16="http://schemas.microsoft.com/office/drawing/2014/main" id="{77073334-89E2-450C-A691-B22B2399AF22}"/>
-                      </a:ext>
-                    </a:extLst>
-                  </p:cNvPr>
-                  <p:cNvGrpSpPr/>
-                  <p:nvPr/>
-                </p:nvGrpSpPr>
-                <p:grpSpPr>
-                  <a:xfrm>
-                    <a:off x="3573710" y="553673"/>
-                    <a:ext cx="5414744" cy="5469617"/>
-                    <a:chOff x="3573710" y="553673"/>
-                    <a:chExt cx="5414744" cy="5469617"/>
-                  </a:xfrm>
-                </p:grpSpPr>
-                <p:grpSp>
-                  <p:nvGrpSpPr>
-                    <p:cNvPr id="11" name="Group 10">
-                      <a:extLst>
-                        <a:ext uri="{FF2B5EF4-FFF2-40B4-BE49-F238E27FC236}">
-                          <a16:creationId xmlns:a16="http://schemas.microsoft.com/office/drawing/2014/main" id="{0ACB2228-17AA-4BE4-A8F9-29F398F18458}"/>
-                        </a:ext>
-                      </a:extLst>
-                    </p:cNvPr>
-                    <p:cNvGrpSpPr/>
-                    <p:nvPr/>
-                  </p:nvGrpSpPr>
-                  <p:grpSpPr>
-                    <a:xfrm>
-                      <a:off x="3573710" y="553673"/>
-                      <a:ext cx="5414744" cy="5469617"/>
-                      <a:chOff x="3573710" y="553673"/>
-                      <a:chExt cx="5414744" cy="5469617"/>
-                    </a:xfrm>
-                  </p:grpSpPr>
-                  <p:cxnSp>
-                    <p:nvCxnSpPr>
-                      <p:cNvPr id="5" name="Straight Arrow Connector 4">
-                        <a:extLst>
-                          <a:ext uri="{FF2B5EF4-FFF2-40B4-BE49-F238E27FC236}">
-                            <a16:creationId xmlns:a16="http://schemas.microsoft.com/office/drawing/2014/main" id="{FE973B01-D7A4-49C9-AE68-EF4563F934AD}"/>
-                          </a:ext>
-                        </a:extLst>
-                      </p:cNvPr>
-                      <p:cNvCxnSpPr>
-                        <a:cxnSpLocks/>
-                      </p:cNvCxnSpPr>
-                      <p:nvPr/>
-                    </p:nvCxnSpPr>
-                    <p:spPr>
-                      <a:xfrm>
-                        <a:off x="6096000" y="553673"/>
-                        <a:ext cx="0" cy="3276118"/>
-                      </a:xfrm>
-                      <a:prstGeom prst="straightConnector1">
-                        <a:avLst/>
-                      </a:prstGeom>
-                      <a:ln w="19050">
-                        <a:solidFill>
-                          <a:schemeClr val="bg1">
-                            <a:lumMod val="50000"/>
-                          </a:schemeClr>
-                        </a:solidFill>
-                        <a:prstDash val="solid"/>
-                        <a:headEnd type="arrow" w="med" len="med"/>
-                        <a:tailEnd type="arrow" w="med" len="med"/>
-                      </a:ln>
-                    </p:spPr>
-                    <p:style>
-                      <a:lnRef idx="1">
-                        <a:schemeClr val="accent1"/>
-                      </a:lnRef>
-                      <a:fillRef idx="0">
-                        <a:schemeClr val="accent1"/>
-                      </a:fillRef>
-                      <a:effectRef idx="0">
-                        <a:schemeClr val="accent1"/>
-                      </a:effectRef>
-                      <a:fontRef idx="minor">
-                        <a:schemeClr val="tx1"/>
-                      </a:fontRef>
-                    </p:style>
-                  </p:cxnSp>
-                  <p:cxnSp>
-                    <p:nvCxnSpPr>
-                      <p:cNvPr id="7" name="Straight Arrow Connector 6">
-                        <a:extLst>
-                          <a:ext uri="{FF2B5EF4-FFF2-40B4-BE49-F238E27FC236}">
-                            <a16:creationId xmlns:a16="http://schemas.microsoft.com/office/drawing/2014/main" id="{7E64A458-4CD0-4635-B13B-FCE2DB2F0838}"/>
-                          </a:ext>
-                        </a:extLst>
-                      </p:cNvPr>
-                      <p:cNvCxnSpPr>
-                        <a:cxnSpLocks/>
-                      </p:cNvCxnSpPr>
-                      <p:nvPr/>
-                    </p:nvCxnSpPr>
-                    <p:spPr>
-                      <a:xfrm>
-                        <a:off x="5658025" y="3433665"/>
-                        <a:ext cx="3330429" cy="0"/>
-                      </a:xfrm>
-                      <a:prstGeom prst="straightConnector1">
-                        <a:avLst/>
-                      </a:prstGeom>
-                      <a:ln w="19050">
-                        <a:solidFill>
-                          <a:schemeClr val="bg1">
-                            <a:lumMod val="50000"/>
-                          </a:schemeClr>
-                        </a:solidFill>
-                        <a:headEnd type="arrow" w="med" len="med"/>
-                        <a:tailEnd type="arrow" w="med" len="med"/>
-                      </a:ln>
-                    </p:spPr>
-                    <p:style>
-                      <a:lnRef idx="1">
-                        <a:schemeClr val="accent1"/>
-                      </a:lnRef>
-                      <a:fillRef idx="0">
-                        <a:schemeClr val="accent1"/>
-                      </a:fillRef>
-                      <a:effectRef idx="0">
-                        <a:schemeClr val="accent1"/>
-                      </a:effectRef>
-                      <a:fontRef idx="minor">
-                        <a:schemeClr val="tx1"/>
-                      </a:fontRef>
-                    </p:style>
-                  </p:cxnSp>
-                  <p:sp>
-                    <p:nvSpPr>
-                      <p:cNvPr id="10" name="Arc 9">
-                        <a:extLst>
-                          <a:ext uri="{FF2B5EF4-FFF2-40B4-BE49-F238E27FC236}">
-                            <a16:creationId xmlns:a16="http://schemas.microsoft.com/office/drawing/2014/main" id="{627EC3D2-3F22-4210-93C7-EBB880B735E4}"/>
-                          </a:ext>
-                        </a:extLst>
-                      </p:cNvPr>
-                      <p:cNvSpPr/>
-                      <p:nvPr/>
-                    </p:nvSpPr>
-                    <p:spPr>
-                      <a:xfrm>
-                        <a:off x="3573710" y="813732"/>
-                        <a:ext cx="5041781" cy="5209558"/>
-                      </a:xfrm>
-                      <a:prstGeom prst="arc">
-                        <a:avLst>
-                          <a:gd name="adj1" fmla="val 16256644"/>
-                          <a:gd name="adj2" fmla="val 11832"/>
-                        </a:avLst>
-                      </a:prstGeom>
-                      <a:ln w="19050">
-                        <a:solidFill>
-                          <a:schemeClr val="tx1">
-                            <a:lumMod val="50000"/>
-                            <a:lumOff val="50000"/>
-                          </a:schemeClr>
-                        </a:solidFill>
-                      </a:ln>
-                    </p:spPr>
-                    <p:style>
-                      <a:lnRef idx="1">
-                        <a:schemeClr val="accent1"/>
-                      </a:lnRef>
-                      <a:fillRef idx="0">
-                        <a:schemeClr val="accent1"/>
-                      </a:fillRef>
-                      <a:effectRef idx="0">
-                        <a:schemeClr val="accent1"/>
-                      </a:effectRef>
-                      <a:fontRef idx="minor">
-                        <a:schemeClr val="tx1"/>
-                      </a:fontRef>
-                    </p:style>
-                    <p:txBody>
-                      <a:bodyPr rtlCol="0" anchor="ctr"/>
-                      <a:lstStyle/>
-                      <a:p>
-                        <a:pPr algn="ctr"/>
-                        <a:endParaRPr lang="en-AU" dirty="0"/>
-                      </a:p>
-                    </p:txBody>
-                  </p:sp>
-                </p:grpSp>
-                <p:sp>
-                  <p:nvSpPr>
-                    <p:cNvPr id="19" name="Oval 18">
-                      <a:extLst>
-                        <a:ext uri="{FF2B5EF4-FFF2-40B4-BE49-F238E27FC236}">
-                          <a16:creationId xmlns:a16="http://schemas.microsoft.com/office/drawing/2014/main" id="{3957E3D9-55E3-4039-89E9-E7D14B9F4B62}"/>
-                        </a:ext>
-                      </a:extLst>
-                    </p:cNvPr>
-                    <p:cNvSpPr/>
-                    <p:nvPr/>
-                  </p:nvSpPr>
-                  <p:spPr>
-                    <a:xfrm>
-                      <a:off x="8005894" y="1720703"/>
-                      <a:ext cx="62918" cy="62918"/>
-                    </a:xfrm>
-                    <a:prstGeom prst="ellipse">
-                      <a:avLst/>
-                    </a:prstGeom>
-                  </p:spPr>
-                  <p:style>
-                    <a:lnRef idx="2">
-                      <a:schemeClr val="accent1">
-                        <a:shade val="50000"/>
-                      </a:schemeClr>
-                    </a:lnRef>
-                    <a:fillRef idx="1">
-                      <a:schemeClr val="accent1"/>
-                    </a:fillRef>
-                    <a:effectRef idx="0">
-                      <a:schemeClr val="accent1"/>
-                    </a:effectRef>
-                    <a:fontRef idx="minor">
-                      <a:schemeClr val="lt1"/>
-                    </a:fontRef>
-                  </p:style>
-                  <p:txBody>
-                    <a:bodyPr rtlCol="0" anchor="ctr"/>
-                    <a:lstStyle/>
-                    <a:p>
-                      <a:pPr algn="ctr"/>
-                      <a:endParaRPr lang="en-AU"/>
-                    </a:p>
-                  </p:txBody>
-                </p:sp>
-                <p:cxnSp>
-                  <p:nvCxnSpPr>
-                    <p:cNvPr id="16" name="Straight Arrow Connector 15">
-                      <a:extLst>
-                        <a:ext uri="{FF2B5EF4-FFF2-40B4-BE49-F238E27FC236}">
-                          <a16:creationId xmlns:a16="http://schemas.microsoft.com/office/drawing/2014/main" id="{4882507F-54FA-4F7D-9A9C-FF3637FA9C7F}"/>
-                        </a:ext>
-                      </a:extLst>
-                    </p:cNvPr>
-                    <p:cNvCxnSpPr>
-                      <a:cxnSpLocks/>
-                    </p:cNvCxnSpPr>
-                    <p:nvPr/>
-                  </p:nvCxnSpPr>
-                  <p:spPr>
-                    <a:xfrm flipV="1">
-                      <a:off x="6096000" y="1761688"/>
-                      <a:ext cx="1941354" cy="1667313"/>
-                    </a:xfrm>
-                    <a:prstGeom prst="straightConnector1">
-                      <a:avLst/>
-                    </a:prstGeom>
-                    <a:ln w="19050">
-                      <a:solidFill>
-                        <a:srgbClr val="FF0000"/>
-                      </a:solidFill>
-                      <a:tailEnd type="stealth" w="lg" len="lg"/>
-                    </a:ln>
-                  </p:spPr>
-                  <p:style>
-                    <a:lnRef idx="1">
-                      <a:schemeClr val="accent1"/>
-                    </a:lnRef>
-                    <a:fillRef idx="0">
-                      <a:schemeClr val="accent1"/>
-                    </a:fillRef>
-                    <a:effectRef idx="0">
-                      <a:schemeClr val="accent1"/>
-                    </a:effectRef>
-                    <a:fontRef idx="minor">
-                      <a:schemeClr val="tx1"/>
-                    </a:fontRef>
-                  </p:style>
-                </p:cxnSp>
-              </p:grpSp>
-              <p:cxnSp>
-                <p:nvCxnSpPr>
-                  <p:cNvPr id="40" name="Straight Arrow Connector 39">
-                    <a:extLst>
-                      <a:ext uri="{FF2B5EF4-FFF2-40B4-BE49-F238E27FC236}">
-                        <a16:creationId xmlns:a16="http://schemas.microsoft.com/office/drawing/2014/main" id="{5956BE8D-C09D-4C11-BF40-C1F8C200A13A}"/>
-                      </a:ext>
-                    </a:extLst>
-                  </p:cNvPr>
-                  <p:cNvCxnSpPr>
-                    <a:stCxn id="19" idx="2"/>
-                  </p:cNvCxnSpPr>
-                  <p:nvPr/>
-                </p:nvCxnSpPr>
-                <p:spPr>
-                  <a:xfrm flipH="1" flipV="1">
-                    <a:off x="6080271" y="1752161"/>
-                    <a:ext cx="1925623" cy="1"/>
-                  </a:xfrm>
-                  <a:prstGeom prst="straightConnector1">
-                    <a:avLst/>
-                  </a:prstGeom>
-                  <a:ln w="19050">
-                    <a:solidFill>
-                      <a:schemeClr val="bg1">
-                        <a:lumMod val="50000"/>
-                      </a:schemeClr>
-                    </a:solidFill>
-                    <a:prstDash val="sysDash"/>
-                    <a:tailEnd type="triangle"/>
-                  </a:ln>
-                </p:spPr>
-                <p:style>
-                  <a:lnRef idx="1">
-                    <a:schemeClr val="accent1"/>
-                  </a:lnRef>
-                  <a:fillRef idx="0">
-                    <a:schemeClr val="accent1"/>
-                  </a:fillRef>
-                  <a:effectRef idx="0">
-                    <a:schemeClr val="accent1"/>
-                  </a:effectRef>
-                  <a:fontRef idx="minor">
-                    <a:schemeClr val="tx1"/>
-                  </a:fontRef>
-                </p:style>
-              </p:cxnSp>
-              <p:sp>
-                <p:nvSpPr>
-                  <p:cNvPr id="41" name="TextBox 40">
-                    <a:extLst>
-                      <a:ext uri="{FF2B5EF4-FFF2-40B4-BE49-F238E27FC236}">
-                        <a16:creationId xmlns:a16="http://schemas.microsoft.com/office/drawing/2014/main" id="{10B6ECF5-1F08-482F-8796-E2528DD0EBD7}"/>
-                      </a:ext>
-                    </a:extLst>
-                  </p:cNvPr>
-                  <p:cNvSpPr txBox="1"/>
-                  <p:nvPr/>
-                </p:nvSpPr>
-                <p:spPr>
-                  <a:xfrm>
-                    <a:off x="6501579" y="3043939"/>
-                    <a:ext cx="308098" cy="369332"/>
-                  </a:xfrm>
-                  <a:prstGeom prst="rect">
-                    <a:avLst/>
-                  </a:prstGeom>
-                  <a:noFill/>
-                </p:spPr>
-                <p:txBody>
-                  <a:bodyPr wrap="none" rtlCol="0">
-                    <a:spAutoFit/>
-                  </a:bodyPr>
-                  <a:lstStyle/>
-                  <a:p>
-                    <a:r>
-                      <a:rPr lang="el-GR" dirty="0"/>
-                      <a:t>θ</a:t>
-                    </a:r>
-                    <a:endParaRPr lang="en-AU" dirty="0"/>
-                  </a:p>
-                </p:txBody>
-              </p:sp>
-              <p:sp>
-                <p:nvSpPr>
-                  <p:cNvPr id="43" name="TextBox 42">
-                    <a:extLst>
-                      <a:ext uri="{FF2B5EF4-FFF2-40B4-BE49-F238E27FC236}">
-                        <a16:creationId xmlns:a16="http://schemas.microsoft.com/office/drawing/2014/main" id="{9C2C76D3-5508-4286-9D0C-1078C5C7AEDB}"/>
-                      </a:ext>
-                    </a:extLst>
-                  </p:cNvPr>
-                  <p:cNvSpPr txBox="1"/>
-                  <p:nvPr/>
-                </p:nvSpPr>
-                <p:spPr>
-                  <a:xfrm>
-                    <a:off x="5059098" y="1567369"/>
-                    <a:ext cx="1029037" cy="369332"/>
-                  </a:xfrm>
-                  <a:prstGeom prst="rect">
-                    <a:avLst/>
-                  </a:prstGeom>
-                  <a:noFill/>
-                </p:spPr>
-                <p:txBody>
-                  <a:bodyPr wrap="square" rtlCol="0">
-                    <a:spAutoFit/>
-                  </a:bodyPr>
-                  <a:lstStyle/>
-                  <a:p>
-                    <a:r>
-                      <a:rPr lang="en-AU" dirty="0"/>
-                      <a:t>q = sin </a:t>
-                    </a:r>
-                    <a:r>
-                      <a:rPr lang="el-GR" dirty="0"/>
-                      <a:t>θ</a:t>
-                    </a:r>
-                    <a:endParaRPr lang="en-AU" dirty="0"/>
-                  </a:p>
-                </p:txBody>
-              </p:sp>
-              <p:sp>
-                <p:nvSpPr>
-                  <p:cNvPr id="45" name="TextBox 44">
-                    <a:extLst>
-                      <a:ext uri="{FF2B5EF4-FFF2-40B4-BE49-F238E27FC236}">
-                        <a16:creationId xmlns:a16="http://schemas.microsoft.com/office/drawing/2014/main" id="{B173B910-5355-4ADD-A2DC-ACC65D57F60A}"/>
-                      </a:ext>
-                    </a:extLst>
-                  </p:cNvPr>
-                  <p:cNvSpPr txBox="1"/>
-                  <p:nvPr/>
-                </p:nvSpPr>
-                <p:spPr>
-                  <a:xfrm>
-                    <a:off x="8988454" y="3218119"/>
-                    <a:ext cx="302001" cy="369332"/>
-                  </a:xfrm>
-                  <a:prstGeom prst="rect">
-                    <a:avLst/>
-                  </a:prstGeom>
-                  <a:noFill/>
-                </p:spPr>
-                <p:txBody>
-                  <a:bodyPr wrap="square" rtlCol="0">
-                    <a:spAutoFit/>
-                  </a:bodyPr>
-                  <a:lstStyle/>
-                  <a:p>
-                    <a:r>
-                      <a:rPr lang="el-GR" dirty="0"/>
-                      <a:t>φ</a:t>
-                    </a:r>
-                    <a:endParaRPr lang="en-AU" dirty="0"/>
-                  </a:p>
-                </p:txBody>
-              </p:sp>
-              <p:sp>
-                <p:nvSpPr>
-                  <p:cNvPr id="46" name="TextBox 45">
-                    <a:extLst>
-                      <a:ext uri="{FF2B5EF4-FFF2-40B4-BE49-F238E27FC236}">
-                        <a16:creationId xmlns:a16="http://schemas.microsoft.com/office/drawing/2014/main" id="{FDBCF700-188E-44DE-AC5D-DBF0F189172F}"/>
-                      </a:ext>
-                    </a:extLst>
-                  </p:cNvPr>
-                  <p:cNvSpPr txBox="1"/>
-                  <p:nvPr/>
-                </p:nvSpPr>
-                <p:spPr>
-                  <a:xfrm>
-                    <a:off x="5918056" y="248748"/>
-                    <a:ext cx="340158" cy="369332"/>
-                  </a:xfrm>
-                  <a:prstGeom prst="rect">
-                    <a:avLst/>
-                  </a:prstGeom>
-                  <a:noFill/>
-                </p:spPr>
-                <p:txBody>
-                  <a:bodyPr wrap="none" rtlCol="0">
-                    <a:spAutoFit/>
-                  </a:bodyPr>
-                  <a:lstStyle/>
-                  <a:p>
-                    <a:r>
-                      <a:rPr lang="en-GB" dirty="0"/>
-                      <a:t>Q</a:t>
-                    </a:r>
-                    <a:endParaRPr lang="en-AU" dirty="0"/>
-                  </a:p>
-                </p:txBody>
-              </p:sp>
-            </p:grpSp>
-            <p:sp>
-              <p:nvSpPr>
-                <p:cNvPr id="53" name="Oval 52">
-                  <a:extLst>
-                    <a:ext uri="{FF2B5EF4-FFF2-40B4-BE49-F238E27FC236}">
-                      <a16:creationId xmlns:a16="http://schemas.microsoft.com/office/drawing/2014/main" id="{6668B356-3054-41B7-88C4-CA338368754E}"/>
-                    </a:ext>
-                  </a:extLst>
-                </p:cNvPr>
-                <p:cNvSpPr/>
-                <p:nvPr/>
-              </p:nvSpPr>
-              <p:spPr>
-                <a:xfrm>
-                  <a:off x="6057278" y="775076"/>
-                  <a:ext cx="74644" cy="74644"/>
-                </a:xfrm>
-                <a:prstGeom prst="ellipse">
-                  <a:avLst/>
-                </a:prstGeom>
-                <a:noFill/>
-                <a:ln>
-                  <a:solidFill>
-                    <a:schemeClr val="bg1">
-                      <a:lumMod val="50000"/>
-                    </a:schemeClr>
-                  </a:solidFill>
-                </a:ln>
-              </p:spPr>
-              <p:style>
-                <a:lnRef idx="2">
-                  <a:schemeClr val="accent1">
-                    <a:shade val="50000"/>
-                  </a:schemeClr>
-                </a:lnRef>
-                <a:fillRef idx="1">
-                  <a:schemeClr val="accent1"/>
-                </a:fillRef>
-                <a:effectRef idx="0">
-                  <a:schemeClr val="accent1"/>
-                </a:effectRef>
-                <a:fontRef idx="minor">
-                  <a:schemeClr val="lt1"/>
-                </a:fontRef>
-              </p:style>
-              <p:txBody>
-                <a:bodyPr rtlCol="0" anchor="ctr"/>
-                <a:lstStyle/>
-                <a:p>
-                  <a:pPr algn="ctr"/>
-                  <a:endParaRPr lang="en-AU"/>
-                </a:p>
-              </p:txBody>
-            </p:sp>
-            <p:sp>
-              <p:nvSpPr>
-                <p:cNvPr id="54" name="TextBox 53">
-                  <a:extLst>
-                    <a:ext uri="{FF2B5EF4-FFF2-40B4-BE49-F238E27FC236}">
-                      <a16:creationId xmlns:a16="http://schemas.microsoft.com/office/drawing/2014/main" id="{B10070ED-642E-4995-8D1D-87A6120F938D}"/>
-                    </a:ext>
-                  </a:extLst>
-                </p:cNvPr>
-                <p:cNvSpPr txBox="1"/>
-                <p:nvPr/>
-              </p:nvSpPr>
-              <p:spPr>
-                <a:xfrm>
-                  <a:off x="4981717" y="644295"/>
-                  <a:ext cx="1034963" cy="369332"/>
-                </a:xfrm>
-                <a:prstGeom prst="rect">
-                  <a:avLst/>
-                </a:prstGeom>
-                <a:noFill/>
-              </p:spPr>
-              <p:txBody>
-                <a:bodyPr wrap="none" rtlCol="0">
-                  <a:spAutoFit/>
-                </a:bodyPr>
-                <a:lstStyle/>
-                <a:p>
-                  <a:r>
-                    <a:rPr lang="en-GB" dirty="0"/>
-                    <a:t>tempo=0</a:t>
-                  </a:r>
-                  <a:endParaRPr lang="en-AU" dirty="0"/>
-                </a:p>
-              </p:txBody>
-            </p:sp>
-          </p:grpSp>
-          <p:sp>
-            <p:nvSpPr>
-              <p:cNvPr id="2" name="TextBox 1">
-                <a:extLst>
-                  <a:ext uri="{FF2B5EF4-FFF2-40B4-BE49-F238E27FC236}">
-                    <a16:creationId xmlns:a16="http://schemas.microsoft.com/office/drawing/2014/main" id="{1E557B4A-B5FE-4519-8389-15E9552C4441}"/>
-                  </a:ext>
-                </a:extLst>
-              </p:cNvPr>
-              <p:cNvSpPr txBox="1"/>
-              <p:nvPr/>
-            </p:nvSpPr>
-            <p:spPr>
-              <a:xfrm>
-                <a:off x="6501579" y="161908"/>
-                <a:ext cx="2890065" cy="369332"/>
-              </a:xfrm>
-              <a:prstGeom prst="rect">
-                <a:avLst/>
-              </a:prstGeom>
-              <a:noFill/>
-            </p:spPr>
-            <p:txBody>
-              <a:bodyPr wrap="square" rtlCol="0">
-                <a:spAutoFit/>
-              </a:bodyPr>
-              <a:lstStyle/>
-              <a:p>
-                <a:r>
-                  <a:rPr lang="en-GB" dirty="0"/>
-                  <a:t>Q-depth and Q-slack</a:t>
-                </a:r>
-                <a:endParaRPr lang="en-AU" dirty="0"/>
-              </a:p>
-            </p:txBody>
-          </p:sp>
-        </p:grpSp>
-        <p:sp>
-          <p:nvSpPr>
-            <p:cNvPr id="6" name="TextBox 5">
-              <a:extLst>
-                <a:ext uri="{FF2B5EF4-FFF2-40B4-BE49-F238E27FC236}">
-                  <a16:creationId xmlns:a16="http://schemas.microsoft.com/office/drawing/2014/main" id="{D9182949-B373-4D4A-B040-2FF15590960C}"/>
-                </a:ext>
-              </a:extLst>
-            </p:cNvPr>
-            <p:cNvSpPr txBox="1"/>
-            <p:nvPr/>
-          </p:nvSpPr>
-          <p:spPr>
-            <a:xfrm>
-              <a:off x="9101663" y="1088185"/>
-              <a:ext cx="1511559" cy="369332"/>
-            </a:xfrm>
-            <a:prstGeom prst="rect">
-              <a:avLst/>
-            </a:prstGeom>
-            <a:noFill/>
-          </p:spPr>
-          <p:txBody>
-            <a:bodyPr wrap="square" rtlCol="0">
-              <a:spAutoFit/>
-            </a:bodyPr>
-            <a:lstStyle/>
-            <a:p>
-              <a:r>
-                <a:rPr lang="en-GB" dirty="0"/>
-                <a:t>Q-Slack</a:t>
-              </a:r>
-              <a:endParaRPr lang="en-AU" dirty="0"/>
-            </a:p>
-          </p:txBody>
-        </p:sp>
-        <p:sp>
-          <p:nvSpPr>
-            <p:cNvPr id="29" name="TextBox 28">
-              <a:extLst>
-                <a:ext uri="{FF2B5EF4-FFF2-40B4-BE49-F238E27FC236}">
-                  <a16:creationId xmlns:a16="http://schemas.microsoft.com/office/drawing/2014/main" id="{FC62118A-1A4C-4BBA-9887-5FB123E70EF7}"/>
-                </a:ext>
-              </a:extLst>
-            </p:cNvPr>
-            <p:cNvSpPr txBox="1"/>
-            <p:nvPr/>
-          </p:nvSpPr>
-          <p:spPr>
-            <a:xfrm>
-              <a:off x="9139454" y="2301367"/>
-              <a:ext cx="1511559" cy="369332"/>
-            </a:xfrm>
-            <a:prstGeom prst="rect">
-              <a:avLst/>
-            </a:prstGeom>
-            <a:noFill/>
-          </p:spPr>
-          <p:txBody>
-            <a:bodyPr wrap="square" rtlCol="0">
-              <a:spAutoFit/>
-            </a:bodyPr>
-            <a:lstStyle/>
-            <a:p>
-              <a:r>
-                <a:rPr lang="en-GB" dirty="0"/>
-                <a:t>Q-Depth</a:t>
-              </a:r>
-              <a:endParaRPr lang="en-AU" dirty="0"/>
-            </a:p>
-          </p:txBody>
-        </p:sp>
-      </p:grpSp>
-    </p:spTree>
-    <p:extLst>
-      <p:ext uri="{BB962C8B-B14F-4D97-AF65-F5344CB8AC3E}">
-        <p14:creationId xmlns:p14="http://schemas.microsoft.com/office/powerpoint/2010/main" val="674563492"/>
-      </p:ext>
-    </p:extLst>
-  </p:cSld>
-  <p:clrMapOvr>
-    <a:masterClrMapping/>
-  </p:clrMapOvr>
-</p:sld>
-</file>
-
-<file path=ppt/slides/slide4.xml><?xml version="1.0" encoding="utf-8"?>
-<p:sld xmlns:a="http://schemas.openxmlformats.org/drawingml/2006/main" xmlns:r="http://schemas.openxmlformats.org/officeDocument/2006/relationships" xmlns:p="http://schemas.openxmlformats.org/presentationml/2006/main">
-  <p:cSld>
-    <p:spTree>
-      <p:nvGrpSpPr>
-        <p:cNvPr id="1" name=""/>
-        <p:cNvGrpSpPr/>
-        <p:nvPr/>
-      </p:nvGrpSpPr>
-      <p:grpSpPr>
-        <a:xfrm>
-          <a:off x="0" y="0"/>
-          <a:ext cx="0" cy="0"/>
-          <a:chOff x="0" y="0"/>
-          <a:chExt cx="0" cy="0"/>
-        </a:xfrm>
-      </p:grpSpPr>
-      <p:grpSp>
-        <p:nvGrpSpPr>
           <p:cNvPr id="23" name="Group 22">
             <a:extLst>
               <a:ext uri="{FF2B5EF4-FFF2-40B4-BE49-F238E27FC236}">
@@ -26370,7 +25457,7 @@
 </p:sld>
 </file>
 
-<file path=ppt/slides/slide5.xml><?xml version="1.0" encoding="utf-8"?>
+<file path=ppt/slides/slide4.xml><?xml version="1.0" encoding="utf-8"?>
 <p:sld xmlns:a="http://schemas.openxmlformats.org/drawingml/2006/main" xmlns:r="http://schemas.openxmlformats.org/officeDocument/2006/relationships" xmlns:p="http://schemas.openxmlformats.org/presentationml/2006/main">
   <p:cSld>
     <p:spTree>
@@ -27993,6 +27080,43 @@
           </a:p>
         </p:txBody>
       </p:sp>
+      <p:sp>
+        <p:nvSpPr>
+          <p:cNvPr id="3" name="TextBox 2">
+            <a:extLst>
+              <a:ext uri="{FF2B5EF4-FFF2-40B4-BE49-F238E27FC236}">
+                <a16:creationId xmlns:a16="http://schemas.microsoft.com/office/drawing/2014/main" id="{3DA3F392-1FEE-48FF-8028-99C5BF087B98}"/>
+              </a:ext>
+            </a:extLst>
+          </p:cNvPr>
+          <p:cNvSpPr txBox="1"/>
+          <p:nvPr/>
+        </p:nvSpPr>
+        <p:spPr>
+          <a:xfrm>
+            <a:off x="3829050" y="410538"/>
+            <a:ext cx="3863026" cy="369332"/>
+          </a:xfrm>
+          <a:prstGeom prst="rect">
+            <a:avLst/>
+          </a:prstGeom>
+          <a:noFill/>
+        </p:spPr>
+        <p:txBody>
+          <a:bodyPr wrap="square" rtlCol="0">
+            <a:spAutoFit/>
+          </a:bodyPr>
+          <a:lstStyle/>
+          <a:p>
+            <a:pPr algn="ctr"/>
+            <a:r>
+              <a:rPr lang="en-GB" dirty="0"/>
+              <a:t>Water Trough Analogy</a:t>
+            </a:r>
+            <a:endParaRPr lang="en-AU" dirty="0"/>
+          </a:p>
+        </p:txBody>
+      </p:sp>
     </p:spTree>
     <p:extLst>
       <p:ext uri="{BB962C8B-B14F-4D97-AF65-F5344CB8AC3E}">
@@ -28006,7 +27130,7 @@
 </p:sld>
 </file>
 
-<file path=ppt/slides/slide6.xml><?xml version="1.0" encoding="utf-8"?>
+<file path=ppt/slides/slide5.xml><?xml version="1.0" encoding="utf-8"?>
 <p:sld xmlns:a="http://schemas.openxmlformats.org/drawingml/2006/main" xmlns:r="http://schemas.openxmlformats.org/officeDocument/2006/relationships" xmlns:p="http://schemas.openxmlformats.org/presentationml/2006/main">
   <p:cSld>
     <p:spTree>
@@ -28655,7 +27779,7 @@
 </p:sld>
 </file>
 
-<file path=ppt/slides/slide7.xml><?xml version="1.0" encoding="utf-8"?>
+<file path=ppt/slides/slide6.xml><?xml version="1.0" encoding="utf-8"?>
 <p:sld xmlns:a="http://schemas.openxmlformats.org/drawingml/2006/main" xmlns:r="http://schemas.openxmlformats.org/officeDocument/2006/relationships" xmlns:p="http://schemas.openxmlformats.org/presentationml/2006/main">
   <p:cSld>
     <p:spTree>
@@ -29027,7 +28151,7 @@
 </p:sld>
 </file>
 
-<file path=ppt/slides/slide8.xml><?xml version="1.0" encoding="utf-8"?>
+<file path=ppt/slides/slide7.xml><?xml version="1.0" encoding="utf-8"?>
 <p:sld xmlns:a="http://schemas.openxmlformats.org/drawingml/2006/main" xmlns:r="http://schemas.openxmlformats.org/officeDocument/2006/relationships" xmlns:p="http://schemas.openxmlformats.org/presentationml/2006/main">
   <p:cSld>
     <p:spTree>
@@ -29636,6 +28760,50 @@
           </p:pic>
         </p:grpSp>
       </p:grpSp>
+      <p:sp>
+        <p:nvSpPr>
+          <p:cNvPr id="4" name="TextBox 3">
+            <a:extLst>
+              <a:ext uri="{FF2B5EF4-FFF2-40B4-BE49-F238E27FC236}">
+                <a16:creationId xmlns:a16="http://schemas.microsoft.com/office/drawing/2014/main" id="{10710FEF-DBA1-46AB-84F2-079A953AD75D}"/>
+              </a:ext>
+            </a:extLst>
+          </p:cNvPr>
+          <p:cNvSpPr txBox="1"/>
+          <p:nvPr/>
+        </p:nvSpPr>
+        <p:spPr>
+          <a:xfrm>
+            <a:off x="4979988" y="502920"/>
+            <a:ext cx="5577104" cy="646331"/>
+          </a:xfrm>
+          <a:prstGeom prst="rect">
+            <a:avLst/>
+          </a:prstGeom>
+          <a:noFill/>
+        </p:spPr>
+        <p:txBody>
+          <a:bodyPr wrap="none" rtlCol="0">
+            <a:spAutoFit/>
+          </a:bodyPr>
+          <a:lstStyle/>
+          <a:p>
+            <a:pPr algn="ctr"/>
+            <a:r>
+              <a:rPr lang="en-GB" dirty="0"/>
+              <a:t>Effect of Q-slack on incompressible Water Wave travelling</a:t>
+            </a:r>
+            <a:br>
+              <a:rPr lang="en-GB" dirty="0"/>
+            </a:br>
+            <a:r>
+              <a:rPr lang="en-GB" dirty="0"/>
+              <a:t>Towards Shore</a:t>
+            </a:r>
+            <a:endParaRPr lang="en-AU" dirty="0"/>
+          </a:p>
+        </p:txBody>
+      </p:sp>
     </p:spTree>
     <p:extLst>
       <p:ext uri="{BB962C8B-B14F-4D97-AF65-F5344CB8AC3E}">
@@ -29649,7 +28817,7 @@
 </p:sld>
 </file>
 
-<file path=ppt/slides/slide9.xml><?xml version="1.0" encoding="utf-8"?>
+<file path=ppt/slides/slide8.xml><?xml version="1.0" encoding="utf-8"?>
 <p:sld xmlns:a="http://schemas.openxmlformats.org/drawingml/2006/main" xmlns:r="http://schemas.openxmlformats.org/officeDocument/2006/relationships" xmlns:p="http://schemas.openxmlformats.org/presentationml/2006/main">
   <p:cSld>
     <p:spTree>
@@ -30258,10 +29426,1595 @@
           </p:pic>
         </p:grpSp>
       </p:grpSp>
+      <p:sp>
+        <p:nvSpPr>
+          <p:cNvPr id="6" name="TextBox 5">
+            <a:extLst>
+              <a:ext uri="{FF2B5EF4-FFF2-40B4-BE49-F238E27FC236}">
+                <a16:creationId xmlns:a16="http://schemas.microsoft.com/office/drawing/2014/main" id="{59A4A0E3-6D76-439F-8E08-44E72E20E926}"/>
+              </a:ext>
+            </a:extLst>
+          </p:cNvPr>
+          <p:cNvSpPr txBox="1"/>
+          <p:nvPr/>
+        </p:nvSpPr>
+        <p:spPr>
+          <a:xfrm>
+            <a:off x="2827781" y="960120"/>
+            <a:ext cx="6471708" cy="646331"/>
+          </a:xfrm>
+          <a:prstGeom prst="rect">
+            <a:avLst/>
+          </a:prstGeom>
+          <a:noFill/>
+        </p:spPr>
+        <p:txBody>
+          <a:bodyPr wrap="none" rtlCol="0">
+            <a:spAutoFit/>
+          </a:bodyPr>
+          <a:lstStyle/>
+          <a:p>
+            <a:pPr algn="ctr"/>
+            <a:r>
+              <a:rPr lang="en-GB" dirty="0"/>
+              <a:t>Effect of Q-Slack on Compressible, doubly bounded Wave travelling</a:t>
+            </a:r>
+            <a:br>
+              <a:rPr lang="en-GB" dirty="0"/>
+            </a:br>
+            <a:r>
+              <a:rPr lang="en-GB" dirty="0"/>
+              <a:t>Towards Shore</a:t>
+            </a:r>
+            <a:endParaRPr lang="en-AU" dirty="0"/>
+          </a:p>
+        </p:txBody>
+      </p:sp>
     </p:spTree>
     <p:extLst>
       <p:ext uri="{BB962C8B-B14F-4D97-AF65-F5344CB8AC3E}">
         <p14:creationId xmlns:p14="http://schemas.microsoft.com/office/powerpoint/2010/main" val="1969167963"/>
+      </p:ext>
+    </p:extLst>
+  </p:cSld>
+  <p:clrMapOvr>
+    <a:masterClrMapping/>
+  </p:clrMapOvr>
+</p:sld>
+</file>
+
+<file path=ppt/slides/slide9.xml><?xml version="1.0" encoding="utf-8"?>
+<p:sld xmlns:a="http://schemas.openxmlformats.org/drawingml/2006/main" xmlns:r="http://schemas.openxmlformats.org/officeDocument/2006/relationships" xmlns:p="http://schemas.openxmlformats.org/presentationml/2006/main">
+  <p:cSld>
+    <p:bg>
+      <p:bgPr>
+        <a:solidFill>
+          <a:schemeClr val="bg1">
+            <a:alpha val="99000"/>
+          </a:schemeClr>
+        </a:solidFill>
+        <a:effectLst/>
+      </p:bgPr>
+    </p:bg>
+    <p:spTree>
+      <p:nvGrpSpPr>
+        <p:cNvPr id="1" name=""/>
+        <p:cNvGrpSpPr/>
+        <p:nvPr/>
+      </p:nvGrpSpPr>
+      <p:grpSpPr>
+        <a:xfrm>
+          <a:off x="0" y="0"/>
+          <a:ext cx="0" cy="0"/>
+          <a:chOff x="0" y="0"/>
+          <a:chExt cx="0" cy="0"/>
+        </a:xfrm>
+      </p:grpSpPr>
+      <p:sp>
+        <p:nvSpPr>
+          <p:cNvPr id="46" name="Arc 45">
+            <a:extLst>
+              <a:ext uri="{FF2B5EF4-FFF2-40B4-BE49-F238E27FC236}">
+                <a16:creationId xmlns:a16="http://schemas.microsoft.com/office/drawing/2014/main" id="{A4C5642D-AC1A-4512-A5A4-63C66C071622}"/>
+              </a:ext>
+            </a:extLst>
+          </p:cNvPr>
+          <p:cNvSpPr/>
+          <p:nvPr/>
+        </p:nvSpPr>
+        <p:spPr>
+          <a:xfrm>
+            <a:off x="405417" y="-209059"/>
+            <a:ext cx="7750362" cy="7750362"/>
+          </a:xfrm>
+          <a:prstGeom prst="arc">
+            <a:avLst>
+              <a:gd name="adj1" fmla="val 2123"/>
+              <a:gd name="adj2" fmla="val 1633386"/>
+            </a:avLst>
+          </a:prstGeom>
+          <a:ln w="19050"/>
+        </p:spPr>
+        <p:style>
+          <a:lnRef idx="1">
+            <a:schemeClr val="accent1"/>
+          </a:lnRef>
+          <a:fillRef idx="0">
+            <a:schemeClr val="accent1"/>
+          </a:fillRef>
+          <a:effectRef idx="0">
+            <a:schemeClr val="accent1"/>
+          </a:effectRef>
+          <a:fontRef idx="minor">
+            <a:schemeClr val="tx1"/>
+          </a:fontRef>
+        </p:style>
+        <p:txBody>
+          <a:bodyPr rtlCol="0" anchor="ctr"/>
+          <a:lstStyle/>
+          <a:p>
+            <a:pPr algn="ctr"/>
+            <a:endParaRPr lang="en-AU"/>
+          </a:p>
+        </p:txBody>
+      </p:sp>
+      <p:sp>
+        <p:nvSpPr>
+          <p:cNvPr id="48" name="Arc 47">
+            <a:extLst>
+              <a:ext uri="{FF2B5EF4-FFF2-40B4-BE49-F238E27FC236}">
+                <a16:creationId xmlns:a16="http://schemas.microsoft.com/office/drawing/2014/main" id="{F770F6E8-960F-4901-AA43-46D2B03322D4}"/>
+              </a:ext>
+            </a:extLst>
+          </p:cNvPr>
+          <p:cNvSpPr/>
+          <p:nvPr/>
+        </p:nvSpPr>
+        <p:spPr>
+          <a:xfrm>
+            <a:off x="2372087" y="1663846"/>
+            <a:ext cx="3656857" cy="4004550"/>
+          </a:xfrm>
+          <a:prstGeom prst="arc">
+            <a:avLst>
+              <a:gd name="adj1" fmla="val 21587170"/>
+              <a:gd name="adj2" fmla="val 1834383"/>
+            </a:avLst>
+          </a:prstGeom>
+          <a:ln w="19050"/>
+        </p:spPr>
+        <p:style>
+          <a:lnRef idx="1">
+            <a:schemeClr val="accent1"/>
+          </a:lnRef>
+          <a:fillRef idx="0">
+            <a:schemeClr val="accent1"/>
+          </a:fillRef>
+          <a:effectRef idx="0">
+            <a:schemeClr val="accent1"/>
+          </a:effectRef>
+          <a:fontRef idx="minor">
+            <a:schemeClr val="tx1"/>
+          </a:fontRef>
+        </p:style>
+        <p:txBody>
+          <a:bodyPr rtlCol="0" anchor="ctr"/>
+          <a:lstStyle/>
+          <a:p>
+            <a:pPr algn="ctr"/>
+            <a:endParaRPr lang="en-AU"/>
+          </a:p>
+        </p:txBody>
+      </p:sp>
+      <p:sp>
+        <p:nvSpPr>
+          <p:cNvPr id="101" name="Arc 100">
+            <a:extLst>
+              <a:ext uri="{FF2B5EF4-FFF2-40B4-BE49-F238E27FC236}">
+                <a16:creationId xmlns:a16="http://schemas.microsoft.com/office/drawing/2014/main" id="{917D25E1-0130-4345-9B11-12530BB5DC0D}"/>
+              </a:ext>
+            </a:extLst>
+          </p:cNvPr>
+          <p:cNvSpPr/>
+          <p:nvPr/>
+        </p:nvSpPr>
+        <p:spPr>
+          <a:xfrm>
+            <a:off x="1395091" y="-683303"/>
+            <a:ext cx="7768495" cy="7750362"/>
+          </a:xfrm>
+          <a:prstGeom prst="arc">
+            <a:avLst>
+              <a:gd name="adj1" fmla="val 2094"/>
+              <a:gd name="adj2" fmla="val 1631430"/>
+            </a:avLst>
+          </a:prstGeom>
+          <a:ln w="19050"/>
+        </p:spPr>
+        <p:style>
+          <a:lnRef idx="1">
+            <a:schemeClr val="accent1"/>
+          </a:lnRef>
+          <a:fillRef idx="0">
+            <a:schemeClr val="accent1"/>
+          </a:fillRef>
+          <a:effectRef idx="0">
+            <a:schemeClr val="accent1"/>
+          </a:effectRef>
+          <a:fontRef idx="minor">
+            <a:schemeClr val="tx1"/>
+          </a:fontRef>
+        </p:style>
+        <p:txBody>
+          <a:bodyPr rtlCol="0" anchor="ctr"/>
+          <a:lstStyle/>
+          <a:p>
+            <a:pPr algn="ctr"/>
+            <a:endParaRPr lang="en-AU"/>
+          </a:p>
+        </p:txBody>
+      </p:sp>
+      <p:sp>
+        <p:nvSpPr>
+          <p:cNvPr id="107" name="Arc 106">
+            <a:extLst>
+              <a:ext uri="{FF2B5EF4-FFF2-40B4-BE49-F238E27FC236}">
+                <a16:creationId xmlns:a16="http://schemas.microsoft.com/office/drawing/2014/main" id="{C3AA2F2E-BB27-425C-B585-7C578D78A777}"/>
+              </a:ext>
+            </a:extLst>
+          </p:cNvPr>
+          <p:cNvSpPr/>
+          <p:nvPr/>
+        </p:nvSpPr>
+        <p:spPr>
+          <a:xfrm>
+            <a:off x="2715793" y="1205000"/>
+            <a:ext cx="4337251" cy="4004552"/>
+          </a:xfrm>
+          <a:prstGeom prst="arc">
+            <a:avLst>
+              <a:gd name="adj1" fmla="val 21556473"/>
+              <a:gd name="adj2" fmla="val 1294205"/>
+            </a:avLst>
+          </a:prstGeom>
+          <a:ln w="19050"/>
+        </p:spPr>
+        <p:style>
+          <a:lnRef idx="1">
+            <a:schemeClr val="accent1"/>
+          </a:lnRef>
+          <a:fillRef idx="0">
+            <a:schemeClr val="accent1"/>
+          </a:fillRef>
+          <a:effectRef idx="0">
+            <a:schemeClr val="accent1"/>
+          </a:effectRef>
+          <a:fontRef idx="minor">
+            <a:schemeClr val="tx1"/>
+          </a:fontRef>
+        </p:style>
+        <p:txBody>
+          <a:bodyPr rtlCol="0" anchor="ctr"/>
+          <a:lstStyle/>
+          <a:p>
+            <a:pPr algn="ctr"/>
+            <a:endParaRPr lang="en-AU"/>
+          </a:p>
+        </p:txBody>
+      </p:sp>
+      <p:sp>
+        <p:nvSpPr>
+          <p:cNvPr id="88" name="Parallelogram 87">
+            <a:extLst>
+              <a:ext uri="{FF2B5EF4-FFF2-40B4-BE49-F238E27FC236}">
+                <a16:creationId xmlns:a16="http://schemas.microsoft.com/office/drawing/2014/main" id="{5F26B470-4070-4A4D-9591-E20F17BCDADB}"/>
+              </a:ext>
+            </a:extLst>
+          </p:cNvPr>
+          <p:cNvSpPr/>
+          <p:nvPr/>
+        </p:nvSpPr>
+        <p:spPr>
+          <a:xfrm rot="1671234">
+            <a:off x="4305812" y="3985548"/>
+            <a:ext cx="4908333" cy="889129"/>
+          </a:xfrm>
+          <a:prstGeom prst="parallelogram">
+            <a:avLst>
+              <a:gd name="adj" fmla="val 75267"/>
+            </a:avLst>
+          </a:prstGeom>
+          <a:solidFill>
+            <a:schemeClr val="accent1">
+              <a:alpha val="18000"/>
+            </a:schemeClr>
+          </a:solidFill>
+        </p:spPr>
+        <p:style>
+          <a:lnRef idx="2">
+            <a:schemeClr val="accent1">
+              <a:shade val="50000"/>
+            </a:schemeClr>
+          </a:lnRef>
+          <a:fillRef idx="1">
+            <a:schemeClr val="accent1"/>
+          </a:fillRef>
+          <a:effectRef idx="0">
+            <a:schemeClr val="accent1"/>
+          </a:effectRef>
+          <a:fontRef idx="minor">
+            <a:schemeClr val="lt1"/>
+          </a:fontRef>
+        </p:style>
+        <p:txBody>
+          <a:bodyPr rtlCol="0" anchor="ctr"/>
+          <a:lstStyle/>
+          <a:p>
+            <a:pPr algn="ctr"/>
+            <a:endParaRPr lang="en-AU" dirty="0"/>
+          </a:p>
+        </p:txBody>
+      </p:sp>
+      <p:grpSp>
+        <p:nvGrpSpPr>
+          <p:cNvPr id="45" name="Group 44">
+            <a:extLst>
+              <a:ext uri="{FF2B5EF4-FFF2-40B4-BE49-F238E27FC236}">
+                <a16:creationId xmlns:a16="http://schemas.microsoft.com/office/drawing/2014/main" id="{AC310F68-C2B6-4792-8BD7-53933B512123}"/>
+              </a:ext>
+            </a:extLst>
+          </p:cNvPr>
+          <p:cNvGrpSpPr/>
+          <p:nvPr/>
+        </p:nvGrpSpPr>
+        <p:grpSpPr>
+          <a:xfrm>
+            <a:off x="4380079" y="3666124"/>
+            <a:ext cx="3897179" cy="2002272"/>
+            <a:chOff x="2302516" y="3428996"/>
+            <a:chExt cx="6984703" cy="2064513"/>
+          </a:xfrm>
+        </p:grpSpPr>
+        <p:cxnSp>
+          <p:nvCxnSpPr>
+            <p:cNvPr id="39" name="Straight Connector 38">
+              <a:extLst>
+                <a:ext uri="{FF2B5EF4-FFF2-40B4-BE49-F238E27FC236}">
+                  <a16:creationId xmlns:a16="http://schemas.microsoft.com/office/drawing/2014/main" id="{CBFFF161-DEA8-4365-AEDE-D0ED12796E72}"/>
+                </a:ext>
+              </a:extLst>
+            </p:cNvPr>
+            <p:cNvCxnSpPr/>
+            <p:nvPr/>
+          </p:nvCxnSpPr>
+          <p:spPr>
+            <a:xfrm>
+              <a:off x="2302525" y="3429000"/>
+              <a:ext cx="6984694" cy="0"/>
+            </a:xfrm>
+            <a:prstGeom prst="line">
+              <a:avLst/>
+            </a:prstGeom>
+          </p:spPr>
+          <p:style>
+            <a:lnRef idx="1">
+              <a:schemeClr val="accent1"/>
+            </a:lnRef>
+            <a:fillRef idx="0">
+              <a:schemeClr val="accent1"/>
+            </a:fillRef>
+            <a:effectRef idx="0">
+              <a:schemeClr val="accent1"/>
+            </a:effectRef>
+            <a:fontRef idx="minor">
+              <a:schemeClr val="tx1"/>
+            </a:fontRef>
+          </p:style>
+        </p:cxnSp>
+        <p:cxnSp>
+          <p:nvCxnSpPr>
+            <p:cNvPr id="41" name="Straight Connector 40">
+              <a:extLst>
+                <a:ext uri="{FF2B5EF4-FFF2-40B4-BE49-F238E27FC236}">
+                  <a16:creationId xmlns:a16="http://schemas.microsoft.com/office/drawing/2014/main" id="{286BE9B1-7CF6-43DC-ABCC-EB09CC6288B2}"/>
+                </a:ext>
+              </a:extLst>
+            </p:cNvPr>
+            <p:cNvCxnSpPr>
+              <a:cxnSpLocks/>
+              <a:stCxn id="47" idx="4"/>
+            </p:cNvCxnSpPr>
+            <p:nvPr/>
+          </p:nvCxnSpPr>
+          <p:spPr>
+            <a:xfrm>
+              <a:off x="2302516" y="3428996"/>
+              <a:ext cx="6777218" cy="2064513"/>
+            </a:xfrm>
+            <a:prstGeom prst="line">
+              <a:avLst/>
+            </a:prstGeom>
+          </p:spPr>
+          <p:style>
+            <a:lnRef idx="1">
+              <a:schemeClr val="accent1"/>
+            </a:lnRef>
+            <a:fillRef idx="0">
+              <a:schemeClr val="accent1"/>
+            </a:fillRef>
+            <a:effectRef idx="0">
+              <a:schemeClr val="accent1"/>
+            </a:effectRef>
+            <a:fontRef idx="minor">
+              <a:schemeClr val="tx1"/>
+            </a:fontRef>
+          </p:style>
+        </p:cxnSp>
+      </p:grpSp>
+      <p:sp>
+        <p:nvSpPr>
+          <p:cNvPr id="47" name="Isosceles Triangle 46">
+            <a:extLst>
+              <a:ext uri="{FF2B5EF4-FFF2-40B4-BE49-F238E27FC236}">
+                <a16:creationId xmlns:a16="http://schemas.microsoft.com/office/drawing/2014/main" id="{12693047-67EB-495A-9F22-0DACDB085A63}"/>
+              </a:ext>
+            </a:extLst>
+          </p:cNvPr>
+          <p:cNvSpPr/>
+          <p:nvPr/>
+        </p:nvSpPr>
+        <p:spPr>
+          <a:xfrm rot="16200000" flipV="1">
+            <a:off x="5269647" y="2776555"/>
+            <a:ext cx="2002275" cy="3781411"/>
+          </a:xfrm>
+          <a:prstGeom prst="triangle">
+            <a:avLst>
+              <a:gd name="adj" fmla="val 0"/>
+            </a:avLst>
+          </a:prstGeom>
+        </p:spPr>
+        <p:style>
+          <a:lnRef idx="2">
+            <a:schemeClr val="accent1">
+              <a:shade val="50000"/>
+            </a:schemeClr>
+          </a:lnRef>
+          <a:fillRef idx="1">
+            <a:schemeClr val="accent1"/>
+          </a:fillRef>
+          <a:effectRef idx="0">
+            <a:schemeClr val="accent1"/>
+          </a:effectRef>
+          <a:fontRef idx="minor">
+            <a:schemeClr val="lt1"/>
+          </a:fontRef>
+        </p:style>
+        <p:txBody>
+          <a:bodyPr rtlCol="0" anchor="ctr"/>
+          <a:lstStyle/>
+          <a:p>
+            <a:pPr algn="ctr"/>
+            <a:endParaRPr lang="en-AU"/>
+          </a:p>
+        </p:txBody>
+      </p:sp>
+      <p:sp>
+        <p:nvSpPr>
+          <p:cNvPr id="49" name="Arc 48">
+            <a:extLst>
+              <a:ext uri="{FF2B5EF4-FFF2-40B4-BE49-F238E27FC236}">
+                <a16:creationId xmlns:a16="http://schemas.microsoft.com/office/drawing/2014/main" id="{C7878056-A928-4322-A60A-9D23EFC37BB4}"/>
+              </a:ext>
+            </a:extLst>
+          </p:cNvPr>
+          <p:cNvSpPr/>
+          <p:nvPr/>
+        </p:nvSpPr>
+        <p:spPr>
+          <a:xfrm>
+            <a:off x="3922879" y="3208921"/>
+            <a:ext cx="914400" cy="914400"/>
+          </a:xfrm>
+          <a:prstGeom prst="arc">
+            <a:avLst>
+              <a:gd name="adj1" fmla="val 21557601"/>
+              <a:gd name="adj2" fmla="val 2161639"/>
+            </a:avLst>
+          </a:prstGeom>
+          <a:ln w="19050"/>
+        </p:spPr>
+        <p:style>
+          <a:lnRef idx="1">
+            <a:schemeClr val="accent1"/>
+          </a:lnRef>
+          <a:fillRef idx="0">
+            <a:schemeClr val="accent1"/>
+          </a:fillRef>
+          <a:effectRef idx="0">
+            <a:schemeClr val="accent1"/>
+          </a:effectRef>
+          <a:fontRef idx="minor">
+            <a:schemeClr val="tx1"/>
+          </a:fontRef>
+        </p:style>
+        <p:txBody>
+          <a:bodyPr rtlCol="0" anchor="ctr"/>
+          <a:lstStyle/>
+          <a:p>
+            <a:pPr algn="ctr"/>
+            <a:endParaRPr lang="en-AU"/>
+          </a:p>
+        </p:txBody>
+      </p:sp>
+      <p:sp>
+        <p:nvSpPr>
+          <p:cNvPr id="54" name="Rectangle 53">
+            <a:extLst>
+              <a:ext uri="{FF2B5EF4-FFF2-40B4-BE49-F238E27FC236}">
+                <a16:creationId xmlns:a16="http://schemas.microsoft.com/office/drawing/2014/main" id="{9BF4EC97-D220-4DE1-B57D-E8C122283779}"/>
+              </a:ext>
+            </a:extLst>
+          </p:cNvPr>
+          <p:cNvSpPr/>
+          <p:nvPr/>
+        </p:nvSpPr>
+        <p:spPr>
+          <a:xfrm rot="1773429">
+            <a:off x="5761719" y="4270012"/>
+            <a:ext cx="154236" cy="154236"/>
+          </a:xfrm>
+          <a:prstGeom prst="rect">
+            <a:avLst/>
+          </a:prstGeom>
+          <a:noFill/>
+        </p:spPr>
+        <p:style>
+          <a:lnRef idx="2">
+            <a:schemeClr val="accent1">
+              <a:shade val="50000"/>
+            </a:schemeClr>
+          </a:lnRef>
+          <a:fillRef idx="1">
+            <a:schemeClr val="accent1"/>
+          </a:fillRef>
+          <a:effectRef idx="0">
+            <a:schemeClr val="accent1"/>
+          </a:effectRef>
+          <a:fontRef idx="minor">
+            <a:schemeClr val="lt1"/>
+          </a:fontRef>
+        </p:style>
+        <p:txBody>
+          <a:bodyPr rtlCol="0" anchor="ctr"/>
+          <a:lstStyle/>
+          <a:p>
+            <a:pPr algn="ctr"/>
+            <a:endParaRPr lang="en-AU"/>
+          </a:p>
+        </p:txBody>
+      </p:sp>
+      <p:sp>
+        <p:nvSpPr>
+          <p:cNvPr id="55" name="Rectangle 54">
+            <a:extLst>
+              <a:ext uri="{FF2B5EF4-FFF2-40B4-BE49-F238E27FC236}">
+                <a16:creationId xmlns:a16="http://schemas.microsoft.com/office/drawing/2014/main" id="{15460610-DCE4-429F-B01D-5A37DF1FC802}"/>
+              </a:ext>
+            </a:extLst>
+          </p:cNvPr>
+          <p:cNvSpPr/>
+          <p:nvPr/>
+        </p:nvSpPr>
+        <p:spPr>
+          <a:xfrm rot="1669691">
+            <a:off x="7610275" y="5257677"/>
+            <a:ext cx="154236" cy="154236"/>
+          </a:xfrm>
+          <a:prstGeom prst="rect">
+            <a:avLst/>
+          </a:prstGeom>
+          <a:noFill/>
+        </p:spPr>
+        <p:style>
+          <a:lnRef idx="2">
+            <a:schemeClr val="accent1">
+              <a:shade val="50000"/>
+            </a:schemeClr>
+          </a:lnRef>
+          <a:fillRef idx="1">
+            <a:schemeClr val="accent1"/>
+          </a:fillRef>
+          <a:effectRef idx="0">
+            <a:schemeClr val="accent1"/>
+          </a:effectRef>
+          <a:fontRef idx="minor">
+            <a:schemeClr val="lt1"/>
+          </a:fontRef>
+        </p:style>
+        <p:txBody>
+          <a:bodyPr rtlCol="0" anchor="ctr"/>
+          <a:lstStyle/>
+          <a:p>
+            <a:pPr algn="ctr"/>
+            <a:endParaRPr lang="en-AU"/>
+          </a:p>
+        </p:txBody>
+      </p:sp>
+      <p:sp>
+        <p:nvSpPr>
+          <p:cNvPr id="56" name="Rectangle 55">
+            <a:extLst>
+              <a:ext uri="{FF2B5EF4-FFF2-40B4-BE49-F238E27FC236}">
+                <a16:creationId xmlns:a16="http://schemas.microsoft.com/office/drawing/2014/main" id="{F3F4CFFC-6873-403E-9E58-FCE837BC94A1}"/>
+              </a:ext>
+            </a:extLst>
+          </p:cNvPr>
+          <p:cNvSpPr/>
+          <p:nvPr/>
+        </p:nvSpPr>
+        <p:spPr>
+          <a:xfrm>
+            <a:off x="8000427" y="3669048"/>
+            <a:ext cx="154236" cy="154236"/>
+          </a:xfrm>
+          <a:prstGeom prst="rect">
+            <a:avLst/>
+          </a:prstGeom>
+          <a:noFill/>
+        </p:spPr>
+        <p:style>
+          <a:lnRef idx="2">
+            <a:schemeClr val="accent1">
+              <a:shade val="50000"/>
+            </a:schemeClr>
+          </a:lnRef>
+          <a:fillRef idx="1">
+            <a:schemeClr val="accent1"/>
+          </a:fillRef>
+          <a:effectRef idx="0">
+            <a:schemeClr val="accent1"/>
+          </a:effectRef>
+          <a:fontRef idx="minor">
+            <a:schemeClr val="lt1"/>
+          </a:fontRef>
+        </p:style>
+        <p:txBody>
+          <a:bodyPr rtlCol="0" anchor="ctr"/>
+          <a:lstStyle/>
+          <a:p>
+            <a:pPr algn="ctr"/>
+            <a:endParaRPr lang="en-AU"/>
+          </a:p>
+        </p:txBody>
+      </p:sp>
+      <p:sp>
+        <p:nvSpPr>
+          <p:cNvPr id="57" name="Rectangle 56">
+            <a:extLst>
+              <a:ext uri="{FF2B5EF4-FFF2-40B4-BE49-F238E27FC236}">
+                <a16:creationId xmlns:a16="http://schemas.microsoft.com/office/drawing/2014/main" id="{B4147C33-960E-4E4F-B3D7-097082A79023}"/>
+              </a:ext>
+            </a:extLst>
+          </p:cNvPr>
+          <p:cNvSpPr/>
+          <p:nvPr/>
+        </p:nvSpPr>
+        <p:spPr>
+          <a:xfrm>
+            <a:off x="5881478" y="3681775"/>
+            <a:ext cx="154236" cy="154236"/>
+          </a:xfrm>
+          <a:prstGeom prst="rect">
+            <a:avLst/>
+          </a:prstGeom>
+          <a:noFill/>
+        </p:spPr>
+        <p:style>
+          <a:lnRef idx="2">
+            <a:schemeClr val="accent1">
+              <a:shade val="50000"/>
+            </a:schemeClr>
+          </a:lnRef>
+          <a:fillRef idx="1">
+            <a:schemeClr val="accent1"/>
+          </a:fillRef>
+          <a:effectRef idx="0">
+            <a:schemeClr val="accent1"/>
+          </a:effectRef>
+          <a:fontRef idx="minor">
+            <a:schemeClr val="lt1"/>
+          </a:fontRef>
+        </p:style>
+        <p:txBody>
+          <a:bodyPr rtlCol="0" anchor="ctr"/>
+          <a:lstStyle/>
+          <a:p>
+            <a:pPr algn="ctr"/>
+            <a:endParaRPr lang="en-AU"/>
+          </a:p>
+        </p:txBody>
+      </p:sp>
+      <p:sp>
+        <p:nvSpPr>
+          <p:cNvPr id="58" name="Parallelogram 57">
+            <a:extLst>
+              <a:ext uri="{FF2B5EF4-FFF2-40B4-BE49-F238E27FC236}">
+                <a16:creationId xmlns:a16="http://schemas.microsoft.com/office/drawing/2014/main" id="{288DC3CF-0821-46C8-B0A6-ED5A28EC5D16}"/>
+              </a:ext>
+            </a:extLst>
+          </p:cNvPr>
+          <p:cNvSpPr/>
+          <p:nvPr/>
+        </p:nvSpPr>
+        <p:spPr>
+          <a:xfrm>
+            <a:off x="4400572" y="3195537"/>
+            <a:ext cx="5326493" cy="468041"/>
+          </a:xfrm>
+          <a:prstGeom prst="parallelogram">
+            <a:avLst>
+              <a:gd name="adj" fmla="val 217135"/>
+            </a:avLst>
+          </a:prstGeom>
+          <a:solidFill>
+            <a:schemeClr val="accent1">
+              <a:alpha val="18000"/>
+            </a:schemeClr>
+          </a:solidFill>
+        </p:spPr>
+        <p:style>
+          <a:lnRef idx="2">
+            <a:schemeClr val="accent1">
+              <a:shade val="50000"/>
+            </a:schemeClr>
+          </a:lnRef>
+          <a:fillRef idx="1">
+            <a:schemeClr val="accent1"/>
+          </a:fillRef>
+          <a:effectRef idx="0">
+            <a:schemeClr val="accent1"/>
+          </a:effectRef>
+          <a:fontRef idx="minor">
+            <a:schemeClr val="lt1"/>
+          </a:fontRef>
+        </p:style>
+        <p:txBody>
+          <a:bodyPr rtlCol="0" anchor="ctr"/>
+          <a:lstStyle/>
+          <a:p>
+            <a:pPr algn="ctr"/>
+            <a:endParaRPr lang="en-AU"/>
+          </a:p>
+        </p:txBody>
+      </p:sp>
+      <p:cxnSp>
+        <p:nvCxnSpPr>
+          <p:cNvPr id="59" name="Straight Arrow Connector 58">
+            <a:extLst>
+              <a:ext uri="{FF2B5EF4-FFF2-40B4-BE49-F238E27FC236}">
+                <a16:creationId xmlns:a16="http://schemas.microsoft.com/office/drawing/2014/main" id="{99534178-3884-4ADF-AB41-DCB44AA716E5}"/>
+              </a:ext>
+            </a:extLst>
+          </p:cNvPr>
+          <p:cNvCxnSpPr>
+            <a:cxnSpLocks/>
+          </p:cNvCxnSpPr>
+          <p:nvPr/>
+        </p:nvCxnSpPr>
+        <p:spPr>
+          <a:xfrm flipV="1">
+            <a:off x="5443752" y="3203835"/>
+            <a:ext cx="767959" cy="362280"/>
+          </a:xfrm>
+          <a:prstGeom prst="straightConnector1">
+            <a:avLst/>
+          </a:prstGeom>
+          <a:ln w="57150">
+            <a:solidFill>
+              <a:srgbClr val="00B050"/>
+            </a:solidFill>
+            <a:tailEnd type="stealth" w="lg" len="lg"/>
+          </a:ln>
+        </p:spPr>
+        <p:style>
+          <a:lnRef idx="1">
+            <a:schemeClr val="accent1"/>
+          </a:lnRef>
+          <a:fillRef idx="0">
+            <a:schemeClr val="accent1"/>
+          </a:fillRef>
+          <a:effectRef idx="0">
+            <a:schemeClr val="accent1"/>
+          </a:effectRef>
+          <a:fontRef idx="minor">
+            <a:schemeClr val="tx1"/>
+          </a:fontRef>
+        </p:style>
+      </p:cxnSp>
+      <p:cxnSp>
+        <p:nvCxnSpPr>
+          <p:cNvPr id="80" name="Straight Connector 79">
+            <a:extLst>
+              <a:ext uri="{FF2B5EF4-FFF2-40B4-BE49-F238E27FC236}">
+                <a16:creationId xmlns:a16="http://schemas.microsoft.com/office/drawing/2014/main" id="{D5662873-2B05-4D06-9BD3-CE81EDA93B6E}"/>
+              </a:ext>
+            </a:extLst>
+          </p:cNvPr>
+          <p:cNvCxnSpPr/>
+          <p:nvPr/>
+        </p:nvCxnSpPr>
+        <p:spPr>
+          <a:xfrm flipH="1">
+            <a:off x="7472077" y="4018962"/>
+            <a:ext cx="51708" cy="0"/>
+          </a:xfrm>
+          <a:prstGeom prst="line">
+            <a:avLst/>
+          </a:prstGeom>
+        </p:spPr>
+        <p:style>
+          <a:lnRef idx="1">
+            <a:schemeClr val="accent1"/>
+          </a:lnRef>
+          <a:fillRef idx="0">
+            <a:schemeClr val="accent1"/>
+          </a:fillRef>
+          <a:effectRef idx="0">
+            <a:schemeClr val="accent1"/>
+          </a:effectRef>
+          <a:fontRef idx="minor">
+            <a:schemeClr val="tx1"/>
+          </a:fontRef>
+        </p:style>
+      </p:cxnSp>
+      <p:cxnSp>
+        <p:nvCxnSpPr>
+          <p:cNvPr id="93" name="Straight Connector 92">
+            <a:extLst>
+              <a:ext uri="{FF2B5EF4-FFF2-40B4-BE49-F238E27FC236}">
+                <a16:creationId xmlns:a16="http://schemas.microsoft.com/office/drawing/2014/main" id="{229D5ACC-E1D9-48EF-A995-071B6FEC7083}"/>
+              </a:ext>
+            </a:extLst>
+          </p:cNvPr>
+          <p:cNvCxnSpPr>
+            <a:cxnSpLocks/>
+          </p:cNvCxnSpPr>
+          <p:nvPr/>
+        </p:nvCxnSpPr>
+        <p:spPr>
+          <a:xfrm flipV="1">
+            <a:off x="7720333" y="4971542"/>
+            <a:ext cx="1015498" cy="465074"/>
+          </a:xfrm>
+          <a:prstGeom prst="line">
+            <a:avLst/>
+          </a:prstGeom>
+        </p:spPr>
+        <p:style>
+          <a:lnRef idx="1">
+            <a:schemeClr val="accent1"/>
+          </a:lnRef>
+          <a:fillRef idx="0">
+            <a:schemeClr val="accent1"/>
+          </a:fillRef>
+          <a:effectRef idx="0">
+            <a:schemeClr val="accent1"/>
+          </a:effectRef>
+          <a:fontRef idx="minor">
+            <a:schemeClr val="tx1"/>
+          </a:fontRef>
+        </p:style>
+      </p:cxnSp>
+      <p:sp>
+        <p:nvSpPr>
+          <p:cNvPr id="89" name="Parallelogram 88">
+            <a:extLst>
+              <a:ext uri="{FF2B5EF4-FFF2-40B4-BE49-F238E27FC236}">
+                <a16:creationId xmlns:a16="http://schemas.microsoft.com/office/drawing/2014/main" id="{955251FA-5555-43CA-A0C7-807F4A2198BF}"/>
+              </a:ext>
+            </a:extLst>
+          </p:cNvPr>
+          <p:cNvSpPr/>
+          <p:nvPr/>
+        </p:nvSpPr>
+        <p:spPr>
+          <a:xfrm rot="780000">
+            <a:off x="4393951" y="3584950"/>
+            <a:ext cx="5104419" cy="672420"/>
+          </a:xfrm>
+          <a:prstGeom prst="parallelogram">
+            <a:avLst>
+              <a:gd name="adj" fmla="val 128731"/>
+            </a:avLst>
+          </a:prstGeom>
+          <a:solidFill>
+            <a:schemeClr val="accent1">
+              <a:alpha val="18000"/>
+            </a:schemeClr>
+          </a:solidFill>
+        </p:spPr>
+        <p:style>
+          <a:lnRef idx="2">
+            <a:schemeClr val="accent1">
+              <a:shade val="50000"/>
+            </a:schemeClr>
+          </a:lnRef>
+          <a:fillRef idx="1">
+            <a:schemeClr val="accent1"/>
+          </a:fillRef>
+          <a:effectRef idx="0">
+            <a:schemeClr val="accent1"/>
+          </a:effectRef>
+          <a:fontRef idx="minor">
+            <a:schemeClr val="lt1"/>
+          </a:fontRef>
+        </p:style>
+        <p:txBody>
+          <a:bodyPr rtlCol="0" anchor="ctr"/>
+          <a:lstStyle/>
+          <a:p>
+            <a:pPr algn="ctr"/>
+            <a:endParaRPr lang="en-AU" dirty="0"/>
+          </a:p>
+        </p:txBody>
+      </p:sp>
+      <p:cxnSp>
+        <p:nvCxnSpPr>
+          <p:cNvPr id="97" name="Straight Connector 96">
+            <a:extLst>
+              <a:ext uri="{FF2B5EF4-FFF2-40B4-BE49-F238E27FC236}">
+                <a16:creationId xmlns:a16="http://schemas.microsoft.com/office/drawing/2014/main" id="{35C7ED1E-B9D1-4E7F-9C6B-7ADD328B1CC0}"/>
+              </a:ext>
+            </a:extLst>
+          </p:cNvPr>
+          <p:cNvCxnSpPr>
+            <a:cxnSpLocks/>
+          </p:cNvCxnSpPr>
+          <p:nvPr/>
+        </p:nvCxnSpPr>
+        <p:spPr>
+          <a:xfrm flipV="1">
+            <a:off x="8060851" y="4065947"/>
+            <a:ext cx="994191" cy="460299"/>
+          </a:xfrm>
+          <a:prstGeom prst="line">
+            <a:avLst/>
+          </a:prstGeom>
+        </p:spPr>
+        <p:style>
+          <a:lnRef idx="1">
+            <a:schemeClr val="accent1"/>
+          </a:lnRef>
+          <a:fillRef idx="0">
+            <a:schemeClr val="accent1"/>
+          </a:fillRef>
+          <a:effectRef idx="0">
+            <a:schemeClr val="accent1"/>
+          </a:effectRef>
+          <a:fontRef idx="minor">
+            <a:schemeClr val="tx1"/>
+          </a:fontRef>
+        </p:style>
+      </p:cxnSp>
+      <p:cxnSp>
+        <p:nvCxnSpPr>
+          <p:cNvPr id="100" name="Straight Connector 99">
+            <a:extLst>
+              <a:ext uri="{FF2B5EF4-FFF2-40B4-BE49-F238E27FC236}">
+                <a16:creationId xmlns:a16="http://schemas.microsoft.com/office/drawing/2014/main" id="{28544516-F908-496F-A11C-71ABAC2C89EF}"/>
+              </a:ext>
+            </a:extLst>
+          </p:cNvPr>
+          <p:cNvCxnSpPr>
+            <a:cxnSpLocks/>
+          </p:cNvCxnSpPr>
+          <p:nvPr/>
+        </p:nvCxnSpPr>
+        <p:spPr>
+          <a:xfrm flipV="1">
+            <a:off x="8147982" y="3196642"/>
+            <a:ext cx="1017985" cy="464889"/>
+          </a:xfrm>
+          <a:prstGeom prst="line">
+            <a:avLst/>
+          </a:prstGeom>
+        </p:spPr>
+        <p:style>
+          <a:lnRef idx="1">
+            <a:schemeClr val="accent1"/>
+          </a:lnRef>
+          <a:fillRef idx="0">
+            <a:schemeClr val="accent1"/>
+          </a:fillRef>
+          <a:effectRef idx="0">
+            <a:schemeClr val="accent1"/>
+          </a:effectRef>
+          <a:fontRef idx="minor">
+            <a:schemeClr val="tx1"/>
+          </a:fontRef>
+        </p:style>
+      </p:cxnSp>
+      <p:cxnSp>
+        <p:nvCxnSpPr>
+          <p:cNvPr id="108" name="Straight Connector 107">
+            <a:extLst>
+              <a:ext uri="{FF2B5EF4-FFF2-40B4-BE49-F238E27FC236}">
+                <a16:creationId xmlns:a16="http://schemas.microsoft.com/office/drawing/2014/main" id="{4E73F104-EDE5-407E-B915-2D33904BE063}"/>
+              </a:ext>
+            </a:extLst>
+          </p:cNvPr>
+          <p:cNvCxnSpPr>
+            <a:cxnSpLocks/>
+          </p:cNvCxnSpPr>
+          <p:nvPr/>
+        </p:nvCxnSpPr>
+        <p:spPr>
+          <a:xfrm flipV="1">
+            <a:off x="5849310" y="3986665"/>
+            <a:ext cx="1015498" cy="475419"/>
+          </a:xfrm>
+          <a:prstGeom prst="line">
+            <a:avLst/>
+          </a:prstGeom>
+        </p:spPr>
+        <p:style>
+          <a:lnRef idx="1">
+            <a:schemeClr val="accent1"/>
+          </a:lnRef>
+          <a:fillRef idx="0">
+            <a:schemeClr val="accent1"/>
+          </a:fillRef>
+          <a:effectRef idx="0">
+            <a:schemeClr val="accent1"/>
+          </a:effectRef>
+          <a:fontRef idx="minor">
+            <a:schemeClr val="tx1"/>
+          </a:fontRef>
+        </p:style>
+      </p:cxnSp>
+      <p:cxnSp>
+        <p:nvCxnSpPr>
+          <p:cNvPr id="109" name="Straight Connector 108">
+            <a:extLst>
+              <a:ext uri="{FF2B5EF4-FFF2-40B4-BE49-F238E27FC236}">
+                <a16:creationId xmlns:a16="http://schemas.microsoft.com/office/drawing/2014/main" id="{6191B49E-EFF5-4738-AB6E-33E1AE470FE5}"/>
+              </a:ext>
+            </a:extLst>
+          </p:cNvPr>
+          <p:cNvCxnSpPr>
+            <a:cxnSpLocks/>
+            <a:endCxn id="58" idx="0"/>
+          </p:cNvCxnSpPr>
+          <p:nvPr/>
+        </p:nvCxnSpPr>
+        <p:spPr>
+          <a:xfrm flipV="1">
+            <a:off x="6056494" y="3195537"/>
+            <a:ext cx="1007325" cy="456434"/>
+          </a:xfrm>
+          <a:prstGeom prst="line">
+            <a:avLst/>
+          </a:prstGeom>
+        </p:spPr>
+        <p:style>
+          <a:lnRef idx="1">
+            <a:schemeClr val="accent1"/>
+          </a:lnRef>
+          <a:fillRef idx="0">
+            <a:schemeClr val="accent1"/>
+          </a:fillRef>
+          <a:effectRef idx="0">
+            <a:schemeClr val="accent1"/>
+          </a:effectRef>
+          <a:fontRef idx="minor">
+            <a:schemeClr val="tx1"/>
+          </a:fontRef>
+        </p:style>
+      </p:cxnSp>
+      <p:sp>
+        <p:nvSpPr>
+          <p:cNvPr id="110" name="Arc 109">
+            <a:extLst>
+              <a:ext uri="{FF2B5EF4-FFF2-40B4-BE49-F238E27FC236}">
+                <a16:creationId xmlns:a16="http://schemas.microsoft.com/office/drawing/2014/main" id="{77D6F64C-5260-4D10-BFE1-80F678C6533B}"/>
+              </a:ext>
+            </a:extLst>
+          </p:cNvPr>
+          <p:cNvSpPr/>
+          <p:nvPr/>
+        </p:nvSpPr>
+        <p:spPr>
+          <a:xfrm>
+            <a:off x="4958226" y="2714223"/>
+            <a:ext cx="914400" cy="914400"/>
+          </a:xfrm>
+          <a:prstGeom prst="arc">
+            <a:avLst>
+              <a:gd name="adj1" fmla="val 288290"/>
+              <a:gd name="adj2" fmla="val 1974097"/>
+            </a:avLst>
+          </a:prstGeom>
+          <a:ln w="19050"/>
+        </p:spPr>
+        <p:style>
+          <a:lnRef idx="1">
+            <a:schemeClr val="accent1"/>
+          </a:lnRef>
+          <a:fillRef idx="0">
+            <a:schemeClr val="accent1"/>
+          </a:fillRef>
+          <a:effectRef idx="0">
+            <a:schemeClr val="accent1"/>
+          </a:effectRef>
+          <a:fontRef idx="minor">
+            <a:schemeClr val="tx1"/>
+          </a:fontRef>
+        </p:style>
+        <p:txBody>
+          <a:bodyPr rtlCol="0" anchor="ctr"/>
+          <a:lstStyle/>
+          <a:p>
+            <a:pPr algn="ctr"/>
+            <a:endParaRPr lang="en-AU"/>
+          </a:p>
+        </p:txBody>
+      </p:sp>
+      <p:cxnSp>
+        <p:nvCxnSpPr>
+          <p:cNvPr id="111" name="Straight Connector 110">
+            <a:extLst>
+              <a:ext uri="{FF2B5EF4-FFF2-40B4-BE49-F238E27FC236}">
+                <a16:creationId xmlns:a16="http://schemas.microsoft.com/office/drawing/2014/main" id="{1CE0ECAA-0B91-4CAD-90A0-2AFD9DC97BA0}"/>
+              </a:ext>
+            </a:extLst>
+          </p:cNvPr>
+          <p:cNvCxnSpPr>
+            <a:cxnSpLocks/>
+          </p:cNvCxnSpPr>
+          <p:nvPr/>
+        </p:nvCxnSpPr>
+        <p:spPr>
+          <a:xfrm flipV="1">
+            <a:off x="4836969" y="3192815"/>
+            <a:ext cx="1028723" cy="470255"/>
+          </a:xfrm>
+          <a:prstGeom prst="line">
+            <a:avLst/>
+          </a:prstGeom>
+        </p:spPr>
+        <p:style>
+          <a:lnRef idx="1">
+            <a:schemeClr val="accent1"/>
+          </a:lnRef>
+          <a:fillRef idx="0">
+            <a:schemeClr val="accent1"/>
+          </a:fillRef>
+          <a:effectRef idx="0">
+            <a:schemeClr val="accent1"/>
+          </a:effectRef>
+          <a:fontRef idx="minor">
+            <a:schemeClr val="tx1"/>
+          </a:fontRef>
+        </p:style>
+      </p:cxnSp>
+      <p:cxnSp>
+        <p:nvCxnSpPr>
+          <p:cNvPr id="112" name="Straight Connector 111">
+            <a:extLst>
+              <a:ext uri="{FF2B5EF4-FFF2-40B4-BE49-F238E27FC236}">
+                <a16:creationId xmlns:a16="http://schemas.microsoft.com/office/drawing/2014/main" id="{43F841B7-AEC5-4C32-A89E-E56EC752442A}"/>
+              </a:ext>
+            </a:extLst>
+          </p:cNvPr>
+          <p:cNvCxnSpPr>
+            <a:cxnSpLocks/>
+          </p:cNvCxnSpPr>
+          <p:nvPr/>
+        </p:nvCxnSpPr>
+        <p:spPr>
+          <a:xfrm flipV="1">
+            <a:off x="4748864" y="3417150"/>
+            <a:ext cx="1058113" cy="479239"/>
+          </a:xfrm>
+          <a:prstGeom prst="line">
+            <a:avLst/>
+          </a:prstGeom>
+        </p:spPr>
+        <p:style>
+          <a:lnRef idx="1">
+            <a:schemeClr val="accent1"/>
+          </a:lnRef>
+          <a:fillRef idx="0">
+            <a:schemeClr val="accent1"/>
+          </a:fillRef>
+          <a:effectRef idx="0">
+            <a:schemeClr val="accent1"/>
+          </a:effectRef>
+          <a:fontRef idx="minor">
+            <a:schemeClr val="tx1"/>
+          </a:fontRef>
+        </p:style>
+      </p:cxnSp>
+      <p:cxnSp>
+        <p:nvCxnSpPr>
+          <p:cNvPr id="121" name="Straight Connector 120">
+            <a:extLst>
+              <a:ext uri="{FF2B5EF4-FFF2-40B4-BE49-F238E27FC236}">
+                <a16:creationId xmlns:a16="http://schemas.microsoft.com/office/drawing/2014/main" id="{81997C64-4C34-411B-8E0B-5BF6813B1C86}"/>
+              </a:ext>
+            </a:extLst>
+          </p:cNvPr>
+          <p:cNvCxnSpPr>
+            <a:cxnSpLocks/>
+            <a:endCxn id="89" idx="0"/>
+          </p:cNvCxnSpPr>
+          <p:nvPr/>
+        </p:nvCxnSpPr>
+        <p:spPr>
+          <a:xfrm flipV="1">
+            <a:off x="6007723" y="3593567"/>
+            <a:ext cx="1014069" cy="448218"/>
+          </a:xfrm>
+          <a:prstGeom prst="line">
+            <a:avLst/>
+          </a:prstGeom>
+        </p:spPr>
+        <p:style>
+          <a:lnRef idx="1">
+            <a:schemeClr val="accent1"/>
+          </a:lnRef>
+          <a:fillRef idx="0">
+            <a:schemeClr val="accent1"/>
+          </a:fillRef>
+          <a:effectRef idx="0">
+            <a:schemeClr val="accent1"/>
+          </a:effectRef>
+          <a:fontRef idx="minor">
+            <a:schemeClr val="tx1"/>
+          </a:fontRef>
+        </p:style>
+      </p:cxnSp>
+      <p:cxnSp>
+        <p:nvCxnSpPr>
+          <p:cNvPr id="131" name="Straight Connector 130">
+            <a:extLst>
+              <a:ext uri="{FF2B5EF4-FFF2-40B4-BE49-F238E27FC236}">
+                <a16:creationId xmlns:a16="http://schemas.microsoft.com/office/drawing/2014/main" id="{C7C11E92-151B-4668-9032-3F28B5E31805}"/>
+              </a:ext>
+            </a:extLst>
+          </p:cNvPr>
+          <p:cNvCxnSpPr>
+            <a:stCxn id="89" idx="5"/>
+            <a:endCxn id="89" idx="2"/>
+          </p:cNvCxnSpPr>
+          <p:nvPr/>
+        </p:nvCxnSpPr>
+        <p:spPr>
+          <a:xfrm>
+            <a:off x="4881077" y="3444398"/>
+            <a:ext cx="4130167" cy="953524"/>
+          </a:xfrm>
+          <a:prstGeom prst="line">
+            <a:avLst/>
+          </a:prstGeom>
+        </p:spPr>
+        <p:style>
+          <a:lnRef idx="1">
+            <a:schemeClr val="accent1"/>
+          </a:lnRef>
+          <a:fillRef idx="0">
+            <a:schemeClr val="accent1"/>
+          </a:fillRef>
+          <a:effectRef idx="0">
+            <a:schemeClr val="accent1"/>
+          </a:effectRef>
+          <a:fontRef idx="minor">
+            <a:schemeClr val="tx1"/>
+          </a:fontRef>
+        </p:style>
+      </p:cxnSp>
+      <p:cxnSp>
+        <p:nvCxnSpPr>
+          <p:cNvPr id="202" name="Straight Connector 201">
+            <a:extLst>
+              <a:ext uri="{FF2B5EF4-FFF2-40B4-BE49-F238E27FC236}">
+                <a16:creationId xmlns:a16="http://schemas.microsoft.com/office/drawing/2014/main" id="{8EB34537-B236-4FA0-9FD6-DFE5D5ED4E75}"/>
+              </a:ext>
+            </a:extLst>
+          </p:cNvPr>
+          <p:cNvCxnSpPr>
+            <a:cxnSpLocks/>
+          </p:cNvCxnSpPr>
+          <p:nvPr/>
+        </p:nvCxnSpPr>
+        <p:spPr>
+          <a:xfrm flipH="1">
+            <a:off x="8228082" y="3429000"/>
+            <a:ext cx="455102" cy="1765154"/>
+          </a:xfrm>
+          <a:prstGeom prst="line">
+            <a:avLst/>
+          </a:prstGeom>
+        </p:spPr>
+        <p:style>
+          <a:lnRef idx="1">
+            <a:schemeClr val="accent1"/>
+          </a:lnRef>
+          <a:fillRef idx="0">
+            <a:schemeClr val="accent1"/>
+          </a:fillRef>
+          <a:effectRef idx="0">
+            <a:schemeClr val="accent1"/>
+          </a:effectRef>
+          <a:fontRef idx="minor">
+            <a:schemeClr val="tx1"/>
+          </a:fontRef>
+        </p:style>
+      </p:cxnSp>
+      <p:cxnSp>
+        <p:nvCxnSpPr>
+          <p:cNvPr id="208" name="Straight Connector 207">
+            <a:extLst>
+              <a:ext uri="{FF2B5EF4-FFF2-40B4-BE49-F238E27FC236}">
+                <a16:creationId xmlns:a16="http://schemas.microsoft.com/office/drawing/2014/main" id="{B927ADA8-D634-4D5B-9587-89440C8616A5}"/>
+              </a:ext>
+            </a:extLst>
+          </p:cNvPr>
+          <p:cNvCxnSpPr>
+            <a:stCxn id="89" idx="5"/>
+            <a:endCxn id="88" idx="2"/>
+          </p:cNvCxnSpPr>
+          <p:nvPr/>
+        </p:nvCxnSpPr>
+        <p:spPr>
+          <a:xfrm>
+            <a:off x="4881077" y="3444398"/>
+            <a:ext cx="3752890" cy="1976011"/>
+          </a:xfrm>
+          <a:prstGeom prst="line">
+            <a:avLst/>
+          </a:prstGeom>
+        </p:spPr>
+        <p:style>
+          <a:lnRef idx="1">
+            <a:schemeClr val="accent1"/>
+          </a:lnRef>
+          <a:fillRef idx="0">
+            <a:schemeClr val="accent1"/>
+          </a:fillRef>
+          <a:effectRef idx="0">
+            <a:schemeClr val="accent1"/>
+          </a:effectRef>
+          <a:fontRef idx="minor">
+            <a:schemeClr val="tx1"/>
+          </a:fontRef>
+        </p:style>
+      </p:cxnSp>
+      <p:cxnSp>
+        <p:nvCxnSpPr>
+          <p:cNvPr id="212" name="Straight Connector 211">
+            <a:extLst>
+              <a:ext uri="{FF2B5EF4-FFF2-40B4-BE49-F238E27FC236}">
+                <a16:creationId xmlns:a16="http://schemas.microsoft.com/office/drawing/2014/main" id="{E23D0723-3463-4790-B9AF-E578E7077039}"/>
+              </a:ext>
+            </a:extLst>
+          </p:cNvPr>
+          <p:cNvCxnSpPr>
+            <a:stCxn id="89" idx="5"/>
+            <a:endCxn id="58" idx="2"/>
+          </p:cNvCxnSpPr>
+          <p:nvPr/>
+        </p:nvCxnSpPr>
+        <p:spPr>
+          <a:xfrm flipV="1">
+            <a:off x="4881077" y="3429558"/>
+            <a:ext cx="4337848" cy="14840"/>
+          </a:xfrm>
+          <a:prstGeom prst="line">
+            <a:avLst/>
+          </a:prstGeom>
+        </p:spPr>
+        <p:style>
+          <a:lnRef idx="1">
+            <a:schemeClr val="accent1"/>
+          </a:lnRef>
+          <a:fillRef idx="0">
+            <a:schemeClr val="accent1"/>
+          </a:fillRef>
+          <a:effectRef idx="0">
+            <a:schemeClr val="accent1"/>
+          </a:effectRef>
+          <a:fontRef idx="minor">
+            <a:schemeClr val="tx1"/>
+          </a:fontRef>
+        </p:style>
+      </p:cxnSp>
+      <p:pic>
+        <p:nvPicPr>
+          <p:cNvPr id="215" name="Picture 214">
+            <a:extLst>
+              <a:ext uri="{FF2B5EF4-FFF2-40B4-BE49-F238E27FC236}">
+                <a16:creationId xmlns:a16="http://schemas.microsoft.com/office/drawing/2014/main" id="{AC623809-65F1-4136-ADC5-93BC5B529110}"/>
+              </a:ext>
+            </a:extLst>
+          </p:cNvPr>
+          <p:cNvPicPr>
+            <a:picLocks noChangeAspect="1"/>
+          </p:cNvPicPr>
+          <p:nvPr/>
+        </p:nvPicPr>
+        <p:blipFill>
+          <a:blip r:embed="rId2"/>
+          <a:stretch>
+            <a:fillRect/>
+          </a:stretch>
+        </p:blipFill>
+        <p:spPr>
+          <a:xfrm>
+            <a:off x="6908391" y="3327832"/>
+            <a:ext cx="3530956" cy="2617136"/>
+          </a:xfrm>
+          <a:prstGeom prst="rect">
+            <a:avLst/>
+          </a:prstGeom>
+        </p:spPr>
+      </p:pic>
+      <p:pic>
+        <p:nvPicPr>
+          <p:cNvPr id="230" name="Picture 229">
+            <a:extLst>
+              <a:ext uri="{FF2B5EF4-FFF2-40B4-BE49-F238E27FC236}">
+                <a16:creationId xmlns:a16="http://schemas.microsoft.com/office/drawing/2014/main" id="{BFC4E085-83C5-4E95-A56F-686755AC988F}"/>
+              </a:ext>
+            </a:extLst>
+          </p:cNvPr>
+          <p:cNvPicPr>
+            <a:picLocks noChangeAspect="1"/>
+          </p:cNvPicPr>
+          <p:nvPr/>
+        </p:nvPicPr>
+        <p:blipFill>
+          <a:blip r:embed="rId3"/>
+          <a:stretch>
+            <a:fillRect/>
+          </a:stretch>
+        </p:blipFill>
+        <p:spPr>
+          <a:xfrm>
+            <a:off x="6090855" y="3407196"/>
+            <a:ext cx="1332000" cy="1358761"/>
+          </a:xfrm>
+          <a:prstGeom prst="rect">
+            <a:avLst/>
+          </a:prstGeom>
+          <a:ln>
+            <a:noFill/>
+          </a:ln>
+        </p:spPr>
+      </p:pic>
+      <p:pic>
+        <p:nvPicPr>
+          <p:cNvPr id="231" name="Picture 230">
+            <a:extLst>
+              <a:ext uri="{FF2B5EF4-FFF2-40B4-BE49-F238E27FC236}">
+                <a16:creationId xmlns:a16="http://schemas.microsoft.com/office/drawing/2014/main" id="{BDB62D6F-28DA-40D4-9604-EAD5CFB4DE8D}"/>
+              </a:ext>
+            </a:extLst>
+          </p:cNvPr>
+          <p:cNvPicPr>
+            <a:picLocks noChangeAspect="1"/>
+          </p:cNvPicPr>
+          <p:nvPr/>
+        </p:nvPicPr>
+        <p:blipFill>
+          <a:blip r:embed="rId4"/>
+          <a:stretch>
+            <a:fillRect/>
+          </a:stretch>
+        </p:blipFill>
+        <p:spPr>
+          <a:xfrm>
+            <a:off x="5220162" y="3459238"/>
+            <a:ext cx="657225" cy="412061"/>
+          </a:xfrm>
+          <a:prstGeom prst="rect">
+            <a:avLst/>
+          </a:prstGeom>
+        </p:spPr>
+      </p:pic>
+      <p:cxnSp>
+        <p:nvCxnSpPr>
+          <p:cNvPr id="234" name="Straight Arrow Connector 233">
+            <a:extLst>
+              <a:ext uri="{FF2B5EF4-FFF2-40B4-BE49-F238E27FC236}">
+                <a16:creationId xmlns:a16="http://schemas.microsoft.com/office/drawing/2014/main" id="{5DF379B6-6D79-4B37-B229-2559B07C8A67}"/>
+              </a:ext>
+            </a:extLst>
+          </p:cNvPr>
+          <p:cNvCxnSpPr>
+            <a:cxnSpLocks/>
+          </p:cNvCxnSpPr>
+          <p:nvPr/>
+        </p:nvCxnSpPr>
+        <p:spPr>
+          <a:xfrm flipV="1">
+            <a:off x="6556320" y="3192815"/>
+            <a:ext cx="1324979" cy="625052"/>
+          </a:xfrm>
+          <a:prstGeom prst="straightConnector1">
+            <a:avLst/>
+          </a:prstGeom>
+          <a:ln w="57150">
+            <a:solidFill>
+              <a:srgbClr val="00B050"/>
+            </a:solidFill>
+            <a:tailEnd type="stealth" w="lg" len="lg"/>
+          </a:ln>
+        </p:spPr>
+        <p:style>
+          <a:lnRef idx="1">
+            <a:schemeClr val="accent1"/>
+          </a:lnRef>
+          <a:fillRef idx="0">
+            <a:schemeClr val="accent1"/>
+          </a:fillRef>
+          <a:effectRef idx="0">
+            <a:schemeClr val="accent1"/>
+          </a:effectRef>
+          <a:fontRef idx="minor">
+            <a:schemeClr val="tx1"/>
+          </a:fontRef>
+        </p:style>
+      </p:cxnSp>
+      <p:cxnSp>
+        <p:nvCxnSpPr>
+          <p:cNvPr id="236" name="Straight Arrow Connector 235">
+            <a:extLst>
+              <a:ext uri="{FF2B5EF4-FFF2-40B4-BE49-F238E27FC236}">
+                <a16:creationId xmlns:a16="http://schemas.microsoft.com/office/drawing/2014/main" id="{72720128-EA7F-4EDA-8002-52CAD3E765DA}"/>
+              </a:ext>
+            </a:extLst>
+          </p:cNvPr>
+          <p:cNvCxnSpPr>
+            <a:cxnSpLocks/>
+          </p:cNvCxnSpPr>
+          <p:nvPr/>
+        </p:nvCxnSpPr>
+        <p:spPr>
+          <a:xfrm flipV="1">
+            <a:off x="8484429" y="3226942"/>
+            <a:ext cx="2210869" cy="1042967"/>
+          </a:xfrm>
+          <a:prstGeom prst="straightConnector1">
+            <a:avLst/>
+          </a:prstGeom>
+          <a:ln w="57150">
+            <a:solidFill>
+              <a:srgbClr val="00B050"/>
+            </a:solidFill>
+            <a:tailEnd type="stealth" w="lg" len="lg"/>
+          </a:ln>
+        </p:spPr>
+        <p:style>
+          <a:lnRef idx="1">
+            <a:schemeClr val="accent1"/>
+          </a:lnRef>
+          <a:fillRef idx="0">
+            <a:schemeClr val="accent1"/>
+          </a:fillRef>
+          <a:effectRef idx="0">
+            <a:schemeClr val="accent1"/>
+          </a:effectRef>
+          <a:fontRef idx="minor">
+            <a:schemeClr val="tx1"/>
+          </a:fontRef>
+        </p:style>
+      </p:cxnSp>
+    </p:spTree>
+    <p:extLst>
+      <p:ext uri="{BB962C8B-B14F-4D97-AF65-F5344CB8AC3E}">
+        <p14:creationId xmlns:p14="http://schemas.microsoft.com/office/powerpoint/2010/main" val="3133723904"/>
       </p:ext>
     </p:extLst>
   </p:cSld>

--- a/docs/figures/new diagrams 3.pptx
+++ b/docs/figures/new diagrams 3.pptx
@@ -34,6 +34,12 @@
     <p:sldId id="266" r:id="rId28"/>
     <p:sldId id="265" r:id="rId29"/>
     <p:sldId id="267" r:id="rId30"/>
+    <p:sldId id="288" r:id="rId31"/>
+    <p:sldId id="289" r:id="rId32"/>
+    <p:sldId id="290" r:id="rId33"/>
+    <p:sldId id="291" r:id="rId34"/>
+    <p:sldId id="292" r:id="rId35"/>
+    <p:sldId id="293" r:id="rId36"/>
   </p:sldIdLst>
   <p:sldSz cx="12192000" cy="6858000"/>
   <p:notesSz cx="6858000" cy="9144000"/>
@@ -170,6 +176,12 @@
             <p14:sldId id="266"/>
             <p14:sldId id="265"/>
             <p14:sldId id="267"/>
+            <p14:sldId id="288"/>
+            <p14:sldId id="289"/>
+            <p14:sldId id="290"/>
+            <p14:sldId id="291"/>
+            <p14:sldId id="292"/>
+            <p14:sldId id="293"/>
           </p14:sldIdLst>
         </p14:section>
       </p14:sectionLst>
@@ -341,7 +353,7 @@
           <a:p>
             <a:fld id="{783195BA-A24A-42A8-94D4-15E9273B559F}" type="datetimeFigureOut">
               <a:rPr lang="en-AU" smtClean="0"/>
-              <a:t>26/05/2026</a:t>
+              <a:t>16/06/2026</a:t>
             </a:fld>
             <a:endParaRPr lang="en-AU"/>
           </a:p>
@@ -541,7 +553,7 @@
           <a:p>
             <a:fld id="{783195BA-A24A-42A8-94D4-15E9273B559F}" type="datetimeFigureOut">
               <a:rPr lang="en-AU" smtClean="0"/>
-              <a:t>26/05/2026</a:t>
+              <a:t>16/06/2026</a:t>
             </a:fld>
             <a:endParaRPr lang="en-AU"/>
           </a:p>
@@ -751,7 +763,7 @@
           <a:p>
             <a:fld id="{783195BA-A24A-42A8-94D4-15E9273B559F}" type="datetimeFigureOut">
               <a:rPr lang="en-AU" smtClean="0"/>
-              <a:t>26/05/2026</a:t>
+              <a:t>16/06/2026</a:t>
             </a:fld>
             <a:endParaRPr lang="en-AU"/>
           </a:p>
@@ -951,7 +963,7 @@
           <a:p>
             <a:fld id="{783195BA-A24A-42A8-94D4-15E9273B559F}" type="datetimeFigureOut">
               <a:rPr lang="en-AU" smtClean="0"/>
-              <a:t>26/05/2026</a:t>
+              <a:t>16/06/2026</a:t>
             </a:fld>
             <a:endParaRPr lang="en-AU"/>
           </a:p>
@@ -1227,7 +1239,7 @@
           <a:p>
             <a:fld id="{783195BA-A24A-42A8-94D4-15E9273B559F}" type="datetimeFigureOut">
               <a:rPr lang="en-AU" smtClean="0"/>
-              <a:t>26/05/2026</a:t>
+              <a:t>16/06/2026</a:t>
             </a:fld>
             <a:endParaRPr lang="en-AU"/>
           </a:p>
@@ -1495,7 +1507,7 @@
           <a:p>
             <a:fld id="{783195BA-A24A-42A8-94D4-15E9273B559F}" type="datetimeFigureOut">
               <a:rPr lang="en-AU" smtClean="0"/>
-              <a:t>26/05/2026</a:t>
+              <a:t>16/06/2026</a:t>
             </a:fld>
             <a:endParaRPr lang="en-AU"/>
           </a:p>
@@ -1910,7 +1922,7 @@
           <a:p>
             <a:fld id="{783195BA-A24A-42A8-94D4-15E9273B559F}" type="datetimeFigureOut">
               <a:rPr lang="en-AU" smtClean="0"/>
-              <a:t>26/05/2026</a:t>
+              <a:t>16/06/2026</a:t>
             </a:fld>
             <a:endParaRPr lang="en-AU"/>
           </a:p>
@@ -2052,7 +2064,7 @@
           <a:p>
             <a:fld id="{783195BA-A24A-42A8-94D4-15E9273B559F}" type="datetimeFigureOut">
               <a:rPr lang="en-AU" smtClean="0"/>
-              <a:t>26/05/2026</a:t>
+              <a:t>16/06/2026</a:t>
             </a:fld>
             <a:endParaRPr lang="en-AU"/>
           </a:p>
@@ -2165,7 +2177,7 @@
           <a:p>
             <a:fld id="{783195BA-A24A-42A8-94D4-15E9273B559F}" type="datetimeFigureOut">
               <a:rPr lang="en-AU" smtClean="0"/>
-              <a:t>26/05/2026</a:t>
+              <a:t>16/06/2026</a:t>
             </a:fld>
             <a:endParaRPr lang="en-AU"/>
           </a:p>
@@ -2478,7 +2490,7 @@
           <a:p>
             <a:fld id="{783195BA-A24A-42A8-94D4-15E9273B559F}" type="datetimeFigureOut">
               <a:rPr lang="en-AU" smtClean="0"/>
-              <a:t>26/05/2026</a:t>
+              <a:t>16/06/2026</a:t>
             </a:fld>
             <a:endParaRPr lang="en-AU"/>
           </a:p>
@@ -2767,7 +2779,7 @@
           <a:p>
             <a:fld id="{783195BA-A24A-42A8-94D4-15E9273B559F}" type="datetimeFigureOut">
               <a:rPr lang="en-AU" smtClean="0"/>
-              <a:t>26/05/2026</a:t>
+              <a:t>16/06/2026</a:t>
             </a:fld>
             <a:endParaRPr lang="en-AU"/>
           </a:p>
@@ -3010,7 +3022,7 @@
           <a:p>
             <a:fld id="{783195BA-A24A-42A8-94D4-15E9273B559F}" type="datetimeFigureOut">
               <a:rPr lang="en-AU" smtClean="0"/>
-              <a:t>26/05/2026</a:t>
+              <a:t>16/06/2026</a:t>
             </a:fld>
             <a:endParaRPr lang="en-AU"/>
           </a:p>
@@ -18599,6 +18611,36 @@
           </a:prstGeom>
         </p:spPr>
       </p:pic>
+      <p:pic>
+        <p:nvPicPr>
+          <p:cNvPr id="31" name="Picture 30">
+            <a:extLst>
+              <a:ext uri="{FF2B5EF4-FFF2-40B4-BE49-F238E27FC236}">
+                <a16:creationId xmlns:a16="http://schemas.microsoft.com/office/drawing/2014/main" id="{1847D78A-56CE-43B8-AD74-056B49B1E887}"/>
+              </a:ext>
+            </a:extLst>
+          </p:cNvPr>
+          <p:cNvPicPr>
+            <a:picLocks noChangeAspect="1"/>
+          </p:cNvPicPr>
+          <p:nvPr/>
+        </p:nvPicPr>
+        <p:blipFill>
+          <a:blip r:embed="rId2"/>
+          <a:stretch>
+            <a:fillRect/>
+          </a:stretch>
+        </p:blipFill>
+        <p:spPr>
+          <a:xfrm rot="1783512">
+            <a:off x="2060506" y="2745204"/>
+            <a:ext cx="4282578" cy="4273578"/>
+          </a:xfrm>
+          <a:prstGeom prst="rect">
+            <a:avLst/>
+          </a:prstGeom>
+        </p:spPr>
+      </p:pic>
     </p:spTree>
     <p:extLst>
       <p:ext uri="{BB962C8B-B14F-4D97-AF65-F5344CB8AC3E}">
@@ -25457,6 +25499,5071 @@
 </p:sld>
 </file>
 
+<file path=ppt/slides/slide30.xml><?xml version="1.0" encoding="utf-8"?>
+<p:sld xmlns:a="http://schemas.openxmlformats.org/drawingml/2006/main" xmlns:r="http://schemas.openxmlformats.org/officeDocument/2006/relationships" xmlns:p="http://schemas.openxmlformats.org/presentationml/2006/main">
+  <p:cSld>
+    <p:spTree>
+      <p:nvGrpSpPr>
+        <p:cNvPr id="1" name=""/>
+        <p:cNvGrpSpPr/>
+        <p:nvPr/>
+      </p:nvGrpSpPr>
+      <p:grpSpPr>
+        <a:xfrm>
+          <a:off x="0" y="0"/>
+          <a:ext cx="0" cy="0"/>
+          <a:chOff x="0" y="0"/>
+          <a:chExt cx="0" cy="0"/>
+        </a:xfrm>
+      </p:grpSpPr>
+      <p:grpSp>
+        <p:nvGrpSpPr>
+          <p:cNvPr id="41" name="Group 40">
+            <a:extLst>
+              <a:ext uri="{FF2B5EF4-FFF2-40B4-BE49-F238E27FC236}">
+                <a16:creationId xmlns:a16="http://schemas.microsoft.com/office/drawing/2014/main" id="{4D40488A-4B87-481F-A194-F73A36648E98}"/>
+              </a:ext>
+            </a:extLst>
+          </p:cNvPr>
+          <p:cNvGrpSpPr/>
+          <p:nvPr/>
+        </p:nvGrpSpPr>
+        <p:grpSpPr>
+          <a:xfrm>
+            <a:off x="1016270" y="1088571"/>
+            <a:ext cx="9599480" cy="4317641"/>
+            <a:chOff x="1016270" y="1088571"/>
+            <a:chExt cx="9599480" cy="4317641"/>
+          </a:xfrm>
+        </p:grpSpPr>
+        <p:sp>
+          <p:nvSpPr>
+            <p:cNvPr id="39" name="Oval 38">
+              <a:extLst>
+                <a:ext uri="{FF2B5EF4-FFF2-40B4-BE49-F238E27FC236}">
+                  <a16:creationId xmlns:a16="http://schemas.microsoft.com/office/drawing/2014/main" id="{7D286CA9-84FE-46F6-8BFF-ACF9824E2C0B}"/>
+                </a:ext>
+              </a:extLst>
+            </p:cNvPr>
+            <p:cNvSpPr/>
+            <p:nvPr/>
+          </p:nvSpPr>
+          <p:spPr>
+            <a:xfrm>
+              <a:off x="4984850" y="1923415"/>
+              <a:ext cx="1637790" cy="1637790"/>
+            </a:xfrm>
+            <a:prstGeom prst="ellipse">
+              <a:avLst/>
+            </a:prstGeom>
+            <a:gradFill flip="none" rotWithShape="1">
+              <a:gsLst>
+                <a:gs pos="71000">
+                  <a:schemeClr val="bg1"/>
+                </a:gs>
+                <a:gs pos="100000">
+                  <a:schemeClr val="bg1"/>
+                </a:gs>
+                <a:gs pos="7000">
+                  <a:srgbClr val="9CB4E0"/>
+                </a:gs>
+                <a:gs pos="0">
+                  <a:schemeClr val="accent1">
+                    <a:lumMod val="75000"/>
+                  </a:schemeClr>
+                </a:gs>
+              </a:gsLst>
+              <a:path path="circle">
+                <a:fillToRect l="50000" t="50000" r="50000" b="50000"/>
+              </a:path>
+              <a:tileRect/>
+            </a:gradFill>
+            <a:ln>
+              <a:noFill/>
+            </a:ln>
+          </p:spPr>
+          <p:style>
+            <a:lnRef idx="2">
+              <a:schemeClr val="accent1">
+                <a:shade val="50000"/>
+              </a:schemeClr>
+            </a:lnRef>
+            <a:fillRef idx="1">
+              <a:schemeClr val="accent1"/>
+            </a:fillRef>
+            <a:effectRef idx="0">
+              <a:schemeClr val="accent1"/>
+            </a:effectRef>
+            <a:fontRef idx="minor">
+              <a:schemeClr val="lt1"/>
+            </a:fontRef>
+          </p:style>
+          <p:txBody>
+            <a:bodyPr rtlCol="0" anchor="ctr"/>
+            <a:lstStyle/>
+            <a:p>
+              <a:pPr algn="ctr"/>
+              <a:endParaRPr lang="en-AU"/>
+            </a:p>
+          </p:txBody>
+        </p:sp>
+        <p:grpSp>
+          <p:nvGrpSpPr>
+            <p:cNvPr id="6" name="Group 5">
+              <a:extLst>
+                <a:ext uri="{FF2B5EF4-FFF2-40B4-BE49-F238E27FC236}">
+                  <a16:creationId xmlns:a16="http://schemas.microsoft.com/office/drawing/2014/main" id="{CB1C5496-AF4F-4B4E-8789-A9ADB74491EB}"/>
+                </a:ext>
+              </a:extLst>
+            </p:cNvPr>
+            <p:cNvGrpSpPr/>
+            <p:nvPr/>
+          </p:nvGrpSpPr>
+          <p:grpSpPr>
+            <a:xfrm>
+              <a:off x="4036234" y="4829552"/>
+              <a:ext cx="3542768" cy="530912"/>
+              <a:chOff x="143925" y="517849"/>
+              <a:chExt cx="6568751" cy="5822302"/>
+            </a:xfrm>
+          </p:grpSpPr>
+          <p:sp>
+            <p:nvSpPr>
+              <p:cNvPr id="7" name="Flowchart: Manual Operation 6">
+                <a:extLst>
+                  <a:ext uri="{FF2B5EF4-FFF2-40B4-BE49-F238E27FC236}">
+                    <a16:creationId xmlns:a16="http://schemas.microsoft.com/office/drawing/2014/main" id="{A898B8CA-4964-484B-AEE9-9D8A9600B9D6}"/>
+                  </a:ext>
+                </a:extLst>
+              </p:cNvPr>
+              <p:cNvSpPr/>
+              <p:nvPr/>
+            </p:nvSpPr>
+            <p:spPr>
+              <a:xfrm flipV="1">
+                <a:off x="143925" y="517849"/>
+                <a:ext cx="6568751" cy="5822302"/>
+              </a:xfrm>
+              <a:prstGeom prst="flowChartManualOperation">
+                <a:avLst/>
+              </a:prstGeom>
+              <a:solidFill>
+                <a:schemeClr val="bg1">
+                  <a:lumMod val="50000"/>
+                  <a:alpha val="50000"/>
+                </a:schemeClr>
+              </a:solidFill>
+              <a:ln>
+                <a:solidFill>
+                  <a:schemeClr val="bg1">
+                    <a:lumMod val="50000"/>
+                  </a:schemeClr>
+                </a:solidFill>
+              </a:ln>
+            </p:spPr>
+            <p:style>
+              <a:lnRef idx="2">
+                <a:schemeClr val="accent1">
+                  <a:shade val="50000"/>
+                </a:schemeClr>
+              </a:lnRef>
+              <a:fillRef idx="1">
+                <a:schemeClr val="accent1"/>
+              </a:fillRef>
+              <a:effectRef idx="0">
+                <a:schemeClr val="accent1"/>
+              </a:effectRef>
+              <a:fontRef idx="minor">
+                <a:schemeClr val="lt1"/>
+              </a:fontRef>
+            </p:style>
+            <p:txBody>
+              <a:bodyPr rtlCol="0" anchor="ctr"/>
+              <a:lstStyle/>
+              <a:p>
+                <a:pPr algn="ctr"/>
+                <a:endParaRPr lang="en-AU"/>
+              </a:p>
+            </p:txBody>
+          </p:sp>
+          <p:grpSp>
+            <p:nvGrpSpPr>
+              <p:cNvPr id="8" name="Group 7">
+                <a:extLst>
+                  <a:ext uri="{FF2B5EF4-FFF2-40B4-BE49-F238E27FC236}">
+                    <a16:creationId xmlns:a16="http://schemas.microsoft.com/office/drawing/2014/main" id="{1EECDE72-B5C3-4F17-9DF2-DF3143BA9BA3}"/>
+                  </a:ext>
+                </a:extLst>
+              </p:cNvPr>
+              <p:cNvGrpSpPr/>
+              <p:nvPr/>
+            </p:nvGrpSpPr>
+            <p:grpSpPr>
+              <a:xfrm>
+                <a:off x="1291201" y="1291905"/>
+                <a:ext cx="4282588" cy="4274190"/>
+                <a:chOff x="1291201" y="1291905"/>
+                <a:chExt cx="4282588" cy="4274190"/>
+              </a:xfrm>
+            </p:grpSpPr>
+            <p:pic>
+              <p:nvPicPr>
+                <p:cNvPr id="9" name="Picture 8">
+                  <a:extLst>
+                    <a:ext uri="{FF2B5EF4-FFF2-40B4-BE49-F238E27FC236}">
+                      <a16:creationId xmlns:a16="http://schemas.microsoft.com/office/drawing/2014/main" id="{C77CDC4E-7500-404C-B658-F711E6DD9F3B}"/>
+                    </a:ext>
+                  </a:extLst>
+                </p:cNvPr>
+                <p:cNvPicPr>
+                  <a:picLocks noChangeAspect="1"/>
+                </p:cNvPicPr>
+                <p:nvPr/>
+              </p:nvPicPr>
+              <p:blipFill>
+                <a:blip r:embed="rId2"/>
+                <a:stretch>
+                  <a:fillRect/>
+                </a:stretch>
+              </p:blipFill>
+              <p:spPr>
+                <a:xfrm>
+                  <a:off x="1291201" y="1292207"/>
+                  <a:ext cx="4282588" cy="4273588"/>
+                </a:xfrm>
+                <a:prstGeom prst="rect">
+                  <a:avLst/>
+                </a:prstGeom>
+              </p:spPr>
+            </p:pic>
+            <p:grpSp>
+              <p:nvGrpSpPr>
+                <p:cNvPr id="10" name="Group 9">
+                  <a:extLst>
+                    <a:ext uri="{FF2B5EF4-FFF2-40B4-BE49-F238E27FC236}">
+                      <a16:creationId xmlns:a16="http://schemas.microsoft.com/office/drawing/2014/main" id="{7F5AC4DB-AFF9-40F9-B950-28D2812A7D20}"/>
+                    </a:ext>
+                  </a:extLst>
+                </p:cNvPr>
+                <p:cNvGrpSpPr/>
+                <p:nvPr/>
+              </p:nvGrpSpPr>
+              <p:grpSpPr>
+                <a:xfrm>
+                  <a:off x="1291206" y="1291905"/>
+                  <a:ext cx="4274190" cy="4274190"/>
+                  <a:chOff x="1291206" y="1291905"/>
+                  <a:chExt cx="4274190" cy="4274190"/>
+                </a:xfrm>
+                <a:scene3d>
+                  <a:camera prst="orthographicFront">
+                    <a:rot lat="0" lon="0" rev="0"/>
+                  </a:camera>
+                  <a:lightRig rig="threePt" dir="t"/>
+                </a:scene3d>
+              </p:grpSpPr>
+              <p:sp>
+                <p:nvSpPr>
+                  <p:cNvPr id="11" name="Oval 10">
+                    <a:extLst>
+                      <a:ext uri="{FF2B5EF4-FFF2-40B4-BE49-F238E27FC236}">
+                        <a16:creationId xmlns:a16="http://schemas.microsoft.com/office/drawing/2014/main" id="{1F3D646E-F7C8-436E-8F37-A66C9F242143}"/>
+                      </a:ext>
+                    </a:extLst>
+                  </p:cNvPr>
+                  <p:cNvSpPr/>
+                  <p:nvPr/>
+                </p:nvSpPr>
+                <p:spPr>
+                  <a:xfrm>
+                    <a:off x="1291206" y="1291905"/>
+                    <a:ext cx="4274190" cy="4274190"/>
+                  </a:xfrm>
+                  <a:prstGeom prst="ellipse">
+                    <a:avLst/>
+                  </a:prstGeom>
+                  <a:noFill/>
+                  <a:ln>
+                    <a:solidFill>
+                      <a:schemeClr val="bg2">
+                        <a:lumMod val="50000"/>
+                      </a:schemeClr>
+                    </a:solidFill>
+                  </a:ln>
+                </p:spPr>
+                <p:style>
+                  <a:lnRef idx="2">
+                    <a:schemeClr val="accent1">
+                      <a:shade val="50000"/>
+                    </a:schemeClr>
+                  </a:lnRef>
+                  <a:fillRef idx="1">
+                    <a:schemeClr val="accent1"/>
+                  </a:fillRef>
+                  <a:effectRef idx="0">
+                    <a:schemeClr val="accent1"/>
+                  </a:effectRef>
+                  <a:fontRef idx="minor">
+                    <a:schemeClr val="lt1"/>
+                  </a:fontRef>
+                </p:style>
+                <p:txBody>
+                  <a:bodyPr rtlCol="0" anchor="ctr"/>
+                  <a:lstStyle/>
+                  <a:p>
+                    <a:pPr algn="ctr"/>
+                    <a:endParaRPr lang="en-AU"/>
+                  </a:p>
+                </p:txBody>
+              </p:sp>
+              <p:cxnSp>
+                <p:nvCxnSpPr>
+                  <p:cNvPr id="12" name="Straight Connector 11">
+                    <a:extLst>
+                      <a:ext uri="{FF2B5EF4-FFF2-40B4-BE49-F238E27FC236}">
+                        <a16:creationId xmlns:a16="http://schemas.microsoft.com/office/drawing/2014/main" id="{10A2F2DB-289C-49C8-AE39-5D1C14804951}"/>
+                      </a:ext>
+                    </a:extLst>
+                  </p:cNvPr>
+                  <p:cNvCxnSpPr>
+                    <a:stCxn id="11" idx="0"/>
+                    <a:endCxn id="11" idx="4"/>
+                  </p:cNvCxnSpPr>
+                  <p:nvPr/>
+                </p:nvCxnSpPr>
+                <p:spPr>
+                  <a:xfrm>
+                    <a:off x="3428301" y="1291905"/>
+                    <a:ext cx="0" cy="4274190"/>
+                  </a:xfrm>
+                  <a:prstGeom prst="line">
+                    <a:avLst/>
+                  </a:prstGeom>
+                  <a:ln>
+                    <a:solidFill>
+                      <a:schemeClr val="bg1">
+                        <a:lumMod val="50000"/>
+                      </a:schemeClr>
+                    </a:solidFill>
+                  </a:ln>
+                </p:spPr>
+                <p:style>
+                  <a:lnRef idx="1">
+                    <a:schemeClr val="accent1"/>
+                  </a:lnRef>
+                  <a:fillRef idx="0">
+                    <a:schemeClr val="accent1"/>
+                  </a:fillRef>
+                  <a:effectRef idx="0">
+                    <a:schemeClr val="accent1"/>
+                  </a:effectRef>
+                  <a:fontRef idx="minor">
+                    <a:schemeClr val="tx1"/>
+                  </a:fontRef>
+                </p:style>
+              </p:cxnSp>
+              <p:cxnSp>
+                <p:nvCxnSpPr>
+                  <p:cNvPr id="13" name="Straight Connector 12">
+                    <a:extLst>
+                      <a:ext uri="{FF2B5EF4-FFF2-40B4-BE49-F238E27FC236}">
+                        <a16:creationId xmlns:a16="http://schemas.microsoft.com/office/drawing/2014/main" id="{7ED648D0-F8AA-483C-B239-E6E7AC4A598A}"/>
+                      </a:ext>
+                    </a:extLst>
+                  </p:cNvPr>
+                  <p:cNvCxnSpPr>
+                    <a:stCxn id="11" idx="2"/>
+                    <a:endCxn id="11" idx="6"/>
+                  </p:cNvCxnSpPr>
+                  <p:nvPr/>
+                </p:nvCxnSpPr>
+                <p:spPr>
+                  <a:xfrm>
+                    <a:off x="1291206" y="3429000"/>
+                    <a:ext cx="4274190" cy="0"/>
+                  </a:xfrm>
+                  <a:prstGeom prst="line">
+                    <a:avLst/>
+                  </a:prstGeom>
+                  <a:ln>
+                    <a:solidFill>
+                      <a:schemeClr val="bg1">
+                        <a:lumMod val="50000"/>
+                      </a:schemeClr>
+                    </a:solidFill>
+                  </a:ln>
+                </p:spPr>
+                <p:style>
+                  <a:lnRef idx="1">
+                    <a:schemeClr val="accent1"/>
+                  </a:lnRef>
+                  <a:fillRef idx="0">
+                    <a:schemeClr val="accent1"/>
+                  </a:fillRef>
+                  <a:effectRef idx="0">
+                    <a:schemeClr val="accent1"/>
+                  </a:effectRef>
+                  <a:fontRef idx="minor">
+                    <a:schemeClr val="tx1"/>
+                  </a:fontRef>
+                </p:style>
+              </p:cxnSp>
+              <p:cxnSp>
+                <p:nvCxnSpPr>
+                  <p:cNvPr id="14" name="Straight Arrow Connector 13">
+                    <a:extLst>
+                      <a:ext uri="{FF2B5EF4-FFF2-40B4-BE49-F238E27FC236}">
+                        <a16:creationId xmlns:a16="http://schemas.microsoft.com/office/drawing/2014/main" id="{F1E486FB-1B54-4A57-8999-3213A0FBB574}"/>
+                      </a:ext>
+                    </a:extLst>
+                  </p:cNvPr>
+                  <p:cNvCxnSpPr>
+                    <a:endCxn id="11" idx="7"/>
+                  </p:cNvCxnSpPr>
+                  <p:nvPr/>
+                </p:nvCxnSpPr>
+                <p:spPr>
+                  <a:xfrm flipV="1">
+                    <a:off x="3428301" y="1917846"/>
+                    <a:ext cx="1511154" cy="1511154"/>
+                  </a:xfrm>
+                  <a:prstGeom prst="straightConnector1">
+                    <a:avLst/>
+                  </a:prstGeom>
+                  <a:ln w="38100">
+                    <a:solidFill>
+                      <a:srgbClr val="FF0000"/>
+                    </a:solidFill>
+                    <a:tailEnd type="triangle"/>
+                  </a:ln>
+                </p:spPr>
+                <p:style>
+                  <a:lnRef idx="1">
+                    <a:schemeClr val="accent1"/>
+                  </a:lnRef>
+                  <a:fillRef idx="0">
+                    <a:schemeClr val="accent1"/>
+                  </a:fillRef>
+                  <a:effectRef idx="0">
+                    <a:schemeClr val="accent1"/>
+                  </a:effectRef>
+                  <a:fontRef idx="minor">
+                    <a:schemeClr val="tx1"/>
+                  </a:fontRef>
+                </p:style>
+              </p:cxnSp>
+              <p:cxnSp>
+                <p:nvCxnSpPr>
+                  <p:cNvPr id="15" name="Straight Connector 14">
+                    <a:extLst>
+                      <a:ext uri="{FF2B5EF4-FFF2-40B4-BE49-F238E27FC236}">
+                        <a16:creationId xmlns:a16="http://schemas.microsoft.com/office/drawing/2014/main" id="{929DA9C2-0E3B-49F7-AC52-B928EA4D5210}"/>
+                      </a:ext>
+                    </a:extLst>
+                  </p:cNvPr>
+                  <p:cNvCxnSpPr/>
+                  <p:nvPr/>
+                </p:nvCxnSpPr>
+                <p:spPr>
+                  <a:xfrm>
+                    <a:off x="4379053" y="2474752"/>
+                    <a:ext cx="0" cy="0"/>
+                  </a:xfrm>
+                  <a:prstGeom prst="line">
+                    <a:avLst/>
+                  </a:prstGeom>
+                </p:spPr>
+                <p:style>
+                  <a:lnRef idx="1">
+                    <a:schemeClr val="accent1"/>
+                  </a:lnRef>
+                  <a:fillRef idx="0">
+                    <a:schemeClr val="accent1"/>
+                  </a:fillRef>
+                  <a:effectRef idx="0">
+                    <a:schemeClr val="accent1"/>
+                  </a:effectRef>
+                  <a:fontRef idx="minor">
+                    <a:schemeClr val="tx1"/>
+                  </a:fontRef>
+                </p:style>
+              </p:cxnSp>
+            </p:grpSp>
+          </p:grpSp>
+        </p:grpSp>
+        <p:cxnSp>
+          <p:nvCxnSpPr>
+            <p:cNvPr id="17" name="Straight Arrow Connector 16">
+              <a:extLst>
+                <a:ext uri="{FF2B5EF4-FFF2-40B4-BE49-F238E27FC236}">
+                  <a16:creationId xmlns:a16="http://schemas.microsoft.com/office/drawing/2014/main" id="{B2C8B944-4903-4110-ACA2-E2E9034D46DD}"/>
+                </a:ext>
+              </a:extLst>
+            </p:cNvPr>
+            <p:cNvCxnSpPr>
+              <a:cxnSpLocks/>
+            </p:cNvCxnSpPr>
+            <p:nvPr/>
+          </p:nvCxnSpPr>
+          <p:spPr>
+            <a:xfrm>
+              <a:off x="5807618" y="2747262"/>
+              <a:ext cx="8393" cy="2347746"/>
+            </a:xfrm>
+            <a:prstGeom prst="straightConnector1">
+              <a:avLst/>
+            </a:prstGeom>
+            <a:ln w="38100">
+              <a:tailEnd type="triangle"/>
+            </a:ln>
+          </p:spPr>
+          <p:style>
+            <a:lnRef idx="1">
+              <a:schemeClr val="accent1"/>
+            </a:lnRef>
+            <a:fillRef idx="0">
+              <a:schemeClr val="accent1"/>
+            </a:fillRef>
+            <a:effectRef idx="0">
+              <a:schemeClr val="accent1"/>
+            </a:effectRef>
+            <a:fontRef idx="minor">
+              <a:schemeClr val="tx1"/>
+            </a:fontRef>
+          </p:style>
+        </p:cxnSp>
+        <p:grpSp>
+          <p:nvGrpSpPr>
+            <p:cNvPr id="18" name="Group 17">
+              <a:extLst>
+                <a:ext uri="{FF2B5EF4-FFF2-40B4-BE49-F238E27FC236}">
+                  <a16:creationId xmlns:a16="http://schemas.microsoft.com/office/drawing/2014/main" id="{93F17EB9-B364-433F-9E1B-37CE8C3BA79A}"/>
+                </a:ext>
+              </a:extLst>
+            </p:cNvPr>
+            <p:cNvGrpSpPr/>
+            <p:nvPr/>
+          </p:nvGrpSpPr>
+          <p:grpSpPr>
+            <a:xfrm>
+              <a:off x="1016270" y="2006166"/>
+              <a:ext cx="9599480" cy="1438558"/>
+              <a:chOff x="143925" y="517849"/>
+              <a:chExt cx="6568751" cy="5822302"/>
+            </a:xfrm>
+          </p:grpSpPr>
+          <p:sp>
+            <p:nvSpPr>
+              <p:cNvPr id="19" name="Flowchart: Manual Operation 18">
+                <a:extLst>
+                  <a:ext uri="{FF2B5EF4-FFF2-40B4-BE49-F238E27FC236}">
+                    <a16:creationId xmlns:a16="http://schemas.microsoft.com/office/drawing/2014/main" id="{67097BFD-DD46-4F6B-A035-CC3D5D68CCF3}"/>
+                  </a:ext>
+                </a:extLst>
+              </p:cNvPr>
+              <p:cNvSpPr/>
+              <p:nvPr/>
+            </p:nvSpPr>
+            <p:spPr>
+              <a:xfrm flipV="1">
+                <a:off x="143925" y="517849"/>
+                <a:ext cx="6568751" cy="5822302"/>
+              </a:xfrm>
+              <a:prstGeom prst="flowChartManualOperation">
+                <a:avLst/>
+              </a:prstGeom>
+              <a:solidFill>
+                <a:schemeClr val="bg1">
+                  <a:lumMod val="75000"/>
+                  <a:alpha val="50000"/>
+                </a:schemeClr>
+              </a:solidFill>
+              <a:ln>
+                <a:solidFill>
+                  <a:schemeClr val="bg1">
+                    <a:lumMod val="50000"/>
+                  </a:schemeClr>
+                </a:solidFill>
+              </a:ln>
+            </p:spPr>
+            <p:style>
+              <a:lnRef idx="2">
+                <a:schemeClr val="accent1">
+                  <a:shade val="50000"/>
+                </a:schemeClr>
+              </a:lnRef>
+              <a:fillRef idx="1">
+                <a:schemeClr val="accent1"/>
+              </a:fillRef>
+              <a:effectRef idx="0">
+                <a:schemeClr val="accent1"/>
+              </a:effectRef>
+              <a:fontRef idx="minor">
+                <a:schemeClr val="lt1"/>
+              </a:fontRef>
+            </p:style>
+            <p:txBody>
+              <a:bodyPr rtlCol="0" anchor="ctr"/>
+              <a:lstStyle/>
+              <a:p>
+                <a:pPr algn="ctr"/>
+                <a:endParaRPr lang="en-AU" dirty="0"/>
+              </a:p>
+            </p:txBody>
+          </p:sp>
+          <p:grpSp>
+            <p:nvGrpSpPr>
+              <p:cNvPr id="20" name="Group 19">
+                <a:extLst>
+                  <a:ext uri="{FF2B5EF4-FFF2-40B4-BE49-F238E27FC236}">
+                    <a16:creationId xmlns:a16="http://schemas.microsoft.com/office/drawing/2014/main" id="{850E9349-7B44-4F6C-BA40-A2330FD0A473}"/>
+                  </a:ext>
+                </a:extLst>
+              </p:cNvPr>
+              <p:cNvGrpSpPr/>
+              <p:nvPr/>
+            </p:nvGrpSpPr>
+            <p:grpSpPr>
+              <a:xfrm>
+                <a:off x="1291201" y="1291905"/>
+                <a:ext cx="4282588" cy="4274190"/>
+                <a:chOff x="1291201" y="1291905"/>
+                <a:chExt cx="4282588" cy="4274190"/>
+              </a:xfrm>
+            </p:grpSpPr>
+            <p:pic>
+              <p:nvPicPr>
+                <p:cNvPr id="21" name="Picture 20">
+                  <a:extLst>
+                    <a:ext uri="{FF2B5EF4-FFF2-40B4-BE49-F238E27FC236}">
+                      <a16:creationId xmlns:a16="http://schemas.microsoft.com/office/drawing/2014/main" id="{AC669A94-2216-4D0A-9B13-9DBB202FD259}"/>
+                    </a:ext>
+                  </a:extLst>
+                </p:cNvPr>
+                <p:cNvPicPr>
+                  <a:picLocks noChangeAspect="1"/>
+                </p:cNvPicPr>
+                <p:nvPr/>
+              </p:nvPicPr>
+              <p:blipFill>
+                <a:blip r:embed="rId2"/>
+                <a:stretch>
+                  <a:fillRect/>
+                </a:stretch>
+              </p:blipFill>
+              <p:spPr>
+                <a:xfrm>
+                  <a:off x="1291201" y="1292207"/>
+                  <a:ext cx="4282588" cy="4273588"/>
+                </a:xfrm>
+                <a:prstGeom prst="rect">
+                  <a:avLst/>
+                </a:prstGeom>
+              </p:spPr>
+            </p:pic>
+            <p:grpSp>
+              <p:nvGrpSpPr>
+                <p:cNvPr id="22" name="Group 21">
+                  <a:extLst>
+                    <a:ext uri="{FF2B5EF4-FFF2-40B4-BE49-F238E27FC236}">
+                      <a16:creationId xmlns:a16="http://schemas.microsoft.com/office/drawing/2014/main" id="{F0B16C4C-42A8-48C9-B300-3D8D3AC99A41}"/>
+                    </a:ext>
+                  </a:extLst>
+                </p:cNvPr>
+                <p:cNvGrpSpPr/>
+                <p:nvPr/>
+              </p:nvGrpSpPr>
+              <p:grpSpPr>
+                <a:xfrm>
+                  <a:off x="1291206" y="1291905"/>
+                  <a:ext cx="4274190" cy="4274190"/>
+                  <a:chOff x="1291206" y="1291905"/>
+                  <a:chExt cx="4274190" cy="4274190"/>
+                </a:xfrm>
+                <a:scene3d>
+                  <a:camera prst="orthographicFront">
+                    <a:rot lat="0" lon="0" rev="0"/>
+                  </a:camera>
+                  <a:lightRig rig="threePt" dir="t"/>
+                </a:scene3d>
+              </p:grpSpPr>
+              <p:sp>
+                <p:nvSpPr>
+                  <p:cNvPr id="23" name="Oval 22">
+                    <a:extLst>
+                      <a:ext uri="{FF2B5EF4-FFF2-40B4-BE49-F238E27FC236}">
+                        <a16:creationId xmlns:a16="http://schemas.microsoft.com/office/drawing/2014/main" id="{2C9B85E8-D89C-42E8-9B8F-655AA6101268}"/>
+                      </a:ext>
+                    </a:extLst>
+                  </p:cNvPr>
+                  <p:cNvSpPr/>
+                  <p:nvPr/>
+                </p:nvSpPr>
+                <p:spPr>
+                  <a:xfrm>
+                    <a:off x="1291206" y="1291905"/>
+                    <a:ext cx="4274190" cy="4274190"/>
+                  </a:xfrm>
+                  <a:prstGeom prst="ellipse">
+                    <a:avLst/>
+                  </a:prstGeom>
+                  <a:noFill/>
+                  <a:ln>
+                    <a:solidFill>
+                      <a:schemeClr val="bg2">
+                        <a:lumMod val="50000"/>
+                      </a:schemeClr>
+                    </a:solidFill>
+                  </a:ln>
+                </p:spPr>
+                <p:style>
+                  <a:lnRef idx="2">
+                    <a:schemeClr val="accent1">
+                      <a:shade val="50000"/>
+                    </a:schemeClr>
+                  </a:lnRef>
+                  <a:fillRef idx="1">
+                    <a:schemeClr val="accent1"/>
+                  </a:fillRef>
+                  <a:effectRef idx="0">
+                    <a:schemeClr val="accent1"/>
+                  </a:effectRef>
+                  <a:fontRef idx="minor">
+                    <a:schemeClr val="lt1"/>
+                  </a:fontRef>
+                </p:style>
+                <p:txBody>
+                  <a:bodyPr rtlCol="0" anchor="ctr"/>
+                  <a:lstStyle/>
+                  <a:p>
+                    <a:pPr algn="ctr"/>
+                    <a:endParaRPr lang="en-AU"/>
+                  </a:p>
+                </p:txBody>
+              </p:sp>
+              <p:cxnSp>
+                <p:nvCxnSpPr>
+                  <p:cNvPr id="24" name="Straight Connector 23">
+                    <a:extLst>
+                      <a:ext uri="{FF2B5EF4-FFF2-40B4-BE49-F238E27FC236}">
+                        <a16:creationId xmlns:a16="http://schemas.microsoft.com/office/drawing/2014/main" id="{8A73B449-1032-4F8A-8BD3-7983BF259076}"/>
+                      </a:ext>
+                    </a:extLst>
+                  </p:cNvPr>
+                  <p:cNvCxnSpPr>
+                    <a:stCxn id="23" idx="0"/>
+                    <a:endCxn id="23" idx="4"/>
+                  </p:cNvCxnSpPr>
+                  <p:nvPr/>
+                </p:nvCxnSpPr>
+                <p:spPr>
+                  <a:xfrm>
+                    <a:off x="3428301" y="1291905"/>
+                    <a:ext cx="0" cy="4274190"/>
+                  </a:xfrm>
+                  <a:prstGeom prst="line">
+                    <a:avLst/>
+                  </a:prstGeom>
+                  <a:ln>
+                    <a:solidFill>
+                      <a:schemeClr val="bg1">
+                        <a:lumMod val="50000"/>
+                      </a:schemeClr>
+                    </a:solidFill>
+                  </a:ln>
+                </p:spPr>
+                <p:style>
+                  <a:lnRef idx="1">
+                    <a:schemeClr val="accent1"/>
+                  </a:lnRef>
+                  <a:fillRef idx="0">
+                    <a:schemeClr val="accent1"/>
+                  </a:fillRef>
+                  <a:effectRef idx="0">
+                    <a:schemeClr val="accent1"/>
+                  </a:effectRef>
+                  <a:fontRef idx="minor">
+                    <a:schemeClr val="tx1"/>
+                  </a:fontRef>
+                </p:style>
+              </p:cxnSp>
+              <p:cxnSp>
+                <p:nvCxnSpPr>
+                  <p:cNvPr id="25" name="Straight Connector 24">
+                    <a:extLst>
+                      <a:ext uri="{FF2B5EF4-FFF2-40B4-BE49-F238E27FC236}">
+                        <a16:creationId xmlns:a16="http://schemas.microsoft.com/office/drawing/2014/main" id="{5D313EBA-A523-4159-A210-DFDA36CC6D94}"/>
+                      </a:ext>
+                    </a:extLst>
+                  </p:cNvPr>
+                  <p:cNvCxnSpPr>
+                    <a:stCxn id="23" idx="2"/>
+                    <a:endCxn id="23" idx="6"/>
+                  </p:cNvCxnSpPr>
+                  <p:nvPr/>
+                </p:nvCxnSpPr>
+                <p:spPr>
+                  <a:xfrm>
+                    <a:off x="1291206" y="3429000"/>
+                    <a:ext cx="4274190" cy="0"/>
+                  </a:xfrm>
+                  <a:prstGeom prst="line">
+                    <a:avLst/>
+                  </a:prstGeom>
+                  <a:ln>
+                    <a:solidFill>
+                      <a:schemeClr val="bg1">
+                        <a:lumMod val="50000"/>
+                      </a:schemeClr>
+                    </a:solidFill>
+                  </a:ln>
+                </p:spPr>
+                <p:style>
+                  <a:lnRef idx="1">
+                    <a:schemeClr val="accent1"/>
+                  </a:lnRef>
+                  <a:fillRef idx="0">
+                    <a:schemeClr val="accent1"/>
+                  </a:fillRef>
+                  <a:effectRef idx="0">
+                    <a:schemeClr val="accent1"/>
+                  </a:effectRef>
+                  <a:fontRef idx="minor">
+                    <a:schemeClr val="tx1"/>
+                  </a:fontRef>
+                </p:style>
+              </p:cxnSp>
+              <p:cxnSp>
+                <p:nvCxnSpPr>
+                  <p:cNvPr id="26" name="Straight Arrow Connector 25">
+                    <a:extLst>
+                      <a:ext uri="{FF2B5EF4-FFF2-40B4-BE49-F238E27FC236}">
+                        <a16:creationId xmlns:a16="http://schemas.microsoft.com/office/drawing/2014/main" id="{0BFDC4C8-C5AF-4704-A444-7C20A9928DE2}"/>
+                      </a:ext>
+                    </a:extLst>
+                  </p:cNvPr>
+                  <p:cNvCxnSpPr>
+                    <a:endCxn id="23" idx="7"/>
+                  </p:cNvCxnSpPr>
+                  <p:nvPr/>
+                </p:nvCxnSpPr>
+                <p:spPr>
+                  <a:xfrm flipV="1">
+                    <a:off x="3428301" y="1917846"/>
+                    <a:ext cx="1511154" cy="1511154"/>
+                  </a:xfrm>
+                  <a:prstGeom prst="straightConnector1">
+                    <a:avLst/>
+                  </a:prstGeom>
+                  <a:ln w="38100">
+                    <a:solidFill>
+                      <a:srgbClr val="FF0000"/>
+                    </a:solidFill>
+                    <a:tailEnd type="triangle"/>
+                  </a:ln>
+                </p:spPr>
+                <p:style>
+                  <a:lnRef idx="1">
+                    <a:schemeClr val="accent1"/>
+                  </a:lnRef>
+                  <a:fillRef idx="0">
+                    <a:schemeClr val="accent1"/>
+                  </a:fillRef>
+                  <a:effectRef idx="0">
+                    <a:schemeClr val="accent1"/>
+                  </a:effectRef>
+                  <a:fontRef idx="minor">
+                    <a:schemeClr val="tx1"/>
+                  </a:fontRef>
+                </p:style>
+              </p:cxnSp>
+              <p:cxnSp>
+                <p:nvCxnSpPr>
+                  <p:cNvPr id="27" name="Straight Connector 26">
+                    <a:extLst>
+                      <a:ext uri="{FF2B5EF4-FFF2-40B4-BE49-F238E27FC236}">
+                        <a16:creationId xmlns:a16="http://schemas.microsoft.com/office/drawing/2014/main" id="{6BC36780-FA3F-4E1C-9794-ED8DE562CDB0}"/>
+                      </a:ext>
+                    </a:extLst>
+                  </p:cNvPr>
+                  <p:cNvCxnSpPr/>
+                  <p:nvPr/>
+                </p:nvCxnSpPr>
+                <p:spPr>
+                  <a:xfrm>
+                    <a:off x="4379053" y="2474752"/>
+                    <a:ext cx="0" cy="0"/>
+                  </a:xfrm>
+                  <a:prstGeom prst="line">
+                    <a:avLst/>
+                  </a:prstGeom>
+                </p:spPr>
+                <p:style>
+                  <a:lnRef idx="1">
+                    <a:schemeClr val="accent1"/>
+                  </a:lnRef>
+                  <a:fillRef idx="0">
+                    <a:schemeClr val="accent1"/>
+                  </a:fillRef>
+                  <a:effectRef idx="0">
+                    <a:schemeClr val="accent1"/>
+                  </a:effectRef>
+                  <a:fontRef idx="minor">
+                    <a:schemeClr val="tx1"/>
+                  </a:fontRef>
+                </p:style>
+              </p:cxnSp>
+            </p:grpSp>
+          </p:grpSp>
+        </p:grpSp>
+        <mc:AlternateContent xmlns:mc="http://schemas.openxmlformats.org/markup-compatibility/2006" xmlns:a14="http://schemas.microsoft.com/office/drawing/2010/main">
+          <mc:Choice Requires="a14">
+            <p:sp>
+              <p:nvSpPr>
+                <p:cNvPr id="28" name="TextBox 27">
+                  <a:extLst>
+                    <a:ext uri="{FF2B5EF4-FFF2-40B4-BE49-F238E27FC236}">
+                      <a16:creationId xmlns:a16="http://schemas.microsoft.com/office/drawing/2014/main" id="{D707BBD0-DD24-4AB6-B8D9-3C602EB140C2}"/>
+                    </a:ext>
+                  </a:extLst>
+                </p:cNvPr>
+                <p:cNvSpPr txBox="1"/>
+                <p:nvPr/>
+              </p:nvSpPr>
+              <p:spPr>
+                <a:xfrm>
+                  <a:off x="4101293" y="5036880"/>
+                  <a:ext cx="801188" cy="369332"/>
+                </a:xfrm>
+                <a:prstGeom prst="rect">
+                  <a:avLst/>
+                </a:prstGeom>
+                <a:noFill/>
+              </p:spPr>
+              <p:txBody>
+                <a:bodyPr wrap="square" rtlCol="0">
+                  <a:spAutoFit/>
+                </a:bodyPr>
+                <a:lstStyle/>
+                <a:p>
+                  <a:pPr/>
+                  <a14:m>
+                    <m:oMathPara xmlns:m="http://schemas.openxmlformats.org/officeDocument/2006/math">
+                      <m:oMathParaPr>
+                        <m:jc m:val="centerGroup"/>
+                      </m:oMathParaPr>
+                      <m:oMath xmlns:m="http://schemas.openxmlformats.org/officeDocument/2006/math">
+                        <m:sSub>
+                          <m:sSubPr>
+                            <m:ctrlPr>
+                              <a:rPr lang="en-AU" i="1" smtClean="0">
+                                <a:latin typeface="Cambria Math" panose="02040503050406030204" pitchFamily="18" charset="0"/>
+                              </a:rPr>
+                            </m:ctrlPr>
+                          </m:sSubPr>
+                          <m:e>
+                            <m:r>
+                              <a:rPr lang="en-GB" b="0" i="1" smtClean="0">
+                                <a:latin typeface="Cambria Math" panose="02040503050406030204" pitchFamily="18" charset="0"/>
+                              </a:rPr>
+                              <m:t>𝐿</m:t>
+                            </m:r>
+                          </m:e>
+                          <m:sub>
+                            <m:r>
+                              <a:rPr lang="en-GB" b="0" i="1" smtClean="0">
+                                <a:latin typeface="Cambria Math" panose="02040503050406030204" pitchFamily="18" charset="0"/>
+                              </a:rPr>
+                              <m:t>𝑖</m:t>
+                            </m:r>
+                            <m:r>
+                              <a:rPr lang="en-GB" b="0" i="1" smtClean="0">
+                                <a:latin typeface="Cambria Math" panose="02040503050406030204" pitchFamily="18" charset="0"/>
+                              </a:rPr>
+                              <m:t>+1</m:t>
+                            </m:r>
+                          </m:sub>
+                        </m:sSub>
+                      </m:oMath>
+                    </m:oMathPara>
+                  </a14:m>
+                  <a:endParaRPr lang="en-AU" dirty="0"/>
+                </a:p>
+              </p:txBody>
+            </p:sp>
+          </mc:Choice>
+          <mc:Fallback xmlns="">
+            <p:sp>
+              <p:nvSpPr>
+                <p:cNvPr id="28" name="TextBox 27">
+                  <a:extLst>
+                    <a:ext uri="{FF2B5EF4-FFF2-40B4-BE49-F238E27FC236}">
+                      <a16:creationId xmlns:a16="http://schemas.microsoft.com/office/drawing/2014/main" id="{D707BBD0-DD24-4AB6-B8D9-3C602EB140C2}"/>
+                    </a:ext>
+                  </a:extLst>
+                </p:cNvPr>
+                <p:cNvSpPr txBox="1">
+                  <a:spLocks noRot="1" noChangeAspect="1" noMove="1" noResize="1" noEditPoints="1" noAdjustHandles="1" noChangeArrowheads="1" noChangeShapeType="1" noTextEdit="1"/>
+                </p:cNvSpPr>
+                <p:nvPr/>
+              </p:nvSpPr>
+              <p:spPr>
+                <a:xfrm>
+                  <a:off x="4101293" y="5036880"/>
+                  <a:ext cx="801188" cy="369332"/>
+                </a:xfrm>
+                <a:prstGeom prst="rect">
+                  <a:avLst/>
+                </a:prstGeom>
+                <a:blipFill>
+                  <a:blip r:embed="rId3"/>
+                  <a:stretch>
+                    <a:fillRect/>
+                  </a:stretch>
+                </a:blipFill>
+              </p:spPr>
+              <p:txBody>
+                <a:bodyPr/>
+                <a:lstStyle/>
+                <a:p>
+                  <a:r>
+                    <a:rPr lang="en-AU">
+                      <a:noFill/>
+                    </a:rPr>
+                    <a:t> </a:t>
+                  </a:r>
+                </a:p>
+              </p:txBody>
+            </p:sp>
+          </mc:Fallback>
+        </mc:AlternateContent>
+        <mc:AlternateContent xmlns:mc="http://schemas.openxmlformats.org/markup-compatibility/2006" xmlns:a14="http://schemas.microsoft.com/office/drawing/2010/main">
+          <mc:Choice Requires="a14">
+            <p:sp>
+              <p:nvSpPr>
+                <p:cNvPr id="29" name="TextBox 28">
+                  <a:extLst>
+                    <a:ext uri="{FF2B5EF4-FFF2-40B4-BE49-F238E27FC236}">
+                      <a16:creationId xmlns:a16="http://schemas.microsoft.com/office/drawing/2014/main" id="{649653ED-9481-4A27-ADD3-AFE887B7E044}"/>
+                    </a:ext>
+                  </a:extLst>
+                </p:cNvPr>
+                <p:cNvSpPr txBox="1"/>
+                <p:nvPr/>
+              </p:nvSpPr>
+              <p:spPr>
+                <a:xfrm>
+                  <a:off x="1311024" y="3037196"/>
+                  <a:ext cx="801188" cy="369332"/>
+                </a:xfrm>
+                <a:prstGeom prst="rect">
+                  <a:avLst/>
+                </a:prstGeom>
+                <a:noFill/>
+              </p:spPr>
+              <p:txBody>
+                <a:bodyPr wrap="square" rtlCol="0">
+                  <a:spAutoFit/>
+                </a:bodyPr>
+                <a:lstStyle/>
+                <a:p>
+                  <a:pPr/>
+                  <a14:m>
+                    <m:oMathPara xmlns:m="http://schemas.openxmlformats.org/officeDocument/2006/math">
+                      <m:oMathParaPr>
+                        <m:jc m:val="centerGroup"/>
+                      </m:oMathParaPr>
+                      <m:oMath xmlns:m="http://schemas.openxmlformats.org/officeDocument/2006/math">
+                        <m:sSub>
+                          <m:sSubPr>
+                            <m:ctrlPr>
+                              <a:rPr lang="en-AU" i="1" smtClean="0">
+                                <a:latin typeface="Cambria Math" panose="02040503050406030204" pitchFamily="18" charset="0"/>
+                              </a:rPr>
+                            </m:ctrlPr>
+                          </m:sSubPr>
+                          <m:e>
+                            <m:r>
+                              <a:rPr lang="en-GB" b="0" i="1" smtClean="0">
+                                <a:latin typeface="Cambria Math" panose="02040503050406030204" pitchFamily="18" charset="0"/>
+                              </a:rPr>
+                              <m:t>𝐿</m:t>
+                            </m:r>
+                          </m:e>
+                          <m:sub>
+                            <m:r>
+                              <a:rPr lang="en-GB" b="0" i="1" smtClean="0">
+                                <a:latin typeface="Cambria Math" panose="02040503050406030204" pitchFamily="18" charset="0"/>
+                              </a:rPr>
+                              <m:t>𝑖</m:t>
+                            </m:r>
+                          </m:sub>
+                        </m:sSub>
+                      </m:oMath>
+                    </m:oMathPara>
+                  </a14:m>
+                  <a:endParaRPr lang="en-AU" dirty="0"/>
+                </a:p>
+              </p:txBody>
+            </p:sp>
+          </mc:Choice>
+          <mc:Fallback xmlns="">
+            <p:sp>
+              <p:nvSpPr>
+                <p:cNvPr id="29" name="TextBox 28">
+                  <a:extLst>
+                    <a:ext uri="{FF2B5EF4-FFF2-40B4-BE49-F238E27FC236}">
+                      <a16:creationId xmlns:a16="http://schemas.microsoft.com/office/drawing/2014/main" id="{649653ED-9481-4A27-ADD3-AFE887B7E044}"/>
+                    </a:ext>
+                  </a:extLst>
+                </p:cNvPr>
+                <p:cNvSpPr txBox="1">
+                  <a:spLocks noRot="1" noChangeAspect="1" noMove="1" noResize="1" noEditPoints="1" noAdjustHandles="1" noChangeArrowheads="1" noChangeShapeType="1" noTextEdit="1"/>
+                </p:cNvSpPr>
+                <p:nvPr/>
+              </p:nvSpPr>
+              <p:spPr>
+                <a:xfrm>
+                  <a:off x="1311024" y="3037196"/>
+                  <a:ext cx="801188" cy="369332"/>
+                </a:xfrm>
+                <a:prstGeom prst="rect">
+                  <a:avLst/>
+                </a:prstGeom>
+                <a:blipFill>
+                  <a:blip r:embed="rId4"/>
+                  <a:stretch>
+                    <a:fillRect/>
+                  </a:stretch>
+                </a:blipFill>
+              </p:spPr>
+              <p:txBody>
+                <a:bodyPr/>
+                <a:lstStyle/>
+                <a:p>
+                  <a:r>
+                    <a:rPr lang="en-AU">
+                      <a:noFill/>
+                    </a:rPr>
+                    <a:t> </a:t>
+                  </a:r>
+                </a:p>
+              </p:txBody>
+            </p:sp>
+          </mc:Fallback>
+        </mc:AlternateContent>
+        <mc:AlternateContent xmlns:mc="http://schemas.openxmlformats.org/markup-compatibility/2006" xmlns:a14="http://schemas.microsoft.com/office/drawing/2010/main">
+          <mc:Choice Requires="a14">
+            <p:sp>
+              <p:nvSpPr>
+                <p:cNvPr id="33" name="TextBox 32">
+                  <a:extLst>
+                    <a:ext uri="{FF2B5EF4-FFF2-40B4-BE49-F238E27FC236}">
+                      <a16:creationId xmlns:a16="http://schemas.microsoft.com/office/drawing/2014/main" id="{BBDB06B0-FB68-489F-ABBB-E03D5D20CB57}"/>
+                    </a:ext>
+                  </a:extLst>
+                </p:cNvPr>
+                <p:cNvSpPr txBox="1"/>
+                <p:nvPr/>
+              </p:nvSpPr>
+              <p:spPr>
+                <a:xfrm>
+                  <a:off x="5762744" y="3947632"/>
+                  <a:ext cx="4326843" cy="369332"/>
+                </a:xfrm>
+                <a:prstGeom prst="rect">
+                  <a:avLst/>
+                </a:prstGeom>
+                <a:noFill/>
+              </p:spPr>
+              <p:txBody>
+                <a:bodyPr wrap="square" rtlCol="0">
+                  <a:spAutoFit/>
+                </a:bodyPr>
+                <a:lstStyle/>
+                <a:p>
+                  <a14:m>
+                    <m:oMath xmlns:m="http://schemas.openxmlformats.org/officeDocument/2006/math">
+                      <m:sSub>
+                        <m:sSubPr>
+                          <m:ctrlPr>
+                            <a:rPr lang="en-AU" i="1" smtClean="0">
+                              <a:solidFill>
+                                <a:schemeClr val="accent1">
+                                  <a:lumMod val="75000"/>
+                                </a:schemeClr>
+                              </a:solidFill>
+                              <a:latin typeface="Cambria Math" panose="02040503050406030204" pitchFamily="18" charset="0"/>
+                            </a:rPr>
+                          </m:ctrlPr>
+                        </m:sSubPr>
+                        <m:e>
+                          <m:r>
+                            <a:rPr lang="en-GB" b="0" i="1" smtClean="0">
+                              <a:solidFill>
+                                <a:schemeClr val="accent1">
+                                  <a:lumMod val="75000"/>
+                                </a:schemeClr>
+                              </a:solidFill>
+                              <a:latin typeface="Cambria Math" panose="02040503050406030204" pitchFamily="18" charset="0"/>
+                            </a:rPr>
+                            <m:t>𝑄</m:t>
+                          </m:r>
+                        </m:e>
+                        <m:sub>
+                          <m:r>
+                            <a:rPr lang="en-GB" b="0" i="1" smtClean="0">
+                              <a:solidFill>
+                                <a:schemeClr val="accent1">
+                                  <a:lumMod val="75000"/>
+                                </a:schemeClr>
+                              </a:solidFill>
+                              <a:latin typeface="Cambria Math" panose="02040503050406030204" pitchFamily="18" charset="0"/>
+                            </a:rPr>
+                            <m:t>𝑖</m:t>
+                          </m:r>
+                        </m:sub>
+                      </m:sSub>
+                    </m:oMath>
+                  </a14:m>
+                  <a:r>
+                    <a:rPr lang="en-AU" dirty="0">
+                      <a:solidFill>
+                        <a:schemeClr val="accent1">
+                          <a:lumMod val="75000"/>
+                        </a:schemeClr>
+                      </a:solidFill>
+                    </a:rPr>
+                    <a:t> </a:t>
+                  </a:r>
+                  <a:r>
+                    <a:rPr lang="en-GB" sz="1400" i="1" dirty="0">
+                      <a:solidFill>
+                        <a:schemeClr val="accent1">
+                          <a:lumMod val="75000"/>
+                        </a:schemeClr>
+                      </a:solidFill>
+                    </a:rPr>
+                    <a:t>Emergent axis / new degree of freedom</a:t>
+                  </a:r>
+                  <a:endParaRPr lang="en-AU" i="1" dirty="0">
+                    <a:solidFill>
+                      <a:srgbClr val="0070C0"/>
+                    </a:solidFill>
+                  </a:endParaRPr>
+                </a:p>
+              </p:txBody>
+            </p:sp>
+          </mc:Choice>
+          <mc:Fallback xmlns="">
+            <p:sp>
+              <p:nvSpPr>
+                <p:cNvPr id="33" name="TextBox 32">
+                  <a:extLst>
+                    <a:ext uri="{FF2B5EF4-FFF2-40B4-BE49-F238E27FC236}">
+                      <a16:creationId xmlns:a16="http://schemas.microsoft.com/office/drawing/2014/main" id="{BBDB06B0-FB68-489F-ABBB-E03D5D20CB57}"/>
+                    </a:ext>
+                  </a:extLst>
+                </p:cNvPr>
+                <p:cNvSpPr txBox="1">
+                  <a:spLocks noRot="1" noChangeAspect="1" noMove="1" noResize="1" noEditPoints="1" noAdjustHandles="1" noChangeArrowheads="1" noChangeShapeType="1" noTextEdit="1"/>
+                </p:cNvSpPr>
+                <p:nvPr/>
+              </p:nvSpPr>
+              <p:spPr>
+                <a:xfrm>
+                  <a:off x="5762744" y="3947632"/>
+                  <a:ext cx="4326843" cy="369332"/>
+                </a:xfrm>
+                <a:prstGeom prst="rect">
+                  <a:avLst/>
+                </a:prstGeom>
+                <a:blipFill>
+                  <a:blip r:embed="rId5"/>
+                  <a:stretch>
+                    <a:fillRect l="-282" b="-13333"/>
+                  </a:stretch>
+                </a:blipFill>
+              </p:spPr>
+              <p:txBody>
+                <a:bodyPr/>
+                <a:lstStyle/>
+                <a:p>
+                  <a:r>
+                    <a:rPr lang="en-AU">
+                      <a:noFill/>
+                    </a:rPr>
+                    <a:t> </a:t>
+                  </a:r>
+                </a:p>
+              </p:txBody>
+            </p:sp>
+          </mc:Fallback>
+        </mc:AlternateContent>
+        <p:sp>
+          <p:nvSpPr>
+            <p:cNvPr id="4" name="TextBox 3">
+              <a:extLst>
+                <a:ext uri="{FF2B5EF4-FFF2-40B4-BE49-F238E27FC236}">
+                  <a16:creationId xmlns:a16="http://schemas.microsoft.com/office/drawing/2014/main" id="{B213E956-B0E5-42DB-B0B6-693BA2D05D45}"/>
+                </a:ext>
+              </a:extLst>
+            </p:cNvPr>
+            <p:cNvSpPr txBox="1"/>
+            <p:nvPr/>
+          </p:nvSpPr>
+          <p:spPr>
+            <a:xfrm>
+              <a:off x="5002452" y="2716271"/>
+              <a:ext cx="798167" cy="369332"/>
+            </a:xfrm>
+            <a:prstGeom prst="rect">
+              <a:avLst/>
+            </a:prstGeom>
+            <a:noFill/>
+          </p:spPr>
+          <p:txBody>
+            <a:bodyPr wrap="square" rtlCol="0">
+              <a:spAutoFit/>
+            </a:bodyPr>
+            <a:lstStyle/>
+            <a:p>
+              <a:r>
+                <a:rPr lang="en-GB" dirty="0">
+                  <a:solidFill>
+                    <a:schemeClr val="accent1">
+                      <a:lumMod val="75000"/>
+                    </a:schemeClr>
+                  </a:solidFill>
+                </a:rPr>
+                <a:t>Parent</a:t>
+              </a:r>
+              <a:endParaRPr lang="en-AU" dirty="0">
+                <a:solidFill>
+                  <a:schemeClr val="accent1">
+                    <a:lumMod val="75000"/>
+                  </a:schemeClr>
+                </a:solidFill>
+              </a:endParaRPr>
+            </a:p>
+          </p:txBody>
+        </p:sp>
+        <p:sp>
+          <p:nvSpPr>
+            <p:cNvPr id="30" name="TextBox 29">
+              <a:extLst>
+                <a:ext uri="{FF2B5EF4-FFF2-40B4-BE49-F238E27FC236}">
+                  <a16:creationId xmlns:a16="http://schemas.microsoft.com/office/drawing/2014/main" id="{77A9148B-D167-4C8E-968A-11A10683B619}"/>
+                </a:ext>
+              </a:extLst>
+            </p:cNvPr>
+            <p:cNvSpPr txBox="1"/>
+            <p:nvPr/>
+          </p:nvSpPr>
+          <p:spPr>
+            <a:xfrm>
+              <a:off x="5193376" y="4739169"/>
+              <a:ext cx="657552" cy="369332"/>
+            </a:xfrm>
+            <a:prstGeom prst="rect">
+              <a:avLst/>
+            </a:prstGeom>
+            <a:noFill/>
+          </p:spPr>
+          <p:txBody>
+            <a:bodyPr wrap="square" rtlCol="0">
+              <a:spAutoFit/>
+            </a:bodyPr>
+            <a:lstStyle/>
+            <a:p>
+              <a:r>
+                <a:rPr lang="en-GB" dirty="0">
+                  <a:solidFill>
+                    <a:schemeClr val="accent1">
+                      <a:lumMod val="75000"/>
+                    </a:schemeClr>
+                  </a:solidFill>
+                </a:rPr>
+                <a:t>Child</a:t>
+              </a:r>
+              <a:endParaRPr lang="en-AU" dirty="0">
+                <a:solidFill>
+                  <a:schemeClr val="accent1">
+                    <a:lumMod val="75000"/>
+                  </a:schemeClr>
+                </a:solidFill>
+              </a:endParaRPr>
+            </a:p>
+          </p:txBody>
+        </p:sp>
+        <mc:AlternateContent xmlns:mc="http://schemas.openxmlformats.org/markup-compatibility/2006" xmlns:a14="http://schemas.microsoft.com/office/drawing/2010/main">
+          <mc:Choice Requires="a14">
+            <p:sp>
+              <p:nvSpPr>
+                <p:cNvPr id="5" name="TextBox 4">
+                  <a:extLst>
+                    <a:ext uri="{FF2B5EF4-FFF2-40B4-BE49-F238E27FC236}">
+                      <a16:creationId xmlns:a16="http://schemas.microsoft.com/office/drawing/2014/main" id="{977CDD17-B2B9-4474-82DC-F17F7C62A852}"/>
+                    </a:ext>
+                  </a:extLst>
+                </p:cNvPr>
+                <p:cNvSpPr txBox="1"/>
+                <p:nvPr/>
+              </p:nvSpPr>
+              <p:spPr>
+                <a:xfrm>
+                  <a:off x="8684759" y="2593160"/>
+                  <a:ext cx="1287328" cy="307777"/>
+                </a:xfrm>
+                <a:prstGeom prst="rect">
+                  <a:avLst/>
+                </a:prstGeom>
+                <a:noFill/>
+              </p:spPr>
+              <p:txBody>
+                <a:bodyPr wrap="square" rtlCol="0">
+                  <a:spAutoFit/>
+                </a:bodyPr>
+                <a:lstStyle/>
+                <a:p>
+                  <a:pPr/>
+                  <a14:m>
+                    <m:oMathPara xmlns:m="http://schemas.openxmlformats.org/officeDocument/2006/math">
+                      <m:oMathParaPr>
+                        <m:jc m:val="centerGroup"/>
+                      </m:oMathParaPr>
+                      <m:oMath xmlns:m="http://schemas.openxmlformats.org/officeDocument/2006/math">
+                        <m:sSub>
+                          <m:sSubPr>
+                            <m:ctrlPr>
+                              <a:rPr lang="en-AU" sz="1400" i="1" smtClean="0">
+                                <a:solidFill>
+                                  <a:srgbClr val="FF0000"/>
+                                </a:solidFill>
+                                <a:latin typeface="Cambria Math" panose="02040503050406030204" pitchFamily="18" charset="0"/>
+                              </a:rPr>
+                            </m:ctrlPr>
+                          </m:sSubPr>
+                          <m:e>
+                            <m:r>
+                              <a:rPr lang="en-GB" sz="1400" b="0" i="1" smtClean="0">
+                                <a:solidFill>
+                                  <a:srgbClr val="FF0000"/>
+                                </a:solidFill>
+                                <a:latin typeface="Cambria Math" panose="02040503050406030204" pitchFamily="18" charset="0"/>
+                              </a:rPr>
+                              <m:t>𝑃𝑟𝑖𝑚𝑎𝑟𝑦</m:t>
+                            </m:r>
+                          </m:e>
+                          <m:sub>
+                            <m:r>
+                              <a:rPr lang="en-GB" sz="1400" b="0" i="1" smtClean="0">
+                                <a:solidFill>
+                                  <a:srgbClr val="FF0000"/>
+                                </a:solidFill>
+                                <a:latin typeface="Cambria Math" panose="02040503050406030204" pitchFamily="18" charset="0"/>
+                              </a:rPr>
+                              <m:t>𝑖</m:t>
+                            </m:r>
+                          </m:sub>
+                        </m:sSub>
+                      </m:oMath>
+                    </m:oMathPara>
+                  </a14:m>
+                  <a:endParaRPr lang="en-AU" dirty="0"/>
+                </a:p>
+              </p:txBody>
+            </p:sp>
+          </mc:Choice>
+          <mc:Fallback xmlns="">
+            <p:sp>
+              <p:nvSpPr>
+                <p:cNvPr id="5" name="TextBox 4">
+                  <a:extLst>
+                    <a:ext uri="{FF2B5EF4-FFF2-40B4-BE49-F238E27FC236}">
+                      <a16:creationId xmlns:a16="http://schemas.microsoft.com/office/drawing/2014/main" id="{977CDD17-B2B9-4474-82DC-F17F7C62A852}"/>
+                    </a:ext>
+                  </a:extLst>
+                </p:cNvPr>
+                <p:cNvSpPr txBox="1">
+                  <a:spLocks noRot="1" noChangeAspect="1" noMove="1" noResize="1" noEditPoints="1" noAdjustHandles="1" noChangeArrowheads="1" noChangeShapeType="1" noTextEdit="1"/>
+                </p:cNvSpPr>
+                <p:nvPr/>
+              </p:nvSpPr>
+              <p:spPr>
+                <a:xfrm>
+                  <a:off x="8684759" y="2593160"/>
+                  <a:ext cx="1287328" cy="307777"/>
+                </a:xfrm>
+                <a:prstGeom prst="rect">
+                  <a:avLst/>
+                </a:prstGeom>
+                <a:blipFill>
+                  <a:blip r:embed="rId6"/>
+                  <a:stretch>
+                    <a:fillRect b="-5882"/>
+                  </a:stretch>
+                </a:blipFill>
+              </p:spPr>
+              <p:txBody>
+                <a:bodyPr/>
+                <a:lstStyle/>
+                <a:p>
+                  <a:r>
+                    <a:rPr lang="en-AU">
+                      <a:noFill/>
+                    </a:rPr>
+                    <a:t> </a:t>
+                  </a:r>
+                </a:p>
+              </p:txBody>
+            </p:sp>
+          </mc:Fallback>
+        </mc:AlternateContent>
+        <mc:AlternateContent xmlns:mc="http://schemas.openxmlformats.org/markup-compatibility/2006" xmlns:a14="http://schemas.microsoft.com/office/drawing/2010/main">
+          <mc:Choice Requires="a14">
+            <p:sp>
+              <p:nvSpPr>
+                <p:cNvPr id="31" name="TextBox 30">
+                  <a:extLst>
+                    <a:ext uri="{FF2B5EF4-FFF2-40B4-BE49-F238E27FC236}">
+                      <a16:creationId xmlns:a16="http://schemas.microsoft.com/office/drawing/2014/main" id="{2BF33071-894B-4518-A678-29A5D19168EB}"/>
+                    </a:ext>
+                  </a:extLst>
+                </p:cNvPr>
+                <p:cNvSpPr txBox="1"/>
+                <p:nvPr/>
+              </p:nvSpPr>
+              <p:spPr>
+                <a:xfrm>
+                  <a:off x="5172347" y="1918956"/>
+                  <a:ext cx="1287328" cy="307777"/>
+                </a:xfrm>
+                <a:prstGeom prst="rect">
+                  <a:avLst/>
+                </a:prstGeom>
+                <a:noFill/>
+              </p:spPr>
+              <p:txBody>
+                <a:bodyPr wrap="square" rtlCol="0">
+                  <a:spAutoFit/>
+                </a:bodyPr>
+                <a:lstStyle/>
+                <a:p>
+                  <a:pPr/>
+                  <a14:m>
+                    <m:oMathPara xmlns:m="http://schemas.openxmlformats.org/officeDocument/2006/math">
+                      <m:oMathParaPr>
+                        <m:jc m:val="centerGroup"/>
+                      </m:oMathParaPr>
+                      <m:oMath xmlns:m="http://schemas.openxmlformats.org/officeDocument/2006/math">
+                        <m:sSub>
+                          <m:sSubPr>
+                            <m:ctrlPr>
+                              <a:rPr lang="en-AU" sz="1400" i="1" smtClean="0">
+                                <a:solidFill>
+                                  <a:srgbClr val="00B050"/>
+                                </a:solidFill>
+                                <a:latin typeface="Cambria Math" panose="02040503050406030204" pitchFamily="18" charset="0"/>
+                              </a:rPr>
+                            </m:ctrlPr>
+                          </m:sSubPr>
+                          <m:e>
+                            <m:r>
+                              <a:rPr lang="en-GB" sz="1400" b="0" i="1" smtClean="0">
+                                <a:solidFill>
+                                  <a:srgbClr val="00B050"/>
+                                </a:solidFill>
+                                <a:latin typeface="Cambria Math" panose="02040503050406030204" pitchFamily="18" charset="0"/>
+                              </a:rPr>
+                              <m:t>𝑆𝑒𝑐𝑜𝑛𝑑𝑎𝑟𝑦</m:t>
+                            </m:r>
+                          </m:e>
+                          <m:sub>
+                            <m:r>
+                              <a:rPr lang="en-GB" sz="1400" b="0" i="1" smtClean="0">
+                                <a:solidFill>
+                                  <a:srgbClr val="00B050"/>
+                                </a:solidFill>
+                                <a:latin typeface="Cambria Math" panose="02040503050406030204" pitchFamily="18" charset="0"/>
+                              </a:rPr>
+                              <m:t>𝑖</m:t>
+                            </m:r>
+                          </m:sub>
+                        </m:sSub>
+                      </m:oMath>
+                    </m:oMathPara>
+                  </a14:m>
+                  <a:endParaRPr lang="en-AU" dirty="0">
+                    <a:solidFill>
+                      <a:srgbClr val="00B050"/>
+                    </a:solidFill>
+                  </a:endParaRPr>
+                </a:p>
+              </p:txBody>
+            </p:sp>
+          </mc:Choice>
+          <mc:Fallback xmlns="">
+            <p:sp>
+              <p:nvSpPr>
+                <p:cNvPr id="31" name="TextBox 30">
+                  <a:extLst>
+                    <a:ext uri="{FF2B5EF4-FFF2-40B4-BE49-F238E27FC236}">
+                      <a16:creationId xmlns:a16="http://schemas.microsoft.com/office/drawing/2014/main" id="{2BF33071-894B-4518-A678-29A5D19168EB}"/>
+                    </a:ext>
+                  </a:extLst>
+                </p:cNvPr>
+                <p:cNvSpPr txBox="1">
+                  <a:spLocks noRot="1" noChangeAspect="1" noMove="1" noResize="1" noEditPoints="1" noAdjustHandles="1" noChangeArrowheads="1" noChangeShapeType="1" noTextEdit="1"/>
+                </p:cNvSpPr>
+                <p:nvPr/>
+              </p:nvSpPr>
+              <p:spPr>
+                <a:xfrm>
+                  <a:off x="5172347" y="1918956"/>
+                  <a:ext cx="1287328" cy="307777"/>
+                </a:xfrm>
+                <a:prstGeom prst="rect">
+                  <a:avLst/>
+                </a:prstGeom>
+                <a:blipFill>
+                  <a:blip r:embed="rId7"/>
+                  <a:stretch>
+                    <a:fillRect b="-8000"/>
+                  </a:stretch>
+                </a:blipFill>
+              </p:spPr>
+              <p:txBody>
+                <a:bodyPr/>
+                <a:lstStyle/>
+                <a:p>
+                  <a:r>
+                    <a:rPr lang="en-AU">
+                      <a:noFill/>
+                    </a:rPr>
+                    <a:t> </a:t>
+                  </a:r>
+                </a:p>
+              </p:txBody>
+            </p:sp>
+          </mc:Fallback>
+        </mc:AlternateContent>
+        <mc:AlternateContent xmlns:mc="http://schemas.openxmlformats.org/markup-compatibility/2006" xmlns:a14="http://schemas.microsoft.com/office/drawing/2010/main">
+          <mc:Choice Requires="a14">
+            <p:sp>
+              <p:nvSpPr>
+                <p:cNvPr id="16" name="TextBox 15">
+                  <a:extLst>
+                    <a:ext uri="{FF2B5EF4-FFF2-40B4-BE49-F238E27FC236}">
+                      <a16:creationId xmlns:a16="http://schemas.microsoft.com/office/drawing/2014/main" id="{7D0978DF-41E5-43E0-A7DD-4F4666D62190}"/>
+                    </a:ext>
+                  </a:extLst>
+                </p:cNvPr>
+                <p:cNvSpPr txBox="1"/>
+                <p:nvPr/>
+              </p:nvSpPr>
+              <p:spPr>
+                <a:xfrm>
+                  <a:off x="6820089" y="4876422"/>
+                  <a:ext cx="748386" cy="369332"/>
+                </a:xfrm>
+                <a:prstGeom prst="rect">
+                  <a:avLst/>
+                </a:prstGeom>
+                <a:noFill/>
+              </p:spPr>
+              <p:txBody>
+                <a:bodyPr wrap="square" rtlCol="0">
+                  <a:spAutoFit/>
+                </a:bodyPr>
+                <a:lstStyle/>
+                <a:p>
+                  <a:pPr/>
+                  <a14:m>
+                    <m:oMathPara xmlns:m="http://schemas.openxmlformats.org/officeDocument/2006/math">
+                      <m:oMathParaPr>
+                        <m:jc m:val="centerGroup"/>
+                      </m:oMathParaPr>
+                      <m:oMath xmlns:m="http://schemas.openxmlformats.org/officeDocument/2006/math">
+                        <m:sSub>
+                          <m:sSubPr>
+                            <m:ctrlPr>
+                              <a:rPr lang="en-AU" i="1" smtClean="0">
+                                <a:solidFill>
+                                  <a:srgbClr val="FF0000"/>
+                                </a:solidFill>
+                                <a:latin typeface="Cambria Math" panose="02040503050406030204" pitchFamily="18" charset="0"/>
+                              </a:rPr>
+                            </m:ctrlPr>
+                          </m:sSubPr>
+                          <m:e>
+                            <m:r>
+                              <a:rPr lang="en-GB" b="0" i="1" smtClean="0">
+                                <a:solidFill>
+                                  <a:srgbClr val="FF0000"/>
+                                </a:solidFill>
+                                <a:latin typeface="Cambria Math" panose="02040503050406030204" pitchFamily="18" charset="0"/>
+                              </a:rPr>
+                              <m:t>𝑃</m:t>
+                            </m:r>
+                          </m:e>
+                          <m:sub>
+                            <m:r>
+                              <a:rPr lang="en-GB" b="0" i="1" smtClean="0">
+                                <a:solidFill>
+                                  <a:srgbClr val="FF0000"/>
+                                </a:solidFill>
+                                <a:latin typeface="Cambria Math" panose="02040503050406030204" pitchFamily="18" charset="0"/>
+                              </a:rPr>
+                              <m:t>𝑖</m:t>
+                            </m:r>
+                            <m:r>
+                              <a:rPr lang="en-GB" b="0" i="1" smtClean="0">
+                                <a:solidFill>
+                                  <a:srgbClr val="FF0000"/>
+                                </a:solidFill>
+                                <a:latin typeface="Cambria Math" panose="02040503050406030204" pitchFamily="18" charset="0"/>
+                              </a:rPr>
+                              <m:t>+1</m:t>
+                            </m:r>
+                          </m:sub>
+                        </m:sSub>
+                      </m:oMath>
+                    </m:oMathPara>
+                  </a14:m>
+                  <a:endParaRPr lang="en-AU" dirty="0"/>
+                </a:p>
+              </p:txBody>
+            </p:sp>
+          </mc:Choice>
+          <mc:Fallback xmlns="">
+            <p:sp>
+              <p:nvSpPr>
+                <p:cNvPr id="16" name="TextBox 15">
+                  <a:extLst>
+                    <a:ext uri="{FF2B5EF4-FFF2-40B4-BE49-F238E27FC236}">
+                      <a16:creationId xmlns:a16="http://schemas.microsoft.com/office/drawing/2014/main" id="{7D0978DF-41E5-43E0-A7DD-4F4666D62190}"/>
+                    </a:ext>
+                  </a:extLst>
+                </p:cNvPr>
+                <p:cNvSpPr txBox="1">
+                  <a:spLocks noRot="1" noChangeAspect="1" noMove="1" noResize="1" noEditPoints="1" noAdjustHandles="1" noChangeArrowheads="1" noChangeShapeType="1" noTextEdit="1"/>
+                </p:cNvSpPr>
+                <p:nvPr/>
+              </p:nvSpPr>
+              <p:spPr>
+                <a:xfrm>
+                  <a:off x="6820089" y="4876422"/>
+                  <a:ext cx="748386" cy="369332"/>
+                </a:xfrm>
+                <a:prstGeom prst="rect">
+                  <a:avLst/>
+                </a:prstGeom>
+                <a:blipFill>
+                  <a:blip r:embed="rId8"/>
+                  <a:stretch>
+                    <a:fillRect/>
+                  </a:stretch>
+                </a:blipFill>
+              </p:spPr>
+              <p:txBody>
+                <a:bodyPr/>
+                <a:lstStyle/>
+                <a:p>
+                  <a:r>
+                    <a:rPr lang="en-AU">
+                      <a:noFill/>
+                    </a:rPr>
+                    <a:t> </a:t>
+                  </a:r>
+                </a:p>
+              </p:txBody>
+            </p:sp>
+          </mc:Fallback>
+        </mc:AlternateContent>
+        <mc:AlternateContent xmlns:mc="http://schemas.openxmlformats.org/markup-compatibility/2006" xmlns:a14="http://schemas.microsoft.com/office/drawing/2010/main">
+          <mc:Choice Requires="a14">
+            <p:sp>
+              <p:nvSpPr>
+                <p:cNvPr id="34" name="TextBox 33">
+                  <a:extLst>
+                    <a:ext uri="{FF2B5EF4-FFF2-40B4-BE49-F238E27FC236}">
+                      <a16:creationId xmlns:a16="http://schemas.microsoft.com/office/drawing/2014/main" id="{03ADD3B2-B502-4EEA-80B4-74E7CB1ACEA5}"/>
+                    </a:ext>
+                  </a:extLst>
+                </p:cNvPr>
+                <p:cNvSpPr txBox="1"/>
+                <p:nvPr/>
+              </p:nvSpPr>
+              <p:spPr>
+                <a:xfrm>
+                  <a:off x="5627605" y="4571016"/>
+                  <a:ext cx="748386" cy="369332"/>
+                </a:xfrm>
+                <a:prstGeom prst="rect">
+                  <a:avLst/>
+                </a:prstGeom>
+                <a:noFill/>
+              </p:spPr>
+              <p:txBody>
+                <a:bodyPr wrap="square" rtlCol="0">
+                  <a:spAutoFit/>
+                </a:bodyPr>
+                <a:lstStyle/>
+                <a:p>
+                  <a:pPr/>
+                  <a14:m>
+                    <m:oMathPara xmlns:m="http://schemas.openxmlformats.org/officeDocument/2006/math">
+                      <m:oMathParaPr>
+                        <m:jc m:val="centerGroup"/>
+                      </m:oMathParaPr>
+                      <m:oMath xmlns:m="http://schemas.openxmlformats.org/officeDocument/2006/math">
+                        <m:sSub>
+                          <m:sSubPr>
+                            <m:ctrlPr>
+                              <a:rPr lang="en-AU" i="1" smtClean="0">
+                                <a:solidFill>
+                                  <a:srgbClr val="00B050"/>
+                                </a:solidFill>
+                                <a:latin typeface="Cambria Math" panose="02040503050406030204" pitchFamily="18" charset="0"/>
+                              </a:rPr>
+                            </m:ctrlPr>
+                          </m:sSubPr>
+                          <m:e>
+                            <m:r>
+                              <a:rPr lang="en-GB" b="0" i="1" smtClean="0">
+                                <a:solidFill>
+                                  <a:srgbClr val="00B050"/>
+                                </a:solidFill>
+                                <a:latin typeface="Cambria Math" panose="02040503050406030204" pitchFamily="18" charset="0"/>
+                              </a:rPr>
+                              <m:t>𝑆</m:t>
+                            </m:r>
+                          </m:e>
+                          <m:sub>
+                            <m:r>
+                              <a:rPr lang="en-GB" b="0" i="1" smtClean="0">
+                                <a:solidFill>
+                                  <a:srgbClr val="00B050"/>
+                                </a:solidFill>
+                                <a:latin typeface="Cambria Math" panose="02040503050406030204" pitchFamily="18" charset="0"/>
+                              </a:rPr>
+                              <m:t>𝑖</m:t>
+                            </m:r>
+                            <m:r>
+                              <a:rPr lang="en-GB" b="0" i="1" smtClean="0">
+                                <a:solidFill>
+                                  <a:srgbClr val="00B050"/>
+                                </a:solidFill>
+                                <a:latin typeface="Cambria Math" panose="02040503050406030204" pitchFamily="18" charset="0"/>
+                              </a:rPr>
+                              <m:t>+1</m:t>
+                            </m:r>
+                          </m:sub>
+                        </m:sSub>
+                      </m:oMath>
+                    </m:oMathPara>
+                  </a14:m>
+                  <a:endParaRPr lang="en-AU" dirty="0"/>
+                </a:p>
+              </p:txBody>
+            </p:sp>
+          </mc:Choice>
+          <mc:Fallback xmlns="">
+            <p:sp>
+              <p:nvSpPr>
+                <p:cNvPr id="34" name="TextBox 33">
+                  <a:extLst>
+                    <a:ext uri="{FF2B5EF4-FFF2-40B4-BE49-F238E27FC236}">
+                      <a16:creationId xmlns:a16="http://schemas.microsoft.com/office/drawing/2014/main" id="{03ADD3B2-B502-4EEA-80B4-74E7CB1ACEA5}"/>
+                    </a:ext>
+                  </a:extLst>
+                </p:cNvPr>
+                <p:cNvSpPr txBox="1">
+                  <a:spLocks noRot="1" noChangeAspect="1" noMove="1" noResize="1" noEditPoints="1" noAdjustHandles="1" noChangeArrowheads="1" noChangeShapeType="1" noTextEdit="1"/>
+                </p:cNvSpPr>
+                <p:nvPr/>
+              </p:nvSpPr>
+              <p:spPr>
+                <a:xfrm>
+                  <a:off x="5627605" y="4571016"/>
+                  <a:ext cx="748386" cy="369332"/>
+                </a:xfrm>
+                <a:prstGeom prst="rect">
+                  <a:avLst/>
+                </a:prstGeom>
+                <a:blipFill>
+                  <a:blip r:embed="rId9"/>
+                  <a:stretch>
+                    <a:fillRect b="-1667"/>
+                  </a:stretch>
+                </a:blipFill>
+              </p:spPr>
+              <p:txBody>
+                <a:bodyPr/>
+                <a:lstStyle/>
+                <a:p>
+                  <a:r>
+                    <a:rPr lang="en-AU">
+                      <a:noFill/>
+                    </a:rPr>
+                    <a:t> </a:t>
+                  </a:r>
+                </a:p>
+              </p:txBody>
+            </p:sp>
+          </mc:Fallback>
+        </mc:AlternateContent>
+        <p:sp>
+          <p:nvSpPr>
+            <p:cNvPr id="35" name="TextBox 34">
+              <a:extLst>
+                <a:ext uri="{FF2B5EF4-FFF2-40B4-BE49-F238E27FC236}">
+                  <a16:creationId xmlns:a16="http://schemas.microsoft.com/office/drawing/2014/main" id="{C3A41B21-85B4-41A2-AE9B-BCCE16225CD4}"/>
+                </a:ext>
+              </a:extLst>
+            </p:cNvPr>
+            <p:cNvSpPr txBox="1"/>
+            <p:nvPr/>
+          </p:nvSpPr>
+          <p:spPr>
+            <a:xfrm>
+              <a:off x="1576250" y="3253399"/>
+              <a:ext cx="135368" cy="369332"/>
+            </a:xfrm>
+            <a:prstGeom prst="rect">
+              <a:avLst/>
+            </a:prstGeom>
+            <a:noFill/>
+          </p:spPr>
+          <p:txBody>
+            <a:bodyPr wrap="square" rtlCol="0">
+              <a:spAutoFit/>
+            </a:bodyPr>
+            <a:lstStyle/>
+            <a:p>
+              <a:endParaRPr lang="en-AU" dirty="0"/>
+            </a:p>
+          </p:txBody>
+        </p:sp>
+        <p:sp>
+          <p:nvSpPr>
+            <p:cNvPr id="37" name="TextBox 36">
+              <a:extLst>
+                <a:ext uri="{FF2B5EF4-FFF2-40B4-BE49-F238E27FC236}">
+                  <a16:creationId xmlns:a16="http://schemas.microsoft.com/office/drawing/2014/main" id="{7AC3A99A-57E1-41AB-9230-4564FDB551DB}"/>
+                </a:ext>
+              </a:extLst>
+            </p:cNvPr>
+            <p:cNvSpPr txBox="1"/>
+            <p:nvPr/>
+          </p:nvSpPr>
+          <p:spPr>
+            <a:xfrm>
+              <a:off x="4979987" y="1088571"/>
+              <a:ext cx="2897188" cy="369332"/>
+            </a:xfrm>
+            <a:prstGeom prst="rect">
+              <a:avLst/>
+            </a:prstGeom>
+            <a:noFill/>
+          </p:spPr>
+          <p:txBody>
+            <a:bodyPr wrap="square" rtlCol="0">
+              <a:spAutoFit/>
+            </a:bodyPr>
+            <a:lstStyle/>
+            <a:p>
+              <a:r>
+                <a:rPr lang="en-GB" dirty="0"/>
+                <a:t>Layer Transition Diagram - Q</a:t>
+              </a:r>
+            </a:p>
+          </p:txBody>
+        </p:sp>
+      </p:grpSp>
+    </p:spTree>
+    <p:extLst>
+      <p:ext uri="{BB962C8B-B14F-4D97-AF65-F5344CB8AC3E}">
+        <p14:creationId xmlns:p14="http://schemas.microsoft.com/office/powerpoint/2010/main" val="3196692515"/>
+      </p:ext>
+    </p:extLst>
+  </p:cSld>
+  <p:clrMapOvr>
+    <a:masterClrMapping/>
+  </p:clrMapOvr>
+</p:sld>
+</file>
+
+<file path=ppt/slides/slide31.xml><?xml version="1.0" encoding="utf-8"?>
+<p:sld xmlns:a="http://schemas.openxmlformats.org/drawingml/2006/main" xmlns:r="http://schemas.openxmlformats.org/officeDocument/2006/relationships" xmlns:p="http://schemas.openxmlformats.org/presentationml/2006/main">
+  <p:cSld>
+    <p:bg>
+      <p:bgPr>
+        <a:solidFill>
+          <a:schemeClr val="bg1"/>
+        </a:solidFill>
+        <a:effectLst/>
+      </p:bgPr>
+    </p:bg>
+    <p:spTree>
+      <p:nvGrpSpPr>
+        <p:cNvPr id="1" name=""/>
+        <p:cNvGrpSpPr/>
+        <p:nvPr/>
+      </p:nvGrpSpPr>
+      <p:grpSpPr>
+        <a:xfrm>
+          <a:off x="0" y="0"/>
+          <a:ext cx="0" cy="0"/>
+          <a:chOff x="0" y="0"/>
+          <a:chExt cx="0" cy="0"/>
+        </a:xfrm>
+      </p:grpSpPr>
+      <p:grpSp>
+        <p:nvGrpSpPr>
+          <p:cNvPr id="2" name="Group 1">
+            <a:extLst>
+              <a:ext uri="{FF2B5EF4-FFF2-40B4-BE49-F238E27FC236}">
+                <a16:creationId xmlns:a16="http://schemas.microsoft.com/office/drawing/2014/main" id="{7D263833-BF9C-4E59-A3D4-B3BE91D6869F}"/>
+              </a:ext>
+            </a:extLst>
+          </p:cNvPr>
+          <p:cNvGrpSpPr/>
+          <p:nvPr/>
+        </p:nvGrpSpPr>
+        <p:grpSpPr>
+          <a:xfrm>
+            <a:off x="1016270" y="1088571"/>
+            <a:ext cx="9599480" cy="5345369"/>
+            <a:chOff x="1016270" y="1088571"/>
+            <a:chExt cx="9599480" cy="5345369"/>
+          </a:xfrm>
+        </p:grpSpPr>
+        <p:sp>
+          <p:nvSpPr>
+            <p:cNvPr id="39" name="Oval 38">
+              <a:extLst>
+                <a:ext uri="{FF2B5EF4-FFF2-40B4-BE49-F238E27FC236}">
+                  <a16:creationId xmlns:a16="http://schemas.microsoft.com/office/drawing/2014/main" id="{7D286CA9-84FE-46F6-8BFF-ACF9824E2C0B}"/>
+                </a:ext>
+              </a:extLst>
+            </p:cNvPr>
+            <p:cNvSpPr/>
+            <p:nvPr/>
+          </p:nvSpPr>
+          <p:spPr>
+            <a:xfrm>
+              <a:off x="4984850" y="1923415"/>
+              <a:ext cx="1637790" cy="1637790"/>
+            </a:xfrm>
+            <a:prstGeom prst="ellipse">
+              <a:avLst/>
+            </a:prstGeom>
+            <a:gradFill flip="none" rotWithShape="1">
+              <a:gsLst>
+                <a:gs pos="71000">
+                  <a:schemeClr val="bg1"/>
+                </a:gs>
+                <a:gs pos="100000">
+                  <a:schemeClr val="bg1"/>
+                </a:gs>
+                <a:gs pos="7000">
+                  <a:srgbClr val="9CB4E0"/>
+                </a:gs>
+                <a:gs pos="0">
+                  <a:schemeClr val="accent1">
+                    <a:lumMod val="75000"/>
+                  </a:schemeClr>
+                </a:gs>
+              </a:gsLst>
+              <a:path path="circle">
+                <a:fillToRect l="50000" t="50000" r="50000" b="50000"/>
+              </a:path>
+              <a:tileRect/>
+            </a:gradFill>
+            <a:ln>
+              <a:noFill/>
+            </a:ln>
+          </p:spPr>
+          <p:style>
+            <a:lnRef idx="2">
+              <a:schemeClr val="accent1">
+                <a:shade val="50000"/>
+              </a:schemeClr>
+            </a:lnRef>
+            <a:fillRef idx="1">
+              <a:schemeClr val="accent1"/>
+            </a:fillRef>
+            <a:effectRef idx="0">
+              <a:schemeClr val="accent1"/>
+            </a:effectRef>
+            <a:fontRef idx="minor">
+              <a:schemeClr val="lt1"/>
+            </a:fontRef>
+          </p:style>
+          <p:txBody>
+            <a:bodyPr rtlCol="0" anchor="ctr"/>
+            <a:lstStyle/>
+            <a:p>
+              <a:pPr algn="ctr"/>
+              <a:endParaRPr lang="en-AU"/>
+            </a:p>
+          </p:txBody>
+        </p:sp>
+        <p:cxnSp>
+          <p:nvCxnSpPr>
+            <p:cNvPr id="17" name="Straight Arrow Connector 16">
+              <a:extLst>
+                <a:ext uri="{FF2B5EF4-FFF2-40B4-BE49-F238E27FC236}">
+                  <a16:creationId xmlns:a16="http://schemas.microsoft.com/office/drawing/2014/main" id="{B2C8B944-4903-4110-ACA2-E2E9034D46DD}"/>
+                </a:ext>
+              </a:extLst>
+            </p:cNvPr>
+            <p:cNvCxnSpPr>
+              <a:cxnSpLocks/>
+            </p:cNvCxnSpPr>
+            <p:nvPr/>
+          </p:nvCxnSpPr>
+          <p:spPr>
+            <a:xfrm>
+              <a:off x="5807618" y="2747262"/>
+              <a:ext cx="8393" cy="2347746"/>
+            </a:xfrm>
+            <a:prstGeom prst="straightConnector1">
+              <a:avLst/>
+            </a:prstGeom>
+            <a:ln w="38100">
+              <a:tailEnd type="triangle"/>
+            </a:ln>
+          </p:spPr>
+          <p:style>
+            <a:lnRef idx="1">
+              <a:schemeClr val="accent1"/>
+            </a:lnRef>
+            <a:fillRef idx="0">
+              <a:schemeClr val="accent1"/>
+            </a:fillRef>
+            <a:effectRef idx="0">
+              <a:schemeClr val="accent1"/>
+            </a:effectRef>
+            <a:fontRef idx="minor">
+              <a:schemeClr val="tx1"/>
+            </a:fontRef>
+          </p:style>
+        </p:cxnSp>
+        <p:grpSp>
+          <p:nvGrpSpPr>
+            <p:cNvPr id="18" name="Group 17">
+              <a:extLst>
+                <a:ext uri="{FF2B5EF4-FFF2-40B4-BE49-F238E27FC236}">
+                  <a16:creationId xmlns:a16="http://schemas.microsoft.com/office/drawing/2014/main" id="{93F17EB9-B364-433F-9E1B-37CE8C3BA79A}"/>
+                </a:ext>
+              </a:extLst>
+            </p:cNvPr>
+            <p:cNvGrpSpPr/>
+            <p:nvPr/>
+          </p:nvGrpSpPr>
+          <p:grpSpPr>
+            <a:xfrm>
+              <a:off x="1016270" y="2426451"/>
+              <a:ext cx="9599480" cy="597988"/>
+              <a:chOff x="143925" y="517849"/>
+              <a:chExt cx="6568751" cy="5822302"/>
+            </a:xfrm>
+          </p:grpSpPr>
+          <p:sp>
+            <p:nvSpPr>
+              <p:cNvPr id="19" name="Flowchart: Manual Operation 18">
+                <a:extLst>
+                  <a:ext uri="{FF2B5EF4-FFF2-40B4-BE49-F238E27FC236}">
+                    <a16:creationId xmlns:a16="http://schemas.microsoft.com/office/drawing/2014/main" id="{67097BFD-DD46-4F6B-A035-CC3D5D68CCF3}"/>
+                  </a:ext>
+                </a:extLst>
+              </p:cNvPr>
+              <p:cNvSpPr/>
+              <p:nvPr/>
+            </p:nvSpPr>
+            <p:spPr>
+              <a:xfrm flipV="1">
+                <a:off x="143925" y="517849"/>
+                <a:ext cx="6568751" cy="5822302"/>
+              </a:xfrm>
+              <a:prstGeom prst="flowChartManualOperation">
+                <a:avLst/>
+              </a:prstGeom>
+              <a:solidFill>
+                <a:schemeClr val="bg1">
+                  <a:lumMod val="75000"/>
+                  <a:alpha val="50000"/>
+                </a:schemeClr>
+              </a:solidFill>
+              <a:ln>
+                <a:solidFill>
+                  <a:schemeClr val="bg1">
+                    <a:lumMod val="50000"/>
+                  </a:schemeClr>
+                </a:solidFill>
+              </a:ln>
+            </p:spPr>
+            <p:style>
+              <a:lnRef idx="2">
+                <a:schemeClr val="accent1">
+                  <a:shade val="50000"/>
+                </a:schemeClr>
+              </a:lnRef>
+              <a:fillRef idx="1">
+                <a:schemeClr val="accent1"/>
+              </a:fillRef>
+              <a:effectRef idx="0">
+                <a:schemeClr val="accent1"/>
+              </a:effectRef>
+              <a:fontRef idx="minor">
+                <a:schemeClr val="lt1"/>
+              </a:fontRef>
+            </p:style>
+            <p:txBody>
+              <a:bodyPr rtlCol="0" anchor="ctr"/>
+              <a:lstStyle/>
+              <a:p>
+                <a:pPr algn="ctr"/>
+                <a:endParaRPr lang="en-AU" dirty="0"/>
+              </a:p>
+            </p:txBody>
+          </p:sp>
+          <p:grpSp>
+            <p:nvGrpSpPr>
+              <p:cNvPr id="20" name="Group 19">
+                <a:extLst>
+                  <a:ext uri="{FF2B5EF4-FFF2-40B4-BE49-F238E27FC236}">
+                    <a16:creationId xmlns:a16="http://schemas.microsoft.com/office/drawing/2014/main" id="{850E9349-7B44-4F6C-BA40-A2330FD0A473}"/>
+                  </a:ext>
+                </a:extLst>
+              </p:cNvPr>
+              <p:cNvGrpSpPr/>
+              <p:nvPr/>
+            </p:nvGrpSpPr>
+            <p:grpSpPr>
+              <a:xfrm>
+                <a:off x="1291201" y="1291905"/>
+                <a:ext cx="4282588" cy="4274190"/>
+                <a:chOff x="1291201" y="1291905"/>
+                <a:chExt cx="4282588" cy="4274190"/>
+              </a:xfrm>
+            </p:grpSpPr>
+            <p:pic>
+              <p:nvPicPr>
+                <p:cNvPr id="21" name="Picture 20">
+                  <a:extLst>
+                    <a:ext uri="{FF2B5EF4-FFF2-40B4-BE49-F238E27FC236}">
+                      <a16:creationId xmlns:a16="http://schemas.microsoft.com/office/drawing/2014/main" id="{AC669A94-2216-4D0A-9B13-9DBB202FD259}"/>
+                    </a:ext>
+                  </a:extLst>
+                </p:cNvPr>
+                <p:cNvPicPr>
+                  <a:picLocks noChangeAspect="1"/>
+                </p:cNvPicPr>
+                <p:nvPr/>
+              </p:nvPicPr>
+              <p:blipFill>
+                <a:blip r:embed="rId2"/>
+                <a:stretch>
+                  <a:fillRect/>
+                </a:stretch>
+              </p:blipFill>
+              <p:spPr>
+                <a:xfrm>
+                  <a:off x="1291201" y="1292207"/>
+                  <a:ext cx="4282588" cy="4273588"/>
+                </a:xfrm>
+                <a:prstGeom prst="rect">
+                  <a:avLst/>
+                </a:prstGeom>
+              </p:spPr>
+            </p:pic>
+            <p:grpSp>
+              <p:nvGrpSpPr>
+                <p:cNvPr id="22" name="Group 21">
+                  <a:extLst>
+                    <a:ext uri="{FF2B5EF4-FFF2-40B4-BE49-F238E27FC236}">
+                      <a16:creationId xmlns:a16="http://schemas.microsoft.com/office/drawing/2014/main" id="{F0B16C4C-42A8-48C9-B300-3D8D3AC99A41}"/>
+                    </a:ext>
+                  </a:extLst>
+                </p:cNvPr>
+                <p:cNvGrpSpPr/>
+                <p:nvPr/>
+              </p:nvGrpSpPr>
+              <p:grpSpPr>
+                <a:xfrm>
+                  <a:off x="1291206" y="1291905"/>
+                  <a:ext cx="4274190" cy="4274190"/>
+                  <a:chOff x="1291206" y="1291905"/>
+                  <a:chExt cx="4274190" cy="4274190"/>
+                </a:xfrm>
+                <a:scene3d>
+                  <a:camera prst="orthographicFront">
+                    <a:rot lat="0" lon="0" rev="0"/>
+                  </a:camera>
+                  <a:lightRig rig="threePt" dir="t"/>
+                </a:scene3d>
+              </p:grpSpPr>
+              <p:sp>
+                <p:nvSpPr>
+                  <p:cNvPr id="23" name="Oval 22">
+                    <a:extLst>
+                      <a:ext uri="{FF2B5EF4-FFF2-40B4-BE49-F238E27FC236}">
+                        <a16:creationId xmlns:a16="http://schemas.microsoft.com/office/drawing/2014/main" id="{2C9B85E8-D89C-42E8-9B8F-655AA6101268}"/>
+                      </a:ext>
+                    </a:extLst>
+                  </p:cNvPr>
+                  <p:cNvSpPr/>
+                  <p:nvPr/>
+                </p:nvSpPr>
+                <p:spPr>
+                  <a:xfrm>
+                    <a:off x="1291206" y="1291905"/>
+                    <a:ext cx="4274190" cy="4274190"/>
+                  </a:xfrm>
+                  <a:prstGeom prst="ellipse">
+                    <a:avLst/>
+                  </a:prstGeom>
+                  <a:noFill/>
+                  <a:ln>
+                    <a:solidFill>
+                      <a:schemeClr val="bg2">
+                        <a:lumMod val="50000"/>
+                      </a:schemeClr>
+                    </a:solidFill>
+                  </a:ln>
+                </p:spPr>
+                <p:style>
+                  <a:lnRef idx="2">
+                    <a:schemeClr val="accent1">
+                      <a:shade val="50000"/>
+                    </a:schemeClr>
+                  </a:lnRef>
+                  <a:fillRef idx="1">
+                    <a:schemeClr val="accent1"/>
+                  </a:fillRef>
+                  <a:effectRef idx="0">
+                    <a:schemeClr val="accent1"/>
+                  </a:effectRef>
+                  <a:fontRef idx="minor">
+                    <a:schemeClr val="lt1"/>
+                  </a:fontRef>
+                </p:style>
+                <p:txBody>
+                  <a:bodyPr rtlCol="0" anchor="ctr"/>
+                  <a:lstStyle/>
+                  <a:p>
+                    <a:pPr algn="ctr"/>
+                    <a:endParaRPr lang="en-AU"/>
+                  </a:p>
+                </p:txBody>
+              </p:sp>
+              <p:cxnSp>
+                <p:nvCxnSpPr>
+                  <p:cNvPr id="24" name="Straight Connector 23">
+                    <a:extLst>
+                      <a:ext uri="{FF2B5EF4-FFF2-40B4-BE49-F238E27FC236}">
+                        <a16:creationId xmlns:a16="http://schemas.microsoft.com/office/drawing/2014/main" id="{8A73B449-1032-4F8A-8BD3-7983BF259076}"/>
+                      </a:ext>
+                    </a:extLst>
+                  </p:cNvPr>
+                  <p:cNvCxnSpPr>
+                    <a:stCxn id="23" idx="0"/>
+                    <a:endCxn id="23" idx="4"/>
+                  </p:cNvCxnSpPr>
+                  <p:nvPr/>
+                </p:nvCxnSpPr>
+                <p:spPr>
+                  <a:xfrm>
+                    <a:off x="3428301" y="1291905"/>
+                    <a:ext cx="0" cy="4274190"/>
+                  </a:xfrm>
+                  <a:prstGeom prst="line">
+                    <a:avLst/>
+                  </a:prstGeom>
+                  <a:ln>
+                    <a:solidFill>
+                      <a:schemeClr val="bg1">
+                        <a:lumMod val="50000"/>
+                      </a:schemeClr>
+                    </a:solidFill>
+                  </a:ln>
+                </p:spPr>
+                <p:style>
+                  <a:lnRef idx="1">
+                    <a:schemeClr val="accent1"/>
+                  </a:lnRef>
+                  <a:fillRef idx="0">
+                    <a:schemeClr val="accent1"/>
+                  </a:fillRef>
+                  <a:effectRef idx="0">
+                    <a:schemeClr val="accent1"/>
+                  </a:effectRef>
+                  <a:fontRef idx="minor">
+                    <a:schemeClr val="tx1"/>
+                  </a:fontRef>
+                </p:style>
+              </p:cxnSp>
+              <p:cxnSp>
+                <p:nvCxnSpPr>
+                  <p:cNvPr id="25" name="Straight Connector 24">
+                    <a:extLst>
+                      <a:ext uri="{FF2B5EF4-FFF2-40B4-BE49-F238E27FC236}">
+                        <a16:creationId xmlns:a16="http://schemas.microsoft.com/office/drawing/2014/main" id="{5D313EBA-A523-4159-A210-DFDA36CC6D94}"/>
+                      </a:ext>
+                    </a:extLst>
+                  </p:cNvPr>
+                  <p:cNvCxnSpPr>
+                    <a:stCxn id="23" idx="2"/>
+                    <a:endCxn id="23" idx="6"/>
+                  </p:cNvCxnSpPr>
+                  <p:nvPr/>
+                </p:nvCxnSpPr>
+                <p:spPr>
+                  <a:xfrm>
+                    <a:off x="1291206" y="3429000"/>
+                    <a:ext cx="4274190" cy="0"/>
+                  </a:xfrm>
+                  <a:prstGeom prst="line">
+                    <a:avLst/>
+                  </a:prstGeom>
+                  <a:ln>
+                    <a:solidFill>
+                      <a:schemeClr val="bg1">
+                        <a:lumMod val="50000"/>
+                      </a:schemeClr>
+                    </a:solidFill>
+                  </a:ln>
+                </p:spPr>
+                <p:style>
+                  <a:lnRef idx="1">
+                    <a:schemeClr val="accent1"/>
+                  </a:lnRef>
+                  <a:fillRef idx="0">
+                    <a:schemeClr val="accent1"/>
+                  </a:fillRef>
+                  <a:effectRef idx="0">
+                    <a:schemeClr val="accent1"/>
+                  </a:effectRef>
+                  <a:fontRef idx="minor">
+                    <a:schemeClr val="tx1"/>
+                  </a:fontRef>
+                </p:style>
+              </p:cxnSp>
+              <p:cxnSp>
+                <p:nvCxnSpPr>
+                  <p:cNvPr id="27" name="Straight Connector 26">
+                    <a:extLst>
+                      <a:ext uri="{FF2B5EF4-FFF2-40B4-BE49-F238E27FC236}">
+                        <a16:creationId xmlns:a16="http://schemas.microsoft.com/office/drawing/2014/main" id="{6BC36780-FA3F-4E1C-9794-ED8DE562CDB0}"/>
+                      </a:ext>
+                    </a:extLst>
+                  </p:cNvPr>
+                  <p:cNvCxnSpPr/>
+                  <p:nvPr/>
+                </p:nvCxnSpPr>
+                <p:spPr>
+                  <a:xfrm>
+                    <a:off x="4379053" y="2474752"/>
+                    <a:ext cx="0" cy="0"/>
+                  </a:xfrm>
+                  <a:prstGeom prst="line">
+                    <a:avLst/>
+                  </a:prstGeom>
+                </p:spPr>
+                <p:style>
+                  <a:lnRef idx="1">
+                    <a:schemeClr val="accent1"/>
+                  </a:lnRef>
+                  <a:fillRef idx="0">
+                    <a:schemeClr val="accent1"/>
+                  </a:fillRef>
+                  <a:effectRef idx="0">
+                    <a:schemeClr val="accent1"/>
+                  </a:effectRef>
+                  <a:fontRef idx="minor">
+                    <a:schemeClr val="tx1"/>
+                  </a:fontRef>
+                </p:style>
+              </p:cxnSp>
+            </p:grpSp>
+          </p:grpSp>
+        </p:grpSp>
+        <p:sp>
+          <p:nvSpPr>
+            <p:cNvPr id="37" name="TextBox 36">
+              <a:extLst>
+                <a:ext uri="{FF2B5EF4-FFF2-40B4-BE49-F238E27FC236}">
+                  <a16:creationId xmlns:a16="http://schemas.microsoft.com/office/drawing/2014/main" id="{7AC3A99A-57E1-41AB-9230-4564FDB551DB}"/>
+                </a:ext>
+              </a:extLst>
+            </p:cNvPr>
+            <p:cNvSpPr txBox="1"/>
+            <p:nvPr/>
+          </p:nvSpPr>
+          <p:spPr>
+            <a:xfrm>
+              <a:off x="4979986" y="1088571"/>
+              <a:ext cx="3386773" cy="369332"/>
+            </a:xfrm>
+            <a:prstGeom prst="rect">
+              <a:avLst/>
+            </a:prstGeom>
+            <a:noFill/>
+          </p:spPr>
+          <p:txBody>
+            <a:bodyPr wrap="square" rtlCol="0">
+              <a:spAutoFit/>
+            </a:bodyPr>
+            <a:lstStyle/>
+            <a:p>
+              <a:r>
+                <a:rPr lang="en-GB" dirty="0"/>
+                <a:t>Layer Transition Diagram – Q - Tilt</a:t>
+              </a:r>
+            </a:p>
+          </p:txBody>
+        </p:sp>
+        <p:cxnSp>
+          <p:nvCxnSpPr>
+            <p:cNvPr id="63" name="Straight Connector 62">
+              <a:extLst>
+                <a:ext uri="{FF2B5EF4-FFF2-40B4-BE49-F238E27FC236}">
+                  <a16:creationId xmlns:a16="http://schemas.microsoft.com/office/drawing/2014/main" id="{B6F3C519-1266-4C18-8BD6-1F60D28C712C}"/>
+                </a:ext>
+              </a:extLst>
+            </p:cNvPr>
+            <p:cNvCxnSpPr/>
+            <p:nvPr/>
+          </p:nvCxnSpPr>
+          <p:spPr>
+            <a:xfrm>
+              <a:off x="5814069" y="4424253"/>
+              <a:ext cx="0" cy="2009687"/>
+            </a:xfrm>
+            <a:prstGeom prst="line">
+              <a:avLst/>
+            </a:prstGeom>
+            <a:scene3d>
+              <a:camera prst="orthographicFront">
+                <a:rot lat="0" lon="0" rev="0"/>
+              </a:camera>
+              <a:lightRig rig="threePt" dir="t"/>
+            </a:scene3d>
+          </p:spPr>
+          <p:style>
+            <a:lnRef idx="1">
+              <a:schemeClr val="accent1"/>
+            </a:lnRef>
+            <a:fillRef idx="0">
+              <a:schemeClr val="accent1"/>
+            </a:fillRef>
+            <a:effectRef idx="0">
+              <a:schemeClr val="accent1"/>
+            </a:effectRef>
+            <a:fontRef idx="minor">
+              <a:schemeClr val="tx1"/>
+            </a:fontRef>
+          </p:style>
+        </p:cxnSp>
+        <p:cxnSp>
+          <p:nvCxnSpPr>
+            <p:cNvPr id="30" name="Straight Connector 29">
+              <a:extLst>
+                <a:ext uri="{FF2B5EF4-FFF2-40B4-BE49-F238E27FC236}">
+                  <a16:creationId xmlns:a16="http://schemas.microsoft.com/office/drawing/2014/main" id="{E726084D-4EB7-4108-8A14-5417E239E462}"/>
+                </a:ext>
+              </a:extLst>
+            </p:cNvPr>
+            <p:cNvCxnSpPr>
+              <a:cxnSpLocks/>
+            </p:cNvCxnSpPr>
+            <p:nvPr/>
+          </p:nvCxnSpPr>
+          <p:spPr>
+            <a:xfrm>
+              <a:off x="5818144" y="4794991"/>
+              <a:ext cx="0" cy="588023"/>
+            </a:xfrm>
+            <a:prstGeom prst="line">
+              <a:avLst/>
+            </a:prstGeom>
+          </p:spPr>
+          <p:style>
+            <a:lnRef idx="1">
+              <a:schemeClr val="accent1"/>
+            </a:lnRef>
+            <a:fillRef idx="0">
+              <a:schemeClr val="accent1"/>
+            </a:fillRef>
+            <a:effectRef idx="0">
+              <a:schemeClr val="accent1"/>
+            </a:effectRef>
+            <a:fontRef idx="minor">
+              <a:schemeClr val="tx1"/>
+            </a:fontRef>
+          </p:style>
+        </p:cxnSp>
+      </p:grpSp>
+      <p:grpSp>
+        <p:nvGrpSpPr>
+          <p:cNvPr id="67" name="Group 66">
+            <a:extLst>
+              <a:ext uri="{FF2B5EF4-FFF2-40B4-BE49-F238E27FC236}">
+                <a16:creationId xmlns:a16="http://schemas.microsoft.com/office/drawing/2014/main" id="{D85983E7-4ABF-43A4-849C-921F0262C450}"/>
+              </a:ext>
+            </a:extLst>
+          </p:cNvPr>
+          <p:cNvGrpSpPr/>
+          <p:nvPr/>
+        </p:nvGrpSpPr>
+        <p:grpSpPr>
+          <a:xfrm>
+            <a:off x="4420144" y="4289143"/>
+            <a:ext cx="2767202" cy="1599718"/>
+            <a:chOff x="7214556" y="1441420"/>
+            <a:chExt cx="5153834" cy="2979428"/>
+          </a:xfrm>
+        </p:grpSpPr>
+        <p:pic>
+          <p:nvPicPr>
+            <p:cNvPr id="68" name="Picture 67">
+              <a:extLst>
+                <a:ext uri="{FF2B5EF4-FFF2-40B4-BE49-F238E27FC236}">
+                  <a16:creationId xmlns:a16="http://schemas.microsoft.com/office/drawing/2014/main" id="{358377E1-F688-4AE4-9C44-EAE27B5014EA}"/>
+                </a:ext>
+              </a:extLst>
+            </p:cNvPr>
+            <p:cNvPicPr>
+              <a:picLocks noChangeAspect="1"/>
+            </p:cNvPicPr>
+            <p:nvPr/>
+          </p:nvPicPr>
+          <p:blipFill>
+            <a:blip r:embed="rId3"/>
+            <a:stretch>
+              <a:fillRect/>
+            </a:stretch>
+          </p:blipFill>
+          <p:spPr>
+            <a:xfrm rot="18521390">
+              <a:off x="9154836" y="348146"/>
+              <a:ext cx="1273273" cy="5153834"/>
+            </a:xfrm>
+            <a:prstGeom prst="rect">
+              <a:avLst/>
+            </a:prstGeom>
+          </p:spPr>
+        </p:pic>
+        <p:grpSp>
+          <p:nvGrpSpPr>
+            <p:cNvPr id="69" name="Group 68">
+              <a:extLst>
+                <a:ext uri="{FF2B5EF4-FFF2-40B4-BE49-F238E27FC236}">
+                  <a16:creationId xmlns:a16="http://schemas.microsoft.com/office/drawing/2014/main" id="{BC344E7F-F442-4C8E-AF53-6B710F16A8CA}"/>
+                </a:ext>
+              </a:extLst>
+            </p:cNvPr>
+            <p:cNvGrpSpPr/>
+            <p:nvPr/>
+          </p:nvGrpSpPr>
+          <p:grpSpPr>
+            <a:xfrm>
+              <a:off x="7650179" y="1441420"/>
+              <a:ext cx="4282588" cy="2979428"/>
+              <a:chOff x="7650179" y="1441420"/>
+              <a:chExt cx="4282588" cy="2979428"/>
+            </a:xfrm>
+          </p:grpSpPr>
+          <p:cxnSp>
+            <p:nvCxnSpPr>
+              <p:cNvPr id="72" name="Straight Connector 71">
+                <a:extLst>
+                  <a:ext uri="{FF2B5EF4-FFF2-40B4-BE49-F238E27FC236}">
+                    <a16:creationId xmlns:a16="http://schemas.microsoft.com/office/drawing/2014/main" id="{692D77DF-D8BD-4C8E-8451-6B1F6439135D}"/>
+                  </a:ext>
+                </a:extLst>
+              </p:cNvPr>
+              <p:cNvCxnSpPr>
+                <a:cxnSpLocks/>
+                <a:stCxn id="80" idx="2"/>
+                <a:endCxn id="80" idx="6"/>
+              </p:cNvCxnSpPr>
+              <p:nvPr/>
+            </p:nvCxnSpPr>
+            <p:spPr>
+              <a:xfrm>
+                <a:off x="7650179" y="2925065"/>
+                <a:ext cx="4282588" cy="0"/>
+              </a:xfrm>
+              <a:prstGeom prst="line">
+                <a:avLst/>
+              </a:prstGeom>
+            </p:spPr>
+            <p:style>
+              <a:lnRef idx="1">
+                <a:schemeClr val="accent1"/>
+              </a:lnRef>
+              <a:fillRef idx="0">
+                <a:schemeClr val="accent1"/>
+              </a:fillRef>
+              <a:effectRef idx="0">
+                <a:schemeClr val="accent1"/>
+              </a:effectRef>
+              <a:fontRef idx="minor">
+                <a:schemeClr val="tx1"/>
+              </a:fontRef>
+            </p:style>
+          </p:cxnSp>
+          <p:cxnSp>
+            <p:nvCxnSpPr>
+              <p:cNvPr id="73" name="Straight Connector 72">
+                <a:extLst>
+                  <a:ext uri="{FF2B5EF4-FFF2-40B4-BE49-F238E27FC236}">
+                    <a16:creationId xmlns:a16="http://schemas.microsoft.com/office/drawing/2014/main" id="{6BEBC1D8-0EE7-4747-B778-CB050412EA22}"/>
+                  </a:ext>
+                </a:extLst>
+              </p:cNvPr>
+              <p:cNvCxnSpPr>
+                <a:stCxn id="80" idx="4"/>
+              </p:cNvCxnSpPr>
+              <p:nvPr/>
+            </p:nvCxnSpPr>
+            <p:spPr>
+              <a:xfrm>
+                <a:off x="9791473" y="2627959"/>
+                <a:ext cx="0" cy="594212"/>
+              </a:xfrm>
+              <a:prstGeom prst="line">
+                <a:avLst/>
+              </a:prstGeom>
+            </p:spPr>
+            <p:style>
+              <a:lnRef idx="1">
+                <a:schemeClr val="accent1"/>
+              </a:lnRef>
+              <a:fillRef idx="0">
+                <a:schemeClr val="accent1"/>
+              </a:fillRef>
+              <a:effectRef idx="0">
+                <a:schemeClr val="accent1"/>
+              </a:effectRef>
+              <a:fontRef idx="minor">
+                <a:schemeClr val="tx1"/>
+              </a:fontRef>
+            </p:style>
+          </p:cxnSp>
+          <p:grpSp>
+            <p:nvGrpSpPr>
+              <p:cNvPr id="74" name="Group 73">
+                <a:extLst>
+                  <a:ext uri="{FF2B5EF4-FFF2-40B4-BE49-F238E27FC236}">
+                    <a16:creationId xmlns:a16="http://schemas.microsoft.com/office/drawing/2014/main" id="{2ECB25C4-D5A3-4AF1-8F54-12F4EC746FE3}"/>
+                  </a:ext>
+                </a:extLst>
+              </p:cNvPr>
+              <p:cNvGrpSpPr/>
+              <p:nvPr/>
+            </p:nvGrpSpPr>
+            <p:grpSpPr>
+              <a:xfrm>
+                <a:off x="7650179" y="2627959"/>
+                <a:ext cx="4282588" cy="594212"/>
+                <a:chOff x="7650179" y="2627959"/>
+                <a:chExt cx="4282588" cy="594212"/>
+              </a:xfrm>
+            </p:grpSpPr>
+            <p:sp>
+              <p:nvSpPr>
+                <p:cNvPr id="80" name="Oval 79">
+                  <a:extLst>
+                    <a:ext uri="{FF2B5EF4-FFF2-40B4-BE49-F238E27FC236}">
+                      <a16:creationId xmlns:a16="http://schemas.microsoft.com/office/drawing/2014/main" id="{20A58419-EEA3-4D88-9E38-9D962238966F}"/>
+                    </a:ext>
+                  </a:extLst>
+                </p:cNvPr>
+                <p:cNvSpPr/>
+                <p:nvPr/>
+              </p:nvSpPr>
+              <p:spPr>
+                <a:xfrm flipV="1">
+                  <a:off x="7650179" y="2627959"/>
+                  <a:ext cx="4282588" cy="594212"/>
+                </a:xfrm>
+                <a:prstGeom prst="ellipse">
+                  <a:avLst/>
+                </a:prstGeom>
+                <a:noFill/>
+              </p:spPr>
+              <p:style>
+                <a:lnRef idx="2">
+                  <a:schemeClr val="accent1">
+                    <a:shade val="50000"/>
+                  </a:schemeClr>
+                </a:lnRef>
+                <a:fillRef idx="1">
+                  <a:schemeClr val="accent1"/>
+                </a:fillRef>
+                <a:effectRef idx="0">
+                  <a:schemeClr val="accent1"/>
+                </a:effectRef>
+                <a:fontRef idx="minor">
+                  <a:schemeClr val="lt1"/>
+                </a:fontRef>
+              </p:style>
+              <p:txBody>
+                <a:bodyPr rtlCol="0" anchor="ctr"/>
+                <a:lstStyle/>
+                <a:p>
+                  <a:pPr algn="ctr"/>
+                  <a:endParaRPr lang="en-AU"/>
+                </a:p>
+              </p:txBody>
+            </p:sp>
+            <p:sp>
+              <p:nvSpPr>
+                <p:cNvPr id="81" name="Arc 80">
+                  <a:extLst>
+                    <a:ext uri="{FF2B5EF4-FFF2-40B4-BE49-F238E27FC236}">
+                      <a16:creationId xmlns:a16="http://schemas.microsoft.com/office/drawing/2014/main" id="{A94D9E5E-AF04-4EB1-B1DD-CDA6AD34F8A3}"/>
+                    </a:ext>
+                  </a:extLst>
+                </p:cNvPr>
+                <p:cNvSpPr/>
+                <p:nvPr/>
+              </p:nvSpPr>
+              <p:spPr>
+                <a:xfrm>
+                  <a:off x="7650179" y="2627959"/>
+                  <a:ext cx="4282588" cy="594212"/>
+                </a:xfrm>
+                <a:prstGeom prst="arc">
+                  <a:avLst>
+                    <a:gd name="adj1" fmla="val 4879"/>
+                    <a:gd name="adj2" fmla="val 508170"/>
+                  </a:avLst>
+                </a:prstGeom>
+                <a:solidFill>
+                  <a:srgbClr val="FFFF00">
+                    <a:alpha val="52000"/>
+                  </a:srgbClr>
+                </a:solidFill>
+                <a:ln w="28575">
+                  <a:tailEnd type="none" w="lg" len="lg"/>
+                </a:ln>
+              </p:spPr>
+              <p:style>
+                <a:lnRef idx="1">
+                  <a:schemeClr val="accent1"/>
+                </a:lnRef>
+                <a:fillRef idx="0">
+                  <a:schemeClr val="accent1"/>
+                </a:fillRef>
+                <a:effectRef idx="0">
+                  <a:schemeClr val="accent1"/>
+                </a:effectRef>
+                <a:fontRef idx="minor">
+                  <a:schemeClr val="tx1"/>
+                </a:fontRef>
+              </p:style>
+              <p:txBody>
+                <a:bodyPr rtlCol="0" anchor="ctr"/>
+                <a:lstStyle/>
+                <a:p>
+                  <a:pPr algn="ctr"/>
+                  <a:endParaRPr lang="en-AU"/>
+                </a:p>
+              </p:txBody>
+            </p:sp>
+          </p:grpSp>
+          <p:sp>
+            <p:nvSpPr>
+              <p:cNvPr id="75" name="Arc 74">
+                <a:extLst>
+                  <a:ext uri="{FF2B5EF4-FFF2-40B4-BE49-F238E27FC236}">
+                    <a16:creationId xmlns:a16="http://schemas.microsoft.com/office/drawing/2014/main" id="{3FCDF938-717D-4DC4-9183-B5DD62E244AE}"/>
+                  </a:ext>
+                </a:extLst>
+              </p:cNvPr>
+              <p:cNvSpPr/>
+              <p:nvPr/>
+            </p:nvSpPr>
+            <p:spPr>
+              <a:xfrm>
+                <a:off x="8264551" y="1441420"/>
+                <a:ext cx="3028250" cy="2979428"/>
+              </a:xfrm>
+              <a:prstGeom prst="arc">
+                <a:avLst>
+                  <a:gd name="adj1" fmla="val 471535"/>
+                  <a:gd name="adj2" fmla="val 3145054"/>
+                </a:avLst>
+              </a:prstGeom>
+              <a:solidFill>
+                <a:srgbClr val="92D050">
+                  <a:alpha val="45000"/>
+                </a:srgbClr>
+              </a:solidFill>
+              <a:ln w="28575"/>
+            </p:spPr>
+            <p:style>
+              <a:lnRef idx="1">
+                <a:schemeClr val="accent1"/>
+              </a:lnRef>
+              <a:fillRef idx="0">
+                <a:schemeClr val="accent1"/>
+              </a:fillRef>
+              <a:effectRef idx="0">
+                <a:schemeClr val="accent1"/>
+              </a:effectRef>
+              <a:fontRef idx="minor">
+                <a:schemeClr val="tx1"/>
+              </a:fontRef>
+            </p:style>
+            <p:txBody>
+              <a:bodyPr rtlCol="0" anchor="ctr"/>
+              <a:lstStyle/>
+              <a:p>
+                <a:pPr algn="ctr"/>
+                <a:endParaRPr lang="en-AU"/>
+              </a:p>
+            </p:txBody>
+          </p:sp>
+          <p:cxnSp>
+            <p:nvCxnSpPr>
+              <p:cNvPr id="76" name="Straight Connector 75">
+                <a:extLst>
+                  <a:ext uri="{FF2B5EF4-FFF2-40B4-BE49-F238E27FC236}">
+                    <a16:creationId xmlns:a16="http://schemas.microsoft.com/office/drawing/2014/main" id="{183F4E1D-B166-42AD-BD64-8C1485697442}"/>
+                  </a:ext>
+                </a:extLst>
+              </p:cNvPr>
+              <p:cNvCxnSpPr>
+                <a:cxnSpLocks/>
+              </p:cNvCxnSpPr>
+              <p:nvPr/>
+            </p:nvCxnSpPr>
+            <p:spPr>
+              <a:xfrm flipH="1">
+                <a:off x="9607704" y="2712631"/>
+                <a:ext cx="341944" cy="424866"/>
+              </a:xfrm>
+              <a:prstGeom prst="line">
+                <a:avLst/>
+              </a:prstGeom>
+            </p:spPr>
+            <p:style>
+              <a:lnRef idx="1">
+                <a:schemeClr val="accent1"/>
+              </a:lnRef>
+              <a:fillRef idx="0">
+                <a:schemeClr val="accent1"/>
+              </a:fillRef>
+              <a:effectRef idx="0">
+                <a:schemeClr val="accent1"/>
+              </a:effectRef>
+              <a:fontRef idx="minor">
+                <a:schemeClr val="tx1"/>
+              </a:fontRef>
+            </p:style>
+          </p:cxnSp>
+          <p:cxnSp>
+            <p:nvCxnSpPr>
+              <p:cNvPr id="77" name="Straight Arrow Connector 76">
+                <a:extLst>
+                  <a:ext uri="{FF2B5EF4-FFF2-40B4-BE49-F238E27FC236}">
+                    <a16:creationId xmlns:a16="http://schemas.microsoft.com/office/drawing/2014/main" id="{ADDCB846-3E23-4F5B-863A-C8BE842F7BB1}"/>
+                  </a:ext>
+                </a:extLst>
+              </p:cNvPr>
+              <p:cNvCxnSpPr>
+                <a:cxnSpLocks/>
+                <a:stCxn id="75" idx="1"/>
+                <a:endCxn id="75" idx="2"/>
+              </p:cNvCxnSpPr>
+              <p:nvPr/>
+            </p:nvCxnSpPr>
+            <p:spPr>
+              <a:xfrm>
+                <a:off x="9778676" y="2931134"/>
+                <a:ext cx="914034" cy="1187650"/>
+              </a:xfrm>
+              <a:prstGeom prst="straightConnector1">
+                <a:avLst/>
+              </a:prstGeom>
+              <a:ln w="28575">
+                <a:tailEnd type="triangle"/>
+              </a:ln>
+            </p:spPr>
+            <p:style>
+              <a:lnRef idx="1">
+                <a:schemeClr val="accent1"/>
+              </a:lnRef>
+              <a:fillRef idx="0">
+                <a:schemeClr val="accent1"/>
+              </a:fillRef>
+              <a:effectRef idx="0">
+                <a:schemeClr val="accent1"/>
+              </a:effectRef>
+              <a:fontRef idx="minor">
+                <a:schemeClr val="tx1"/>
+              </a:fontRef>
+            </p:style>
+          </p:cxnSp>
+          <p:cxnSp>
+            <p:nvCxnSpPr>
+              <p:cNvPr id="78" name="Straight Connector 77">
+                <a:extLst>
+                  <a:ext uri="{FF2B5EF4-FFF2-40B4-BE49-F238E27FC236}">
+                    <a16:creationId xmlns:a16="http://schemas.microsoft.com/office/drawing/2014/main" id="{AE21D175-10CF-418A-818C-D5ED3AC0A7EA}"/>
+                  </a:ext>
+                </a:extLst>
+              </p:cNvPr>
+              <p:cNvCxnSpPr>
+                <a:stCxn id="75" idx="0"/>
+              </p:cNvCxnSpPr>
+              <p:nvPr/>
+            </p:nvCxnSpPr>
+            <p:spPr>
+              <a:xfrm flipH="1" flipV="1">
+                <a:off x="9791473" y="2925065"/>
+                <a:ext cx="1486644" cy="213038"/>
+              </a:xfrm>
+              <a:prstGeom prst="line">
+                <a:avLst/>
+              </a:prstGeom>
+              <a:ln w="28575"/>
+            </p:spPr>
+            <p:style>
+              <a:lnRef idx="1">
+                <a:schemeClr val="accent1"/>
+              </a:lnRef>
+              <a:fillRef idx="0">
+                <a:schemeClr val="accent1"/>
+              </a:fillRef>
+              <a:effectRef idx="0">
+                <a:schemeClr val="accent1"/>
+              </a:effectRef>
+              <a:fontRef idx="minor">
+                <a:schemeClr val="tx1"/>
+              </a:fontRef>
+            </p:style>
+          </p:cxnSp>
+          <p:cxnSp>
+            <p:nvCxnSpPr>
+              <p:cNvPr id="79" name="Straight Connector 78">
+                <a:extLst>
+                  <a:ext uri="{FF2B5EF4-FFF2-40B4-BE49-F238E27FC236}">
+                    <a16:creationId xmlns:a16="http://schemas.microsoft.com/office/drawing/2014/main" id="{C243EDC4-729E-4281-84CC-7BD095DF575C}"/>
+                  </a:ext>
+                </a:extLst>
+              </p:cNvPr>
+              <p:cNvCxnSpPr>
+                <a:stCxn id="75" idx="1"/>
+                <a:endCxn id="81" idx="0"/>
+              </p:cNvCxnSpPr>
+              <p:nvPr/>
+            </p:nvCxnSpPr>
+            <p:spPr>
+              <a:xfrm flipV="1">
+                <a:off x="9778676" y="2928104"/>
+                <a:ext cx="2153979" cy="3030"/>
+              </a:xfrm>
+              <a:prstGeom prst="line">
+                <a:avLst/>
+              </a:prstGeom>
+              <a:ln w="28575"/>
+            </p:spPr>
+            <p:style>
+              <a:lnRef idx="1">
+                <a:schemeClr val="accent1"/>
+              </a:lnRef>
+              <a:fillRef idx="0">
+                <a:schemeClr val="accent1"/>
+              </a:fillRef>
+              <a:effectRef idx="0">
+                <a:schemeClr val="accent1"/>
+              </a:effectRef>
+              <a:fontRef idx="minor">
+                <a:schemeClr val="tx1"/>
+              </a:fontRef>
+            </p:style>
+          </p:cxnSp>
+        </p:grpSp>
+        <p:sp>
+          <p:nvSpPr>
+            <p:cNvPr id="70" name="TextBox 69">
+              <a:extLst>
+                <a:ext uri="{FF2B5EF4-FFF2-40B4-BE49-F238E27FC236}">
+                  <a16:creationId xmlns:a16="http://schemas.microsoft.com/office/drawing/2014/main" id="{411F9746-462D-4ACF-92AD-D209DEF9A942}"/>
+                </a:ext>
+              </a:extLst>
+            </p:cNvPr>
+            <p:cNvSpPr txBox="1"/>
+            <p:nvPr/>
+          </p:nvSpPr>
+          <p:spPr>
+            <a:xfrm>
+              <a:off x="11079453" y="2768166"/>
+              <a:ext cx="281097" cy="369332"/>
+            </a:xfrm>
+            <a:prstGeom prst="rect">
+              <a:avLst/>
+            </a:prstGeom>
+            <a:noFill/>
+          </p:spPr>
+          <p:txBody>
+            <a:bodyPr wrap="square" rtlCol="0">
+              <a:spAutoFit/>
+            </a:bodyPr>
+            <a:lstStyle/>
+            <a:p>
+              <a:r>
+                <a:rPr lang="en-AU" dirty="0">
+                  <a:sym typeface="Symbol" panose="05050102010706020507" pitchFamily="18" charset="2"/>
+                </a:rPr>
+                <a:t></a:t>
+              </a:r>
+              <a:endParaRPr lang="en-AU" dirty="0"/>
+            </a:p>
+          </p:txBody>
+        </p:sp>
+        <p:sp>
+          <p:nvSpPr>
+            <p:cNvPr id="71" name="TextBox 70">
+              <a:extLst>
+                <a:ext uri="{FF2B5EF4-FFF2-40B4-BE49-F238E27FC236}">
+                  <a16:creationId xmlns:a16="http://schemas.microsoft.com/office/drawing/2014/main" id="{F3042F6B-C79D-416F-B55E-BC964BFB078D}"/>
+                </a:ext>
+              </a:extLst>
+            </p:cNvPr>
+            <p:cNvSpPr txBox="1"/>
+            <p:nvPr/>
+          </p:nvSpPr>
+          <p:spPr>
+            <a:xfrm>
+              <a:off x="10013738" y="2942219"/>
+              <a:ext cx="341941" cy="369332"/>
+            </a:xfrm>
+            <a:prstGeom prst="rect">
+              <a:avLst/>
+            </a:prstGeom>
+            <a:noFill/>
+          </p:spPr>
+          <p:txBody>
+            <a:bodyPr wrap="square" rtlCol="0">
+              <a:spAutoFit/>
+            </a:bodyPr>
+            <a:lstStyle/>
+            <a:p>
+              <a:r>
+                <a:rPr lang="en-AU" dirty="0">
+                  <a:sym typeface="Symbol" panose="05050102010706020507" pitchFamily="18" charset="2"/>
+                </a:rPr>
+                <a:t></a:t>
+              </a:r>
+              <a:endParaRPr lang="en-AU" dirty="0"/>
+            </a:p>
+          </p:txBody>
+        </p:sp>
+      </p:grpSp>
+    </p:spTree>
+    <p:extLst>
+      <p:ext uri="{BB962C8B-B14F-4D97-AF65-F5344CB8AC3E}">
+        <p14:creationId xmlns:p14="http://schemas.microsoft.com/office/powerpoint/2010/main" val="2682449163"/>
+      </p:ext>
+    </p:extLst>
+  </p:cSld>
+  <p:clrMapOvr>
+    <a:masterClrMapping/>
+  </p:clrMapOvr>
+</p:sld>
+</file>
+
+<file path=ppt/slides/slide32.xml><?xml version="1.0" encoding="utf-8"?>
+<p:sld xmlns:a="http://schemas.openxmlformats.org/drawingml/2006/main" xmlns:r="http://schemas.openxmlformats.org/officeDocument/2006/relationships" xmlns:p="http://schemas.openxmlformats.org/presentationml/2006/main">
+  <p:cSld>
+    <p:spTree>
+      <p:nvGrpSpPr>
+        <p:cNvPr id="1" name=""/>
+        <p:cNvGrpSpPr/>
+        <p:nvPr/>
+      </p:nvGrpSpPr>
+      <p:grpSpPr>
+        <a:xfrm>
+          <a:off x="0" y="0"/>
+          <a:ext cx="0" cy="0"/>
+          <a:chOff x="0" y="0"/>
+          <a:chExt cx="0" cy="0"/>
+        </a:xfrm>
+      </p:grpSpPr>
+      <p:grpSp>
+        <p:nvGrpSpPr>
+          <p:cNvPr id="14" name="Group 13">
+            <a:extLst>
+              <a:ext uri="{FF2B5EF4-FFF2-40B4-BE49-F238E27FC236}">
+                <a16:creationId xmlns:a16="http://schemas.microsoft.com/office/drawing/2014/main" id="{2CA3878D-139A-4F98-BE30-CACCC18AA1BE}"/>
+              </a:ext>
+            </a:extLst>
+          </p:cNvPr>
+          <p:cNvGrpSpPr/>
+          <p:nvPr/>
+        </p:nvGrpSpPr>
+        <p:grpSpPr>
+          <a:xfrm>
+            <a:off x="631597" y="2041298"/>
+            <a:ext cx="2775404" cy="2775404"/>
+            <a:chOff x="2688319" y="1137331"/>
+            <a:chExt cx="4583338" cy="4583338"/>
+          </a:xfrm>
+          <a:solidFill>
+            <a:schemeClr val="accent2">
+              <a:lumMod val="60000"/>
+              <a:lumOff val="40000"/>
+              <a:alpha val="16000"/>
+            </a:schemeClr>
+          </a:solidFill>
+          <a:scene3d>
+            <a:camera prst="orthographicFront">
+              <a:rot lat="844564" lon="2361194" rev="21285826"/>
+            </a:camera>
+            <a:lightRig rig="threePt" dir="t"/>
+          </a:scene3d>
+        </p:grpSpPr>
+        <p:sp>
+          <p:nvSpPr>
+            <p:cNvPr id="8" name="Oval 7">
+              <a:extLst>
+                <a:ext uri="{FF2B5EF4-FFF2-40B4-BE49-F238E27FC236}">
+                  <a16:creationId xmlns:a16="http://schemas.microsoft.com/office/drawing/2014/main" id="{117DBB4B-C90E-41E3-948B-288162FD7471}"/>
+                </a:ext>
+              </a:extLst>
+            </p:cNvPr>
+            <p:cNvSpPr/>
+            <p:nvPr/>
+          </p:nvSpPr>
+          <p:spPr>
+            <a:xfrm>
+              <a:off x="2688319" y="1137331"/>
+              <a:ext cx="4583338" cy="4583338"/>
+            </a:xfrm>
+            <a:prstGeom prst="ellipse">
+              <a:avLst/>
+            </a:prstGeom>
+            <a:grpFill/>
+            <a:ln>
+              <a:solidFill>
+                <a:schemeClr val="accent2">
+                  <a:lumMod val="60000"/>
+                  <a:lumOff val="40000"/>
+                </a:schemeClr>
+              </a:solidFill>
+            </a:ln>
+          </p:spPr>
+          <p:style>
+            <a:lnRef idx="2">
+              <a:schemeClr val="accent1">
+                <a:shade val="50000"/>
+              </a:schemeClr>
+            </a:lnRef>
+            <a:fillRef idx="1">
+              <a:schemeClr val="accent1"/>
+            </a:fillRef>
+            <a:effectRef idx="0">
+              <a:schemeClr val="accent1"/>
+            </a:effectRef>
+            <a:fontRef idx="minor">
+              <a:schemeClr val="lt1"/>
+            </a:fontRef>
+          </p:style>
+          <p:txBody>
+            <a:bodyPr rtlCol="0" anchor="ctr"/>
+            <a:lstStyle/>
+            <a:p>
+              <a:pPr algn="ctr"/>
+              <a:endParaRPr lang="en-AU"/>
+            </a:p>
+          </p:txBody>
+        </p:sp>
+        <p:cxnSp>
+          <p:nvCxnSpPr>
+            <p:cNvPr id="11" name="Straight Connector 10">
+              <a:extLst>
+                <a:ext uri="{FF2B5EF4-FFF2-40B4-BE49-F238E27FC236}">
+                  <a16:creationId xmlns:a16="http://schemas.microsoft.com/office/drawing/2014/main" id="{FD02CAC4-ABCD-46DA-9823-73AEFEC8BD4B}"/>
+                </a:ext>
+              </a:extLst>
+            </p:cNvPr>
+            <p:cNvCxnSpPr>
+              <a:stCxn id="8" idx="0"/>
+              <a:endCxn id="8" idx="4"/>
+            </p:cNvCxnSpPr>
+            <p:nvPr/>
+          </p:nvCxnSpPr>
+          <p:spPr>
+            <a:xfrm>
+              <a:off x="4979988" y="1137331"/>
+              <a:ext cx="0" cy="4583338"/>
+            </a:xfrm>
+            <a:prstGeom prst="line">
+              <a:avLst/>
+            </a:prstGeom>
+            <a:grpFill/>
+            <a:ln>
+              <a:solidFill>
+                <a:schemeClr val="accent2">
+                  <a:lumMod val="60000"/>
+                  <a:lumOff val="40000"/>
+                </a:schemeClr>
+              </a:solidFill>
+            </a:ln>
+          </p:spPr>
+          <p:style>
+            <a:lnRef idx="1">
+              <a:schemeClr val="accent1"/>
+            </a:lnRef>
+            <a:fillRef idx="0">
+              <a:schemeClr val="accent1"/>
+            </a:fillRef>
+            <a:effectRef idx="0">
+              <a:schemeClr val="accent1"/>
+            </a:effectRef>
+            <a:fontRef idx="minor">
+              <a:schemeClr val="tx1"/>
+            </a:fontRef>
+          </p:style>
+        </p:cxnSp>
+        <p:cxnSp>
+          <p:nvCxnSpPr>
+            <p:cNvPr id="13" name="Straight Connector 12">
+              <a:extLst>
+                <a:ext uri="{FF2B5EF4-FFF2-40B4-BE49-F238E27FC236}">
+                  <a16:creationId xmlns:a16="http://schemas.microsoft.com/office/drawing/2014/main" id="{511C588C-F5C2-486B-91E2-03B8D6F56C2F}"/>
+                </a:ext>
+              </a:extLst>
+            </p:cNvPr>
+            <p:cNvCxnSpPr>
+              <a:stCxn id="8" idx="2"/>
+              <a:endCxn id="8" idx="6"/>
+            </p:cNvCxnSpPr>
+            <p:nvPr/>
+          </p:nvCxnSpPr>
+          <p:spPr>
+            <a:xfrm>
+              <a:off x="2688319" y="3429000"/>
+              <a:ext cx="4583338" cy="0"/>
+            </a:xfrm>
+            <a:prstGeom prst="line">
+              <a:avLst/>
+            </a:prstGeom>
+            <a:grpFill/>
+            <a:ln>
+              <a:solidFill>
+                <a:schemeClr val="accent2">
+                  <a:lumMod val="60000"/>
+                  <a:lumOff val="40000"/>
+                </a:schemeClr>
+              </a:solidFill>
+            </a:ln>
+          </p:spPr>
+          <p:style>
+            <a:lnRef idx="1">
+              <a:schemeClr val="accent1"/>
+            </a:lnRef>
+            <a:fillRef idx="0">
+              <a:schemeClr val="accent1"/>
+            </a:fillRef>
+            <a:effectRef idx="0">
+              <a:schemeClr val="accent1"/>
+            </a:effectRef>
+            <a:fontRef idx="minor">
+              <a:schemeClr val="tx1"/>
+            </a:fontRef>
+          </p:style>
+        </p:cxnSp>
+      </p:grpSp>
+      <p:grpSp>
+        <p:nvGrpSpPr>
+          <p:cNvPr id="35" name="Group 34">
+            <a:extLst>
+              <a:ext uri="{FF2B5EF4-FFF2-40B4-BE49-F238E27FC236}">
+                <a16:creationId xmlns:a16="http://schemas.microsoft.com/office/drawing/2014/main" id="{297628D6-4672-4ED1-9042-C11E0E9BD0F6}"/>
+              </a:ext>
+            </a:extLst>
+          </p:cNvPr>
+          <p:cNvGrpSpPr/>
+          <p:nvPr/>
+        </p:nvGrpSpPr>
+        <p:grpSpPr>
+          <a:xfrm>
+            <a:off x="631597" y="2041298"/>
+            <a:ext cx="2775404" cy="2775404"/>
+            <a:chOff x="2688319" y="1137331"/>
+            <a:chExt cx="4583338" cy="4583338"/>
+          </a:xfrm>
+          <a:solidFill>
+            <a:schemeClr val="accent6">
+              <a:lumMod val="60000"/>
+              <a:lumOff val="40000"/>
+              <a:alpha val="50000"/>
+            </a:schemeClr>
+          </a:solidFill>
+          <a:scene3d>
+            <a:camera prst="orthographicFront">
+              <a:rot lat="3001185" lon="19166398" rev="21531239"/>
+            </a:camera>
+            <a:lightRig rig="threePt" dir="t"/>
+          </a:scene3d>
+        </p:grpSpPr>
+        <p:sp>
+          <p:nvSpPr>
+            <p:cNvPr id="36" name="Oval 35">
+              <a:extLst>
+                <a:ext uri="{FF2B5EF4-FFF2-40B4-BE49-F238E27FC236}">
+                  <a16:creationId xmlns:a16="http://schemas.microsoft.com/office/drawing/2014/main" id="{9BC19B87-C670-4D35-A191-823719620B8F}"/>
+                </a:ext>
+              </a:extLst>
+            </p:cNvPr>
+            <p:cNvSpPr/>
+            <p:nvPr/>
+          </p:nvSpPr>
+          <p:spPr>
+            <a:xfrm>
+              <a:off x="2688319" y="1137331"/>
+              <a:ext cx="4583338" cy="4583338"/>
+            </a:xfrm>
+            <a:prstGeom prst="ellipse">
+              <a:avLst/>
+            </a:prstGeom>
+            <a:grpFill/>
+          </p:spPr>
+          <p:style>
+            <a:lnRef idx="2">
+              <a:schemeClr val="accent1">
+                <a:shade val="50000"/>
+              </a:schemeClr>
+            </a:lnRef>
+            <a:fillRef idx="1">
+              <a:schemeClr val="accent1"/>
+            </a:fillRef>
+            <a:effectRef idx="0">
+              <a:schemeClr val="accent1"/>
+            </a:effectRef>
+            <a:fontRef idx="minor">
+              <a:schemeClr val="lt1"/>
+            </a:fontRef>
+          </p:style>
+          <p:txBody>
+            <a:bodyPr rtlCol="0" anchor="ctr"/>
+            <a:lstStyle/>
+            <a:p>
+              <a:pPr algn="ctr"/>
+              <a:endParaRPr lang="en-AU"/>
+            </a:p>
+          </p:txBody>
+        </p:sp>
+        <p:cxnSp>
+          <p:nvCxnSpPr>
+            <p:cNvPr id="37" name="Straight Connector 36">
+              <a:extLst>
+                <a:ext uri="{FF2B5EF4-FFF2-40B4-BE49-F238E27FC236}">
+                  <a16:creationId xmlns:a16="http://schemas.microsoft.com/office/drawing/2014/main" id="{608910F4-AFED-4A40-9E11-E10823BBEC5C}"/>
+                </a:ext>
+              </a:extLst>
+            </p:cNvPr>
+            <p:cNvCxnSpPr>
+              <a:stCxn id="36" idx="0"/>
+              <a:endCxn id="36" idx="4"/>
+            </p:cNvCxnSpPr>
+            <p:nvPr/>
+          </p:nvCxnSpPr>
+          <p:spPr>
+            <a:xfrm>
+              <a:off x="4979988" y="1137331"/>
+              <a:ext cx="0" cy="4583338"/>
+            </a:xfrm>
+            <a:prstGeom prst="line">
+              <a:avLst/>
+            </a:prstGeom>
+            <a:grpFill/>
+          </p:spPr>
+          <p:style>
+            <a:lnRef idx="1">
+              <a:schemeClr val="accent1"/>
+            </a:lnRef>
+            <a:fillRef idx="0">
+              <a:schemeClr val="accent1"/>
+            </a:fillRef>
+            <a:effectRef idx="0">
+              <a:schemeClr val="accent1"/>
+            </a:effectRef>
+            <a:fontRef idx="minor">
+              <a:schemeClr val="tx1"/>
+            </a:fontRef>
+          </p:style>
+        </p:cxnSp>
+        <p:cxnSp>
+          <p:nvCxnSpPr>
+            <p:cNvPr id="38" name="Straight Connector 37">
+              <a:extLst>
+                <a:ext uri="{FF2B5EF4-FFF2-40B4-BE49-F238E27FC236}">
+                  <a16:creationId xmlns:a16="http://schemas.microsoft.com/office/drawing/2014/main" id="{76628ECF-6F94-4543-B697-B04835516A08}"/>
+                </a:ext>
+              </a:extLst>
+            </p:cNvPr>
+            <p:cNvCxnSpPr>
+              <a:stCxn id="36" idx="2"/>
+              <a:endCxn id="36" idx="6"/>
+            </p:cNvCxnSpPr>
+            <p:nvPr/>
+          </p:nvCxnSpPr>
+          <p:spPr>
+            <a:xfrm>
+              <a:off x="2688319" y="3429000"/>
+              <a:ext cx="4583338" cy="0"/>
+            </a:xfrm>
+            <a:prstGeom prst="line">
+              <a:avLst/>
+            </a:prstGeom>
+            <a:grpFill/>
+          </p:spPr>
+          <p:style>
+            <a:lnRef idx="1">
+              <a:schemeClr val="accent1"/>
+            </a:lnRef>
+            <a:fillRef idx="0">
+              <a:schemeClr val="accent1"/>
+            </a:fillRef>
+            <a:effectRef idx="0">
+              <a:schemeClr val="accent1"/>
+            </a:effectRef>
+            <a:fontRef idx="minor">
+              <a:schemeClr val="tx1"/>
+            </a:fontRef>
+          </p:style>
+        </p:cxnSp>
+      </p:grpSp>
+      <p:grpSp>
+        <p:nvGrpSpPr>
+          <p:cNvPr id="39" name="Group 38">
+            <a:extLst>
+              <a:ext uri="{FF2B5EF4-FFF2-40B4-BE49-F238E27FC236}">
+                <a16:creationId xmlns:a16="http://schemas.microsoft.com/office/drawing/2014/main" id="{EF389823-17BD-44BF-8A4D-2D6A7893900D}"/>
+              </a:ext>
+            </a:extLst>
+          </p:cNvPr>
+          <p:cNvGrpSpPr/>
+          <p:nvPr/>
+        </p:nvGrpSpPr>
+        <p:grpSpPr>
+          <a:xfrm>
+            <a:off x="631597" y="2041298"/>
+            <a:ext cx="2775404" cy="2775404"/>
+            <a:chOff x="2688319" y="1137331"/>
+            <a:chExt cx="4583338" cy="4583338"/>
+          </a:xfrm>
+          <a:solidFill>
+            <a:schemeClr val="accent1">
+              <a:lumMod val="60000"/>
+              <a:lumOff val="40000"/>
+              <a:alpha val="26000"/>
+            </a:schemeClr>
+          </a:solidFill>
+          <a:scene3d>
+            <a:camera prst="orthographicFront">
+              <a:rot lat="20755394" lon="20361179" rev="314165"/>
+            </a:camera>
+            <a:lightRig rig="threePt" dir="t"/>
+          </a:scene3d>
+        </p:grpSpPr>
+        <p:sp>
+          <p:nvSpPr>
+            <p:cNvPr id="40" name="Oval 39">
+              <a:extLst>
+                <a:ext uri="{FF2B5EF4-FFF2-40B4-BE49-F238E27FC236}">
+                  <a16:creationId xmlns:a16="http://schemas.microsoft.com/office/drawing/2014/main" id="{F66740A4-206C-4B59-BF9B-9723CAA01FD1}"/>
+                </a:ext>
+              </a:extLst>
+            </p:cNvPr>
+            <p:cNvSpPr/>
+            <p:nvPr/>
+          </p:nvSpPr>
+          <p:spPr>
+            <a:xfrm>
+              <a:off x="2688319" y="1137331"/>
+              <a:ext cx="4583338" cy="4583338"/>
+            </a:xfrm>
+            <a:prstGeom prst="ellipse">
+              <a:avLst/>
+            </a:prstGeom>
+            <a:grpFill/>
+          </p:spPr>
+          <p:style>
+            <a:lnRef idx="2">
+              <a:schemeClr val="accent1">
+                <a:shade val="50000"/>
+              </a:schemeClr>
+            </a:lnRef>
+            <a:fillRef idx="1">
+              <a:schemeClr val="accent1"/>
+            </a:fillRef>
+            <a:effectRef idx="0">
+              <a:schemeClr val="accent1"/>
+            </a:effectRef>
+            <a:fontRef idx="minor">
+              <a:schemeClr val="lt1"/>
+            </a:fontRef>
+          </p:style>
+          <p:txBody>
+            <a:bodyPr rtlCol="0" anchor="ctr"/>
+            <a:lstStyle/>
+            <a:p>
+              <a:pPr algn="ctr"/>
+              <a:endParaRPr lang="en-AU"/>
+            </a:p>
+          </p:txBody>
+        </p:sp>
+        <p:cxnSp>
+          <p:nvCxnSpPr>
+            <p:cNvPr id="41" name="Straight Connector 40">
+              <a:extLst>
+                <a:ext uri="{FF2B5EF4-FFF2-40B4-BE49-F238E27FC236}">
+                  <a16:creationId xmlns:a16="http://schemas.microsoft.com/office/drawing/2014/main" id="{8080A80E-CE44-458E-BA50-238AC9CC9E96}"/>
+                </a:ext>
+              </a:extLst>
+            </p:cNvPr>
+            <p:cNvCxnSpPr>
+              <a:stCxn id="40" idx="0"/>
+              <a:endCxn id="40" idx="4"/>
+            </p:cNvCxnSpPr>
+            <p:nvPr/>
+          </p:nvCxnSpPr>
+          <p:spPr>
+            <a:xfrm>
+              <a:off x="4979988" y="1137331"/>
+              <a:ext cx="0" cy="4583338"/>
+            </a:xfrm>
+            <a:prstGeom prst="line">
+              <a:avLst/>
+            </a:prstGeom>
+            <a:grpFill/>
+          </p:spPr>
+          <p:style>
+            <a:lnRef idx="1">
+              <a:schemeClr val="accent1"/>
+            </a:lnRef>
+            <a:fillRef idx="0">
+              <a:schemeClr val="accent1"/>
+            </a:fillRef>
+            <a:effectRef idx="0">
+              <a:schemeClr val="accent1"/>
+            </a:effectRef>
+            <a:fontRef idx="minor">
+              <a:schemeClr val="tx1"/>
+            </a:fontRef>
+          </p:style>
+        </p:cxnSp>
+        <p:cxnSp>
+          <p:nvCxnSpPr>
+            <p:cNvPr id="42" name="Straight Connector 41">
+              <a:extLst>
+                <a:ext uri="{FF2B5EF4-FFF2-40B4-BE49-F238E27FC236}">
+                  <a16:creationId xmlns:a16="http://schemas.microsoft.com/office/drawing/2014/main" id="{CBCCE66A-A70B-4BEE-8F50-DA37ED580CA1}"/>
+                </a:ext>
+              </a:extLst>
+            </p:cNvPr>
+            <p:cNvCxnSpPr>
+              <a:stCxn id="40" idx="2"/>
+              <a:endCxn id="40" idx="6"/>
+            </p:cNvCxnSpPr>
+            <p:nvPr/>
+          </p:nvCxnSpPr>
+          <p:spPr>
+            <a:xfrm>
+              <a:off x="2688319" y="3429000"/>
+              <a:ext cx="4583338" cy="0"/>
+            </a:xfrm>
+            <a:prstGeom prst="line">
+              <a:avLst/>
+            </a:prstGeom>
+            <a:grpFill/>
+          </p:spPr>
+          <p:style>
+            <a:lnRef idx="1">
+              <a:schemeClr val="accent1"/>
+            </a:lnRef>
+            <a:fillRef idx="0">
+              <a:schemeClr val="accent1"/>
+            </a:fillRef>
+            <a:effectRef idx="0">
+              <a:schemeClr val="accent1"/>
+            </a:effectRef>
+            <a:fontRef idx="minor">
+              <a:schemeClr val="tx1"/>
+            </a:fontRef>
+          </p:style>
+        </p:cxnSp>
+      </p:grpSp>
+    </p:spTree>
+    <p:extLst>
+      <p:ext uri="{BB962C8B-B14F-4D97-AF65-F5344CB8AC3E}">
+        <p14:creationId xmlns:p14="http://schemas.microsoft.com/office/powerpoint/2010/main" val="1505339195"/>
+      </p:ext>
+    </p:extLst>
+  </p:cSld>
+  <p:clrMapOvr>
+    <a:masterClrMapping/>
+  </p:clrMapOvr>
+</p:sld>
+</file>
+
+<file path=ppt/slides/slide33.xml><?xml version="1.0" encoding="utf-8"?>
+<p:sld xmlns:a="http://schemas.openxmlformats.org/drawingml/2006/main" xmlns:r="http://schemas.openxmlformats.org/officeDocument/2006/relationships" xmlns:p="http://schemas.openxmlformats.org/presentationml/2006/main">
+  <p:cSld>
+    <p:spTree>
+      <p:nvGrpSpPr>
+        <p:cNvPr id="1" name=""/>
+        <p:cNvGrpSpPr/>
+        <p:nvPr/>
+      </p:nvGrpSpPr>
+      <p:grpSpPr>
+        <a:xfrm>
+          <a:off x="0" y="0"/>
+          <a:ext cx="0" cy="0"/>
+          <a:chOff x="0" y="0"/>
+          <a:chExt cx="0" cy="0"/>
+        </a:xfrm>
+      </p:grpSpPr>
+      <p:grpSp>
+        <p:nvGrpSpPr>
+          <p:cNvPr id="32" name="Group 31">
+            <a:extLst>
+              <a:ext uri="{FF2B5EF4-FFF2-40B4-BE49-F238E27FC236}">
+                <a16:creationId xmlns:a16="http://schemas.microsoft.com/office/drawing/2014/main" id="{0DA5EE98-A7C2-4A58-9515-8A0573BCDF80}"/>
+              </a:ext>
+            </a:extLst>
+          </p:cNvPr>
+          <p:cNvGrpSpPr/>
+          <p:nvPr/>
+        </p:nvGrpSpPr>
+        <p:grpSpPr>
+          <a:xfrm rot="20467488">
+            <a:off x="426246" y="-207275"/>
+            <a:ext cx="3845711" cy="3876671"/>
+            <a:chOff x="8235557" y="1504948"/>
+            <a:chExt cx="3845711" cy="3865670"/>
+          </a:xfrm>
+        </p:grpSpPr>
+        <p:sp>
+          <p:nvSpPr>
+            <p:cNvPr id="33" name="Oval 32">
+              <a:extLst>
+                <a:ext uri="{FF2B5EF4-FFF2-40B4-BE49-F238E27FC236}">
+                  <a16:creationId xmlns:a16="http://schemas.microsoft.com/office/drawing/2014/main" id="{1CE42198-FD5B-420C-AB24-8F70B2BD9998}"/>
+                </a:ext>
+              </a:extLst>
+            </p:cNvPr>
+            <p:cNvSpPr/>
+            <p:nvPr/>
+          </p:nvSpPr>
+          <p:spPr>
+            <a:xfrm>
+              <a:off x="8263228" y="1504948"/>
+              <a:ext cx="3804671" cy="3865670"/>
+            </a:xfrm>
+            <a:prstGeom prst="ellipse">
+              <a:avLst/>
+            </a:prstGeom>
+            <a:noFill/>
+            <a:ln w="28575">
+              <a:solidFill>
+                <a:schemeClr val="bg2">
+                  <a:lumMod val="50000"/>
+                </a:schemeClr>
+              </a:solidFill>
+            </a:ln>
+            <a:scene3d>
+              <a:camera prst="orthographicFront">
+                <a:rot lat="0" lon="0" rev="0"/>
+              </a:camera>
+              <a:lightRig rig="threePt" dir="t"/>
+            </a:scene3d>
+          </p:spPr>
+          <p:style>
+            <a:lnRef idx="2">
+              <a:schemeClr val="accent1">
+                <a:shade val="50000"/>
+              </a:schemeClr>
+            </a:lnRef>
+            <a:fillRef idx="1">
+              <a:schemeClr val="accent1"/>
+            </a:fillRef>
+            <a:effectRef idx="0">
+              <a:schemeClr val="accent1"/>
+            </a:effectRef>
+            <a:fontRef idx="minor">
+              <a:schemeClr val="lt1"/>
+            </a:fontRef>
+          </p:style>
+          <p:txBody>
+            <a:bodyPr rtlCol="0" anchor="ctr"/>
+            <a:lstStyle/>
+            <a:p>
+              <a:pPr algn="ctr"/>
+              <a:endParaRPr lang="en-AU"/>
+            </a:p>
+          </p:txBody>
+        </p:sp>
+        <p:cxnSp>
+          <p:nvCxnSpPr>
+            <p:cNvPr id="34" name="Straight Connector 33">
+              <a:extLst>
+                <a:ext uri="{FF2B5EF4-FFF2-40B4-BE49-F238E27FC236}">
+                  <a16:creationId xmlns:a16="http://schemas.microsoft.com/office/drawing/2014/main" id="{2D4C0475-28A3-48FD-ABA3-7B0F77439815}"/>
+                </a:ext>
+              </a:extLst>
+            </p:cNvPr>
+            <p:cNvCxnSpPr>
+              <a:cxnSpLocks/>
+              <a:stCxn id="33" idx="2"/>
+              <a:endCxn id="44" idx="3"/>
+            </p:cNvCxnSpPr>
+            <p:nvPr/>
+          </p:nvCxnSpPr>
+          <p:spPr>
+            <a:xfrm>
+              <a:off x="8263228" y="3437783"/>
+              <a:ext cx="3818040" cy="272"/>
+            </a:xfrm>
+            <a:prstGeom prst="line">
+              <a:avLst/>
+            </a:prstGeom>
+            <a:ln w="19050">
+              <a:solidFill>
+                <a:schemeClr val="bg1">
+                  <a:lumMod val="50000"/>
+                </a:schemeClr>
+              </a:solidFill>
+            </a:ln>
+          </p:spPr>
+          <p:style>
+            <a:lnRef idx="1">
+              <a:schemeClr val="accent1"/>
+            </a:lnRef>
+            <a:fillRef idx="0">
+              <a:schemeClr val="accent1"/>
+            </a:fillRef>
+            <a:effectRef idx="0">
+              <a:schemeClr val="accent1"/>
+            </a:effectRef>
+            <a:fontRef idx="minor">
+              <a:schemeClr val="tx1"/>
+            </a:fontRef>
+          </p:style>
+        </p:cxnSp>
+        <p:grpSp>
+          <p:nvGrpSpPr>
+            <p:cNvPr id="43" name="Group 42">
+              <a:extLst>
+                <a:ext uri="{FF2B5EF4-FFF2-40B4-BE49-F238E27FC236}">
+                  <a16:creationId xmlns:a16="http://schemas.microsoft.com/office/drawing/2014/main" id="{B392DC44-163E-4ED0-9FB3-928F2E4C8D3D}"/>
+                </a:ext>
+              </a:extLst>
+            </p:cNvPr>
+            <p:cNvGrpSpPr/>
+            <p:nvPr/>
+          </p:nvGrpSpPr>
+          <p:grpSpPr>
+            <a:xfrm>
+              <a:off x="8235557" y="1505492"/>
+              <a:ext cx="3845711" cy="3865126"/>
+              <a:chOff x="8235557" y="1505492"/>
+              <a:chExt cx="3845711" cy="3865126"/>
+            </a:xfrm>
+          </p:grpSpPr>
+          <p:pic>
+            <p:nvPicPr>
+              <p:cNvPr id="44" name="Picture 43">
+                <a:extLst>
+                  <a:ext uri="{FF2B5EF4-FFF2-40B4-BE49-F238E27FC236}">
+                    <a16:creationId xmlns:a16="http://schemas.microsoft.com/office/drawing/2014/main" id="{DE898E41-163F-4477-9621-60FD7D9C30C8}"/>
+                  </a:ext>
+                </a:extLst>
+              </p:cNvPr>
+              <p:cNvPicPr>
+                <a:picLocks noChangeAspect="1"/>
+              </p:cNvPicPr>
+              <p:nvPr/>
+            </p:nvPicPr>
+            <p:blipFill>
+              <a:blip r:embed="rId2"/>
+              <a:stretch>
+                <a:fillRect/>
+              </a:stretch>
+            </p:blipFill>
+            <p:spPr>
+              <a:xfrm>
+                <a:off x="8235557" y="1505492"/>
+                <a:ext cx="3845711" cy="3865126"/>
+              </a:xfrm>
+              <a:prstGeom prst="rect">
+                <a:avLst/>
+              </a:prstGeom>
+            </p:spPr>
+          </p:pic>
+          <p:cxnSp>
+            <p:nvCxnSpPr>
+              <p:cNvPr id="45" name="Straight Connector 44">
+                <a:extLst>
+                  <a:ext uri="{FF2B5EF4-FFF2-40B4-BE49-F238E27FC236}">
+                    <a16:creationId xmlns:a16="http://schemas.microsoft.com/office/drawing/2014/main" id="{92EE95CB-EB1E-49E1-B75D-3AFB5CFD1927}"/>
+                  </a:ext>
+                </a:extLst>
+              </p:cNvPr>
+              <p:cNvCxnSpPr>
+                <a:cxnSpLocks/>
+                <a:stCxn id="44" idx="0"/>
+                <a:endCxn id="44" idx="2"/>
+              </p:cNvCxnSpPr>
+              <p:nvPr/>
+            </p:nvCxnSpPr>
+            <p:spPr>
+              <a:xfrm>
+                <a:off x="10158413" y="1505492"/>
+                <a:ext cx="0" cy="3865126"/>
+              </a:xfrm>
+              <a:prstGeom prst="line">
+                <a:avLst/>
+              </a:prstGeom>
+              <a:ln w="19050">
+                <a:solidFill>
+                  <a:schemeClr val="bg1">
+                    <a:lumMod val="50000"/>
+                  </a:schemeClr>
+                </a:solidFill>
+              </a:ln>
+            </p:spPr>
+            <p:style>
+              <a:lnRef idx="1">
+                <a:schemeClr val="accent1"/>
+              </a:lnRef>
+              <a:fillRef idx="0">
+                <a:schemeClr val="accent1"/>
+              </a:fillRef>
+              <a:effectRef idx="0">
+                <a:schemeClr val="accent1"/>
+              </a:effectRef>
+              <a:fontRef idx="minor">
+                <a:schemeClr val="tx1"/>
+              </a:fontRef>
+            </p:style>
+          </p:cxnSp>
+          <p:cxnSp>
+            <p:nvCxnSpPr>
+              <p:cNvPr id="46" name="Straight Arrow Connector 45">
+                <a:extLst>
+                  <a:ext uri="{FF2B5EF4-FFF2-40B4-BE49-F238E27FC236}">
+                    <a16:creationId xmlns:a16="http://schemas.microsoft.com/office/drawing/2014/main" id="{82610C9D-AAC8-4E71-8093-C8DC8486DCBE}"/>
+                  </a:ext>
+                </a:extLst>
+              </p:cNvPr>
+              <p:cNvCxnSpPr>
+                <a:cxnSpLocks/>
+                <a:endCxn id="33" idx="7"/>
+              </p:cNvCxnSpPr>
+              <p:nvPr/>
+            </p:nvCxnSpPr>
+            <p:spPr>
+              <a:xfrm flipV="1">
+                <a:off x="10161826" y="2071063"/>
+                <a:ext cx="1348892" cy="1366721"/>
+              </a:xfrm>
+              <a:prstGeom prst="straightConnector1">
+                <a:avLst/>
+              </a:prstGeom>
+              <a:ln w="28575">
+                <a:solidFill>
+                  <a:srgbClr val="FF0000"/>
+                </a:solidFill>
+                <a:tailEnd type="stealth" w="lg" len="lg"/>
+              </a:ln>
+            </p:spPr>
+            <p:style>
+              <a:lnRef idx="1">
+                <a:schemeClr val="accent1"/>
+              </a:lnRef>
+              <a:fillRef idx="0">
+                <a:schemeClr val="accent1"/>
+              </a:fillRef>
+              <a:effectRef idx="0">
+                <a:schemeClr val="accent1"/>
+              </a:effectRef>
+              <a:fontRef idx="minor">
+                <a:schemeClr val="tx1"/>
+              </a:fontRef>
+            </p:style>
+          </p:cxnSp>
+        </p:grpSp>
+      </p:grpSp>
+      <p:sp>
+        <p:nvSpPr>
+          <p:cNvPr id="4" name="Blue">
+            <a:extLst>
+              <a:ext uri="{FF2B5EF4-FFF2-40B4-BE49-F238E27FC236}">
+                <a16:creationId xmlns:a16="http://schemas.microsoft.com/office/drawing/2014/main" id="{AA1EEA68-DFD8-47AC-A1B0-0A5BE473C9AD}"/>
+              </a:ext>
+            </a:extLst>
+          </p:cNvPr>
+          <p:cNvSpPr/>
+          <p:nvPr/>
+        </p:nvSpPr>
+        <p:spPr>
+          <a:xfrm>
+            <a:off x="4979988" y="2273300"/>
+            <a:ext cx="1198562" cy="1155700"/>
+          </a:xfrm>
+          <a:prstGeom prst="rect">
+            <a:avLst/>
+          </a:prstGeom>
+          <a:solidFill>
+            <a:schemeClr val="accent1">
+              <a:alpha val="25000"/>
+            </a:schemeClr>
+          </a:solidFill>
+          <a:scene3d>
+            <a:camera prst="orthographicFront">
+              <a:rot lat="1288114" lon="14130089" rev="10012557"/>
+            </a:camera>
+            <a:lightRig rig="threePt" dir="t"/>
+          </a:scene3d>
+        </p:spPr>
+        <p:style>
+          <a:lnRef idx="2">
+            <a:schemeClr val="accent1">
+              <a:shade val="50000"/>
+            </a:schemeClr>
+          </a:lnRef>
+          <a:fillRef idx="1">
+            <a:schemeClr val="accent1"/>
+          </a:fillRef>
+          <a:effectRef idx="0">
+            <a:schemeClr val="accent1"/>
+          </a:effectRef>
+          <a:fontRef idx="minor">
+            <a:schemeClr val="lt1"/>
+          </a:fontRef>
+        </p:style>
+        <p:txBody>
+          <a:bodyPr rtlCol="0" anchor="ctr"/>
+          <a:lstStyle/>
+          <a:p>
+            <a:pPr algn="ctr"/>
+            <a:endParaRPr lang="en-AU"/>
+          </a:p>
+        </p:txBody>
+      </p:sp>
+      <p:sp>
+        <p:nvSpPr>
+          <p:cNvPr id="27" name="Red">
+            <a:extLst>
+              <a:ext uri="{FF2B5EF4-FFF2-40B4-BE49-F238E27FC236}">
+                <a16:creationId xmlns:a16="http://schemas.microsoft.com/office/drawing/2014/main" id="{9E19F8ED-ED20-4146-AAF5-55C07DBAF7F7}"/>
+              </a:ext>
+            </a:extLst>
+          </p:cNvPr>
+          <p:cNvSpPr/>
+          <p:nvPr/>
+        </p:nvSpPr>
+        <p:spPr>
+          <a:xfrm>
+            <a:off x="4980038" y="2273300"/>
+            <a:ext cx="1198562" cy="1155700"/>
+          </a:xfrm>
+          <a:prstGeom prst="rect">
+            <a:avLst/>
+          </a:prstGeom>
+          <a:solidFill>
+            <a:srgbClr val="FF0000">
+              <a:alpha val="25000"/>
+            </a:srgbClr>
+          </a:solidFill>
+          <a:scene3d>
+            <a:camera prst="orthographicFront">
+              <a:rot lat="1288115" lon="8850089" rev="10012558"/>
+            </a:camera>
+            <a:lightRig rig="threePt" dir="t"/>
+          </a:scene3d>
+        </p:spPr>
+        <p:style>
+          <a:lnRef idx="2">
+            <a:schemeClr val="accent1">
+              <a:shade val="50000"/>
+            </a:schemeClr>
+          </a:lnRef>
+          <a:fillRef idx="1">
+            <a:schemeClr val="accent1"/>
+          </a:fillRef>
+          <a:effectRef idx="0">
+            <a:schemeClr val="accent1"/>
+          </a:effectRef>
+          <a:fontRef idx="minor">
+            <a:schemeClr val="lt1"/>
+          </a:fontRef>
+        </p:style>
+        <p:txBody>
+          <a:bodyPr rtlCol="0" anchor="ctr"/>
+          <a:lstStyle/>
+          <a:p>
+            <a:pPr algn="ctr"/>
+            <a:endParaRPr lang="en-AU"/>
+          </a:p>
+        </p:txBody>
+      </p:sp>
+      <p:sp>
+        <p:nvSpPr>
+          <p:cNvPr id="28" name="Green">
+            <a:extLst>
+              <a:ext uri="{FF2B5EF4-FFF2-40B4-BE49-F238E27FC236}">
+                <a16:creationId xmlns:a16="http://schemas.microsoft.com/office/drawing/2014/main" id="{1501A62F-E367-4734-B519-ED1DD7A3F539}"/>
+              </a:ext>
+            </a:extLst>
+          </p:cNvPr>
+          <p:cNvSpPr/>
+          <p:nvPr/>
+        </p:nvSpPr>
+        <p:spPr>
+          <a:xfrm>
+            <a:off x="4979988" y="2273300"/>
+            <a:ext cx="1198562" cy="1155700"/>
+          </a:xfrm>
+          <a:prstGeom prst="rect">
+            <a:avLst/>
+          </a:prstGeom>
+          <a:solidFill>
+            <a:srgbClr val="00B050">
+              <a:alpha val="25000"/>
+            </a:srgbClr>
+          </a:solidFill>
+          <a:scene3d>
+            <a:camera prst="orthographicFront">
+              <a:rot lat="18569936" lon="7690747" rev="13467560"/>
+            </a:camera>
+            <a:lightRig rig="threePt" dir="t"/>
+          </a:scene3d>
+        </p:spPr>
+        <p:style>
+          <a:lnRef idx="2">
+            <a:schemeClr val="accent1">
+              <a:shade val="50000"/>
+            </a:schemeClr>
+          </a:lnRef>
+          <a:fillRef idx="1">
+            <a:schemeClr val="accent1"/>
+          </a:fillRef>
+          <a:effectRef idx="0">
+            <a:schemeClr val="accent1"/>
+          </a:effectRef>
+          <a:fontRef idx="minor">
+            <a:schemeClr val="lt1"/>
+          </a:fontRef>
+        </p:style>
+        <p:txBody>
+          <a:bodyPr rtlCol="0" anchor="ctr"/>
+          <a:lstStyle/>
+          <a:p>
+            <a:pPr algn="ctr"/>
+            <a:endParaRPr lang="en-AU"/>
+          </a:p>
+        </p:txBody>
+      </p:sp>
+    </p:spTree>
+    <p:extLst>
+      <p:ext uri="{BB962C8B-B14F-4D97-AF65-F5344CB8AC3E}">
+        <p14:creationId xmlns:p14="http://schemas.microsoft.com/office/powerpoint/2010/main" val="1540508432"/>
+      </p:ext>
+    </p:extLst>
+  </p:cSld>
+  <p:clrMapOvr>
+    <a:masterClrMapping/>
+  </p:clrMapOvr>
+</p:sld>
+</file>
+
+<file path=ppt/slides/slide34.xml><?xml version="1.0" encoding="utf-8"?>
+<p:sld xmlns:a="http://schemas.openxmlformats.org/drawingml/2006/main" xmlns:r="http://schemas.openxmlformats.org/officeDocument/2006/relationships" xmlns:p="http://schemas.openxmlformats.org/presentationml/2006/main">
+  <p:cSld>
+    <p:spTree>
+      <p:nvGrpSpPr>
+        <p:cNvPr id="1" name=""/>
+        <p:cNvGrpSpPr/>
+        <p:nvPr/>
+      </p:nvGrpSpPr>
+      <p:grpSpPr>
+        <a:xfrm>
+          <a:off x="0" y="0"/>
+          <a:ext cx="0" cy="0"/>
+          <a:chOff x="0" y="0"/>
+          <a:chExt cx="0" cy="0"/>
+        </a:xfrm>
+      </p:grpSpPr>
+      <p:cxnSp>
+        <p:nvCxnSpPr>
+          <p:cNvPr id="3" name="Straight Connector 2">
+            <a:extLst>
+              <a:ext uri="{FF2B5EF4-FFF2-40B4-BE49-F238E27FC236}">
+                <a16:creationId xmlns:a16="http://schemas.microsoft.com/office/drawing/2014/main" id="{9F324494-9A80-4F97-B8FD-02F368594D60}"/>
+              </a:ext>
+            </a:extLst>
+          </p:cNvPr>
+          <p:cNvCxnSpPr>
+            <a:cxnSpLocks/>
+          </p:cNvCxnSpPr>
+          <p:nvPr/>
+        </p:nvCxnSpPr>
+        <p:spPr>
+          <a:xfrm>
+            <a:off x="2960914" y="3429000"/>
+            <a:ext cx="4293326" cy="0"/>
+          </a:xfrm>
+          <a:prstGeom prst="line">
+            <a:avLst/>
+          </a:prstGeom>
+        </p:spPr>
+        <p:style>
+          <a:lnRef idx="1">
+            <a:schemeClr val="accent1"/>
+          </a:lnRef>
+          <a:fillRef idx="0">
+            <a:schemeClr val="accent1"/>
+          </a:fillRef>
+          <a:effectRef idx="0">
+            <a:schemeClr val="accent1"/>
+          </a:effectRef>
+          <a:fontRef idx="minor">
+            <a:schemeClr val="tx1"/>
+          </a:fontRef>
+        </p:style>
+      </p:cxnSp>
+      <p:sp>
+        <p:nvSpPr>
+          <p:cNvPr id="7" name="Arc 6">
+            <a:extLst>
+              <a:ext uri="{FF2B5EF4-FFF2-40B4-BE49-F238E27FC236}">
+                <a16:creationId xmlns:a16="http://schemas.microsoft.com/office/drawing/2014/main" id="{0B72C936-5115-4F93-85C9-B6CD24F4B537}"/>
+              </a:ext>
+            </a:extLst>
+          </p:cNvPr>
+          <p:cNvSpPr/>
+          <p:nvPr/>
+        </p:nvSpPr>
+        <p:spPr>
+          <a:xfrm>
+            <a:off x="4412616" y="2537459"/>
+            <a:ext cx="1134744" cy="1783081"/>
+          </a:xfrm>
+          <a:prstGeom prst="arc">
+            <a:avLst>
+              <a:gd name="adj1" fmla="val 2680793"/>
+              <a:gd name="adj2" fmla="val 4176669"/>
+            </a:avLst>
+          </a:prstGeom>
+          <a:solidFill>
+            <a:srgbClr val="FFFF00"/>
+          </a:solidFill>
+        </p:spPr>
+        <p:style>
+          <a:lnRef idx="1">
+            <a:schemeClr val="accent1"/>
+          </a:lnRef>
+          <a:fillRef idx="0">
+            <a:schemeClr val="accent1"/>
+          </a:fillRef>
+          <a:effectRef idx="0">
+            <a:schemeClr val="accent1"/>
+          </a:effectRef>
+          <a:fontRef idx="minor">
+            <a:schemeClr val="tx1"/>
+          </a:fontRef>
+        </p:style>
+        <p:txBody>
+          <a:bodyPr rtlCol="0" anchor="ctr"/>
+          <a:lstStyle/>
+          <a:p>
+            <a:pPr algn="ctr"/>
+            <a:endParaRPr lang="en-AU"/>
+          </a:p>
+        </p:txBody>
+      </p:sp>
+      <p:cxnSp>
+        <p:nvCxnSpPr>
+          <p:cNvPr id="9" name="Straight Arrow Connector 8">
+            <a:extLst>
+              <a:ext uri="{FF2B5EF4-FFF2-40B4-BE49-F238E27FC236}">
+                <a16:creationId xmlns:a16="http://schemas.microsoft.com/office/drawing/2014/main" id="{A1BF1980-51D0-4910-BA9D-BECC8B93AE40}"/>
+              </a:ext>
+            </a:extLst>
+          </p:cNvPr>
+          <p:cNvCxnSpPr>
+            <a:cxnSpLocks/>
+            <a:stCxn id="5" idx="1"/>
+            <a:endCxn id="7" idx="2"/>
+          </p:cNvCxnSpPr>
+          <p:nvPr/>
+        </p:nvCxnSpPr>
+        <p:spPr>
+          <a:xfrm>
+            <a:off x="4979988" y="3429000"/>
+            <a:ext cx="286138" cy="769859"/>
+          </a:xfrm>
+          <a:prstGeom prst="straightConnector1">
+            <a:avLst/>
+          </a:prstGeom>
+          <a:ln w="28575">
+            <a:solidFill>
+              <a:srgbClr val="FF0000"/>
+            </a:solidFill>
+            <a:tailEnd type="triangle"/>
+          </a:ln>
+        </p:spPr>
+        <p:style>
+          <a:lnRef idx="1">
+            <a:schemeClr val="accent1"/>
+          </a:lnRef>
+          <a:fillRef idx="0">
+            <a:schemeClr val="accent1"/>
+          </a:fillRef>
+          <a:effectRef idx="0">
+            <a:schemeClr val="accent1"/>
+          </a:effectRef>
+          <a:fontRef idx="minor">
+            <a:schemeClr val="tx1"/>
+          </a:fontRef>
+        </p:style>
+      </p:cxnSp>
+      <p:sp>
+        <p:nvSpPr>
+          <p:cNvPr id="5" name="Arc 4">
+            <a:extLst>
+              <a:ext uri="{FF2B5EF4-FFF2-40B4-BE49-F238E27FC236}">
+                <a16:creationId xmlns:a16="http://schemas.microsoft.com/office/drawing/2014/main" id="{9F628723-CC02-412B-98FA-351012B52734}"/>
+              </a:ext>
+            </a:extLst>
+          </p:cNvPr>
+          <p:cNvSpPr/>
+          <p:nvPr/>
+        </p:nvSpPr>
+        <p:spPr>
+          <a:xfrm>
+            <a:off x="3115039" y="2947858"/>
+            <a:ext cx="3729898" cy="962284"/>
+          </a:xfrm>
+          <a:prstGeom prst="arc">
+            <a:avLst>
+              <a:gd name="adj1" fmla="val 21594995"/>
+              <a:gd name="adj2" fmla="val 2635990"/>
+            </a:avLst>
+          </a:prstGeom>
+          <a:solidFill>
+            <a:srgbClr val="00B050"/>
+          </a:solidFill>
+        </p:spPr>
+        <p:style>
+          <a:lnRef idx="1">
+            <a:schemeClr val="accent1"/>
+          </a:lnRef>
+          <a:fillRef idx="0">
+            <a:schemeClr val="accent1"/>
+          </a:fillRef>
+          <a:effectRef idx="0">
+            <a:schemeClr val="accent1"/>
+          </a:effectRef>
+          <a:fontRef idx="minor">
+            <a:schemeClr val="tx1"/>
+          </a:fontRef>
+        </p:style>
+        <p:txBody>
+          <a:bodyPr rtlCol="0" anchor="ctr"/>
+          <a:lstStyle/>
+          <a:p>
+            <a:pPr algn="ctr"/>
+            <a:endParaRPr lang="en-AU"/>
+          </a:p>
+        </p:txBody>
+      </p:sp>
+      <p:cxnSp>
+        <p:nvCxnSpPr>
+          <p:cNvPr id="45" name="Straight Connector 44">
+            <a:extLst>
+              <a:ext uri="{FF2B5EF4-FFF2-40B4-BE49-F238E27FC236}">
+                <a16:creationId xmlns:a16="http://schemas.microsoft.com/office/drawing/2014/main" id="{D757DB41-C7D9-406E-8DC3-959E3B3D638B}"/>
+              </a:ext>
+            </a:extLst>
+          </p:cNvPr>
+          <p:cNvCxnSpPr/>
+          <p:nvPr/>
+        </p:nvCxnSpPr>
+        <p:spPr>
+          <a:xfrm>
+            <a:off x="4979988" y="2229394"/>
+            <a:ext cx="0" cy="2873829"/>
+          </a:xfrm>
+          <a:prstGeom prst="line">
+            <a:avLst/>
+          </a:prstGeom>
+        </p:spPr>
+        <p:style>
+          <a:lnRef idx="1">
+            <a:schemeClr val="accent1"/>
+          </a:lnRef>
+          <a:fillRef idx="0">
+            <a:schemeClr val="accent1"/>
+          </a:fillRef>
+          <a:effectRef idx="0">
+            <a:schemeClr val="accent1"/>
+          </a:effectRef>
+          <a:fontRef idx="minor">
+            <a:schemeClr val="tx1"/>
+          </a:fontRef>
+        </p:style>
+      </p:cxnSp>
+    </p:spTree>
+    <p:extLst>
+      <p:ext uri="{BB962C8B-B14F-4D97-AF65-F5344CB8AC3E}">
+        <p14:creationId xmlns:p14="http://schemas.microsoft.com/office/powerpoint/2010/main" val="4117380832"/>
+      </p:ext>
+    </p:extLst>
+  </p:cSld>
+  <p:clrMapOvr>
+    <a:masterClrMapping/>
+  </p:clrMapOvr>
+</p:sld>
+</file>
+
+<file path=ppt/slides/slide35.xml><?xml version="1.0" encoding="utf-8"?>
+<p:sld xmlns:a="http://schemas.openxmlformats.org/drawingml/2006/main" xmlns:r="http://schemas.openxmlformats.org/officeDocument/2006/relationships" xmlns:p="http://schemas.openxmlformats.org/presentationml/2006/main">
+  <p:cSld>
+    <p:spTree>
+      <p:nvGrpSpPr>
+        <p:cNvPr id="1" name=""/>
+        <p:cNvGrpSpPr/>
+        <p:nvPr/>
+      </p:nvGrpSpPr>
+      <p:grpSpPr>
+        <a:xfrm>
+          <a:off x="0" y="0"/>
+          <a:ext cx="0" cy="0"/>
+          <a:chOff x="0" y="0"/>
+          <a:chExt cx="0" cy="0"/>
+        </a:xfrm>
+      </p:grpSpPr>
+      <p:grpSp>
+        <p:nvGrpSpPr>
+          <p:cNvPr id="15" name="Group 14">
+            <a:extLst>
+              <a:ext uri="{FF2B5EF4-FFF2-40B4-BE49-F238E27FC236}">
+                <a16:creationId xmlns:a16="http://schemas.microsoft.com/office/drawing/2014/main" id="{43E11C2E-DF82-42A7-9712-17D736477D83}"/>
+              </a:ext>
+            </a:extLst>
+          </p:cNvPr>
+          <p:cNvGrpSpPr/>
+          <p:nvPr/>
+        </p:nvGrpSpPr>
+        <p:grpSpPr>
+          <a:xfrm>
+            <a:off x="8011886" y="1902356"/>
+            <a:ext cx="3559174" cy="2057556"/>
+            <a:chOff x="7214556" y="1441420"/>
+            <a:chExt cx="5153834" cy="2979428"/>
+          </a:xfrm>
+        </p:grpSpPr>
+        <p:pic>
+          <p:nvPicPr>
+            <p:cNvPr id="6" name="Picture 5">
+              <a:extLst>
+                <a:ext uri="{FF2B5EF4-FFF2-40B4-BE49-F238E27FC236}">
+                  <a16:creationId xmlns:a16="http://schemas.microsoft.com/office/drawing/2014/main" id="{328EF4C7-6AE0-4E6F-9AD5-97BA46A9C064}"/>
+                </a:ext>
+              </a:extLst>
+            </p:cNvPr>
+            <p:cNvPicPr>
+              <a:picLocks noChangeAspect="1"/>
+            </p:cNvPicPr>
+            <p:nvPr/>
+          </p:nvPicPr>
+          <p:blipFill>
+            <a:blip r:embed="rId2"/>
+            <a:stretch>
+              <a:fillRect/>
+            </a:stretch>
+          </p:blipFill>
+          <p:spPr>
+            <a:xfrm rot="18521390">
+              <a:off x="9154836" y="348146"/>
+              <a:ext cx="1273273" cy="5153834"/>
+            </a:xfrm>
+            <a:prstGeom prst="rect">
+              <a:avLst/>
+            </a:prstGeom>
+          </p:spPr>
+        </p:pic>
+        <p:grpSp>
+          <p:nvGrpSpPr>
+            <p:cNvPr id="2" name="Group 1">
+              <a:extLst>
+                <a:ext uri="{FF2B5EF4-FFF2-40B4-BE49-F238E27FC236}">
+                  <a16:creationId xmlns:a16="http://schemas.microsoft.com/office/drawing/2014/main" id="{DA413148-9EAE-4EF8-B5CC-5A42CE428682}"/>
+                </a:ext>
+              </a:extLst>
+            </p:cNvPr>
+            <p:cNvGrpSpPr/>
+            <p:nvPr/>
+          </p:nvGrpSpPr>
+          <p:grpSpPr>
+            <a:xfrm>
+              <a:off x="7650179" y="1441420"/>
+              <a:ext cx="4282588" cy="2979428"/>
+              <a:chOff x="7650179" y="1441420"/>
+              <a:chExt cx="4282588" cy="2979428"/>
+            </a:xfrm>
+          </p:grpSpPr>
+          <p:cxnSp>
+            <p:nvCxnSpPr>
+              <p:cNvPr id="32" name="Straight Connector 31">
+                <a:extLst>
+                  <a:ext uri="{FF2B5EF4-FFF2-40B4-BE49-F238E27FC236}">
+                    <a16:creationId xmlns:a16="http://schemas.microsoft.com/office/drawing/2014/main" id="{9BAFF04C-7BD0-42CA-A5F6-923F9E750798}"/>
+                  </a:ext>
+                </a:extLst>
+              </p:cNvPr>
+              <p:cNvCxnSpPr>
+                <a:cxnSpLocks/>
+                <a:stCxn id="30" idx="2"/>
+                <a:endCxn id="30" idx="6"/>
+              </p:cNvCxnSpPr>
+              <p:nvPr/>
+            </p:nvCxnSpPr>
+            <p:spPr>
+              <a:xfrm>
+                <a:off x="7650179" y="2925065"/>
+                <a:ext cx="4282588" cy="0"/>
+              </a:xfrm>
+              <a:prstGeom prst="line">
+                <a:avLst/>
+              </a:prstGeom>
+            </p:spPr>
+            <p:style>
+              <a:lnRef idx="1">
+                <a:schemeClr val="accent1"/>
+              </a:lnRef>
+              <a:fillRef idx="0">
+                <a:schemeClr val="accent1"/>
+              </a:fillRef>
+              <a:effectRef idx="0">
+                <a:schemeClr val="accent1"/>
+              </a:effectRef>
+              <a:fontRef idx="minor">
+                <a:schemeClr val="tx1"/>
+              </a:fontRef>
+            </p:style>
+          </p:cxnSp>
+          <p:cxnSp>
+            <p:nvCxnSpPr>
+              <p:cNvPr id="34" name="Straight Connector 33">
+                <a:extLst>
+                  <a:ext uri="{FF2B5EF4-FFF2-40B4-BE49-F238E27FC236}">
+                    <a16:creationId xmlns:a16="http://schemas.microsoft.com/office/drawing/2014/main" id="{1A37E5F0-F9A4-4135-9B9F-B713157B0C87}"/>
+                  </a:ext>
+                </a:extLst>
+              </p:cNvPr>
+              <p:cNvCxnSpPr>
+                <a:stCxn id="30" idx="4"/>
+              </p:cNvCxnSpPr>
+              <p:nvPr/>
+            </p:nvCxnSpPr>
+            <p:spPr>
+              <a:xfrm>
+                <a:off x="9791473" y="2627959"/>
+                <a:ext cx="0" cy="594212"/>
+              </a:xfrm>
+              <a:prstGeom prst="line">
+                <a:avLst/>
+              </a:prstGeom>
+            </p:spPr>
+            <p:style>
+              <a:lnRef idx="1">
+                <a:schemeClr val="accent1"/>
+              </a:lnRef>
+              <a:fillRef idx="0">
+                <a:schemeClr val="accent1"/>
+              </a:fillRef>
+              <a:effectRef idx="0">
+                <a:schemeClr val="accent1"/>
+              </a:effectRef>
+              <a:fontRef idx="minor">
+                <a:schemeClr val="tx1"/>
+              </a:fontRef>
+            </p:style>
+          </p:cxnSp>
+          <p:grpSp>
+            <p:nvGrpSpPr>
+              <p:cNvPr id="53" name="Group 52">
+                <a:extLst>
+                  <a:ext uri="{FF2B5EF4-FFF2-40B4-BE49-F238E27FC236}">
+                    <a16:creationId xmlns:a16="http://schemas.microsoft.com/office/drawing/2014/main" id="{040FD7B8-F7E7-4F0C-B419-3683DB5A167E}"/>
+                  </a:ext>
+                </a:extLst>
+              </p:cNvPr>
+              <p:cNvGrpSpPr/>
+              <p:nvPr/>
+            </p:nvGrpSpPr>
+            <p:grpSpPr>
+              <a:xfrm>
+                <a:off x="7650179" y="2627959"/>
+                <a:ext cx="4282588" cy="594212"/>
+                <a:chOff x="7650179" y="2627959"/>
+                <a:chExt cx="4282588" cy="594212"/>
+              </a:xfrm>
+            </p:grpSpPr>
+            <p:sp>
+              <p:nvSpPr>
+                <p:cNvPr id="30" name="Oval 29">
+                  <a:extLst>
+                    <a:ext uri="{FF2B5EF4-FFF2-40B4-BE49-F238E27FC236}">
+                      <a16:creationId xmlns:a16="http://schemas.microsoft.com/office/drawing/2014/main" id="{B60A481A-5BBC-4D59-955E-C942D3808829}"/>
+                    </a:ext>
+                  </a:extLst>
+                </p:cNvPr>
+                <p:cNvSpPr/>
+                <p:nvPr/>
+              </p:nvSpPr>
+              <p:spPr>
+                <a:xfrm flipV="1">
+                  <a:off x="7650179" y="2627959"/>
+                  <a:ext cx="4282588" cy="594212"/>
+                </a:xfrm>
+                <a:prstGeom prst="ellipse">
+                  <a:avLst/>
+                </a:prstGeom>
+                <a:noFill/>
+              </p:spPr>
+              <p:style>
+                <a:lnRef idx="2">
+                  <a:schemeClr val="accent1">
+                    <a:shade val="50000"/>
+                  </a:schemeClr>
+                </a:lnRef>
+                <a:fillRef idx="1">
+                  <a:schemeClr val="accent1"/>
+                </a:fillRef>
+                <a:effectRef idx="0">
+                  <a:schemeClr val="accent1"/>
+                </a:effectRef>
+                <a:fontRef idx="minor">
+                  <a:schemeClr val="lt1"/>
+                </a:fontRef>
+              </p:style>
+              <p:txBody>
+                <a:bodyPr rtlCol="0" anchor="ctr"/>
+                <a:lstStyle/>
+                <a:p>
+                  <a:pPr algn="ctr"/>
+                  <a:endParaRPr lang="en-AU"/>
+                </a:p>
+              </p:txBody>
+            </p:sp>
+            <p:sp>
+              <p:nvSpPr>
+                <p:cNvPr id="44" name="Arc 43">
+                  <a:extLst>
+                    <a:ext uri="{FF2B5EF4-FFF2-40B4-BE49-F238E27FC236}">
+                      <a16:creationId xmlns:a16="http://schemas.microsoft.com/office/drawing/2014/main" id="{C0F4E609-5EDB-4B56-AB93-7BEEEF9E0228}"/>
+                    </a:ext>
+                  </a:extLst>
+                </p:cNvPr>
+                <p:cNvSpPr/>
+                <p:nvPr/>
+              </p:nvSpPr>
+              <p:spPr>
+                <a:xfrm>
+                  <a:off x="7650179" y="2627959"/>
+                  <a:ext cx="4282588" cy="594212"/>
+                </a:xfrm>
+                <a:prstGeom prst="arc">
+                  <a:avLst>
+                    <a:gd name="adj1" fmla="val 4879"/>
+                    <a:gd name="adj2" fmla="val 508170"/>
+                  </a:avLst>
+                </a:prstGeom>
+                <a:solidFill>
+                  <a:srgbClr val="FFFF00">
+                    <a:alpha val="52000"/>
+                  </a:srgbClr>
+                </a:solidFill>
+                <a:ln w="28575">
+                  <a:tailEnd type="none" w="lg" len="lg"/>
+                </a:ln>
+              </p:spPr>
+              <p:style>
+                <a:lnRef idx="1">
+                  <a:schemeClr val="accent1"/>
+                </a:lnRef>
+                <a:fillRef idx="0">
+                  <a:schemeClr val="accent1"/>
+                </a:fillRef>
+                <a:effectRef idx="0">
+                  <a:schemeClr val="accent1"/>
+                </a:effectRef>
+                <a:fontRef idx="minor">
+                  <a:schemeClr val="tx1"/>
+                </a:fontRef>
+              </p:style>
+              <p:txBody>
+                <a:bodyPr rtlCol="0" anchor="ctr"/>
+                <a:lstStyle/>
+                <a:p>
+                  <a:pPr algn="ctr"/>
+                  <a:endParaRPr lang="en-AU"/>
+                </a:p>
+              </p:txBody>
+            </p:sp>
+          </p:grpSp>
+          <p:sp>
+            <p:nvSpPr>
+              <p:cNvPr id="61" name="Arc 60">
+                <a:extLst>
+                  <a:ext uri="{FF2B5EF4-FFF2-40B4-BE49-F238E27FC236}">
+                    <a16:creationId xmlns:a16="http://schemas.microsoft.com/office/drawing/2014/main" id="{1EB18F00-8D40-494F-B4F4-EF4CD6C55708}"/>
+                  </a:ext>
+                </a:extLst>
+              </p:cNvPr>
+              <p:cNvSpPr/>
+              <p:nvPr/>
+            </p:nvSpPr>
+            <p:spPr>
+              <a:xfrm>
+                <a:off x="8264551" y="1441420"/>
+                <a:ext cx="3028250" cy="2979428"/>
+              </a:xfrm>
+              <a:prstGeom prst="arc">
+                <a:avLst>
+                  <a:gd name="adj1" fmla="val 471535"/>
+                  <a:gd name="adj2" fmla="val 3145054"/>
+                </a:avLst>
+              </a:prstGeom>
+              <a:solidFill>
+                <a:srgbClr val="92D050">
+                  <a:alpha val="45000"/>
+                </a:srgbClr>
+              </a:solidFill>
+              <a:ln w="28575"/>
+            </p:spPr>
+            <p:style>
+              <a:lnRef idx="1">
+                <a:schemeClr val="accent1"/>
+              </a:lnRef>
+              <a:fillRef idx="0">
+                <a:schemeClr val="accent1"/>
+              </a:fillRef>
+              <a:effectRef idx="0">
+                <a:schemeClr val="accent1"/>
+              </a:effectRef>
+              <a:fontRef idx="minor">
+                <a:schemeClr val="tx1"/>
+              </a:fontRef>
+            </p:style>
+            <p:txBody>
+              <a:bodyPr rtlCol="0" anchor="ctr"/>
+              <a:lstStyle/>
+              <a:p>
+                <a:pPr algn="ctr"/>
+                <a:endParaRPr lang="en-AU"/>
+              </a:p>
+            </p:txBody>
+          </p:sp>
+          <p:cxnSp>
+            <p:nvCxnSpPr>
+              <p:cNvPr id="68" name="Straight Connector 67">
+                <a:extLst>
+                  <a:ext uri="{FF2B5EF4-FFF2-40B4-BE49-F238E27FC236}">
+                    <a16:creationId xmlns:a16="http://schemas.microsoft.com/office/drawing/2014/main" id="{96A03E73-1D03-406D-807B-53A9E6154393}"/>
+                  </a:ext>
+                </a:extLst>
+              </p:cNvPr>
+              <p:cNvCxnSpPr>
+                <a:cxnSpLocks/>
+              </p:cNvCxnSpPr>
+              <p:nvPr/>
+            </p:nvCxnSpPr>
+            <p:spPr>
+              <a:xfrm flipH="1">
+                <a:off x="9607704" y="2712631"/>
+                <a:ext cx="341944" cy="424866"/>
+              </a:xfrm>
+              <a:prstGeom prst="line">
+                <a:avLst/>
+              </a:prstGeom>
+            </p:spPr>
+            <p:style>
+              <a:lnRef idx="1">
+                <a:schemeClr val="accent1"/>
+              </a:lnRef>
+              <a:fillRef idx="0">
+                <a:schemeClr val="accent1"/>
+              </a:fillRef>
+              <a:effectRef idx="0">
+                <a:schemeClr val="accent1"/>
+              </a:effectRef>
+              <a:fontRef idx="minor">
+                <a:schemeClr val="tx1"/>
+              </a:fontRef>
+            </p:style>
+          </p:cxnSp>
+          <p:cxnSp>
+            <p:nvCxnSpPr>
+              <p:cNvPr id="71" name="Straight Arrow Connector 70">
+                <a:extLst>
+                  <a:ext uri="{FF2B5EF4-FFF2-40B4-BE49-F238E27FC236}">
+                    <a16:creationId xmlns:a16="http://schemas.microsoft.com/office/drawing/2014/main" id="{5C51B93C-AA7B-4B8A-B8DB-6D49724A0DC9}"/>
+                  </a:ext>
+                </a:extLst>
+              </p:cNvPr>
+              <p:cNvCxnSpPr>
+                <a:cxnSpLocks/>
+                <a:stCxn id="61" idx="1"/>
+                <a:endCxn id="61" idx="2"/>
+              </p:cNvCxnSpPr>
+              <p:nvPr/>
+            </p:nvCxnSpPr>
+            <p:spPr>
+              <a:xfrm>
+                <a:off x="9778676" y="2931134"/>
+                <a:ext cx="914034" cy="1187650"/>
+              </a:xfrm>
+              <a:prstGeom prst="straightConnector1">
+                <a:avLst/>
+              </a:prstGeom>
+              <a:ln w="28575">
+                <a:tailEnd type="triangle"/>
+              </a:ln>
+            </p:spPr>
+            <p:style>
+              <a:lnRef idx="1">
+                <a:schemeClr val="accent1"/>
+              </a:lnRef>
+              <a:fillRef idx="0">
+                <a:schemeClr val="accent1"/>
+              </a:fillRef>
+              <a:effectRef idx="0">
+                <a:schemeClr val="accent1"/>
+              </a:effectRef>
+              <a:fontRef idx="minor">
+                <a:schemeClr val="tx1"/>
+              </a:fontRef>
+            </p:style>
+          </p:cxnSp>
+          <p:cxnSp>
+            <p:nvCxnSpPr>
+              <p:cNvPr id="73" name="Straight Connector 72">
+                <a:extLst>
+                  <a:ext uri="{FF2B5EF4-FFF2-40B4-BE49-F238E27FC236}">
+                    <a16:creationId xmlns:a16="http://schemas.microsoft.com/office/drawing/2014/main" id="{3E6AFC6D-654D-4770-9412-02E512452C47}"/>
+                  </a:ext>
+                </a:extLst>
+              </p:cNvPr>
+              <p:cNvCxnSpPr>
+                <a:stCxn id="61" idx="0"/>
+              </p:cNvCxnSpPr>
+              <p:nvPr/>
+            </p:nvCxnSpPr>
+            <p:spPr>
+              <a:xfrm flipH="1" flipV="1">
+                <a:off x="9791473" y="2925065"/>
+                <a:ext cx="1486644" cy="213038"/>
+              </a:xfrm>
+              <a:prstGeom prst="line">
+                <a:avLst/>
+              </a:prstGeom>
+              <a:ln w="28575"/>
+            </p:spPr>
+            <p:style>
+              <a:lnRef idx="1">
+                <a:schemeClr val="accent1"/>
+              </a:lnRef>
+              <a:fillRef idx="0">
+                <a:schemeClr val="accent1"/>
+              </a:fillRef>
+              <a:effectRef idx="0">
+                <a:schemeClr val="accent1"/>
+              </a:effectRef>
+              <a:fontRef idx="minor">
+                <a:schemeClr val="tx1"/>
+              </a:fontRef>
+            </p:style>
+          </p:cxnSp>
+          <p:cxnSp>
+            <p:nvCxnSpPr>
+              <p:cNvPr id="77" name="Straight Connector 76">
+                <a:extLst>
+                  <a:ext uri="{FF2B5EF4-FFF2-40B4-BE49-F238E27FC236}">
+                    <a16:creationId xmlns:a16="http://schemas.microsoft.com/office/drawing/2014/main" id="{03279EE3-FDFC-4712-84E0-EDBB71100F4E}"/>
+                  </a:ext>
+                </a:extLst>
+              </p:cNvPr>
+              <p:cNvCxnSpPr>
+                <a:stCxn id="61" idx="1"/>
+                <a:endCxn id="44" idx="0"/>
+              </p:cNvCxnSpPr>
+              <p:nvPr/>
+            </p:nvCxnSpPr>
+            <p:spPr>
+              <a:xfrm flipV="1">
+                <a:off x="9778676" y="2928104"/>
+                <a:ext cx="2153979" cy="3030"/>
+              </a:xfrm>
+              <a:prstGeom prst="line">
+                <a:avLst/>
+              </a:prstGeom>
+              <a:ln w="28575"/>
+            </p:spPr>
+            <p:style>
+              <a:lnRef idx="1">
+                <a:schemeClr val="accent1"/>
+              </a:lnRef>
+              <a:fillRef idx="0">
+                <a:schemeClr val="accent1"/>
+              </a:fillRef>
+              <a:effectRef idx="0">
+                <a:schemeClr val="accent1"/>
+              </a:effectRef>
+              <a:fontRef idx="minor">
+                <a:schemeClr val="tx1"/>
+              </a:fontRef>
+            </p:style>
+          </p:cxnSp>
+        </p:grpSp>
+        <p:sp>
+          <p:nvSpPr>
+            <p:cNvPr id="3" name="TextBox 2">
+              <a:extLst>
+                <a:ext uri="{FF2B5EF4-FFF2-40B4-BE49-F238E27FC236}">
+                  <a16:creationId xmlns:a16="http://schemas.microsoft.com/office/drawing/2014/main" id="{D88EF0CB-0643-4714-8C69-65825242E7CA}"/>
+                </a:ext>
+              </a:extLst>
+            </p:cNvPr>
+            <p:cNvSpPr txBox="1"/>
+            <p:nvPr/>
+          </p:nvSpPr>
+          <p:spPr>
+            <a:xfrm>
+              <a:off x="11079453" y="2768166"/>
+              <a:ext cx="281097" cy="369332"/>
+            </a:xfrm>
+            <a:prstGeom prst="rect">
+              <a:avLst/>
+            </a:prstGeom>
+            <a:noFill/>
+          </p:spPr>
+          <p:txBody>
+            <a:bodyPr wrap="square" rtlCol="0">
+              <a:spAutoFit/>
+            </a:bodyPr>
+            <a:lstStyle/>
+            <a:p>
+              <a:r>
+                <a:rPr lang="en-AU" dirty="0">
+                  <a:sym typeface="Symbol" panose="05050102010706020507" pitchFamily="18" charset="2"/>
+                </a:rPr>
+                <a:t></a:t>
+              </a:r>
+              <a:endParaRPr lang="en-AU" dirty="0"/>
+            </a:p>
+          </p:txBody>
+        </p:sp>
+        <p:sp>
+          <p:nvSpPr>
+            <p:cNvPr id="4" name="TextBox 3">
+              <a:extLst>
+                <a:ext uri="{FF2B5EF4-FFF2-40B4-BE49-F238E27FC236}">
+                  <a16:creationId xmlns:a16="http://schemas.microsoft.com/office/drawing/2014/main" id="{1E0DCA83-04CA-4878-91B6-44BBF23E9F17}"/>
+                </a:ext>
+              </a:extLst>
+            </p:cNvPr>
+            <p:cNvSpPr txBox="1"/>
+            <p:nvPr/>
+          </p:nvSpPr>
+          <p:spPr>
+            <a:xfrm>
+              <a:off x="10013738" y="2942219"/>
+              <a:ext cx="341941" cy="369332"/>
+            </a:xfrm>
+            <a:prstGeom prst="rect">
+              <a:avLst/>
+            </a:prstGeom>
+            <a:noFill/>
+          </p:spPr>
+          <p:txBody>
+            <a:bodyPr wrap="square" rtlCol="0">
+              <a:spAutoFit/>
+            </a:bodyPr>
+            <a:lstStyle/>
+            <a:p>
+              <a:r>
+                <a:rPr lang="en-AU" dirty="0">
+                  <a:sym typeface="Symbol" panose="05050102010706020507" pitchFamily="18" charset="2"/>
+                </a:rPr>
+                <a:t></a:t>
+              </a:r>
+              <a:endParaRPr lang="en-AU" dirty="0"/>
+            </a:p>
+          </p:txBody>
+        </p:sp>
+      </p:grpSp>
+      <p:pic>
+        <p:nvPicPr>
+          <p:cNvPr id="17" name="Picture 16">
+            <a:extLst>
+              <a:ext uri="{FF2B5EF4-FFF2-40B4-BE49-F238E27FC236}">
+                <a16:creationId xmlns:a16="http://schemas.microsoft.com/office/drawing/2014/main" id="{E6955BDA-23CD-4A97-A16B-98F1B14643F7}"/>
+              </a:ext>
+            </a:extLst>
+          </p:cNvPr>
+          <p:cNvPicPr>
+            <a:picLocks noChangeAspect="1"/>
+          </p:cNvPicPr>
+          <p:nvPr/>
+        </p:nvPicPr>
+        <p:blipFill>
+          <a:blip r:embed="rId3"/>
+          <a:stretch>
+            <a:fillRect/>
+          </a:stretch>
+        </p:blipFill>
+        <p:spPr>
+          <a:xfrm rot="827903">
+            <a:off x="1958906" y="2284059"/>
+            <a:ext cx="4282578" cy="4273578"/>
+          </a:xfrm>
+          <a:prstGeom prst="rect">
+            <a:avLst/>
+          </a:prstGeom>
+        </p:spPr>
+      </p:pic>
+    </p:spTree>
+    <p:extLst>
+      <p:ext uri="{BB962C8B-B14F-4D97-AF65-F5344CB8AC3E}">
+        <p14:creationId xmlns:p14="http://schemas.microsoft.com/office/powerpoint/2010/main" val="2131122115"/>
+      </p:ext>
+    </p:extLst>
+  </p:cSld>
+  <p:clrMapOvr>
+    <a:masterClrMapping/>
+  </p:clrMapOvr>
+</p:sld>
+</file>
+
 <file path=ppt/slides/slide4.xml><?xml version="1.0" encoding="utf-8"?>
 <p:sld xmlns:a="http://schemas.openxmlformats.org/drawingml/2006/main" xmlns:r="http://schemas.openxmlformats.org/officeDocument/2006/relationships" xmlns:p="http://schemas.openxmlformats.org/presentationml/2006/main">
   <p:cSld>

--- a/docs/figures/new diagrams 3.pptx
+++ b/docs/figures/new diagrams 3.pptx
@@ -353,7 +353,7 @@
           <a:p>
             <a:fld id="{783195BA-A24A-42A8-94D4-15E9273B559F}" type="datetimeFigureOut">
               <a:rPr lang="en-AU" smtClean="0"/>
-              <a:t>16/06/2026</a:t>
+              <a:t>3/07/2026</a:t>
             </a:fld>
             <a:endParaRPr lang="en-AU"/>
           </a:p>
@@ -553,7 +553,7 @@
           <a:p>
             <a:fld id="{783195BA-A24A-42A8-94D4-15E9273B559F}" type="datetimeFigureOut">
               <a:rPr lang="en-AU" smtClean="0"/>
-              <a:t>16/06/2026</a:t>
+              <a:t>3/07/2026</a:t>
             </a:fld>
             <a:endParaRPr lang="en-AU"/>
           </a:p>
@@ -763,7 +763,7 @@
           <a:p>
             <a:fld id="{783195BA-A24A-42A8-94D4-15E9273B559F}" type="datetimeFigureOut">
               <a:rPr lang="en-AU" smtClean="0"/>
-              <a:t>16/06/2026</a:t>
+              <a:t>3/07/2026</a:t>
             </a:fld>
             <a:endParaRPr lang="en-AU"/>
           </a:p>
@@ -963,7 +963,7 @@
           <a:p>
             <a:fld id="{783195BA-A24A-42A8-94D4-15E9273B559F}" type="datetimeFigureOut">
               <a:rPr lang="en-AU" smtClean="0"/>
-              <a:t>16/06/2026</a:t>
+              <a:t>3/07/2026</a:t>
             </a:fld>
             <a:endParaRPr lang="en-AU"/>
           </a:p>
@@ -1239,7 +1239,7 @@
           <a:p>
             <a:fld id="{783195BA-A24A-42A8-94D4-15E9273B559F}" type="datetimeFigureOut">
               <a:rPr lang="en-AU" smtClean="0"/>
-              <a:t>16/06/2026</a:t>
+              <a:t>3/07/2026</a:t>
             </a:fld>
             <a:endParaRPr lang="en-AU"/>
           </a:p>
@@ -1507,7 +1507,7 @@
           <a:p>
             <a:fld id="{783195BA-A24A-42A8-94D4-15E9273B559F}" type="datetimeFigureOut">
               <a:rPr lang="en-AU" smtClean="0"/>
-              <a:t>16/06/2026</a:t>
+              <a:t>3/07/2026</a:t>
             </a:fld>
             <a:endParaRPr lang="en-AU"/>
           </a:p>
@@ -1922,7 +1922,7 @@
           <a:p>
             <a:fld id="{783195BA-A24A-42A8-94D4-15E9273B559F}" type="datetimeFigureOut">
               <a:rPr lang="en-AU" smtClean="0"/>
-              <a:t>16/06/2026</a:t>
+              <a:t>3/07/2026</a:t>
             </a:fld>
             <a:endParaRPr lang="en-AU"/>
           </a:p>
@@ -2064,7 +2064,7 @@
           <a:p>
             <a:fld id="{783195BA-A24A-42A8-94D4-15E9273B559F}" type="datetimeFigureOut">
               <a:rPr lang="en-AU" smtClean="0"/>
-              <a:t>16/06/2026</a:t>
+              <a:t>3/07/2026</a:t>
             </a:fld>
             <a:endParaRPr lang="en-AU"/>
           </a:p>
@@ -2177,7 +2177,7 @@
           <a:p>
             <a:fld id="{783195BA-A24A-42A8-94D4-15E9273B559F}" type="datetimeFigureOut">
               <a:rPr lang="en-AU" smtClean="0"/>
-              <a:t>16/06/2026</a:t>
+              <a:t>3/07/2026</a:t>
             </a:fld>
             <a:endParaRPr lang="en-AU"/>
           </a:p>
@@ -2490,7 +2490,7 @@
           <a:p>
             <a:fld id="{783195BA-A24A-42A8-94D4-15E9273B559F}" type="datetimeFigureOut">
               <a:rPr lang="en-AU" smtClean="0"/>
-              <a:t>16/06/2026</a:t>
+              <a:t>3/07/2026</a:t>
             </a:fld>
             <a:endParaRPr lang="en-AU"/>
           </a:p>
@@ -2779,7 +2779,7 @@
           <a:p>
             <a:fld id="{783195BA-A24A-42A8-94D4-15E9273B559F}" type="datetimeFigureOut">
               <a:rPr lang="en-AU" smtClean="0"/>
-              <a:t>16/06/2026</a:t>
+              <a:t>3/07/2026</a:t>
             </a:fld>
             <a:endParaRPr lang="en-AU"/>
           </a:p>
@@ -3022,7 +3022,7 @@
           <a:p>
             <a:fld id="{783195BA-A24A-42A8-94D4-15E9273B559F}" type="datetimeFigureOut">
               <a:rPr lang="en-AU" smtClean="0"/>
-              <a:t>16/06/2026</a:t>
+              <a:t>3/07/2026</a:t>
             </a:fld>
             <a:endParaRPr lang="en-AU"/>
           </a:p>
@@ -15449,6 +15449,191 @@
           </p:style>
         </p:cxnSp>
       </p:grpSp>
+      <p:pic>
+        <p:nvPicPr>
+          <p:cNvPr id="21" name="Picture 20">
+            <a:extLst>
+              <a:ext uri="{FF2B5EF4-FFF2-40B4-BE49-F238E27FC236}">
+                <a16:creationId xmlns:a16="http://schemas.microsoft.com/office/drawing/2014/main" id="{CC4924C8-FD47-41D8-81E2-1443BB514B8E}"/>
+              </a:ext>
+            </a:extLst>
+          </p:cNvPr>
+          <p:cNvPicPr>
+            <a:picLocks noChangeAspect="1"/>
+          </p:cNvPicPr>
+          <p:nvPr/>
+        </p:nvPicPr>
+        <p:blipFill>
+          <a:blip r:embed="rId3"/>
+          <a:srcRect r="330" b="231"/>
+          <a:stretch>
+            <a:fillRect/>
+          </a:stretch>
+        </p:blipFill>
+        <p:spPr>
+          <a:xfrm rot="2675376">
+            <a:off x="9252857" y="2136814"/>
+            <a:ext cx="2892386" cy="2889169"/>
+          </a:xfrm>
+          <a:custGeom>
+            <a:avLst/>
+            <a:gdLst>
+              <a:gd name="connsiteX0" fmla="*/ 1446193 w 2892386"/>
+              <a:gd name="connsiteY0" fmla="*/ 266064 h 2889169"/>
+              <a:gd name="connsiteX1" fmla="*/ 269281 w 2892386"/>
+              <a:gd name="connsiteY1" fmla="*/ 1442976 h 2889169"/>
+              <a:gd name="connsiteX2" fmla="*/ 1446193 w 2892386"/>
+              <a:gd name="connsiteY2" fmla="*/ 2619888 h 2889169"/>
+              <a:gd name="connsiteX3" fmla="*/ 2623105 w 2892386"/>
+              <a:gd name="connsiteY3" fmla="*/ 1442976 h 2889169"/>
+              <a:gd name="connsiteX4" fmla="*/ 1446193 w 2892386"/>
+              <a:gd name="connsiteY4" fmla="*/ 266064 h 2889169"/>
+              <a:gd name="connsiteX5" fmla="*/ 1382485 w 2892386"/>
+              <a:gd name="connsiteY5" fmla="*/ 0 h 2889169"/>
+              <a:gd name="connsiteX6" fmla="*/ 1509901 w 2892386"/>
+              <a:gd name="connsiteY6" fmla="*/ 0 h 2889169"/>
+              <a:gd name="connsiteX7" fmla="*/ 1594058 w 2892386"/>
+              <a:gd name="connsiteY7" fmla="*/ 4250 h 2889169"/>
+              <a:gd name="connsiteX8" fmla="*/ 2892386 w 2892386"/>
+              <a:gd name="connsiteY8" fmla="*/ 1442976 h 2889169"/>
+              <a:gd name="connsiteX9" fmla="*/ 1446193 w 2892386"/>
+              <a:gd name="connsiteY9" fmla="*/ 2889169 h 2889169"/>
+              <a:gd name="connsiteX10" fmla="*/ 0 w 2892386"/>
+              <a:gd name="connsiteY10" fmla="*/ 1442976 h 2889169"/>
+              <a:gd name="connsiteX11" fmla="*/ 1298328 w 2892386"/>
+              <a:gd name="connsiteY11" fmla="*/ 4250 h 2889169"/>
+            </a:gdLst>
+            <a:ahLst/>
+            <a:cxnLst>
+              <a:cxn ang="0">
+                <a:pos x="connsiteX0" y="connsiteY0"/>
+              </a:cxn>
+              <a:cxn ang="0">
+                <a:pos x="connsiteX1" y="connsiteY1"/>
+              </a:cxn>
+              <a:cxn ang="0">
+                <a:pos x="connsiteX2" y="connsiteY2"/>
+              </a:cxn>
+              <a:cxn ang="0">
+                <a:pos x="connsiteX3" y="connsiteY3"/>
+              </a:cxn>
+              <a:cxn ang="0">
+                <a:pos x="connsiteX4" y="connsiteY4"/>
+              </a:cxn>
+              <a:cxn ang="0">
+                <a:pos x="connsiteX5" y="connsiteY5"/>
+              </a:cxn>
+              <a:cxn ang="0">
+                <a:pos x="connsiteX6" y="connsiteY6"/>
+              </a:cxn>
+              <a:cxn ang="0">
+                <a:pos x="connsiteX7" y="connsiteY7"/>
+              </a:cxn>
+              <a:cxn ang="0">
+                <a:pos x="connsiteX8" y="connsiteY8"/>
+              </a:cxn>
+              <a:cxn ang="0">
+                <a:pos x="connsiteX9" y="connsiteY9"/>
+              </a:cxn>
+              <a:cxn ang="0">
+                <a:pos x="connsiteX10" y="connsiteY10"/>
+              </a:cxn>
+              <a:cxn ang="0">
+                <a:pos x="connsiteX11" y="connsiteY11"/>
+              </a:cxn>
+            </a:cxnLst>
+            <a:rect l="l" t="t" r="r" b="b"/>
+            <a:pathLst>
+              <a:path w="2892386" h="2889169">
+                <a:moveTo>
+                  <a:pt x="1446193" y="266064"/>
+                </a:moveTo>
+                <a:cubicBezTo>
+                  <a:pt x="796202" y="266064"/>
+                  <a:pt x="269281" y="792985"/>
+                  <a:pt x="269281" y="1442976"/>
+                </a:cubicBezTo>
+                <a:cubicBezTo>
+                  <a:pt x="269281" y="2092967"/>
+                  <a:pt x="796202" y="2619888"/>
+                  <a:pt x="1446193" y="2619888"/>
+                </a:cubicBezTo>
+                <a:cubicBezTo>
+                  <a:pt x="2096184" y="2619888"/>
+                  <a:pt x="2623105" y="2092967"/>
+                  <a:pt x="2623105" y="1442976"/>
+                </a:cubicBezTo>
+                <a:cubicBezTo>
+                  <a:pt x="2623105" y="792985"/>
+                  <a:pt x="2096184" y="266064"/>
+                  <a:pt x="1446193" y="266064"/>
+                </a:cubicBezTo>
+                <a:close/>
+                <a:moveTo>
+                  <a:pt x="1382485" y="0"/>
+                </a:moveTo>
+                <a:lnTo>
+                  <a:pt x="1509901" y="0"/>
+                </a:lnTo>
+                <a:lnTo>
+                  <a:pt x="1594058" y="4250"/>
+                </a:lnTo>
+                <a:cubicBezTo>
+                  <a:pt x="2323309" y="78309"/>
+                  <a:pt x="2892386" y="694186"/>
+                  <a:pt x="2892386" y="1442976"/>
+                </a:cubicBezTo>
+                <a:cubicBezTo>
+                  <a:pt x="2892386" y="2241686"/>
+                  <a:pt x="2244903" y="2889169"/>
+                  <a:pt x="1446193" y="2889169"/>
+                </a:cubicBezTo>
+                <a:cubicBezTo>
+                  <a:pt x="647483" y="2889169"/>
+                  <a:pt x="0" y="2241686"/>
+                  <a:pt x="0" y="1442976"/>
+                </a:cubicBezTo>
+                <a:cubicBezTo>
+                  <a:pt x="0" y="694186"/>
+                  <a:pt x="569077" y="78309"/>
+                  <a:pt x="1298328" y="4250"/>
+                </a:cubicBezTo>
+                <a:close/>
+              </a:path>
+            </a:pathLst>
+          </a:custGeom>
+        </p:spPr>
+      </p:pic>
+      <p:pic>
+        <p:nvPicPr>
+          <p:cNvPr id="7" name="Picture 6">
+            <a:extLst>
+              <a:ext uri="{FF2B5EF4-FFF2-40B4-BE49-F238E27FC236}">
+                <a16:creationId xmlns:a16="http://schemas.microsoft.com/office/drawing/2014/main" id="{AD77D2BA-9A2C-46D4-A199-E2915AB1FB7D}"/>
+              </a:ext>
+            </a:extLst>
+          </p:cNvPr>
+          <p:cNvPicPr>
+            <a:picLocks noChangeAspect="1"/>
+          </p:cNvPicPr>
+          <p:nvPr/>
+        </p:nvPicPr>
+        <p:blipFill>
+          <a:blip r:embed="rId4"/>
+          <a:stretch>
+            <a:fillRect/>
+          </a:stretch>
+        </p:blipFill>
+        <p:spPr>
+          <a:xfrm>
+            <a:off x="5776954" y="3628154"/>
+            <a:ext cx="2895851" cy="2895851"/>
+          </a:xfrm>
+          <a:prstGeom prst="rect">
+            <a:avLst/>
+          </a:prstGeom>
+        </p:spPr>
+      </p:pic>
     </p:spTree>
     <p:extLst>
       <p:ext uri="{BB962C8B-B14F-4D97-AF65-F5344CB8AC3E}">
